--- a/paper.pptx
+++ b/paper.pptx
@@ -160,6 +160,7 @@
     <p:sldId id="408" r:id="rId159"/>
     <p:sldId id="409" r:id="rId160"/>
     <p:sldId id="410" r:id="rId161"/>
+    <p:sldId id="411" r:id="rId162"/>
   </p:sldIdLst>
   <p:sldSz cx="12191695" cy="6858000" type="screen4x3"/>
   <p:notesSz cx="6858000" cy="9144000"/>
@@ -3656,7 +3657,7 @@
                 </a:solidFill>
                 <a:latin typeface="Microsoft YaHei"/>
               </a:rPr>
-              <a:t>7.5 三重风暴综合验证（图 10）</a:t>
+              <a:t>7.4b 在线准入对决（图 20，v2 运行中）</a:t>
             </a:r>
           </a:p>
         </p:txBody>
@@ -3698,7 +3699,7 @@
                 </a:solidFill>
                 <a:latin typeface="Microsoft YaHei"/>
               </a:rPr>
-              <a:t>方案组装：服务+探针绑核 0–1；16 台客户绑核 2–3；每客户 memory.high=800 MiB、memory.swap.max=0、io.max=200/100 IOPS；准入按 censoring-aware 口径（本验证聚焦保护包络，准入不介入）。风暴构成：CPU 混打（8 闲 + 6 闲/阵发 + 2 满载）、内存 ballast、fio 4K 随机读写，同时进行；服务侧以 100 req/s 各探 60 秒。</a:t>
+              <a:t>v2（rand 相位已完成 7/7；sync 相位运行中）。 富指标 14 局（7 策略 × 2 相位；逐客户速率序列、突发窗对齐采样）。rand 相位定稿结果（图 20 左）：worstcase 停 8、quantile 停 8、fixed 停 16、audible 停 16、ours 停 16、ours_p 停 20、util80 停 28（停点 p5=78%，未违主口径）；所有停点服务 P99 ≤ 0.76 ms；零超接。三个如实观察：（i）相位感知控制器的轮间方差：两局同配置（ours/ours_p）停点 16 vs 20——1 秒剖面在 120 s 历史窗口下的“包络和峰值”估计存在随机涨落，单局停点不应读作精确 oracle（这也正是 boundary 细扫的必要性）；（ii）rand 相位下 util80 反而多卖（28）：在“利用率与风险正相关”的随机相位里，平均忙率恰是有效代理——但它的失效模式在对齐相位（v1 冲帽 40 的实录）；sync 相位 rerun 完成后可给出同口径对照；（iii）主口径断档 [24,32) 内目前只有 util80 的 28 被单局验证达标——细扫（rand 16..32 每档 180 s×2 轮）将把它钉到具体档位。sync 相位（进行中）：7 局按序执行，完成后本小节给出完整“安全接纳数 vs oracle”对照与安全 VM-hours 表，并随图 20 一并定稿。</a:t>
             </a:r>
           </a:p>
         </p:txBody>
@@ -3811,7 +3812,7 @@
                 </a:solidFill>
                 <a:latin typeface="Microsoft YaHei"/>
               </a:rPr>
-              <a:t>图</a:t>
+              <a:t>7 评估</a:t>
             </a:r>
           </a:p>
           <a:p>
@@ -3827,40 +3828,16 @@
           </a:p>
         </p:txBody>
       </p:sp>
-      <p:pic>
-        <p:nvPicPr>
-          <p:cNvPr id="4" name="Picture 3" descr="fig10_synthesis.png"/>
-          <p:cNvPicPr>
-            <a:picLocks noChangeAspect="1"/>
-          </p:cNvPicPr>
-          <p:nvPr/>
-        </p:nvPicPr>
-        <p:blipFill>
-          <a:blip r:embed="rId2"/>
-          <a:stretch>
-            <a:fillRect/>
-          </a:stretch>
-        </p:blipFill>
-        <p:spPr>
-          <a:xfrm>
-            <a:off x="1737360" y="960120"/>
-            <a:ext cx="8686800" cy="4467497"/>
-          </a:xfrm>
-          <a:prstGeom prst="rect">
-            <a:avLst/>
-          </a:prstGeom>
-        </p:spPr>
-      </p:pic>
-      <p:sp>
-        <p:nvSpPr>
-          <p:cNvPr id="5" name="TextBox 4"/>
+      <p:sp>
+        <p:nvSpPr>
+          <p:cNvPr id="4" name="TextBox 3"/>
           <p:cNvSpPr txBox="1"/>
           <p:nvPr/>
         </p:nvSpPr>
         <p:spPr>
           <a:xfrm>
-            <a:off x="914400" y="5467617"/>
-            <a:ext cx="10332720" cy="548640"/>
+            <a:off x="502920" y="914400"/>
+            <a:ext cx="11155680" cy="5486400"/>
           </a:xfrm>
           <a:prstGeom prst="rect">
             <a:avLst/>
@@ -3868,20 +3845,27 @@
           <a:noFill/>
         </p:spPr>
         <p:txBody>
-          <a:bodyPr wrap="none">
+          <a:bodyPr wrap="square">
             <a:spAutoFit/>
           </a:bodyPr>
           <a:lstStyle/>
           <a:p>
-            <a:pPr algn="ctr"/>
-            <a:r>
-              <a:rPr sz="1100" b="0">
-                <a:solidFill>
-                  <a:srgbClr val="5A6472"/>
-                </a:solidFill>
-                <a:latin typeface="Microsoft YaHei"/>
-              </a:rPr>
-              <a:t>图 10 三风暴综合验证（4 次）</a:t>
+            <a:pPr>
+              <a:lnSpc>
+                <a:spcPct val="108000"/>
+              </a:lnSpc>
+              <a:spcAft>
+                <a:spcPts val="400"/>
+              </a:spcAft>
+            </a:pPr>
+            <a:r>
+              <a:rPr sz="1250" b="0">
+                <a:solidFill>
+                  <a:srgbClr val="1C1C1E"/>
+                </a:solidFill>
+                <a:latin typeface="Microsoft YaHei"/>
+              </a:rPr>
+              <a:t>方案组装：服务+探针绑核 0–1；16 台客户绑核 2–3；每客户 memory.high=800 MiB、memory.swap.max=0、io.max=200/100 IOPS；准入按 censoring-aware 口径（本验证聚焦保护包络，准入不介入）。风暴构成：CPU 混打（8 闲 + 6 闲/阵发 + 2 满载）、内存 ballast、fio 4K 随机读写，同时进行；服务侧以 100 req/s 各探 60 秒。</a:t>
             </a:r>
           </a:p>
         </p:txBody>
@@ -3895,6 +3879,189 @@
 </file>
 
 <file path=ppt/slides/slide102.xml><?xml version="1.0" encoding="utf-8"?>
+<p:sld xmlns:a="http://schemas.openxmlformats.org/drawingml/2006/main" xmlns:p="http://schemas.openxmlformats.org/presentationml/2006/main" xmlns:r="http://schemas.openxmlformats.org/officeDocument/2006/relationships">
+  <p:cSld>
+    <p:spTree>
+      <p:nvGrpSpPr>
+        <p:cNvPr id="1" name=""/>
+        <p:cNvGrpSpPr/>
+        <p:nvPr/>
+      </p:nvGrpSpPr>
+      <p:grpSpPr/>
+      <p:sp>
+        <p:nvSpPr>
+          <p:cNvPr id="2" name="Rectangle 1"/>
+          <p:cNvSpPr/>
+          <p:nvPr/>
+        </p:nvSpPr>
+        <p:spPr>
+          <a:xfrm>
+            <a:off x="0" y="0"/>
+            <a:ext cx="12191695" cy="6858000"/>
+          </a:xfrm>
+          <a:prstGeom prst="rect">
+            <a:avLst/>
+          </a:prstGeom>
+          <a:solidFill>
+            <a:srgbClr val="FFFFFF"/>
+          </a:solidFill>
+          <a:ln>
+            <a:noFill/>
+          </a:ln>
+        </p:spPr>
+        <p:style>
+          <a:lnRef idx="1">
+            <a:schemeClr val="accent1"/>
+          </a:lnRef>
+          <a:fillRef idx="3">
+            <a:schemeClr val="accent1"/>
+          </a:fillRef>
+          <a:effectRef idx="2">
+            <a:schemeClr val="accent1"/>
+          </a:effectRef>
+          <a:fontRef idx="minor">
+            <a:schemeClr val="lt1"/>
+          </a:fontRef>
+        </p:style>
+        <p:txBody>
+          <a:bodyPr rtlCol="0" anchor="ctr"/>
+          <a:lstStyle/>
+          <a:p>
+            <a:pPr algn="ctr"/>
+          </a:p>
+        </p:txBody>
+      </p:sp>
+      <p:sp>
+        <p:nvSpPr>
+          <p:cNvPr id="3" name="Rectangle 2"/>
+          <p:cNvSpPr/>
+          <p:nvPr/>
+        </p:nvSpPr>
+        <p:spPr>
+          <a:xfrm>
+            <a:off x="0" y="0"/>
+            <a:ext cx="12191695" cy="777240"/>
+          </a:xfrm>
+          <a:prstGeom prst="rect">
+            <a:avLst/>
+          </a:prstGeom>
+          <a:solidFill>
+            <a:srgbClr val="123A63"/>
+          </a:solidFill>
+          <a:ln>
+            <a:noFill/>
+          </a:ln>
+        </p:spPr>
+        <p:style>
+          <a:lnRef idx="1">
+            <a:schemeClr val="accent1"/>
+          </a:lnRef>
+          <a:fillRef idx="3">
+            <a:schemeClr val="accent1"/>
+          </a:fillRef>
+          <a:effectRef idx="2">
+            <a:schemeClr val="accent1"/>
+          </a:effectRef>
+          <a:fontRef idx="minor">
+            <a:schemeClr val="lt1"/>
+          </a:fontRef>
+        </p:style>
+        <p:txBody>
+          <a:bodyPr rtlCol="0" anchor="ctr" lIns="411480" tIns="54864"/>
+          <a:lstStyle/>
+          <a:p>
+            <a:pPr algn="ctr"/>
+            <a:r>
+              <a:rPr sz="2100" b="1">
+                <a:solidFill>
+                  <a:srgbClr val="FFFFFF"/>
+                </a:solidFill>
+                <a:latin typeface="Microsoft YaHei"/>
+              </a:rPr>
+              <a:t>图</a:t>
+            </a:r>
+          </a:p>
+          <a:p>
+            <a:r>
+              <a:rPr sz="1200">
+                <a:solidFill>
+                  <a:srgbClr val="D8E2F0"/>
+                </a:solidFill>
+                <a:latin typeface="Microsoft YaHei"/>
+              </a:rPr>
+              <a:t>7.5 三重风暴综合验证（图 10）</a:t>
+            </a:r>
+          </a:p>
+        </p:txBody>
+      </p:sp>
+      <p:pic>
+        <p:nvPicPr>
+          <p:cNvPr id="4" name="Picture 3" descr="fig10_synthesis.png"/>
+          <p:cNvPicPr>
+            <a:picLocks noChangeAspect="1"/>
+          </p:cNvPicPr>
+          <p:nvPr/>
+        </p:nvPicPr>
+        <p:blipFill>
+          <a:blip r:embed="rId2"/>
+          <a:stretch>
+            <a:fillRect/>
+          </a:stretch>
+        </p:blipFill>
+        <p:spPr>
+          <a:xfrm>
+            <a:off x="1737360" y="960120"/>
+            <a:ext cx="8686800" cy="4467497"/>
+          </a:xfrm>
+          <a:prstGeom prst="rect">
+            <a:avLst/>
+          </a:prstGeom>
+        </p:spPr>
+      </p:pic>
+      <p:sp>
+        <p:nvSpPr>
+          <p:cNvPr id="5" name="TextBox 4"/>
+          <p:cNvSpPr txBox="1"/>
+          <p:nvPr/>
+        </p:nvSpPr>
+        <p:spPr>
+          <a:xfrm>
+            <a:off x="914400" y="5467617"/>
+            <a:ext cx="10332720" cy="548640"/>
+          </a:xfrm>
+          <a:prstGeom prst="rect">
+            <a:avLst/>
+          </a:prstGeom>
+          <a:noFill/>
+        </p:spPr>
+        <p:txBody>
+          <a:bodyPr wrap="none">
+            <a:spAutoFit/>
+          </a:bodyPr>
+          <a:lstStyle/>
+          <a:p>
+            <a:pPr algn="ctr"/>
+            <a:r>
+              <a:rPr sz="1100" b="0">
+                <a:solidFill>
+                  <a:srgbClr val="5A6472"/>
+                </a:solidFill>
+                <a:latin typeface="Microsoft YaHei"/>
+              </a:rPr>
+              <a:t>图 10 三风暴综合验证（4 次）</a:t>
+            </a:r>
+          </a:p>
+        </p:txBody>
+      </p:sp>
+    </p:spTree>
+  </p:cSld>
+  <p:clrMapOvr>
+    <a:masterClrMapping/>
+  </p:clrMapOvr>
+</p:sld>
+</file>
+
+<file path=ppt/slides/slide103.xml><?xml version="1.0" encoding="utf-8"?>
 <p:sld xmlns:a="http://schemas.openxmlformats.org/drawingml/2006/main" xmlns:p="http://schemas.openxmlformats.org/presentationml/2006/main" xmlns:r="http://schemas.openxmlformats.org/officeDocument/2006/relationships">
   <p:cSld>
     <p:spTree>
@@ -4527,210 +4694,6 @@
 </p:sld>
 </file>
 
-<file path=ppt/slides/slide103.xml><?xml version="1.0" encoding="utf-8"?>
-<p:sld xmlns:a="http://schemas.openxmlformats.org/drawingml/2006/main" xmlns:p="http://schemas.openxmlformats.org/presentationml/2006/main" xmlns:r="http://schemas.openxmlformats.org/officeDocument/2006/relationships">
-  <p:cSld>
-    <p:spTree>
-      <p:nvGrpSpPr>
-        <p:cNvPr id="1" name=""/>
-        <p:cNvGrpSpPr/>
-        <p:nvPr/>
-      </p:nvGrpSpPr>
-      <p:grpSpPr/>
-      <p:sp>
-        <p:nvSpPr>
-          <p:cNvPr id="2" name="Rectangle 1"/>
-          <p:cNvSpPr/>
-          <p:nvPr/>
-        </p:nvSpPr>
-        <p:spPr>
-          <a:xfrm>
-            <a:off x="0" y="0"/>
-            <a:ext cx="12191695" cy="6858000"/>
-          </a:xfrm>
-          <a:prstGeom prst="rect">
-            <a:avLst/>
-          </a:prstGeom>
-          <a:solidFill>
-            <a:srgbClr val="FFFFFF"/>
-          </a:solidFill>
-          <a:ln>
-            <a:noFill/>
-          </a:ln>
-        </p:spPr>
-        <p:style>
-          <a:lnRef idx="1">
-            <a:schemeClr val="accent1"/>
-          </a:lnRef>
-          <a:fillRef idx="3">
-            <a:schemeClr val="accent1"/>
-          </a:fillRef>
-          <a:effectRef idx="2">
-            <a:schemeClr val="accent1"/>
-          </a:effectRef>
-          <a:fontRef idx="minor">
-            <a:schemeClr val="lt1"/>
-          </a:fontRef>
-        </p:style>
-        <p:txBody>
-          <a:bodyPr rtlCol="0" anchor="ctr"/>
-          <a:lstStyle/>
-          <a:p>
-            <a:pPr algn="ctr"/>
-          </a:p>
-        </p:txBody>
-      </p:sp>
-      <p:sp>
-        <p:nvSpPr>
-          <p:cNvPr id="3" name="Rectangle 2"/>
-          <p:cNvSpPr/>
-          <p:nvPr/>
-        </p:nvSpPr>
-        <p:spPr>
-          <a:xfrm>
-            <a:off x="0" y="0"/>
-            <a:ext cx="12191695" cy="777240"/>
-          </a:xfrm>
-          <a:prstGeom prst="rect">
-            <a:avLst/>
-          </a:prstGeom>
-          <a:solidFill>
-            <a:srgbClr val="123A63"/>
-          </a:solidFill>
-          <a:ln>
-            <a:noFill/>
-          </a:ln>
-        </p:spPr>
-        <p:style>
-          <a:lnRef idx="1">
-            <a:schemeClr val="accent1"/>
-          </a:lnRef>
-          <a:fillRef idx="3">
-            <a:schemeClr val="accent1"/>
-          </a:fillRef>
-          <a:effectRef idx="2">
-            <a:schemeClr val="accent1"/>
-          </a:effectRef>
-          <a:fontRef idx="minor">
-            <a:schemeClr val="lt1"/>
-          </a:fontRef>
-        </p:style>
-        <p:txBody>
-          <a:bodyPr rtlCol="0" anchor="ctr" lIns="411480" tIns="54864"/>
-          <a:lstStyle/>
-          <a:p>
-            <a:pPr algn="ctr"/>
-            <a:r>
-              <a:rPr sz="2100" b="1">
-                <a:solidFill>
-                  <a:srgbClr val="FFFFFF"/>
-                </a:solidFill>
-                <a:latin typeface="Microsoft YaHei"/>
-              </a:rPr>
-              <a:t>7 评估</a:t>
-            </a:r>
-          </a:p>
-          <a:p>
-            <a:r>
-              <a:rPr sz="1200">
-                <a:solidFill>
-                  <a:srgbClr val="D8E2F0"/>
-                </a:solidFill>
-                <a:latin typeface="Microsoft YaHei"/>
-              </a:rPr>
-              <a:t>7.5 三重风暴综合验证（图 10）</a:t>
-            </a:r>
-          </a:p>
-        </p:txBody>
-      </p:sp>
-      <p:sp>
-        <p:nvSpPr>
-          <p:cNvPr id="4" name="TextBox 3"/>
-          <p:cNvSpPr txBox="1"/>
-          <p:nvPr/>
-        </p:nvSpPr>
-        <p:spPr>
-          <a:xfrm>
-            <a:off x="502920" y="914400"/>
-            <a:ext cx="11155680" cy="5486400"/>
-          </a:xfrm>
-          <a:prstGeom prst="rect">
-            <a:avLst/>
-          </a:prstGeom>
-          <a:noFill/>
-        </p:spPr>
-        <p:txBody>
-          <a:bodyPr wrap="square">
-            <a:spAutoFit/>
-          </a:bodyPr>
-          <a:lstStyle/>
-          <a:p>
-            <a:pPr>
-              <a:lnSpc>
-                <a:spcPct val="108000"/>
-              </a:lnSpc>
-              <a:spcAft>
-                <a:spcPts val="400"/>
-              </a:spcAft>
-            </a:pPr>
-            <a:r>
-              <a:rPr sz="1250" b="0">
-                <a:solidFill>
-                  <a:srgbClr val="1C1C1E"/>
-                </a:solidFill>
-                <a:latin typeface="Microsoft YaHei"/>
-              </a:rPr>
-              <a:t>读法。 四次均在"服务 P99 ≤ 10 ms"内通过（HTTP 余量约 3–4×）；Redis 在 syn2 尾部略重（p999 27.5 ms、max 74 ms，单次响应级别的长尾，未见超时），如实记录。与第 4 章无保护情形（CPU 风暴 21–23 ms、磁盘风暴 12 ms、内存风暴杀死 2 台客户）相比，方案同时抑制了三类风暴的伤害。客户侧的代价符合设计预期：内存与 IO 上限让"超用客户"先被节流（部分客户 SSH 短暂无响应），这正是经济版的运行状态。</a:t>
-            </a:r>
-          </a:p>
-          <a:p>
-            <a:pPr>
-              <a:lnSpc>
-                <a:spcPct val="108000"/>
-              </a:lnSpc>
-              <a:spcAft>
-                <a:spcPts val="400"/>
-              </a:spcAft>
-            </a:pPr>
-            <a:r>
-              <a:rPr sz="1250" b="0">
-                <a:solidFill>
-                  <a:srgbClr val="1C1C1E"/>
-                </a:solidFill>
-                <a:latin typeface="Microsoft YaHei"/>
-              </a:rPr>
-              <a:t>采集说明：综合验证的客户侧明细在强限速下采集不完整（syn3 为 13/16），本文以服务侧指标作保护结论，客户侧以组合证据（速率、节流计数）支撑。</a:t>
-            </a:r>
-          </a:p>
-          <a:p>
-            <a:pPr>
-              <a:lnSpc>
-                <a:spcPct val="108000"/>
-              </a:lnSpc>
-              <a:spcAft>
-                <a:spcPts val="400"/>
-              </a:spcAft>
-            </a:pPr>
-            <a:r>
-              <a:rPr sz="1250" b="0">
-                <a:solidFill>
-                  <a:srgbClr val="1C1C1E"/>
-                </a:solidFill>
-                <a:latin typeface="Microsoft YaHei"/>
-              </a:rPr>
-              <a:t>v2 海量复测（图 19）。 v2 批次把同一风暴以 20 秒探测、每轮从零重建的方式自动重跑：24 个有效轮（其中一台客户 VM 因批次早期宿主内存压力离线，实为 15 台客户）。结果：HTTP P99 均值 2.93 ms（范围 2.71–3.29）、Redis 均值 2.61 ms（范围 2.18–3.18），0 超时、0 错误，24/24 轮全部通过，逐轮波动带 &lt;0.6 ms（图 19）。保护包络在 28 个轮次（4 预实验 + 24 复测）中零失信。统计口径（诚实性）：若（最乐观地）假定各轮独立，24/24 零违约的单侧 95% 二项上界为 11.7%（28 轮合并为 10.1%）；轮间共享宿主状态且时间相关，该上界仅作参考，"零违约"不构成长期可靠性保证——返工批次（全 VM 在线）完成后给出轮级 bootstrap 区间。</a:t>
-            </a:r>
-          </a:p>
-        </p:txBody>
-      </p:sp>
-    </p:spTree>
-  </p:cSld>
-  <p:clrMapOvr>
-    <a:masterClrMapping/>
-  </p:clrMapOvr>
-</p:sld>
-</file>
-
 <file path=ppt/slides/slide104.xml><?xml version="1.0" encoding="utf-8"?>
 <p:sld xmlns:a="http://schemas.openxmlformats.org/drawingml/2006/main" xmlns:p="http://schemas.openxmlformats.org/presentationml/2006/main" xmlns:r="http://schemas.openxmlformats.org/officeDocument/2006/relationships">
   <p:cSld>
@@ -4831,7 +4794,7 @@
                 </a:solidFill>
                 <a:latin typeface="Microsoft YaHei"/>
               </a:rPr>
-              <a:t>图</a:t>
+              <a:t>7 评估</a:t>
             </a:r>
           </a:p>
           <a:p>
@@ -4847,40 +4810,16 @@
           </a:p>
         </p:txBody>
       </p:sp>
-      <p:pic>
-        <p:nvPicPr>
-          <p:cNvPr id="4" name="Picture 3" descr="fig19_syn_repeat.png"/>
-          <p:cNvPicPr>
-            <a:picLocks noChangeAspect="1"/>
-          </p:cNvPicPr>
-          <p:nvPr/>
-        </p:nvPicPr>
-        <p:blipFill>
-          <a:blip r:embed="rId2"/>
-          <a:stretch>
-            <a:fillRect/>
-          </a:stretch>
-        </p:blipFill>
-        <p:spPr>
-          <a:xfrm>
-            <a:off x="1737360" y="960120"/>
-            <a:ext cx="8686800" cy="3474720"/>
-          </a:xfrm>
-          <a:prstGeom prst="rect">
-            <a:avLst/>
-          </a:prstGeom>
-        </p:spPr>
-      </p:pic>
-      <p:sp>
-        <p:nvSpPr>
-          <p:cNvPr id="5" name="TextBox 4"/>
+      <p:sp>
+        <p:nvSpPr>
+          <p:cNvPr id="4" name="TextBox 3"/>
           <p:cNvSpPr txBox="1"/>
           <p:nvPr/>
         </p:nvSpPr>
         <p:spPr>
           <a:xfrm>
-            <a:off x="914400" y="4474840"/>
-            <a:ext cx="10332720" cy="548640"/>
+            <a:off x="502920" y="914400"/>
+            <a:ext cx="11155680" cy="5486400"/>
           </a:xfrm>
           <a:prstGeom prst="rect">
             <a:avLst/>
@@ -4888,20 +4827,65 @@
           <a:noFill/>
         </p:spPr>
         <p:txBody>
-          <a:bodyPr wrap="none">
+          <a:bodyPr wrap="square">
             <a:spAutoFit/>
           </a:bodyPr>
           <a:lstStyle/>
           <a:p>
-            <a:pPr algn="ctr"/>
-            <a:r>
-              <a:rPr sz="1100" b="0">
-                <a:solidFill>
-                  <a:srgbClr val="5A6472"/>
-                </a:solidFill>
-                <a:latin typeface="Microsoft YaHei"/>
-              </a:rPr>
-              <a:t>图 19 三风暴 24 轮复测：HTTP 均值 2.93 ms，零超时</a:t>
+            <a:pPr>
+              <a:lnSpc>
+                <a:spcPct val="108000"/>
+              </a:lnSpc>
+              <a:spcAft>
+                <a:spcPts val="400"/>
+              </a:spcAft>
+            </a:pPr>
+            <a:r>
+              <a:rPr sz="1250" b="0">
+                <a:solidFill>
+                  <a:srgbClr val="1C1C1E"/>
+                </a:solidFill>
+                <a:latin typeface="Microsoft YaHei"/>
+              </a:rPr>
+              <a:t>读法。 四次均在"服务 P99 ≤ 10 ms"内通过（HTTP 余量约 3–4×）；Redis 在 syn2 尾部略重（p999 27.5 ms、max 74 ms，单次响应级别的长尾，未见超时），如实记录。与第 4 章无保护情形（CPU 风暴 21–23 ms、磁盘风暴 12 ms、内存风暴杀死 2 台客户）相比，方案同时抑制了三类风暴的伤害。客户侧的代价符合设计预期：内存与 IO 上限让"超用客户"先被节流（部分客户 SSH 短暂无响应），这正是经济版的运行状态。</a:t>
+            </a:r>
+          </a:p>
+          <a:p>
+            <a:pPr>
+              <a:lnSpc>
+                <a:spcPct val="108000"/>
+              </a:lnSpc>
+              <a:spcAft>
+                <a:spcPts val="400"/>
+              </a:spcAft>
+            </a:pPr>
+            <a:r>
+              <a:rPr sz="1250" b="0">
+                <a:solidFill>
+                  <a:srgbClr val="1C1C1E"/>
+                </a:solidFill>
+                <a:latin typeface="Microsoft YaHei"/>
+              </a:rPr>
+              <a:t>采集说明：综合验证的客户侧明细在强限速下采集不完整（syn3 为 13/16），本文以服务侧指标作保护结论，客户侧以组合证据（速率、节流计数）支撑。</a:t>
+            </a:r>
+          </a:p>
+          <a:p>
+            <a:pPr>
+              <a:lnSpc>
+                <a:spcPct val="108000"/>
+              </a:lnSpc>
+              <a:spcAft>
+                <a:spcPts val="400"/>
+              </a:spcAft>
+            </a:pPr>
+            <a:r>
+              <a:rPr sz="1250" b="0">
+                <a:solidFill>
+                  <a:srgbClr val="1C1C1E"/>
+                </a:solidFill>
+                <a:latin typeface="Microsoft YaHei"/>
+              </a:rPr>
+              <a:t>v2 海量复测（图 19）。 v2 批次把同一风暴以 20 秒探测、每轮从零重建的方式自动重跑：24 个有效轮（其中一台客户 VM 因批次早期宿主内存压力离线，实为 15 台客户）。结果：HTTP P99 均值 2.93 ms（范围 2.71–3.29）、Redis 均值 2.61 ms（范围 2.18–3.18），0 超时、0 错误，24/24 轮全部通过，逐轮波动带 &lt;0.6 ms（图 19）。保护包络在 28 个轮次（4 预实验 + 24 复测）中零失信。统计口径（诚实性）：若（最乐观地）假定各轮独立，24/24 零违约的单侧 95% 二项上界为 11.7%（28 轮合并为 10.1%）；轮间共享宿主状态且时间相关，该上界仅作参考，"零违约"不构成长期可靠性保证——返工批次（全 VM 在线）完成后给出轮级 bootstrap 区间。</a:t>
             </a:r>
           </a:p>
         </p:txBody>
@@ -5014,7 +4998,7 @@
                 </a:solidFill>
                 <a:latin typeface="Microsoft YaHei"/>
               </a:rPr>
-              <a:t>7 评估</a:t>
+              <a:t>图</a:t>
             </a:r>
           </a:p>
           <a:p>
@@ -5025,21 +5009,45 @@
                 </a:solidFill>
                 <a:latin typeface="Microsoft YaHei"/>
               </a:rPr>
-              <a:t>7.5b 准入＋塑形联合验证（j1，图 13）</a:t>
-            </a:r>
-          </a:p>
-        </p:txBody>
-      </p:sp>
-      <p:sp>
-        <p:nvSpPr>
-          <p:cNvPr id="4" name="TextBox 3"/>
+              <a:t>7.5 三重风暴综合验证（图 10）</a:t>
+            </a:r>
+          </a:p>
+        </p:txBody>
+      </p:sp>
+      <p:pic>
+        <p:nvPicPr>
+          <p:cNvPr id="4" name="Picture 3" descr="fig19_syn_repeat.png"/>
+          <p:cNvPicPr>
+            <a:picLocks noChangeAspect="1"/>
+          </p:cNvPicPr>
+          <p:nvPr/>
+        </p:nvPicPr>
+        <p:blipFill>
+          <a:blip r:embed="rId2"/>
+          <a:stretch>
+            <a:fillRect/>
+          </a:stretch>
+        </p:blipFill>
+        <p:spPr>
+          <a:xfrm>
+            <a:off x="1737360" y="960120"/>
+            <a:ext cx="8686800" cy="3474720"/>
+          </a:xfrm>
+          <a:prstGeom prst="rect">
+            <a:avLst/>
+          </a:prstGeom>
+        </p:spPr>
+      </p:pic>
+      <p:sp>
+        <p:nvSpPr>
+          <p:cNvPr id="5" name="TextBox 4"/>
           <p:cNvSpPr txBox="1"/>
           <p:nvPr/>
         </p:nvSpPr>
         <p:spPr>
           <a:xfrm>
-            <a:off x="502920" y="914400"/>
-            <a:ext cx="11155680" cy="5486400"/>
+            <a:off x="914400" y="4474840"/>
+            <a:ext cx="10332720" cy="548640"/>
           </a:xfrm>
           <a:prstGeom prst="rect">
             <a:avLst/>
@@ -5047,27 +5055,20 @@
           <a:noFill/>
         </p:spPr>
         <p:txBody>
-          <a:bodyPr wrap="square">
+          <a:bodyPr wrap="none">
             <a:spAutoFit/>
           </a:bodyPr>
           <a:lstStyle/>
           <a:p>
-            <a:pPr>
-              <a:lnSpc>
-                <a:spcPct val="108000"/>
-              </a:lnSpc>
-              <a:spcAft>
-                <a:spcPts val="400"/>
-              </a:spcAft>
-            </a:pPr>
-            <a:r>
-              <a:rPr sz="1250" b="0">
-                <a:solidFill>
-                  <a:srgbClr val="1C1C1E"/>
-                </a:solidFill>
-                <a:latin typeface="Microsoft YaHei"/>
-              </a:rPr>
-              <a:t>保护包络全开（服务/探针绑核 0–1、客户绑核 2–3、客户内存双闸 800MB 与 swap.max=0、IO 上限），背景负载 4 台（3 闲＋1 阵发）持续运行；6 个候选逐个到达（到达即限 50% 满载）。两种准入策略在同一包络下决策：</a:t>
+            <a:pPr algn="ctr"/>
+            <a:r>
+              <a:rPr sz="1100" b="0">
+                <a:solidFill>
+                  <a:srgbClr val="5A6472"/>
+                </a:solidFill>
+                <a:latin typeface="Microsoft YaHei"/>
+              </a:rPr>
+              <a:t>图 19 三风暴 24 轮复测：HTTP 均值 2.93 ms，零超时</a:t>
             </a:r>
           </a:p>
         </p:txBody>
@@ -5180,7 +5181,7 @@
                 </a:solidFill>
                 <a:latin typeface="Microsoft YaHei"/>
               </a:rPr>
-              <a:t>图</a:t>
+              <a:t>7 评估</a:t>
             </a:r>
           </a:p>
           <a:p>
@@ -5196,40 +5197,16 @@
           </a:p>
         </p:txBody>
       </p:sp>
-      <p:pic>
-        <p:nvPicPr>
-          <p:cNvPr id="4" name="Picture 3" descr="fig13_joint.png"/>
-          <p:cNvPicPr>
-            <a:picLocks noChangeAspect="1"/>
-          </p:cNvPicPr>
-          <p:nvPr/>
-        </p:nvPicPr>
-        <p:blipFill>
-          <a:blip r:embed="rId2"/>
-          <a:stretch>
-            <a:fillRect/>
-          </a:stretch>
-        </p:blipFill>
-        <p:spPr>
-          <a:xfrm>
-            <a:off x="1737360" y="960120"/>
-            <a:ext cx="8686800" cy="3291840"/>
-          </a:xfrm>
-          <a:prstGeom prst="rect">
-            <a:avLst/>
-          </a:prstGeom>
-        </p:spPr>
-      </p:pic>
-      <p:sp>
-        <p:nvSpPr>
-          <p:cNvPr id="5" name="TextBox 4"/>
+      <p:sp>
+        <p:nvSpPr>
+          <p:cNvPr id="4" name="TextBox 3"/>
           <p:cNvSpPr txBox="1"/>
           <p:nvPr/>
         </p:nvSpPr>
         <p:spPr>
           <a:xfrm>
-            <a:off x="914400" y="4291960"/>
-            <a:ext cx="10332720" cy="548640"/>
+            <a:off x="502920" y="914400"/>
+            <a:ext cx="11155680" cy="5486400"/>
           </a:xfrm>
           <a:prstGeom prst="rect">
             <a:avLst/>
@@ -5237,20 +5214,27 @@
           <a:noFill/>
         </p:spPr>
         <p:txBody>
-          <a:bodyPr wrap="none">
+          <a:bodyPr wrap="square">
             <a:spAutoFit/>
           </a:bodyPr>
           <a:lstStyle/>
           <a:p>
-            <a:pPr algn="ctr"/>
-            <a:r>
-              <a:rPr sz="1100" b="0">
-                <a:solidFill>
-                  <a:srgbClr val="5A6472"/>
-                </a:solidFill>
-                <a:latin typeface="Microsoft YaHei"/>
-              </a:rPr>
-              <a:t>图 13 准入＋塑形联合验证（j1）</a:t>
+            <a:pPr>
+              <a:lnSpc>
+                <a:spcPct val="108000"/>
+              </a:lnSpc>
+              <a:spcAft>
+                <a:spcPts val="400"/>
+              </a:spcAft>
+            </a:pPr>
+            <a:r>
+              <a:rPr sz="1250" b="0">
+                <a:solidFill>
+                  <a:srgbClr val="1C1C1E"/>
+                </a:solidFill>
+                <a:latin typeface="Microsoft YaHei"/>
+              </a:rPr>
+              <a:t>保护包络全开（服务/探针绑核 0–1、客户绑核 2–3、客户内存双闸 800MB 与 swap.max=0、IO 上限），背景负载 4 台（3 闲＋1 阵发）持续运行；6 个候选逐个到达（到达即限 50% 满载）。两种准入策略在同一包络下决策：</a:t>
             </a:r>
           </a:p>
         </p:txBody>
@@ -5363,6 +5347,189 @@
                 </a:solidFill>
                 <a:latin typeface="Microsoft YaHei"/>
               </a:rPr>
+              <a:t>图</a:t>
+            </a:r>
+          </a:p>
+          <a:p>
+            <a:r>
+              <a:rPr sz="1200">
+                <a:solidFill>
+                  <a:srgbClr val="D8E2F0"/>
+                </a:solidFill>
+                <a:latin typeface="Microsoft YaHei"/>
+              </a:rPr>
+              <a:t>7.5b 准入＋塑形联合验证（j1，图 13）</a:t>
+            </a:r>
+          </a:p>
+        </p:txBody>
+      </p:sp>
+      <p:pic>
+        <p:nvPicPr>
+          <p:cNvPr id="4" name="Picture 3" descr="fig13_joint.png"/>
+          <p:cNvPicPr>
+            <a:picLocks noChangeAspect="1"/>
+          </p:cNvPicPr>
+          <p:nvPr/>
+        </p:nvPicPr>
+        <p:blipFill>
+          <a:blip r:embed="rId2"/>
+          <a:stretch>
+            <a:fillRect/>
+          </a:stretch>
+        </p:blipFill>
+        <p:spPr>
+          <a:xfrm>
+            <a:off x="1737360" y="960120"/>
+            <a:ext cx="8686800" cy="3291840"/>
+          </a:xfrm>
+          <a:prstGeom prst="rect">
+            <a:avLst/>
+          </a:prstGeom>
+        </p:spPr>
+      </p:pic>
+      <p:sp>
+        <p:nvSpPr>
+          <p:cNvPr id="5" name="TextBox 4"/>
+          <p:cNvSpPr txBox="1"/>
+          <p:nvPr/>
+        </p:nvSpPr>
+        <p:spPr>
+          <a:xfrm>
+            <a:off x="914400" y="4291960"/>
+            <a:ext cx="10332720" cy="548640"/>
+          </a:xfrm>
+          <a:prstGeom prst="rect">
+            <a:avLst/>
+          </a:prstGeom>
+          <a:noFill/>
+        </p:spPr>
+        <p:txBody>
+          <a:bodyPr wrap="none">
+            <a:spAutoFit/>
+          </a:bodyPr>
+          <a:lstStyle/>
+          <a:p>
+            <a:pPr algn="ctr"/>
+            <a:r>
+              <a:rPr sz="1100" b="0">
+                <a:solidFill>
+                  <a:srgbClr val="5A6472"/>
+                </a:solidFill>
+                <a:latin typeface="Microsoft YaHei"/>
+              </a:rPr>
+              <a:t>图 13 准入＋塑形联合验证（j1）</a:t>
+            </a:r>
+          </a:p>
+        </p:txBody>
+      </p:sp>
+    </p:spTree>
+  </p:cSld>
+  <p:clrMapOvr>
+    <a:masterClrMapping/>
+  </p:clrMapOvr>
+</p:sld>
+</file>
+
+<file path=ppt/slides/slide108.xml><?xml version="1.0" encoding="utf-8"?>
+<p:sld xmlns:a="http://schemas.openxmlformats.org/drawingml/2006/main" xmlns:p="http://schemas.openxmlformats.org/presentationml/2006/main" xmlns:r="http://schemas.openxmlformats.org/officeDocument/2006/relationships">
+  <p:cSld>
+    <p:spTree>
+      <p:nvGrpSpPr>
+        <p:cNvPr id="1" name=""/>
+        <p:cNvGrpSpPr/>
+        <p:nvPr/>
+      </p:nvGrpSpPr>
+      <p:grpSpPr/>
+      <p:sp>
+        <p:nvSpPr>
+          <p:cNvPr id="2" name="Rectangle 1"/>
+          <p:cNvSpPr/>
+          <p:nvPr/>
+        </p:nvSpPr>
+        <p:spPr>
+          <a:xfrm>
+            <a:off x="0" y="0"/>
+            <a:ext cx="12191695" cy="6858000"/>
+          </a:xfrm>
+          <a:prstGeom prst="rect">
+            <a:avLst/>
+          </a:prstGeom>
+          <a:solidFill>
+            <a:srgbClr val="FFFFFF"/>
+          </a:solidFill>
+          <a:ln>
+            <a:noFill/>
+          </a:ln>
+        </p:spPr>
+        <p:style>
+          <a:lnRef idx="1">
+            <a:schemeClr val="accent1"/>
+          </a:lnRef>
+          <a:fillRef idx="3">
+            <a:schemeClr val="accent1"/>
+          </a:fillRef>
+          <a:effectRef idx="2">
+            <a:schemeClr val="accent1"/>
+          </a:effectRef>
+          <a:fontRef idx="minor">
+            <a:schemeClr val="lt1"/>
+          </a:fontRef>
+        </p:style>
+        <p:txBody>
+          <a:bodyPr rtlCol="0" anchor="ctr"/>
+          <a:lstStyle/>
+          <a:p>
+            <a:pPr algn="ctr"/>
+          </a:p>
+        </p:txBody>
+      </p:sp>
+      <p:sp>
+        <p:nvSpPr>
+          <p:cNvPr id="3" name="Rectangle 2"/>
+          <p:cNvSpPr/>
+          <p:nvPr/>
+        </p:nvSpPr>
+        <p:spPr>
+          <a:xfrm>
+            <a:off x="0" y="0"/>
+            <a:ext cx="12191695" cy="777240"/>
+          </a:xfrm>
+          <a:prstGeom prst="rect">
+            <a:avLst/>
+          </a:prstGeom>
+          <a:solidFill>
+            <a:srgbClr val="123A63"/>
+          </a:solidFill>
+          <a:ln>
+            <a:noFill/>
+          </a:ln>
+        </p:spPr>
+        <p:style>
+          <a:lnRef idx="1">
+            <a:schemeClr val="accent1"/>
+          </a:lnRef>
+          <a:fillRef idx="3">
+            <a:schemeClr val="accent1"/>
+          </a:fillRef>
+          <a:effectRef idx="2">
+            <a:schemeClr val="accent1"/>
+          </a:effectRef>
+          <a:fontRef idx="minor">
+            <a:schemeClr val="lt1"/>
+          </a:fontRef>
+        </p:style>
+        <p:txBody>
+          <a:bodyPr rtlCol="0" anchor="ctr" lIns="411480" tIns="54864"/>
+          <a:lstStyle/>
+          <a:p>
+            <a:pPr algn="ctr"/>
+            <a:r>
+              <a:rPr sz="2100" b="1">
+                <a:solidFill>
+                  <a:srgbClr val="FFFFFF"/>
+                </a:solidFill>
+                <a:latin typeface="Microsoft YaHei"/>
+              </a:rPr>
               <a:t>7 评估</a:t>
             </a:r>
           </a:p>
@@ -5653,191 +5820,6 @@
 </p:sld>
 </file>
 
-<file path=ppt/slides/slide108.xml><?xml version="1.0" encoding="utf-8"?>
-<p:sld xmlns:a="http://schemas.openxmlformats.org/drawingml/2006/main" xmlns:p="http://schemas.openxmlformats.org/presentationml/2006/main" xmlns:r="http://schemas.openxmlformats.org/officeDocument/2006/relationships">
-  <p:cSld>
-    <p:spTree>
-      <p:nvGrpSpPr>
-        <p:cNvPr id="1" name=""/>
-        <p:cNvGrpSpPr/>
-        <p:nvPr/>
-      </p:nvGrpSpPr>
-      <p:grpSpPr/>
-      <p:sp>
-        <p:nvSpPr>
-          <p:cNvPr id="2" name="Rectangle 1"/>
-          <p:cNvSpPr/>
-          <p:nvPr/>
-        </p:nvSpPr>
-        <p:spPr>
-          <a:xfrm>
-            <a:off x="0" y="0"/>
-            <a:ext cx="12191695" cy="6858000"/>
-          </a:xfrm>
-          <a:prstGeom prst="rect">
-            <a:avLst/>
-          </a:prstGeom>
-          <a:solidFill>
-            <a:srgbClr val="FFFFFF"/>
-          </a:solidFill>
-          <a:ln>
-            <a:noFill/>
-          </a:ln>
-        </p:spPr>
-        <p:style>
-          <a:lnRef idx="1">
-            <a:schemeClr val="accent1"/>
-          </a:lnRef>
-          <a:fillRef idx="3">
-            <a:schemeClr val="accent1"/>
-          </a:fillRef>
-          <a:effectRef idx="2">
-            <a:schemeClr val="accent1"/>
-          </a:effectRef>
-          <a:fontRef idx="minor">
-            <a:schemeClr val="lt1"/>
-          </a:fontRef>
-        </p:style>
-        <p:txBody>
-          <a:bodyPr rtlCol="0" anchor="ctr"/>
-          <a:lstStyle/>
-          <a:p>
-            <a:pPr algn="ctr"/>
-          </a:p>
-        </p:txBody>
-      </p:sp>
-      <p:sp>
-        <p:nvSpPr>
-          <p:cNvPr id="3" name="Rectangle 2"/>
-          <p:cNvSpPr/>
-          <p:nvPr/>
-        </p:nvSpPr>
-        <p:spPr>
-          <a:xfrm>
-            <a:off x="0" y="0"/>
-            <a:ext cx="12191695" cy="777240"/>
-          </a:xfrm>
-          <a:prstGeom prst="rect">
-            <a:avLst/>
-          </a:prstGeom>
-          <a:solidFill>
-            <a:srgbClr val="123A63"/>
-          </a:solidFill>
-          <a:ln>
-            <a:noFill/>
-          </a:ln>
-        </p:spPr>
-        <p:style>
-          <a:lnRef idx="1">
-            <a:schemeClr val="accent1"/>
-          </a:lnRef>
-          <a:fillRef idx="3">
-            <a:schemeClr val="accent1"/>
-          </a:fillRef>
-          <a:effectRef idx="2">
-            <a:schemeClr val="accent1"/>
-          </a:effectRef>
-          <a:fontRef idx="minor">
-            <a:schemeClr val="lt1"/>
-          </a:fontRef>
-        </p:style>
-        <p:txBody>
-          <a:bodyPr rtlCol="0" anchor="ctr" lIns="411480" tIns="54864"/>
-          <a:lstStyle/>
-          <a:p>
-            <a:pPr algn="ctr"/>
-            <a:r>
-              <a:rPr sz="2100" b="1">
-                <a:solidFill>
-                  <a:srgbClr val="FFFFFF"/>
-                </a:solidFill>
-                <a:latin typeface="Microsoft YaHei"/>
-              </a:rPr>
-              <a:t>7 评估</a:t>
-            </a:r>
-          </a:p>
-          <a:p>
-            <a:r>
-              <a:rPr sz="1200">
-                <a:solidFill>
-                  <a:srgbClr val="D8E2F0"/>
-                </a:solidFill>
-                <a:latin typeface="Microsoft YaHei"/>
-              </a:rPr>
-              <a:t>7.5b 准入＋塑形联合验证（j1，图 13）</a:t>
-            </a:r>
-          </a:p>
-        </p:txBody>
-      </p:sp>
-      <p:sp>
-        <p:nvSpPr>
-          <p:cNvPr id="4" name="TextBox 3"/>
-          <p:cNvSpPr txBox="1"/>
-          <p:nvPr/>
-        </p:nvSpPr>
-        <p:spPr>
-          <a:xfrm>
-            <a:off x="502920" y="914400"/>
-            <a:ext cx="11155680" cy="5486400"/>
-          </a:xfrm>
-          <a:prstGeom prst="rect">
-            <a:avLst/>
-          </a:prstGeom>
-          <a:noFill/>
-        </p:spPr>
-        <p:txBody>
-          <a:bodyPr wrap="square">
-            <a:spAutoFit/>
-          </a:bodyPr>
-          <a:lstStyle/>
-          <a:p>
-            <a:pPr>
-              <a:lnSpc>
-                <a:spcPct val="108000"/>
-              </a:lnSpc>
-              <a:spcAft>
-                <a:spcPts val="400"/>
-              </a:spcAft>
-            </a:pPr>
-            <a:r>
-              <a:rPr sz="1250" b="0">
-                <a:solidFill>
-                  <a:srgbClr val="1C1C1E"/>
-                </a:solidFill>
-                <a:latin typeface="Microsoft YaHei"/>
-              </a:rPr>
-              <a:t>定位说明： 本节为 2025 年的单轮历史试点，其中的控制器尚未实现时间对齐聚合；完整控制器的在线对决（相位剖面 + 节流校正 + 暂停护栏，7 策略 × 2 相位 × 统一到达流）见 7.4b 及图 20，本节只作为设计—实现差距的历史记录。</a:t>
-            </a:r>
-          </a:p>
-          <a:p>
-            <a:pPr>
-              <a:lnSpc>
-                <a:spcPct val="108000"/>
-              </a:lnSpc>
-              <a:spcAft>
-                <a:spcPts val="400"/>
-              </a:spcAft>
-            </a:pPr>
-            <a:r>
-              <a:rPr sz="1250" b="0">
-                <a:solidFill>
-                  <a:srgbClr val="1C1C1E"/>
-                </a:solidFill>
-                <a:latin typeface="Microsoft YaHei"/>
-              </a:rPr>
-              <a:t>读法（三条诚实结论）。（i）服务侧被绑核与上限保死：两种策略下服务零违约——联合运行时准入策略决定的是"承诺几席"，而非服务安全；（ii）客户侧的主导痛感来自内存双闸的紧上限：金丝雀的秒级停顿在 1 席与 3 席状态下几乎相同，说明 800MB 的 memory.high 对 3GB 客户过紧（对照 4.4.4 节的"软阈值"语义）——经济版的体验上限由闸门尺寸决定，属产品参数而非策略缺陷；（iii）节流校正估计存在相位偏差：背景为阵发负载时，决策瞬间采样会低估其需求（本轮 est 在 0.01–1.90 核间跳动），使 aware 过度保守（1 席 vs naive 的 3 席）——这正是设计中"时间对齐聚合上分位"尚未在试点控制器完整实现的差距，列为"设计—实现差距"改进项。v2 修订（进行中）：时间对齐聚合已完整实现（1 秒历史采样 + 相位剖面预测 + 按配额消费口径计账 + 金丝雀闭环护栏），并以四路公平对决（naive / AUDIBLE 式 / aware / taligned）×10 轮与内存闸门 800/1920 MB 对照重测；结果将替换本节单轮试点。</a:t>
-            </a:r>
-          </a:p>
-        </p:txBody>
-      </p:sp>
-    </p:spTree>
-  </p:cSld>
-  <p:clrMapOvr>
-    <a:masterClrMapping/>
-  </p:clrMapOvr>
-</p:sld>
-</file>
-
 <file path=ppt/slides/slide109.xml><?xml version="1.0" encoding="utf-8"?>
 <p:sld xmlns:a="http://schemas.openxmlformats.org/drawingml/2006/main" xmlns:p="http://schemas.openxmlformats.org/presentationml/2006/main" xmlns:r="http://schemas.openxmlformats.org/officeDocument/2006/relationships">
   <p:cSld>
@@ -5949,7 +5931,7 @@
                 </a:solidFill>
                 <a:latin typeface="Microsoft YaHei"/>
               </a:rPr>
-              <a:t>7.6 生产遥测：生产负载画像（图 27）</a:t>
+              <a:t>7.5b 准入＋塑形联合验证（j1，图 13）</a:t>
             </a:r>
           </a:p>
         </p:txBody>
@@ -5991,7 +5973,7 @@
                 </a:solidFill>
                 <a:latin typeface="Microsoft YaHei"/>
               </a:rPr>
-              <a:t>两台生产宿主均为我们自己运营的基础设施，并以免费 VPS 形式开放给外部用户使用——遥测在自有设施上进行、以匿名化约束只读采集（不读 VM 名称/IP/业务内容）。本节定量画像来自其一（LEC-HK-1）：主机为 Xeon Gold 6248（50 核、无 SMT、单 NUMA）、251.7 GiB 内存 + 64 GiB swap、单块 1.1 TB SSD（已用 393 GB）、PVE 9.2.21。宿主级配置清点（一次性只读，/proc 与 *.conf 文件级，不调 PVE API）：285 台 VM 配置 / 276 台运行；ΣvCPU = 417（8.3×）、Σ内存 = 500 GB（2.0×）、Σ磁盘 = 5.38 TB 薄分配于 1.1 TB 卷（≈4.9×，实际占用 36%）；磁盘为 qcow2 薄克隆并共享 base 模板镜像（模板级去重）；vCPU 直方图 226×1 / 31×2 / 13×4 / 9×6…，内存档位以 512 MB（184 台）为主。60 秒遥测窗口内运行数为 210 台（ΣvCPU=288，5.8×）——运行数随生命周期在 210–276 间波动。使用边界：不用于训练、不回写调度、不做主动实验。</a:t>
+              <a:t>定位说明： 本节为 2025 年的单轮历史试点，其中的控制器尚未实现时间对齐聚合；完整控制器的在线对决（相位剖面 + 节流校正 + 暂停护栏，7 策略 × 2 相位 × 统一到达流）见 7.4b 及图 20，本节只作为设计—实现差距的历史记录。</a:t>
             </a:r>
           </a:p>
           <a:p>
@@ -6010,26 +5992,7 @@
                 </a:solidFill>
                 <a:latin typeface="Microsoft YaHei"/>
               </a:rPr>
-              <a:t>单位校验。 Σ 客户 cpu×vCPU = 15.3 核 ≈ 宿主计数核 14.8 核；Σ 客户 cpu（按单核口径）仅 10.2 核——确认客户 cpu 字段为分配 vCPU 的比例，两口径在宿主级一致。</a:t>
-            </a:r>
-          </a:p>
-          <a:p>
-            <a:pPr>
-              <a:lnSpc>
-                <a:spcPct val="108000"/>
-              </a:lnSpc>
-              <a:spcAft>
-                <a:spcPts val="400"/>
-              </a:spcAft>
-            </a:pPr>
-            <a:r>
-              <a:rPr sz="1250" b="0">
-                <a:solidFill>
-                  <a:srgbClr val="1C1C1E"/>
-                </a:solidFill>
-                <a:latin typeface="Microsoft YaHei"/>
-              </a:rPr>
-              <a:t>画像（图 27）。（i）类别：近闲（&lt;5%）71.9%、轻载（5–30%）27.1%、重载（&gt;30%）1.0%——与"多数闲、少数重"的建模前提一致。（ii）超售实锚：vCPU 超售 5.76×（vCPU 配置合计/50 核）、内存限额超售 1.12×、实际内存占用约 95 GiB——第 8 章测试床的 5× 量级来自真实运营实践而非人为拔高。（iii）突发结构：活跃段（≥5% 连续）共 4268 段、中位 1 分钟（3550 段为单分钟）——短促突发为主；数值层自相关在 1–30 分钟全部 ≈ 0（无强持续性、无时钟周期），而状态层仍具持久性（Markov 自转移 0.85/0.37/0.26）——真实突发是"长短不一、相位漂移的活跃段"，既非 i.i.d. 也非固定时钟。（iv）饱和实例（≥95% vCPU）占 VM-样本的 0.046%——"真重载"稀有但存在。</a:t>
+              <a:t>读法（三条诚实结论）。（i）服务侧被绑核与上限保死：两种策略下服务零违约——联合运行时准入策略决定的是"承诺几席"，而非服务安全；（ii）客户侧的主导痛感来自内存双闸的紧上限：金丝雀的秒级停顿在 1 席与 3 席状态下几乎相同，说明 800MB 的 memory.high 对 3GB 客户过紧（对照 4.4.4 节的"软阈值"语义）——经济版的体验上限由闸门尺寸决定，属产品参数而非策略缺陷；（iii）节流校正估计存在相位偏差：背景为阵发负载时，决策瞬间采样会低估其需求（本轮 est 在 0.01–1.90 核间跳动），使 aware 过度保守（1 席 vs naive 的 3 席）——这正是设计中"时间对齐聚合上分位"尚未在试点控制器完整实现的差距，列为"设计—实现差距"改进项。v2 修订（进行中）：时间对齐聚合已完整实现（1 秒历史采样 + 相位剖面预测 + 按配额消费口径计账 + 金丝雀闭环护栏），并以四路公平对决（naive / AUDIBLE 式 / aware / taligned）×10 轮与内存闸门 800/1920 MB 对照重测；结果将替换本节单轮试点。</a:t>
             </a:r>
           </a:p>
         </p:txBody>
@@ -6346,7 +6309,7 @@
                 </a:solidFill>
                 <a:latin typeface="Microsoft YaHei"/>
               </a:rPr>
-              <a:t>图</a:t>
+              <a:t>7 评估</a:t>
             </a:r>
           </a:p>
           <a:p>
@@ -6362,40 +6325,16 @@
           </a:p>
         </p:txBody>
       </p:sp>
-      <p:pic>
-        <p:nvPicPr>
-          <p:cNvPr id="4" name="Picture 3" descr="fig27_production.png"/>
-          <p:cNvPicPr>
-            <a:picLocks noChangeAspect="1"/>
-          </p:cNvPicPr>
-          <p:nvPr/>
-        </p:nvPicPr>
-        <p:blipFill>
-          <a:blip r:embed="rId2"/>
-          <a:stretch>
-            <a:fillRect/>
-          </a:stretch>
-        </p:blipFill>
-        <p:spPr>
-          <a:xfrm>
-            <a:off x="1737360" y="960120"/>
-            <a:ext cx="8686800" cy="2606040"/>
-          </a:xfrm>
-          <a:prstGeom prst="rect">
-            <a:avLst/>
-          </a:prstGeom>
-        </p:spPr>
-      </p:pic>
-      <p:sp>
-        <p:nvSpPr>
-          <p:cNvPr id="5" name="TextBox 4"/>
+      <p:sp>
+        <p:nvSpPr>
+          <p:cNvPr id="4" name="TextBox 3"/>
           <p:cNvSpPr txBox="1"/>
           <p:nvPr/>
         </p:nvSpPr>
         <p:spPr>
           <a:xfrm>
-            <a:off x="914400" y="3606160"/>
-            <a:ext cx="10332720" cy="548640"/>
+            <a:off x="502920" y="914400"/>
+            <a:ext cx="11155680" cy="5486400"/>
           </a:xfrm>
           <a:prstGeom prst="rect">
             <a:avLst/>
@@ -6403,20 +6342,65 @@
           <a:noFill/>
         </p:spPr>
         <p:txBody>
-          <a:bodyPr wrap="none">
+          <a:bodyPr wrap="square">
             <a:spAutoFit/>
           </a:bodyPr>
           <a:lstStyle/>
           <a:p>
-            <a:pPr algn="ctr"/>
-            <a:r>
-              <a:rPr sz="1100" b="0">
-                <a:solidFill>
-                  <a:srgbClr val="5A6472"/>
-                </a:solidFill>
-                <a:latin typeface="Microsoft YaHei"/>
-              </a:rPr>
-              <a:t>图 27 生产负载画像：72% 近闲 / 4268 段短促突发 / 5.76× 超售实锚（170×60 s）</a:t>
+            <a:pPr>
+              <a:lnSpc>
+                <a:spcPct val="108000"/>
+              </a:lnSpc>
+              <a:spcAft>
+                <a:spcPts val="400"/>
+              </a:spcAft>
+            </a:pPr>
+            <a:r>
+              <a:rPr sz="1250" b="0">
+                <a:solidFill>
+                  <a:srgbClr val="1C1C1E"/>
+                </a:solidFill>
+                <a:latin typeface="Microsoft YaHei"/>
+              </a:rPr>
+              <a:t>两台生产宿主均为我们自己运营的基础设施，并以免费 VPS 形式开放给外部用户使用——遥测在自有设施上进行、以匿名化约束只读采集（不读 VM 名称/IP/业务内容）。本节定量画像来自其一（LEC-HK-1）：主机为 Xeon Gold 6248（50 核、无 SMT、单 NUMA）、251.7 GiB 内存 + 64 GiB swap、单块 1.1 TB SSD（已用 393 GB）、PVE 9.2.21。宿主级配置清点（一次性只读，/proc 与 *.conf 文件级，不调 PVE API）：285 台 VM 配置 / 276 台运行；ΣvCPU = 417（8.3×）、Σ内存 = 500 GB（2.0×）、Σ磁盘 = 5.38 TB 薄分配于 1.1 TB 卷（≈4.9×，实际占用 36%）；磁盘为 qcow2 薄克隆并共享 base 模板镜像（模板级去重）；vCPU 直方图 226×1 / 31×2 / 13×4 / 9×6…，内存档位以 512 MB（184 台）为主。60 秒遥测窗口内运行数为 210 台（ΣvCPU=288，5.8×）——运行数随生命周期在 210–276 间波动。使用边界：不用于训练、不回写调度、不做主动实验。</a:t>
+            </a:r>
+          </a:p>
+          <a:p>
+            <a:pPr>
+              <a:lnSpc>
+                <a:spcPct val="108000"/>
+              </a:lnSpc>
+              <a:spcAft>
+                <a:spcPts val="400"/>
+              </a:spcAft>
+            </a:pPr>
+            <a:r>
+              <a:rPr sz="1250" b="0">
+                <a:solidFill>
+                  <a:srgbClr val="1C1C1E"/>
+                </a:solidFill>
+                <a:latin typeface="Microsoft YaHei"/>
+              </a:rPr>
+              <a:t>单位校验。 Σ 客户 cpu×vCPU = 15.3 核 ≈ 宿主计数核 14.8 核；Σ 客户 cpu（按单核口径）仅 10.2 核——确认客户 cpu 字段为分配 vCPU 的比例，两口径在宿主级一致。</a:t>
+            </a:r>
+          </a:p>
+          <a:p>
+            <a:pPr>
+              <a:lnSpc>
+                <a:spcPct val="108000"/>
+              </a:lnSpc>
+              <a:spcAft>
+                <a:spcPts val="400"/>
+              </a:spcAft>
+            </a:pPr>
+            <a:r>
+              <a:rPr sz="1250" b="0">
+                <a:solidFill>
+                  <a:srgbClr val="1C1C1E"/>
+                </a:solidFill>
+                <a:latin typeface="Microsoft YaHei"/>
+              </a:rPr>
+              <a:t>画像（图 27）。（i）类别：近闲（&lt;5%）71.9%、轻载（5–30%）27.1%、重载（&gt;30%）1.0%——与"多数闲、少数重"的建模前提一致。（ii）超售实锚：vCPU 超售 5.76×（vCPU 配置合计/50 核）、内存限额超售 1.12×、实际内存占用约 95 GiB——第 8 章测试床的 5× 量级来自真实运营实践而非人为拔高。（iii）突发结构：活跃段（≥5% 连续）共 4268 段、中位 1 分钟（3550 段为单分钟）——短促突发为主；数值层自相关在 1–30 分钟全部 ≈ 0（无强持续性、无时钟周期），而状态层仍具持久性（Markov 自转移 0.85/0.37/0.26）——真实突发是"长短不一、相位漂移的活跃段"，既非 i.i.d. 也非固定时钟。（iv）饱和实例（≥95% vCPU）占 VM-样本的 0.046%——"真重载"稀有但存在。</a:t>
             </a:r>
           </a:p>
         </p:txBody>
@@ -6529,7 +6513,7 @@
                 </a:solidFill>
                 <a:latin typeface="Microsoft YaHei"/>
               </a:rPr>
-              <a:t>7 评估</a:t>
+              <a:t>图</a:t>
             </a:r>
           </a:p>
           <a:p>
@@ -6545,16 +6529,40 @@
           </a:p>
         </p:txBody>
       </p:sp>
-      <p:sp>
-        <p:nvSpPr>
-          <p:cNvPr id="4" name="TextBox 3"/>
+      <p:pic>
+        <p:nvPicPr>
+          <p:cNvPr id="4" name="Picture 3" descr="fig27_production.png"/>
+          <p:cNvPicPr>
+            <a:picLocks noChangeAspect="1"/>
+          </p:cNvPicPr>
+          <p:nvPr/>
+        </p:nvPicPr>
+        <p:blipFill>
+          <a:blip r:embed="rId2"/>
+          <a:stretch>
+            <a:fillRect/>
+          </a:stretch>
+        </p:blipFill>
+        <p:spPr>
+          <a:xfrm>
+            <a:off x="1737360" y="960120"/>
+            <a:ext cx="8686800" cy="2606040"/>
+          </a:xfrm>
+          <a:prstGeom prst="rect">
+            <a:avLst/>
+          </a:prstGeom>
+        </p:spPr>
+      </p:pic>
+      <p:sp>
+        <p:nvSpPr>
+          <p:cNvPr id="5" name="TextBox 4"/>
           <p:cNvSpPr txBox="1"/>
           <p:nvPr/>
         </p:nvSpPr>
         <p:spPr>
           <a:xfrm>
-            <a:off x="502920" y="914400"/>
-            <a:ext cx="11155680" cy="5486400"/>
+            <a:off x="914400" y="3606160"/>
+            <a:ext cx="10332720" cy="548640"/>
           </a:xfrm>
           <a:prstGeom prst="rect">
             <a:avLst/>
@@ -6562,46 +6570,20 @@
           <a:noFill/>
         </p:spPr>
         <p:txBody>
-          <a:bodyPr wrap="square">
+          <a:bodyPr wrap="none">
             <a:spAutoFit/>
           </a:bodyPr>
           <a:lstStyle/>
           <a:p>
-            <a:pPr>
-              <a:lnSpc>
-                <a:spcPct val="108000"/>
-              </a:lnSpc>
-              <a:spcAft>
-                <a:spcPts val="400"/>
-              </a:spcAft>
-            </a:pPr>
-            <a:r>
-              <a:rPr sz="1250" b="0">
-                <a:solidFill>
-                  <a:srgbClr val="1C1C1E"/>
-                </a:solidFill>
-                <a:latin typeface="Microsoft YaHei"/>
-              </a:rPr>
-              <a:t>对全文的含义。（i）重载类仅 1%，与第 4 章"一台满载邻居即击穿尾延迟"的合成结果互为印证——稀有重载 + 瞬时重叠就是风险的全部来源；（ii）真实突发是漂移型而非时钟型：合成实验中的"严格 60 s 对齐"给出的是最坏情形上界，混合相位容量模型（第 8 章）里的 φ 在真实宿主上应取低值，安全容量因此贴近随机端——与 5.76× 超售长期共存的事实一致；（iii）只读接口不含节流计数，截断比例的现场证据以"饱和实例占比"作下界代理，节流维度的现场证据留待轻量流（/proc PSI）积累。（iv）租户间相关性（分钟粒度）：204 台活跃 VM、20706 对的平均 Pearson r=0.12、中位 0.07、P95 0.45、15.7% 的对 r&gt;0.3——弱正相关而非独立：相位结构不是合成负载的臆造（部分租户确呈弱同步倾向，也可能含宿主级测量共模与日间节律），但也提醒容量模型不该假设完全独立；亚分钟同步在本粒度不可见。</a:t>
-            </a:r>
-          </a:p>
-          <a:p>
-            <a:pPr>
-              <a:lnSpc>
-                <a:spcPct val="108000"/>
-              </a:lnSpc>
-              <a:spcAft>
-                <a:spcPts val="400"/>
-              </a:spcAft>
-            </a:pPr>
-            <a:r>
-              <a:rPr sz="1250" b="0">
-                <a:solidFill>
-                  <a:srgbClr val="1C1C1E"/>
-                </a:solidFill>
-                <a:latin typeface="Microsoft YaHei"/>
-              </a:rPr>
-              <a:t>边界。 单台宿主、170 分钟窗口（3 小时）、无跨天/跨周覆盖；1 分钟粒度无法分辨亚分钟同步（对 60 s 内脉冲无能为力）；重建后轻量流持续采集（高负载段，PSI some avg10 ≈ 26），将与安静段合并为双态锚点并补跨天覆盖。</a:t>
+            <a:pPr algn="ctr"/>
+            <a:r>
+              <a:rPr sz="1100" b="0">
+                <a:solidFill>
+                  <a:srgbClr val="5A6472"/>
+                </a:solidFill>
+                <a:latin typeface="Microsoft YaHei"/>
+              </a:rPr>
+              <a:t>图 27 生产负载画像：72% 近闲 / 4268 段短促突发 / 5.76× 超售实锚（170×60 s）</a:t>
             </a:r>
           </a:p>
         </p:txBody>
@@ -6725,7 +6707,7 @@
                 </a:solidFill>
                 <a:latin typeface="Microsoft YaHei"/>
               </a:rPr>
-              <a:t>7.7 缺口清单（投稿前计划）</a:t>
+              <a:t>7.6 生产遥测：生产负载画像（图 27）</a:t>
             </a:r>
           </a:p>
         </p:txBody>
@@ -6752,7 +6734,7 @@
           </a:bodyPr>
           <a:lstStyle/>
           <a:p>
-            <a:pPr lvl="1">
+            <a:pPr>
               <a:lnSpc>
                 <a:spcPct val="108000"/>
               </a:lnSpc>
@@ -6761,17 +6743,17 @@
               </a:spcAft>
             </a:pPr>
             <a:r>
-              <a:rPr sz="1200" b="0">
+              <a:rPr sz="1250" b="0">
                 <a:solidFill>
                   <a:srgbClr val="1C1C1E"/>
                 </a:solidFill>
                 <a:latin typeface="Microsoft YaHei"/>
               </a:rPr>
-              <a:t>• 与 AUDIBLE 适配基线的对照：预实验见 7.3b（图 11）；v2 已实现四路公平对决（含 AUDIBLE 式 MC 与时间对齐 taligned），×10 轮复测排队运行中（Phase 2）；</a:t>
-            </a:r>
-          </a:p>
-          <a:p>
-            <a:pPr lvl="1">
+              <a:t>对全文的含义。（i）重载类仅 1%，与第 4 章"一台满载邻居即击穿尾延迟"的合成结果互为印证——稀有重载 + 瞬时重叠就是风险的全部来源；（ii）真实突发是漂移型而非时钟型：合成实验中的"严格 60 s 对齐"给出的是最坏情形上界，混合相位容量模型（第 8 章）里的 φ 在真实宿主上应取低值，安全容量因此贴近随机端——与 5.76× 超售长期共存的事实一致；（iii）只读接口不含节流计数，截断比例的现场证据以"饱和实例占比"作下界代理，节流维度的现场证据留待轻量流（/proc PSI）积累。（iv）租户间相关性（分钟粒度）：204 台活跃 VM、20706 对的平均 Pearson r=0.12、中位 0.07、P95 0.45、15.7% 的对 r&gt;0.3——弱正相关而非独立：相位结构不是合成负载的臆造（部分租户确呈弱同步倾向，也可能含宿主级测量共模与日间节律），但也提醒容量模型不该假设完全独立；亚分钟同步在本粒度不可见。</a:t>
+            </a:r>
+          </a:p>
+          <a:p>
+            <a:pPr>
               <a:lnSpc>
                 <a:spcPct val="108000"/>
               </a:lnSpc>
@@ -6780,70 +6762,13 @@
               </a:spcAft>
             </a:pPr>
             <a:r>
-              <a:rPr sz="1200" b="0">
+              <a:rPr sz="1250" b="0">
                 <a:solidFill>
                   <a:srgbClr val="1C1C1E"/>
                 </a:solidFill>
                 <a:latin typeface="Microsoft YaHei"/>
               </a:rPr>
-              <a:t>• 冷启动/短历史专项：预实验见 7.3b；v2 ×10 轮复测排队运行中（Phase 2）；</a:t>
-            </a:r>
-          </a:p>
-          <a:p>
-            <a:pPr lvl="1">
-              <a:lnSpc>
-                <a:spcPct val="108000"/>
-              </a:lnSpc>
-              <a:spcAft>
-                <a:spcPts val="400"/>
-              </a:spcAft>
-            </a:pPr>
-            <a:r>
-              <a:rPr sz="1200" b="0">
-                <a:solidFill>
-                  <a:srgbClr val="1C1C1E"/>
-                </a:solidFill>
-                <a:latin typeface="Microsoft YaHei"/>
-              </a:rPr>
-              <a:t>• 关键结论轮次：Phase 1 已完成（膝点 50 轮、censoring 90 cycle、三风暴 24 轮，见 4.1b/4.3b/6.5 与图 17–19）；因批次早期两台邻居 VM 被宿主 OOM 杀死，返工批次（v3knee 50 + v3cen 30 + v3syn 26）与 Phase 2（53 轮，含准入对决与内存闸门对照）已在自动队列中；完成后统一重算轮级 bootstrap 置信区间与图表；</a:t>
-            </a:r>
-          </a:p>
-          <a:p>
-            <a:pPr lvl="1">
-              <a:lnSpc>
-                <a:spcPct val="108000"/>
-              </a:lnSpc>
-              <a:spcAft>
-                <a:spcPts val="400"/>
-              </a:spcAft>
-            </a:pPr>
-            <a:r>
-              <a:rPr sz="1200" b="0">
-                <a:solidFill>
-                  <a:srgbClr val="1C1C1E"/>
-                </a:solidFill>
-                <a:latin typeface="Microsoft YaHei"/>
-              </a:rPr>
-              <a:t>• 消融：已完成预实验（6.3b 的 naive / AUDIBLE 式 / aware / aware+校准 对照）；隔离项对照见 4.4.3；</a:t>
-            </a:r>
-          </a:p>
-          <a:p>
-            <a:pPr lvl="1">
-              <a:lnSpc>
-                <a:spcPct val="108000"/>
-              </a:lnSpc>
-              <a:spcAft>
-                <a:spcPts val="400"/>
-              </a:spcAft>
-            </a:pPr>
-            <a:r>
-              <a:rPr sz="1200" b="0">
-                <a:solidFill>
-                  <a:srgbClr val="1C1C1E"/>
-                </a:solidFill>
-                <a:latin typeface="Microsoft YaHei"/>
-              </a:rPr>
-              <a:t>• 图 2–19 的出图脚本与数据核对（骨架 §5 清单；pilot 图 2–13、物理机图 14–16、v2 复测图 17–19 均已一键复现）。</a:t>
+              <a:t>边界。 单台宿主、170 分钟窗口（3 小时）、无跨天/跨周覆盖；1 分钟粒度无法分辨亚分钟同步（对 60 s 内脉冲无能为力）；重建后轻量流持续采集（高负载段，PSI some avg10 ≈ 26），将与安静段合并为双态锚点并补跨天覆盖。</a:t>
             </a:r>
           </a:p>
         </p:txBody>
@@ -6917,8 +6842,8 @@
         </p:nvSpPr>
         <p:spPr>
           <a:xfrm>
-            <a:off x="0" y="2651760"/>
-            <a:ext cx="12191695" cy="1371600"/>
+            <a:off x="0" y="0"/>
+            <a:ext cx="12191695" cy="777240"/>
           </a:xfrm>
           <a:prstGeom prst="rect">
             <a:avLst/>
@@ -6945,18 +6870,147 @@
           </a:fontRef>
         </p:style>
         <p:txBody>
-          <a:bodyPr rtlCol="0" anchor="ctr" lIns="731520"/>
+          <a:bodyPr rtlCol="0" anchor="ctr" lIns="411480" tIns="54864"/>
           <a:lstStyle/>
           <a:p>
             <a:pPr algn="ctr"/>
             <a:r>
-              <a:rPr sz="3000" b="1">
+              <a:rPr sz="2100" b="1">
                 <a:solidFill>
                   <a:srgbClr val="FFFFFF"/>
                 </a:solidFill>
                 <a:latin typeface="Microsoft YaHei"/>
               </a:rPr>
-              <a:t>8 物理机验证与安全容量模型</a:t>
+              <a:t>7 评估</a:t>
+            </a:r>
+          </a:p>
+          <a:p>
+            <a:r>
+              <a:rPr sz="1200">
+                <a:solidFill>
+                  <a:srgbClr val="D8E2F0"/>
+                </a:solidFill>
+                <a:latin typeface="Microsoft YaHei"/>
+              </a:rPr>
+              <a:t>7.7 缺口清单（投稿前计划）</a:t>
+            </a:r>
+          </a:p>
+        </p:txBody>
+      </p:sp>
+      <p:sp>
+        <p:nvSpPr>
+          <p:cNvPr id="4" name="TextBox 3"/>
+          <p:cNvSpPr txBox="1"/>
+          <p:nvPr/>
+        </p:nvSpPr>
+        <p:spPr>
+          <a:xfrm>
+            <a:off x="502920" y="914400"/>
+            <a:ext cx="11155680" cy="5486400"/>
+          </a:xfrm>
+          <a:prstGeom prst="rect">
+            <a:avLst/>
+          </a:prstGeom>
+          <a:noFill/>
+        </p:spPr>
+        <p:txBody>
+          <a:bodyPr wrap="square">
+            <a:spAutoFit/>
+          </a:bodyPr>
+          <a:lstStyle/>
+          <a:p>
+            <a:pPr lvl="1">
+              <a:lnSpc>
+                <a:spcPct val="108000"/>
+              </a:lnSpc>
+              <a:spcAft>
+                <a:spcPts val="400"/>
+              </a:spcAft>
+            </a:pPr>
+            <a:r>
+              <a:rPr sz="1200" b="0">
+                <a:solidFill>
+                  <a:srgbClr val="1C1C1E"/>
+                </a:solidFill>
+                <a:latin typeface="Microsoft YaHei"/>
+              </a:rPr>
+              <a:t>• 与 AUDIBLE 适配基线的对照：预实验见 7.3b（图 11）；v2 已实现四路公平对决（含 AUDIBLE 式 MC 与时间对齐 taligned），×10 轮复测排队运行中（Phase 2）；</a:t>
+            </a:r>
+          </a:p>
+          <a:p>
+            <a:pPr lvl="1">
+              <a:lnSpc>
+                <a:spcPct val="108000"/>
+              </a:lnSpc>
+              <a:spcAft>
+                <a:spcPts val="400"/>
+              </a:spcAft>
+            </a:pPr>
+            <a:r>
+              <a:rPr sz="1200" b="0">
+                <a:solidFill>
+                  <a:srgbClr val="1C1C1E"/>
+                </a:solidFill>
+                <a:latin typeface="Microsoft YaHei"/>
+              </a:rPr>
+              <a:t>• 冷启动/短历史专项：预实验见 7.3b；v2 ×10 轮复测排队运行中（Phase 2）；</a:t>
+            </a:r>
+          </a:p>
+          <a:p>
+            <a:pPr lvl="1">
+              <a:lnSpc>
+                <a:spcPct val="108000"/>
+              </a:lnSpc>
+              <a:spcAft>
+                <a:spcPts val="400"/>
+              </a:spcAft>
+            </a:pPr>
+            <a:r>
+              <a:rPr sz="1200" b="0">
+                <a:solidFill>
+                  <a:srgbClr val="1C1C1E"/>
+                </a:solidFill>
+                <a:latin typeface="Microsoft YaHei"/>
+              </a:rPr>
+              <a:t>• 关键结论轮次：Phase 1 已完成（膝点 50 轮、censoring 90 cycle、三风暴 24 轮，见 4.1b/4.3b/6.5 与图 17–19）；因批次早期两台邻居 VM 被宿主 OOM 杀死，返工批次（v3knee 50 + v3cen 30 + v3syn 26）与 Phase 2（53 轮，含准入对决与内存闸门对照）已在自动队列中；完成后统一重算轮级 bootstrap 置信区间与图表；</a:t>
+            </a:r>
+          </a:p>
+          <a:p>
+            <a:pPr lvl="1">
+              <a:lnSpc>
+                <a:spcPct val="108000"/>
+              </a:lnSpc>
+              <a:spcAft>
+                <a:spcPts val="400"/>
+              </a:spcAft>
+            </a:pPr>
+            <a:r>
+              <a:rPr sz="1200" b="0">
+                <a:solidFill>
+                  <a:srgbClr val="1C1C1E"/>
+                </a:solidFill>
+                <a:latin typeface="Microsoft YaHei"/>
+              </a:rPr>
+              <a:t>• 消融：已完成预实验（6.3b 的 naive / AUDIBLE 式 / aware / aware+校准 对照）；隔离项对照见 4.4.3；</a:t>
+            </a:r>
+          </a:p>
+          <a:p>
+            <a:pPr lvl="1">
+              <a:lnSpc>
+                <a:spcPct val="108000"/>
+              </a:lnSpc>
+              <a:spcAft>
+                <a:spcPts val="400"/>
+              </a:spcAft>
+            </a:pPr>
+            <a:r>
+              <a:rPr sz="1200" b="0">
+                <a:solidFill>
+                  <a:srgbClr val="1C1C1E"/>
+                </a:solidFill>
+                <a:latin typeface="Microsoft YaHei"/>
+              </a:rPr>
+              <a:t>• 图 2–19 的出图脚本与数据核对（骨架 §5 清单；pilot 图 2–13、物理机图 14–16、v2 复测图 17–19 均已一键复现）。</a:t>
             </a:r>
           </a:p>
         </p:txBody>
@@ -7030,8 +7084,8 @@
         </p:nvSpPr>
         <p:spPr>
           <a:xfrm>
-            <a:off x="0" y="0"/>
-            <a:ext cx="12191695" cy="658368"/>
+            <a:off x="0" y="2651760"/>
+            <a:ext cx="12191695" cy="1371600"/>
           </a:xfrm>
           <a:prstGeom prst="rect">
             <a:avLst/>
@@ -7058,60 +7112,18 @@
           </a:fontRef>
         </p:style>
         <p:txBody>
-          <a:bodyPr rtlCol="0" anchor="ctr" lIns="411480" tIns="54864"/>
+          <a:bodyPr rtlCol="0" anchor="ctr" lIns="731520"/>
           <a:lstStyle/>
           <a:p>
             <a:pPr algn="ctr"/>
             <a:r>
-              <a:rPr sz="2100" b="1">
+              <a:rPr sz="3000" b="1">
                 <a:solidFill>
                   <a:srgbClr val="FFFFFF"/>
                 </a:solidFill>
                 <a:latin typeface="Microsoft YaHei"/>
               </a:rPr>
               <a:t>8 物理机验证与安全容量模型</a:t>
-            </a:r>
-          </a:p>
-        </p:txBody>
-      </p:sp>
-      <p:sp>
-        <p:nvSpPr>
-          <p:cNvPr id="4" name="TextBox 3"/>
-          <p:cNvSpPr txBox="1"/>
-          <p:nvPr/>
-        </p:nvSpPr>
-        <p:spPr>
-          <a:xfrm>
-            <a:off x="502920" y="914400"/>
-            <a:ext cx="11155680" cy="5486400"/>
-          </a:xfrm>
-          <a:prstGeom prst="rect">
-            <a:avLst/>
-          </a:prstGeom>
-          <a:noFill/>
-        </p:spPr>
-        <p:txBody>
-          <a:bodyPr wrap="square">
-            <a:spAutoFit/>
-          </a:bodyPr>
-          <a:lstStyle/>
-          <a:p>
-            <a:pPr>
-              <a:lnSpc>
-                <a:spcPct val="108000"/>
-              </a:lnSpc>
-              <a:spcAft>
-                <a:spcPts val="400"/>
-              </a:spcAft>
-            </a:pPr>
-            <a:r>
-              <a:rPr sz="1100" b="0">
-                <a:solidFill>
-                  <a:srgbClr val="5A6472"/>
-                </a:solidFill>
-                <a:latin typeface="Microsoft YaHei"/>
-              </a:rPr>
-              <a:t>〔本章回应"单嵌套测试床、规模太小、结论能否推广"的评审关切：在裸金属物理机（双路 Xeon Platinum 8259CL， 48 核 / 96 线程，991 GiB，PVE 9.2.20，非嵌套）上，用 64 台客户 VM 舰队复现第 4–6 章的核心结论， 并把"安全售卖容量"从定性说法升级为可量化的曲线与定律（§8.5 容量近似模型 N*≈C/(ρκ)，含明确假设与边界）。〕</a:t>
             </a:r>
           </a:p>
         </p:txBody>
@@ -7186,7 +7198,7 @@
         <p:spPr>
           <a:xfrm>
             <a:off x="0" y="0"/>
-            <a:ext cx="12191695" cy="777240"/>
+            <a:ext cx="12191695" cy="658368"/>
           </a:xfrm>
           <a:prstGeom prst="rect">
             <a:avLst/>
@@ -7225,17 +7237,6 @@
                 <a:latin typeface="Microsoft YaHei"/>
               </a:rPr>
               <a:t>8 物理机验证与安全容量模型</a:t>
-            </a:r>
-          </a:p>
-          <a:p>
-            <a:r>
-              <a:rPr sz="1200">
-                <a:solidFill>
-                  <a:srgbClr val="D8E2F0"/>
-                </a:solidFill>
-                <a:latin typeface="Microsoft YaHei"/>
-              </a:rPr>
-              <a:t>8.1 测试床</a:t>
             </a:r>
           </a:p>
         </p:txBody>
@@ -7271,51 +7272,13 @@
               </a:spcAft>
             </a:pPr>
             <a:r>
-              <a:rPr sz="1250" b="0">
-                <a:solidFill>
-                  <a:srgbClr val="1C1C1E"/>
-                </a:solidFill>
-                <a:latin typeface="Microsoft YaHei"/>
-              </a:rPr>
-              <a:t>物理机：2×Xeon Platinum 8259CL（48 物理核 / 96 线程，双 NUMA 节点）、8×128 GB DCPMM（Memory Mode，可用 991 GiB，NUMA 520 GiB + 520 GiB）、3×NVMe SSD + 2×SATA SSD、PVE 9.2.20（内核 7.0.14-19-pve，systemd-detect-virt=none，非嵌套）、内网 vmbr0 10.10.0.0/24 + NAT。</a:t>
-            </a:r>
-          </a:p>
-          <a:p>
-            <a:pPr>
-              <a:lnSpc>
-                <a:spcPct val="108000"/>
-              </a:lnSpc>
-              <a:spcAft>
-                <a:spcPts val="400"/>
-              </a:spcAft>
-            </a:pPr>
-            <a:r>
-              <a:rPr sz="1250" b="0">
-                <a:solidFill>
-                  <a:srgbClr val="1C1C1E"/>
-                </a:solidFill>
-                <a:latin typeface="Microsoft YaHei"/>
-              </a:rPr>
-              <a:t>舰队：1 台 HTTP（nginx）、1 台 Redis、1 台探针（开放环 100 req/s）、64 台客户 VM（1 vCPU / 1 GiB，Debian 12 cloud 模板）。客户负载用第 4 章的占空比忙循环（burner.py），速率日志提供逐客户体验指标。服务与探针绑核隔离（2/3/4 号核）；租户池由 taskset -apc 绑定（2–32 核可配）。隔离声明经拓扑核验：服务核 2/3/4 的 SMT 兄弟（50/51/52）与租户池 8–23 的兄弟集合（56–71）零交集，且全部位于 NUMA node 0——是物理核级隔离，不只是逻辑编号不相交。</a:t>
-            </a:r>
-          </a:p>
-          <a:p>
-            <a:pPr>
-              <a:lnSpc>
-                <a:spcPct val="108000"/>
-              </a:lnSpc>
-              <a:spcAft>
-                <a:spcPts val="400"/>
-              </a:spcAft>
-            </a:pPr>
-            <a:r>
               <a:rPr sz="1100" b="0">
                 <a:solidFill>
                   <a:srgbClr val="5A6472"/>
                 </a:solidFill>
                 <a:latin typeface="Microsoft YaHei"/>
               </a:rPr>
-              <a:t>〔环境插曲（如实记录）：测试床搭建期间该机出现过一次内核 panic（Attempted to kill init! exitcode=0x9， 日志停在批量启动 VM 附近）；该机彼时正处内存子系统异常状态（8 条 DCPMM 仅 7 条在线）。 冷启动修复内存（8/8 在线，991 GiB）后，48 台 VM 分批启动 + 数小时满载实验均无异常。 这不是本文方法的组成部分，但说明"生产硬件同样会带病运行"——监测与保守化设计因此更有价值。〕</a:t>
+              <a:t>〔本章回应"单嵌套测试床、规模太小、结论能否推广"的评审关切：在裸金属物理机（双路 Xeon Platinum 8259CL， 48 核 / 96 线程，991 GiB，PVE 9.2.20，非嵌套）上，用 64 台客户 VM 舰队复现第 4–6 章的核心结论， 并把"安全售卖容量"从定性说法升级为可量化的曲线与定律（§8.5 容量近似模型 N*≈C/(ρκ)，含明确假设与边界）。〕</a:t>
             </a:r>
           </a:p>
         </p:txBody>
@@ -7439,7 +7402,7 @@
                 </a:solidFill>
                 <a:latin typeface="Microsoft YaHei"/>
               </a:rPr>
-              <a:t>8.2 多规模膝点复现（图 14）</a:t>
+              <a:t>8.1 测试床</a:t>
             </a:r>
           </a:p>
         </p:txBody>
@@ -7481,7 +7444,7 @@
                 </a:solidFill>
                 <a:latin typeface="Microsoft YaHei"/>
               </a:rPr>
-              <a:t>在物理机上把第 4.1 节的膝点实验放大到五种规模：租户池 2 / 4 / 8 / 16 / 32 物理核，服务侧两种配置：隔离（专用核）与共享（与租户同池）。逐步增加 100% 占空比的满载邻居（每位 1 核），记录服务 P99（图 14；横轴为"超售比 = 满载邻居数 / 租户池核数"）。</a:t>
+              <a:t>物理机：2×Xeon Platinum 8259CL（48 物理核 / 96 线程，双 NUMA 节点）、8×128 GB DCPMM（Memory Mode，可用 991 GiB，NUMA 520 GiB + 520 GiB）、3×NVMe SSD + 2×SATA SSD、PVE 9.2.20（内核 7.0.14-19-pve，systemd-detect-virt=none，非嵌套）、内网 vmbr0 10.10.0.0/24 + NAT。</a:t>
             </a:r>
           </a:p>
           <a:p>
@@ -7500,26 +7463,7 @@
                 </a:solidFill>
                 <a:latin typeface="Microsoft YaHei"/>
               </a:rPr>
-              <a:t>结果。</a:t>
-            </a:r>
-          </a:p>
-          <a:p>
-            <a:pPr lvl="1">
-              <a:lnSpc>
-                <a:spcPct val="108000"/>
-              </a:lnSpc>
-              <a:spcAft>
-                <a:spcPts val="400"/>
-              </a:spcAft>
-            </a:pPr>
-            <a:r>
-              <a:rPr sz="1200" b="0">
-                <a:solidFill>
-                  <a:srgbClr val="1C1C1E"/>
-                </a:solidFill>
-                <a:latin typeface="Microsoft YaHei"/>
-              </a:rPr>
-              <a:t>• 隔离配置：五种规模、超售比 0–2.5× 全程服务 P99 0.68–0.78 ms——即使在 32 核池上、</a:t>
+              <a:t>舰队：1 台 HTTP（nginx）、1 台 Redis、1 台探针（开放环 100 req/s）、64 台客户 VM（1 vCPU / 1 GiB，Debian 12 cloud 模板）。客户负载用第 4 章的占空比忙循环（burner.py），速率日志提供逐客户体验指标。服务与探针绑核隔离（2/3/4 号核）；租户池由 taskset -apc 绑定（2–32 核可配）。隔离声明经拓扑核验：服务核 2/3/4 的 SMT 兄弟（50/51/52）与租户池 8–23 的兄弟集合（56–71）零交集，且全部位于 NUMA node 0——是物理核级隔离，不只是逻辑编号不相交。</a:t>
             </a:r>
           </a:p>
           <a:p>
@@ -7532,70 +7476,13 @@
               </a:spcAft>
             </a:pPr>
             <a:r>
-              <a:rPr sz="1250" b="0">
-                <a:solidFill>
-                  <a:srgbClr val="1C1C1E"/>
-                </a:solidFill>
-                <a:latin typeface="Microsoft YaHei"/>
-              </a:rPr>
-              <a:t>48 台满载邻居（1.5× 超售）下依然零伤尾。"隔离护尾"从 4 vCPU 嵌套床放大到 96 线程物理机后完全成立。</a:t>
-            </a:r>
-          </a:p>
-          <a:p>
-            <a:pPr lvl="1">
-              <a:lnSpc>
-                <a:spcPct val="108000"/>
-              </a:lnSpc>
-              <a:spcAft>
-                <a:spcPts val="400"/>
-              </a:spcAft>
-            </a:pPr>
-            <a:r>
-              <a:rPr sz="1200" b="0">
-                <a:solidFill>
-                  <a:srgbClr val="1C1C1E"/>
-                </a:solidFill>
-                <a:latin typeface="Microsoft YaHei"/>
-              </a:rPr>
-              <a:t>• 共享配置：每种规模都在池饱和点（超售比 = 1.0）出现断崖——2 核池 L2→L4（4.1→10.2 ms）、</a:t>
-            </a:r>
-          </a:p>
-          <a:p>
-            <a:pPr>
-              <a:lnSpc>
-                <a:spcPct val="108000"/>
-              </a:lnSpc>
-              <a:spcAft>
-                <a:spcPts val="400"/>
-              </a:spcAft>
-            </a:pPr>
-            <a:r>
-              <a:rPr sz="1250" b="0">
-                <a:solidFill>
-                  <a:srgbClr val="1C1C1E"/>
-                </a:solidFill>
-                <a:latin typeface="Microsoft YaHei"/>
-              </a:rPr>
-              <a:t>4 核池 L3→L4（1.5→10.2 ms）、16 核池 L13→L16（1.0→12.0 ms）。16 核池细扫 4 轮（L13–L18，图 14 已更新）：L15 = 2.13 ms [2.00–2.29]（仍在平台），L16 = 10.95 ms [9.97–12.02]，4/4 轮在 L15→L16 处跳变；饱和后（L17–L18）稳定在 9.8–10.6 ms 平台——膝点位置精确等于池容量，4 轮无一轮例外，与 BeroHost 的 3→4 结论同构。</a:t>
-            </a:r>
-          </a:p>
-          <a:p>
-            <a:pPr>
-              <a:lnSpc>
-                <a:spcPct val="108000"/>
-              </a:lnSpc>
-              <a:spcAft>
-                <a:spcPts val="400"/>
-              </a:spcAft>
-            </a:pPr>
-            <a:r>
-              <a:rPr sz="1250" b="0">
-                <a:solidFill>
-                  <a:srgbClr val="1C1C1E"/>
-                </a:solidFill>
-                <a:latin typeface="Microsoft YaHei"/>
-              </a:rPr>
-              <a:t>读法。 规模不改变结论的形状，只改变刻度：共享池的膝点始终落在"峰值需求 ≥ 池容量"处，隔离则把这条曲线整根压平。这同时是对"4 vCPU 太小、结论不可推广"关切最直接的回答：在 96 线程物理机上，膝点现象、量级（0.7 ms → 10–12 ms）与隔离有效性逐项复现。</a:t>
+              <a:rPr sz="1100" b="0">
+                <a:solidFill>
+                  <a:srgbClr val="5A6472"/>
+                </a:solidFill>
+                <a:latin typeface="Microsoft YaHei"/>
+              </a:rPr>
+              <a:t>〔环境插曲（如实记录）：测试床搭建期间该机出现过一次内核 panic（Attempted to kill init! exitcode=0x9， 日志停在批量启动 VM 附近）；该机彼时正处内存子系统异常状态（8 条 DCPMM 仅 7 条在线）。 冷启动修复内存（8/8 在线，991 GiB）后，48 台 VM 分批启动 + 数小时满载实验均无异常。 这不是本文方法的组成部分，但说明"生产硬件同样会带病运行"——监测与保守化设计因此更有价值。〕</a:t>
             </a:r>
           </a:p>
         </p:txBody>
@@ -7708,7 +7595,7 @@
                 </a:solidFill>
                 <a:latin typeface="Microsoft YaHei"/>
               </a:rPr>
-              <a:t>图</a:t>
+              <a:t>8 物理机验证与安全容量模型</a:t>
             </a:r>
           </a:p>
           <a:p>
@@ -7724,40 +7611,16 @@
           </a:p>
         </p:txBody>
       </p:sp>
-      <p:pic>
-        <p:nvPicPr>
-          <p:cNvPr id="4" name="Picture 3" descr="fig14_phys_knee.png"/>
-          <p:cNvPicPr>
-            <a:picLocks noChangeAspect="1"/>
-          </p:cNvPicPr>
-          <p:nvPr/>
-        </p:nvPicPr>
-        <p:blipFill>
-          <a:blip r:embed="rId2"/>
-          <a:stretch>
-            <a:fillRect/>
-          </a:stretch>
-        </p:blipFill>
-        <p:spPr>
-          <a:xfrm>
-            <a:off x="1737360" y="960120"/>
-            <a:ext cx="8686800" cy="3226526"/>
-          </a:xfrm>
-          <a:prstGeom prst="rect">
-            <a:avLst/>
-          </a:prstGeom>
-        </p:spPr>
-      </p:pic>
-      <p:sp>
-        <p:nvSpPr>
-          <p:cNvPr id="5" name="TextBox 4"/>
+      <p:sp>
+        <p:nvSpPr>
+          <p:cNvPr id="4" name="TextBox 3"/>
           <p:cNvSpPr txBox="1"/>
           <p:nvPr/>
         </p:nvSpPr>
         <p:spPr>
           <a:xfrm>
-            <a:off x="914400" y="4226646"/>
-            <a:ext cx="10332720" cy="548640"/>
+            <a:off x="502920" y="914400"/>
+            <a:ext cx="11155680" cy="5486400"/>
           </a:xfrm>
           <a:prstGeom prst="rect">
             <a:avLst/>
@@ -7765,20 +7628,141 @@
           <a:noFill/>
         </p:spPr>
         <p:txBody>
-          <a:bodyPr wrap="none">
+          <a:bodyPr wrap="square">
             <a:spAutoFit/>
           </a:bodyPr>
           <a:lstStyle/>
           <a:p>
-            <a:pPr algn="ctr"/>
-            <a:r>
-              <a:rPr sz="1100" b="0">
-                <a:solidFill>
-                  <a:srgbClr val="5A6472"/>
-                </a:solidFill>
-                <a:latin typeface="Microsoft YaHei"/>
-              </a:rPr>
-              <a:t>图 14 物理机多规模膝点：隔离 vs 共享（16 核细扫 4 轮）</a:t>
+            <a:pPr>
+              <a:lnSpc>
+                <a:spcPct val="108000"/>
+              </a:lnSpc>
+              <a:spcAft>
+                <a:spcPts val="400"/>
+              </a:spcAft>
+            </a:pPr>
+            <a:r>
+              <a:rPr sz="1250" b="0">
+                <a:solidFill>
+                  <a:srgbClr val="1C1C1E"/>
+                </a:solidFill>
+                <a:latin typeface="Microsoft YaHei"/>
+              </a:rPr>
+              <a:t>在物理机上把第 4.1 节的膝点实验放大到五种规模：租户池 2 / 4 / 8 / 16 / 32 物理核，服务侧两种配置：隔离（专用核）与共享（与租户同池）。逐步增加 100% 占空比的满载邻居（每位 1 核），记录服务 P99（图 14；横轴为"超售比 = 满载邻居数 / 租户池核数"）。</a:t>
+            </a:r>
+          </a:p>
+          <a:p>
+            <a:pPr>
+              <a:lnSpc>
+                <a:spcPct val="108000"/>
+              </a:lnSpc>
+              <a:spcAft>
+                <a:spcPts val="400"/>
+              </a:spcAft>
+            </a:pPr>
+            <a:r>
+              <a:rPr sz="1250" b="0">
+                <a:solidFill>
+                  <a:srgbClr val="1C1C1E"/>
+                </a:solidFill>
+                <a:latin typeface="Microsoft YaHei"/>
+              </a:rPr>
+              <a:t>结果。</a:t>
+            </a:r>
+          </a:p>
+          <a:p>
+            <a:pPr lvl="1">
+              <a:lnSpc>
+                <a:spcPct val="108000"/>
+              </a:lnSpc>
+              <a:spcAft>
+                <a:spcPts val="400"/>
+              </a:spcAft>
+            </a:pPr>
+            <a:r>
+              <a:rPr sz="1200" b="0">
+                <a:solidFill>
+                  <a:srgbClr val="1C1C1E"/>
+                </a:solidFill>
+                <a:latin typeface="Microsoft YaHei"/>
+              </a:rPr>
+              <a:t>• 隔离配置：五种规模、超售比 0–2.5× 全程服务 P99 0.68–0.78 ms——即使在 32 核池上、</a:t>
+            </a:r>
+          </a:p>
+          <a:p>
+            <a:pPr>
+              <a:lnSpc>
+                <a:spcPct val="108000"/>
+              </a:lnSpc>
+              <a:spcAft>
+                <a:spcPts val="400"/>
+              </a:spcAft>
+            </a:pPr>
+            <a:r>
+              <a:rPr sz="1250" b="0">
+                <a:solidFill>
+                  <a:srgbClr val="1C1C1E"/>
+                </a:solidFill>
+                <a:latin typeface="Microsoft YaHei"/>
+              </a:rPr>
+              <a:t>48 台满载邻居（1.5× 超售）下依然零伤尾。"隔离护尾"从 4 vCPU 嵌套床放大到 96 线程物理机后完全成立。</a:t>
+            </a:r>
+          </a:p>
+          <a:p>
+            <a:pPr lvl="1">
+              <a:lnSpc>
+                <a:spcPct val="108000"/>
+              </a:lnSpc>
+              <a:spcAft>
+                <a:spcPts val="400"/>
+              </a:spcAft>
+            </a:pPr>
+            <a:r>
+              <a:rPr sz="1200" b="0">
+                <a:solidFill>
+                  <a:srgbClr val="1C1C1E"/>
+                </a:solidFill>
+                <a:latin typeface="Microsoft YaHei"/>
+              </a:rPr>
+              <a:t>• 共享配置：每种规模都在池饱和点（超售比 = 1.0）出现断崖——2 核池 L2→L4（4.1→10.2 ms）、</a:t>
+            </a:r>
+          </a:p>
+          <a:p>
+            <a:pPr>
+              <a:lnSpc>
+                <a:spcPct val="108000"/>
+              </a:lnSpc>
+              <a:spcAft>
+                <a:spcPts val="400"/>
+              </a:spcAft>
+            </a:pPr>
+            <a:r>
+              <a:rPr sz="1250" b="0">
+                <a:solidFill>
+                  <a:srgbClr val="1C1C1E"/>
+                </a:solidFill>
+                <a:latin typeface="Microsoft YaHei"/>
+              </a:rPr>
+              <a:t>4 核池 L3→L4（1.5→10.2 ms）、16 核池 L13→L16（1.0→12.0 ms）。16 核池细扫 4 轮（L13–L18，图 14 已更新）：L15 = 2.13 ms [2.00–2.29]（仍在平台），L16 = 10.95 ms [9.97–12.02]，4/4 轮在 L15→L16 处跳变；饱和后（L17–L18）稳定在 9.8–10.6 ms 平台——膝点位置精确等于池容量，4 轮无一轮例外，与 BeroHost 的 3→4 结论同构。</a:t>
+            </a:r>
+          </a:p>
+          <a:p>
+            <a:pPr>
+              <a:lnSpc>
+                <a:spcPct val="108000"/>
+              </a:lnSpc>
+              <a:spcAft>
+                <a:spcPts val="400"/>
+              </a:spcAft>
+            </a:pPr>
+            <a:r>
+              <a:rPr sz="1250" b="0">
+                <a:solidFill>
+                  <a:srgbClr val="1C1C1E"/>
+                </a:solidFill>
+                <a:latin typeface="Microsoft YaHei"/>
+              </a:rPr>
+              <a:t>读法。 规模不改变结论的形状，只改变刻度：共享池的膝点始终落在"峰值需求 ≥ 池容量"处，隔离则把这条曲线整根压平。这同时是对"4 vCPU 太小、结论不可推广"关切最直接的回答：在 96 线程物理机上，膝点现象、量级（0.7 ms → 10–12 ms）与隔离有效性逐项复现。</a:t>
             </a:r>
           </a:p>
         </p:txBody>
@@ -7891,7 +7875,7 @@
                 </a:solidFill>
                 <a:latin typeface="Microsoft YaHei"/>
               </a:rPr>
-              <a:t>8 物理机验证与安全容量模型</a:t>
+              <a:t>图</a:t>
             </a:r>
           </a:p>
           <a:p>
@@ -7902,21 +7886,45 @@
                 </a:solidFill>
                 <a:latin typeface="Microsoft YaHei"/>
               </a:rPr>
-              <a:t>8.3 相位结构：同步 vs 随机（图 15）</a:t>
-            </a:r>
-          </a:p>
-        </p:txBody>
-      </p:sp>
-      <p:sp>
-        <p:nvSpPr>
-          <p:cNvPr id="4" name="TextBox 3"/>
+              <a:t>8.2 多规模膝点复现（图 14）</a:t>
+            </a:r>
+          </a:p>
+        </p:txBody>
+      </p:sp>
+      <p:pic>
+        <p:nvPicPr>
+          <p:cNvPr id="4" name="Picture 3" descr="fig14_phys_knee.png"/>
+          <p:cNvPicPr>
+            <a:picLocks noChangeAspect="1"/>
+          </p:cNvPicPr>
+          <p:nvPr/>
+        </p:nvPicPr>
+        <p:blipFill>
+          <a:blip r:embed="rId2"/>
+          <a:stretch>
+            <a:fillRect/>
+          </a:stretch>
+        </p:blipFill>
+        <p:spPr>
+          <a:xfrm>
+            <a:off x="1737360" y="960120"/>
+            <a:ext cx="8686800" cy="3226526"/>
+          </a:xfrm>
+          <a:prstGeom prst="rect">
+            <a:avLst/>
+          </a:prstGeom>
+        </p:spPr>
+      </p:pic>
+      <p:sp>
+        <p:nvSpPr>
+          <p:cNvPr id="5" name="TextBox 4"/>
           <p:cNvSpPr txBox="1"/>
           <p:nvPr/>
         </p:nvSpPr>
         <p:spPr>
           <a:xfrm>
-            <a:off x="502920" y="914400"/>
-            <a:ext cx="11155680" cy="5486400"/>
+            <a:off x="914400" y="4226646"/>
+            <a:ext cx="10332720" cy="548640"/>
           </a:xfrm>
           <a:prstGeom prst="rect">
             <a:avLst/>
@@ -7924,46 +7932,20 @@
           <a:noFill/>
         </p:spPr>
         <p:txBody>
-          <a:bodyPr wrap="square">
+          <a:bodyPr wrap="none">
             <a:spAutoFit/>
           </a:bodyPr>
           <a:lstStyle/>
           <a:p>
-            <a:pPr>
-              <a:lnSpc>
-                <a:spcPct val="108000"/>
-              </a:lnSpc>
-              <a:spcAft>
-                <a:spcPts val="400"/>
-              </a:spcAft>
-            </a:pPr>
-            <a:r>
-              <a:rPr sz="1250" b="0">
-                <a:solidFill>
-                  <a:srgbClr val="1C1C1E"/>
-                </a:solidFill>
-                <a:latin typeface="Microsoft YaHei"/>
-              </a:rPr>
-              <a:t>把 BeroHost 的同步突发实验（第 4.2 节）放大到 64 台：全部客户同开（各 20% 占空比 / 60 s 周期），一半实验随机相位、一半相位对齐，全部挤在同一个 16 核池（无隔离）。</a:t>
-            </a:r>
-          </a:p>
-          <a:p>
-            <a:pPr>
-              <a:lnSpc>
-                <a:spcPct val="108000"/>
-              </a:lnSpc>
-              <a:spcAft>
-                <a:spcPts val="400"/>
-              </a:spcAft>
-            </a:pPr>
-            <a:r>
-              <a:rPr sz="1250" b="0">
-                <a:solidFill>
-                  <a:srgbClr val="1C1C1E"/>
-                </a:solidFill>
-                <a:latin typeface="Microsoft YaHei"/>
-              </a:rPr>
-              <a:t>结果。</a:t>
+            <a:pPr algn="ctr"/>
+            <a:r>
+              <a:rPr sz="1100" b="0">
+                <a:solidFill>
+                  <a:srgbClr val="5A6472"/>
+                </a:solidFill>
+                <a:latin typeface="Microsoft YaHei"/>
+              </a:rPr>
+              <a:t>图 14 物理机多规模膝点：隔离 vs 共享（16 核细扫 4 轮）</a:t>
             </a:r>
           </a:p>
         </p:txBody>
@@ -8076,7 +8058,7 @@
                 </a:solidFill>
                 <a:latin typeface="Microsoft YaHei"/>
               </a:rPr>
-              <a:t>图</a:t>
+              <a:t>8 物理机验证与安全容量模型</a:t>
             </a:r>
           </a:p>
           <a:p>
@@ -8092,40 +8074,16 @@
           </a:p>
         </p:txBody>
       </p:sp>
-      <p:pic>
-        <p:nvPicPr>
-          <p:cNvPr id="4" name="Picture 3" descr="fig15_phys_sync.png"/>
-          <p:cNvPicPr>
-            <a:picLocks noChangeAspect="1"/>
-          </p:cNvPicPr>
-          <p:nvPr/>
-        </p:nvPicPr>
-        <p:blipFill>
-          <a:blip r:embed="rId2"/>
-          <a:stretch>
-            <a:fillRect/>
-          </a:stretch>
-        </p:blipFill>
-        <p:spPr>
-          <a:xfrm>
-            <a:off x="1737360" y="960120"/>
-            <a:ext cx="8686800" cy="2842953"/>
-          </a:xfrm>
-          <a:prstGeom prst="rect">
-            <a:avLst/>
-          </a:prstGeom>
-        </p:spPr>
-      </p:pic>
-      <p:sp>
-        <p:nvSpPr>
-          <p:cNvPr id="5" name="TextBox 4"/>
+      <p:sp>
+        <p:nvSpPr>
+          <p:cNvPr id="4" name="TextBox 3"/>
           <p:cNvSpPr txBox="1"/>
           <p:nvPr/>
         </p:nvSpPr>
         <p:spPr>
           <a:xfrm>
-            <a:off x="914400" y="3843073"/>
-            <a:ext cx="10332720" cy="548640"/>
+            <a:off x="502920" y="914400"/>
+            <a:ext cx="11155680" cy="5486400"/>
           </a:xfrm>
           <a:prstGeom prst="rect">
             <a:avLst/>
@@ -8133,20 +8091,46 @@
           <a:noFill/>
         </p:spPr>
         <p:txBody>
-          <a:bodyPr wrap="none">
+          <a:bodyPr wrap="square">
             <a:spAutoFit/>
           </a:bodyPr>
           <a:lstStyle/>
           <a:p>
-            <a:pPr algn="ctr"/>
-            <a:r>
-              <a:rPr sz="1100" b="0">
-                <a:solidFill>
-                  <a:srgbClr val="5A6472"/>
-                </a:solidFill>
-                <a:latin typeface="Microsoft YaHei"/>
-              </a:rPr>
-              <a:t>图 15 物理机 64 客户：同步 vs 随机（时间线 + 3 轮簇间隔复现）</a:t>
+            <a:pPr>
+              <a:lnSpc>
+                <a:spcPct val="108000"/>
+              </a:lnSpc>
+              <a:spcAft>
+                <a:spcPts val="400"/>
+              </a:spcAft>
+            </a:pPr>
+            <a:r>
+              <a:rPr sz="1250" b="0">
+                <a:solidFill>
+                  <a:srgbClr val="1C1C1E"/>
+                </a:solidFill>
+                <a:latin typeface="Microsoft YaHei"/>
+              </a:rPr>
+              <a:t>把 BeroHost 的同步突发实验（第 4.2 节）放大到 64 台：全部客户同开（各 20% 占空比 / 60 s 周期），一半实验随机相位、一半相位对齐，全部挤在同一个 16 核池（无隔离）。</a:t>
+            </a:r>
+          </a:p>
+          <a:p>
+            <a:pPr>
+              <a:lnSpc>
+                <a:spcPct val="108000"/>
+              </a:lnSpc>
+              <a:spcAft>
+                <a:spcPts val="400"/>
+              </a:spcAft>
+            </a:pPr>
+            <a:r>
+              <a:rPr sz="1250" b="0">
+                <a:solidFill>
+                  <a:srgbClr val="1C1C1E"/>
+                </a:solidFill>
+                <a:latin typeface="Microsoft YaHei"/>
+              </a:rPr>
+              <a:t>结果。</a:t>
             </a:r>
           </a:p>
         </p:txBody>
@@ -8444,7 +8428,7 @@
                 </a:solidFill>
                 <a:latin typeface="Microsoft YaHei"/>
               </a:rPr>
-              <a:t>8 物理机验证与安全容量模型</a:t>
+              <a:t>图</a:t>
             </a:r>
           </a:p>
           <a:p>
@@ -8460,269 +8444,65 @@
           </a:p>
         </p:txBody>
       </p:sp>
-      <p:graphicFrame>
-        <p:nvGraphicFramePr>
-          <p:cNvPr id="4" name="Table 3"/>
-          <p:cNvGraphicFramePr>
-            <a:graphicFrameLocks noGrp="1"/>
-          </p:cNvGraphicFramePr>
-          <p:nvPr/>
-        </p:nvGraphicFramePr>
-        <p:xfrm>
-          <a:off x="502920" y="960120"/>
-          <a:ext cx="11155680" cy="1463040"/>
-        </p:xfrm>
-        <a:graphic>
-          <a:graphicData uri="http://schemas.openxmlformats.org/drawingml/2006/table">
-            <a:tbl>
-              <a:tblPr firstRow="1" bandRow="1">
-                <a:tableStyleId>{5C22544A-7EE6-4342-B048-85BDC9FD1C3A}</a:tableStyleId>
-              </a:tblPr>
-              <a:tblGrid>
-                <a:gridCol w="3718560"/>
-                <a:gridCol w="3718560"/>
-                <a:gridCol w="3718560"/>
-              </a:tblGrid>
-              <a:tr h="365760">
-                <a:tc>
-                  <a:txBody>
-                    <a:bodyPr/>
-                    <a:lstStyle/>
-                    <a:p>
-                      <a:r>
-                        <a:rPr sz="1050" b="1">
-                          <a:solidFill>
-                            <a:srgbClr val="FFFFFF"/>
-                          </a:solidFill>
-                          <a:latin typeface="Microsoft YaHei"/>
-                        </a:rPr>
-                        <a:t>指标</a:t>
-                      </a:r>
-                    </a:p>
-                  </a:txBody>
-                  <a:tcPr>
-                    <a:solidFill>
-                      <a:srgbClr val="123A63"/>
-                    </a:solidFill>
-                  </a:tcPr>
-                </a:tc>
-                <a:tc>
-                  <a:txBody>
-                    <a:bodyPr/>
-                    <a:lstStyle/>
-                    <a:p>
-                      <a:r>
-                        <a:rPr sz="1050" b="1">
-                          <a:solidFill>
-                            <a:srgbClr val="FFFFFF"/>
-                          </a:solidFill>
-                          <a:latin typeface="Microsoft YaHei"/>
-                        </a:rPr>
-                        <a:t>随机相位</a:t>
-                      </a:r>
-                    </a:p>
-                  </a:txBody>
-                  <a:tcPr>
-                    <a:solidFill>
-                      <a:srgbClr val="123A63"/>
-                    </a:solidFill>
-                  </a:tcPr>
-                </a:tc>
-                <a:tc>
-                  <a:txBody>
-                    <a:bodyPr/>
-                    <a:lstStyle/>
-                    <a:p>
-                      <a:r>
-                        <a:rPr sz="1050" b="1">
-                          <a:solidFill>
-                            <a:srgbClr val="FFFFFF"/>
-                          </a:solidFill>
-                          <a:latin typeface="Microsoft YaHei"/>
-                        </a:rPr>
-                        <a:t>对齐相位</a:t>
-                      </a:r>
-                    </a:p>
-                  </a:txBody>
-                  <a:tcPr>
-                    <a:solidFill>
-                      <a:srgbClr val="123A63"/>
-                    </a:solidFill>
-                  </a:tcPr>
-                </a:tc>
-              </a:tr>
-              <a:tr h="365760">
-                <a:tc>
-                  <a:txBody>
-                    <a:bodyPr/>
-                    <a:lstStyle/>
-                    <a:p>
-                      <a:r>
-                        <a:rPr sz="1000" b="0">
-                          <a:solidFill>
-                            <a:srgbClr val="1C1C1E"/>
-                          </a:solidFill>
-                          <a:latin typeface="Microsoft YaHei"/>
-                        </a:rPr>
-                        <a:t>服务 P99</a:t>
-                      </a:r>
-                    </a:p>
-                  </a:txBody>
-                  <a:tcPr/>
-                </a:tc>
-                <a:tc>
-                  <a:txBody>
-                    <a:bodyPr/>
-                    <a:lstStyle/>
-                    <a:p>
-                      <a:r>
-                        <a:rPr sz="1000" b="0">
-                          <a:solidFill>
-                            <a:srgbClr val="1C1C1E"/>
-                          </a:solidFill>
-                          <a:latin typeface="Microsoft YaHei"/>
-                        </a:rPr>
-                        <a:t>8.8 ms</a:t>
-                      </a:r>
-                    </a:p>
-                  </a:txBody>
-                  <a:tcPr/>
-                </a:tc>
-                <a:tc>
-                  <a:txBody>
-                    <a:bodyPr/>
-                    <a:lstStyle/>
-                    <a:p>
-                      <a:r>
-                        <a:rPr sz="1000" b="0">
-                          <a:solidFill>
-                            <a:srgbClr val="1C1C1E"/>
-                          </a:solidFill>
-                          <a:latin typeface="Microsoft YaHei"/>
-                        </a:rPr>
-                        <a:t>3.6 ms（均值口径）</a:t>
-                      </a:r>
-                    </a:p>
-                  </a:txBody>
-                  <a:tcPr/>
-                </a:tc>
-              </a:tr>
-              <a:tr h="365760">
-                <a:tc>
-                  <a:txBody>
-                    <a:bodyPr/>
-                    <a:lstStyle/>
-                    <a:p>
-                      <a:r>
-                        <a:rPr sz="1000" b="0">
-                          <a:solidFill>
-                            <a:srgbClr val="1C1C1E"/>
-                          </a:solidFill>
-                          <a:latin typeface="Microsoft YaHei"/>
-                        </a:rPr>
-                        <a:t>热点时间形态</a:t>
-                      </a:r>
-                    </a:p>
-                  </a:txBody>
-                  <a:tcPr/>
-                </a:tc>
-                <a:tc>
-                  <a:txBody>
-                    <a:bodyPr/>
-                    <a:lstStyle/>
-                    <a:p>
-                      <a:r>
-                        <a:rPr sz="1000" b="0">
-                          <a:solidFill>
-                            <a:srgbClr val="1C1C1E"/>
-                          </a:solidFill>
-                          <a:latin typeface="Microsoft YaHei"/>
-                        </a:rPr>
-                        <a:t>散点（间隔 20–40 s 混杂）</a:t>
-                      </a:r>
-                    </a:p>
-                  </a:txBody>
-                  <a:tcPr/>
-                </a:tc>
-                <a:tc>
-                  <a:txBody>
-                    <a:bodyPr/>
-                    <a:lstStyle/>
-                    <a:p>
-                      <a:r>
-                        <a:rPr sz="1000" b="0">
-                          <a:solidFill>
-                            <a:srgbClr val="1C1C1E"/>
-                          </a:solidFill>
-                          <a:latin typeface="Microsoft YaHei"/>
-                        </a:rPr>
-                        <a:t>严格 60 s 周期</a:t>
-                      </a:r>
-                    </a:p>
-                  </a:txBody>
-                  <a:tcPr/>
-                </a:tc>
-              </a:tr>
-              <a:tr h="365760">
-                <a:tc>
-                  <a:txBody>
-                    <a:bodyPr/>
-                    <a:lstStyle/>
-                    <a:p>
-                      <a:r>
-                        <a:rPr sz="1000" b="0">
-                          <a:solidFill>
-                            <a:srgbClr val="1C1C1E"/>
-                          </a:solidFill>
-                          <a:latin typeface="Microsoft YaHei"/>
-                        </a:rPr>
-                        <a:t>客户速率</a:t>
-                      </a:r>
-                    </a:p>
-                  </a:txBody>
-                  <a:tcPr/>
-                </a:tc>
-                <a:tc>
-                  <a:txBody>
-                    <a:bodyPr/>
-                    <a:lstStyle/>
-                    <a:p>
-                      <a:r>
-                        <a:rPr sz="1000" b="0">
-                          <a:solidFill>
-                            <a:srgbClr val="1C1C1E"/>
-                          </a:solidFill>
-                          <a:latin typeface="Microsoft YaHei"/>
-                        </a:rPr>
-                        <a:t>持续缓降</a:t>
-                      </a:r>
-                    </a:p>
-                  </a:txBody>
-                  <a:tcPr/>
-                </a:tc>
-                <a:tc>
-                  <a:txBody>
-                    <a:bodyPr/>
-                    <a:lstStyle/>
-                    <a:p>
-                      <a:r>
-                        <a:rPr sz="1000" b="0">
-                          <a:solidFill>
-                            <a:srgbClr val="1C1C1E"/>
-                          </a:solidFill>
-                          <a:latin typeface="Microsoft YaHei"/>
-                        </a:rPr>
-                        <a:t>burst 时骤降（下节量化）</a:t>
-                      </a:r>
-                    </a:p>
-                  </a:txBody>
-                  <a:tcPr/>
-                </a:tc>
-              </a:tr>
-            </a:tbl>
-          </a:graphicData>
-        </a:graphic>
-      </p:graphicFrame>
+      <p:pic>
+        <p:nvPicPr>
+          <p:cNvPr id="4" name="Picture 3" descr="fig15_phys_sync.png"/>
+          <p:cNvPicPr>
+            <a:picLocks noChangeAspect="1"/>
+          </p:cNvPicPr>
+          <p:nvPr/>
+        </p:nvPicPr>
+        <p:blipFill>
+          <a:blip r:embed="rId2"/>
+          <a:stretch>
+            <a:fillRect/>
+          </a:stretch>
+        </p:blipFill>
+        <p:spPr>
+          <a:xfrm>
+            <a:off x="1737360" y="960120"/>
+            <a:ext cx="8686800" cy="2842953"/>
+          </a:xfrm>
+          <a:prstGeom prst="rect">
+            <a:avLst/>
+          </a:prstGeom>
+        </p:spPr>
+      </p:pic>
+      <p:sp>
+        <p:nvSpPr>
+          <p:cNvPr id="5" name="TextBox 4"/>
+          <p:cNvSpPr txBox="1"/>
+          <p:nvPr/>
+        </p:nvSpPr>
+        <p:spPr>
+          <a:xfrm>
+            <a:off x="914400" y="3843073"/>
+            <a:ext cx="10332720" cy="548640"/>
+          </a:xfrm>
+          <a:prstGeom prst="rect">
+            <a:avLst/>
+          </a:prstGeom>
+          <a:noFill/>
+        </p:spPr>
+        <p:txBody>
+          <a:bodyPr wrap="none">
+            <a:spAutoFit/>
+          </a:bodyPr>
+          <a:lstStyle/>
+          <a:p>
+            <a:pPr algn="ctr"/>
+            <a:r>
+              <a:rPr sz="1100" b="0">
+                <a:solidFill>
+                  <a:srgbClr val="5A6472"/>
+                </a:solidFill>
+                <a:latin typeface="Microsoft YaHei"/>
+              </a:rPr>
+              <a:t>图 15 物理机 64 客户：同步 vs 随机（时间线 + 3 轮簇间隔复现）</a:t>
+            </a:r>
+          </a:p>
+        </p:txBody>
+      </p:sp>
     </p:spTree>
   </p:cSld>
   <p:clrMapOvr>
@@ -8847,67 +8627,269 @@
           </a:p>
         </p:txBody>
       </p:sp>
-      <p:sp>
-        <p:nvSpPr>
-          <p:cNvPr id="4" name="TextBox 3"/>
-          <p:cNvSpPr txBox="1"/>
-          <p:nvPr/>
-        </p:nvSpPr>
-        <p:spPr>
-          <a:xfrm>
-            <a:off x="502920" y="914400"/>
-            <a:ext cx="11155680" cy="5486400"/>
-          </a:xfrm>
-          <a:prstGeom prst="rect">
-            <a:avLst/>
-          </a:prstGeom>
-          <a:noFill/>
-        </p:spPr>
-        <p:txBody>
-          <a:bodyPr wrap="square">
-            <a:spAutoFit/>
-          </a:bodyPr>
-          <a:lstStyle/>
-          <a:p>
-            <a:pPr>
-              <a:lnSpc>
-                <a:spcPct val="108000"/>
-              </a:lnSpc>
-              <a:spcAft>
-                <a:spcPts val="400"/>
-              </a:spcAft>
-            </a:pPr>
-            <a:r>
-              <a:rPr sz="1250" b="0">
-                <a:solidFill>
-                  <a:srgbClr val="1C1C1E"/>
-                </a:solidFill>
-                <a:latin typeface="Microsoft YaHei"/>
-              </a:rPr>
-              <a:t>复现（图 15 右）： 随机/对齐各重复 3 轮（r1–r3）。对齐组 3 轮共 5 个热点簇间隔全部精确命中 60 s；随机组的簇间隔在 20–40 s 间散落、无固定节拍。两种相位的"伤害签名"（周期尖峰 vs 基线抬高）在重复轮中稳定复现。</a:t>
-            </a:r>
-          </a:p>
-          <a:p>
-            <a:pPr>
-              <a:lnSpc>
-                <a:spcPct val="108000"/>
-              </a:lnSpc>
-              <a:spcAft>
-                <a:spcPts val="400"/>
-              </a:spcAft>
-            </a:pPr>
-            <a:r>
-              <a:rPr sz="1250" b="0">
-                <a:solidFill>
-                  <a:srgbClr val="1C1C1E"/>
-                </a:solidFill>
-                <a:latin typeface="Microsoft YaHei"/>
-              </a:rPr>
-              <a:t>读法。 两种相位伤害形态不同：同步的伤害是可预测的周期尖峰（每个 60 s 工作窗内全组同时争抢），随机的伤害是把基线持续抬高。这修正了第 4.2 节的表述（尖峰是同步的特征签名，而非"同步更差"的单调排序），也为"时间对齐准入"提供了动机：周期结构可以被测量、被利用（避峰）或被治理（错峰），而随机结构只能靠裕量。</a:t>
-            </a:r>
-          </a:p>
-        </p:txBody>
-      </p:sp>
+      <p:graphicFrame>
+        <p:nvGraphicFramePr>
+          <p:cNvPr id="4" name="Table 3"/>
+          <p:cNvGraphicFramePr>
+            <a:graphicFrameLocks noGrp="1"/>
+          </p:cNvGraphicFramePr>
+          <p:nvPr/>
+        </p:nvGraphicFramePr>
+        <p:xfrm>
+          <a:off x="502920" y="960120"/>
+          <a:ext cx="11155680" cy="1463040"/>
+        </p:xfrm>
+        <a:graphic>
+          <a:graphicData uri="http://schemas.openxmlformats.org/drawingml/2006/table">
+            <a:tbl>
+              <a:tblPr firstRow="1" bandRow="1">
+                <a:tableStyleId>{5C22544A-7EE6-4342-B048-85BDC9FD1C3A}</a:tableStyleId>
+              </a:tblPr>
+              <a:tblGrid>
+                <a:gridCol w="3718560"/>
+                <a:gridCol w="3718560"/>
+                <a:gridCol w="3718560"/>
+              </a:tblGrid>
+              <a:tr h="365760">
+                <a:tc>
+                  <a:txBody>
+                    <a:bodyPr/>
+                    <a:lstStyle/>
+                    <a:p>
+                      <a:r>
+                        <a:rPr sz="1050" b="1">
+                          <a:solidFill>
+                            <a:srgbClr val="FFFFFF"/>
+                          </a:solidFill>
+                          <a:latin typeface="Microsoft YaHei"/>
+                        </a:rPr>
+                        <a:t>指标</a:t>
+                      </a:r>
+                    </a:p>
+                  </a:txBody>
+                  <a:tcPr>
+                    <a:solidFill>
+                      <a:srgbClr val="123A63"/>
+                    </a:solidFill>
+                  </a:tcPr>
+                </a:tc>
+                <a:tc>
+                  <a:txBody>
+                    <a:bodyPr/>
+                    <a:lstStyle/>
+                    <a:p>
+                      <a:r>
+                        <a:rPr sz="1050" b="1">
+                          <a:solidFill>
+                            <a:srgbClr val="FFFFFF"/>
+                          </a:solidFill>
+                          <a:latin typeface="Microsoft YaHei"/>
+                        </a:rPr>
+                        <a:t>随机相位</a:t>
+                      </a:r>
+                    </a:p>
+                  </a:txBody>
+                  <a:tcPr>
+                    <a:solidFill>
+                      <a:srgbClr val="123A63"/>
+                    </a:solidFill>
+                  </a:tcPr>
+                </a:tc>
+                <a:tc>
+                  <a:txBody>
+                    <a:bodyPr/>
+                    <a:lstStyle/>
+                    <a:p>
+                      <a:r>
+                        <a:rPr sz="1050" b="1">
+                          <a:solidFill>
+                            <a:srgbClr val="FFFFFF"/>
+                          </a:solidFill>
+                          <a:latin typeface="Microsoft YaHei"/>
+                        </a:rPr>
+                        <a:t>对齐相位</a:t>
+                      </a:r>
+                    </a:p>
+                  </a:txBody>
+                  <a:tcPr>
+                    <a:solidFill>
+                      <a:srgbClr val="123A63"/>
+                    </a:solidFill>
+                  </a:tcPr>
+                </a:tc>
+              </a:tr>
+              <a:tr h="365760">
+                <a:tc>
+                  <a:txBody>
+                    <a:bodyPr/>
+                    <a:lstStyle/>
+                    <a:p>
+                      <a:r>
+                        <a:rPr sz="1000" b="0">
+                          <a:solidFill>
+                            <a:srgbClr val="1C1C1E"/>
+                          </a:solidFill>
+                          <a:latin typeface="Microsoft YaHei"/>
+                        </a:rPr>
+                        <a:t>服务 P99</a:t>
+                      </a:r>
+                    </a:p>
+                  </a:txBody>
+                  <a:tcPr/>
+                </a:tc>
+                <a:tc>
+                  <a:txBody>
+                    <a:bodyPr/>
+                    <a:lstStyle/>
+                    <a:p>
+                      <a:r>
+                        <a:rPr sz="1000" b="0">
+                          <a:solidFill>
+                            <a:srgbClr val="1C1C1E"/>
+                          </a:solidFill>
+                          <a:latin typeface="Microsoft YaHei"/>
+                        </a:rPr>
+                        <a:t>8.8 ms</a:t>
+                      </a:r>
+                    </a:p>
+                  </a:txBody>
+                  <a:tcPr/>
+                </a:tc>
+                <a:tc>
+                  <a:txBody>
+                    <a:bodyPr/>
+                    <a:lstStyle/>
+                    <a:p>
+                      <a:r>
+                        <a:rPr sz="1000" b="0">
+                          <a:solidFill>
+                            <a:srgbClr val="1C1C1E"/>
+                          </a:solidFill>
+                          <a:latin typeface="Microsoft YaHei"/>
+                        </a:rPr>
+                        <a:t>3.6 ms（均值口径）</a:t>
+                      </a:r>
+                    </a:p>
+                  </a:txBody>
+                  <a:tcPr/>
+                </a:tc>
+              </a:tr>
+              <a:tr h="365760">
+                <a:tc>
+                  <a:txBody>
+                    <a:bodyPr/>
+                    <a:lstStyle/>
+                    <a:p>
+                      <a:r>
+                        <a:rPr sz="1000" b="0">
+                          <a:solidFill>
+                            <a:srgbClr val="1C1C1E"/>
+                          </a:solidFill>
+                          <a:latin typeface="Microsoft YaHei"/>
+                        </a:rPr>
+                        <a:t>热点时间形态</a:t>
+                      </a:r>
+                    </a:p>
+                  </a:txBody>
+                  <a:tcPr/>
+                </a:tc>
+                <a:tc>
+                  <a:txBody>
+                    <a:bodyPr/>
+                    <a:lstStyle/>
+                    <a:p>
+                      <a:r>
+                        <a:rPr sz="1000" b="0">
+                          <a:solidFill>
+                            <a:srgbClr val="1C1C1E"/>
+                          </a:solidFill>
+                          <a:latin typeface="Microsoft YaHei"/>
+                        </a:rPr>
+                        <a:t>散点（间隔 20–40 s 混杂）</a:t>
+                      </a:r>
+                    </a:p>
+                  </a:txBody>
+                  <a:tcPr/>
+                </a:tc>
+                <a:tc>
+                  <a:txBody>
+                    <a:bodyPr/>
+                    <a:lstStyle/>
+                    <a:p>
+                      <a:r>
+                        <a:rPr sz="1000" b="0">
+                          <a:solidFill>
+                            <a:srgbClr val="1C1C1E"/>
+                          </a:solidFill>
+                          <a:latin typeface="Microsoft YaHei"/>
+                        </a:rPr>
+                        <a:t>严格 60 s 周期</a:t>
+                      </a:r>
+                    </a:p>
+                  </a:txBody>
+                  <a:tcPr/>
+                </a:tc>
+              </a:tr>
+              <a:tr h="365760">
+                <a:tc>
+                  <a:txBody>
+                    <a:bodyPr/>
+                    <a:lstStyle/>
+                    <a:p>
+                      <a:r>
+                        <a:rPr sz="1000" b="0">
+                          <a:solidFill>
+                            <a:srgbClr val="1C1C1E"/>
+                          </a:solidFill>
+                          <a:latin typeface="Microsoft YaHei"/>
+                        </a:rPr>
+                        <a:t>客户速率</a:t>
+                      </a:r>
+                    </a:p>
+                  </a:txBody>
+                  <a:tcPr/>
+                </a:tc>
+                <a:tc>
+                  <a:txBody>
+                    <a:bodyPr/>
+                    <a:lstStyle/>
+                    <a:p>
+                      <a:r>
+                        <a:rPr sz="1000" b="0">
+                          <a:solidFill>
+                            <a:srgbClr val="1C1C1E"/>
+                          </a:solidFill>
+                          <a:latin typeface="Microsoft YaHei"/>
+                        </a:rPr>
+                        <a:t>持续缓降</a:t>
+                      </a:r>
+                    </a:p>
+                  </a:txBody>
+                  <a:tcPr/>
+                </a:tc>
+                <a:tc>
+                  <a:txBody>
+                    <a:bodyPr/>
+                    <a:lstStyle/>
+                    <a:p>
+                      <a:r>
+                        <a:rPr sz="1000" b="0">
+                          <a:solidFill>
+                            <a:srgbClr val="1C1C1E"/>
+                          </a:solidFill>
+                          <a:latin typeface="Microsoft YaHei"/>
+                        </a:rPr>
+                        <a:t>burst 时骤降（下节量化）</a:t>
+                      </a:r>
+                    </a:p>
+                  </a:txBody>
+                  <a:tcPr/>
+                </a:tc>
+              </a:tr>
+            </a:tbl>
+          </a:graphicData>
+        </a:graphic>
+      </p:graphicFrame>
     </p:spTree>
   </p:cSld>
   <p:clrMapOvr>
@@ -9027,7 +9009,7 @@
                 </a:solidFill>
                 <a:latin typeface="Microsoft YaHei"/>
               </a:rPr>
-              <a:t>8.4 安全售卖容量（图 16，核心结果）</a:t>
+              <a:t>8.3 相位结构：同步 vs 随机（图 15）</a:t>
             </a:r>
           </a:p>
         </p:txBody>
@@ -9069,7 +9051,7 @@
                 </a:solidFill>
                 <a:latin typeface="Microsoft YaHei"/>
               </a:rPr>
-              <a:t>安全定义（事前统一口径，全部章节适用）。 容量声明一律三元组 （资源、质量约束、风险预算 ε）：（i）服务侧：以 W∈[30,120] s 为窗口，违约 = 窗口内 P99 &gt; 10 ms 或 超时/错误 &gt; 0（失败不豁免）；声明形如"违约窗率 ≤ ε"并附独立轮数与 Clopper–Pearson 上界（5.3.2）；（ii）客户侧：主口径 = 客户工作速率 P5 ≥ 70% 独享基准（低尾分位，非"最差十分位"）；（iii）容量 oracle：在（i）（ii）两约束下、按给定 ε 判定的最大档位——拐点（均值断崖）、零违约容量（ε=0）与风险预算容量（ε&gt;0）是三个不同概念，正文每次引用必须标明属于哪一种（例：4.1b 的"3 台"是拐点前档与 ε≈7% 预算档；ε=0 时为 2 台）。超时与错误一律计入违约（不因剔除而美化成功请求 P99）。</a:t>
+              <a:t>复现（图 15 右）： 随机/对齐各重复 3 轮（r1–r3）。对齐组 3 轮共 5 个热点簇间隔全部精确命中 60 s；随机组的簇间隔在 20–40 s 间散落、无固定节拍。两种相位的"伤害签名"（周期尖峰 vs 基线抬高）在重复轮中稳定复现。</a:t>
             </a:r>
           </a:p>
           <a:p>
@@ -9088,102 +9070,7 @@
                 </a:solidFill>
                 <a:latin typeface="Microsoft YaHei"/>
               </a:rPr>
-              <a:t>问题。 8 核租户池、服务隔离在外，在"服务 P99 ≤ 10 ms 且客户体验不劣化"的双约束下，能卖多少台 1-vCPU VPS？</a:t>
-            </a:r>
-          </a:p>
-          <a:p>
-            <a:pPr>
-              <a:lnSpc>
-                <a:spcPct val="108000"/>
-              </a:lnSpc>
-              <a:spcAft>
-                <a:spcPts val="400"/>
-              </a:spcAft>
-            </a:pPr>
-            <a:r>
-              <a:rPr sz="1250" b="0">
-                <a:solidFill>
-                  <a:srgbClr val="1C1C1E"/>
-                </a:solidFill>
-                <a:latin typeface="Microsoft YaHei"/>
-              </a:rPr>
-              <a:t>质量口径（事前声明，防事后挑选）。 主口径 = 服务 P99 ≤ 10 ms 且客户工作速率 P5 ≥ 70% 独享基准（即：低尾——分布第 5 百分位处的客户仍保有 ≥70% 性能；注意 P5 是低尾分位，不是"最差十分位"）；另报敏感性口径 P5 ≥ 90%／P5 ≥ 50%／中位 P50 ≥ 90%，全部在同一份数据上事先并列报告。统计口径：先按客户级/轮级聚合再估计分位（不把逐客户逐时间样本当独立重复），轮级不确定性以轮为单位重采样。</a:t>
-            </a:r>
-          </a:p>
-          <a:p>
-            <a:pPr>
-              <a:lnSpc>
-                <a:spcPct val="108000"/>
-              </a:lnSpc>
-              <a:spcAft>
-                <a:spcPts val="400"/>
-              </a:spcAft>
-            </a:pPr>
-            <a:r>
-              <a:rPr sz="1250" b="0">
-                <a:solidFill>
-                  <a:srgbClr val="1C1C1E"/>
-                </a:solidFill>
-                <a:latin typeface="Microsoft YaHei"/>
-              </a:rPr>
-              <a:t>方法。 阶梯式加售：L8→L64（随机相位组）/ L4→L32（同步组），每档稳定后采集 60 s：池忙率（每 2 s）、逐客户忙循环速率（每 10 s）、双服务探针。客户速率以独享单核基准（25.9 M it/s）归一；随机组 2 轮合并（r1+r2，逐客户样本 n=13–117），同步组 1 轮。</a:t>
-            </a:r>
-          </a:p>
-          <a:p>
-            <a:pPr>
-              <a:lnSpc>
-                <a:spcPct val="108000"/>
-              </a:lnSpc>
-              <a:spcAft>
-                <a:spcPts val="400"/>
-              </a:spcAft>
-            </a:pPr>
-            <a:r>
-              <a:rPr sz="1250" b="0">
-                <a:solidFill>
-                  <a:srgbClr val="1C1C1E"/>
-                </a:solidFill>
-                <a:latin typeface="Microsoft YaHei"/>
-              </a:rPr>
-              <a:t>结果（图 16 左：客户体验；右：服务侧）。</a:t>
-            </a:r>
-          </a:p>
-          <a:p>
-            <a:pPr lvl="1">
-              <a:lnSpc>
-                <a:spcPct val="108000"/>
-              </a:lnSpc>
-              <a:spcAft>
-                <a:spcPts val="400"/>
-              </a:spcAft>
-            </a:pPr>
-            <a:r>
-              <a:rPr sz="1200" b="0">
-                <a:solidFill>
-                  <a:srgbClr val="1C1C1E"/>
-                </a:solidFill>
-                <a:latin typeface="Microsoft YaHei"/>
-              </a:rPr>
-              <a:t>• 服务侧（右）：两组、全部档位 P99 0.56–0.78 ms——隔离包络下，"卖到 8× 超售"服务依然零伤。</a:t>
-            </a:r>
-          </a:p>
-          <a:p>
-            <a:pPr lvl="1">
-              <a:lnSpc>
-                <a:spcPct val="108000"/>
-              </a:lnSpc>
-              <a:spcAft>
-                <a:spcPts val="400"/>
-              </a:spcAft>
-            </a:pPr>
-            <a:r>
-              <a:rPr sz="1200" b="0">
-                <a:solidFill>
-                  <a:srgbClr val="1C1C1E"/>
-                </a:solidFill>
-                <a:latin typeface="Microsoft YaHei"/>
-              </a:rPr>
-              <a:t>• 客户侧（左）：同负载（人均 20%）、同池子，安全容量随质量口径在 3–7× 区间移动：</a:t>
+              <a:t>读法。 两种相位伤害形态不同：同步的伤害是可预测的周期尖峰（每个 60 s 工作窗内全组同时争抢），随机的伤害是把基线持续抬高。这修正了第 4.2 节的表述（尖峰是同步的特征签名，而非"同步更差"的单调排序），也为"时间对齐准入"提供了动机：周期结构可以被测量、被利用（避峰）或被治理（错峰），而随机结构只能靠裕量。</a:t>
             </a:r>
           </a:p>
         </p:txBody>
@@ -9296,7 +9183,7 @@
                 </a:solidFill>
                 <a:latin typeface="Microsoft YaHei"/>
               </a:rPr>
-              <a:t>图</a:t>
+              <a:t>8 物理机验证与安全容量模型</a:t>
             </a:r>
           </a:p>
           <a:p>
@@ -9312,40 +9199,16 @@
           </a:p>
         </p:txBody>
       </p:sp>
-      <p:pic>
-        <p:nvPicPr>
-          <p:cNvPr id="4" name="Picture 3" descr="fig16_phys_sell.png"/>
-          <p:cNvPicPr>
-            <a:picLocks noChangeAspect="1"/>
-          </p:cNvPicPr>
-          <p:nvPr/>
-        </p:nvPicPr>
-        <p:blipFill>
-          <a:blip r:embed="rId2"/>
-          <a:stretch>
-            <a:fillRect/>
-          </a:stretch>
-        </p:blipFill>
-        <p:spPr>
-          <a:xfrm>
-            <a:off x="1737360" y="960120"/>
-            <a:ext cx="8686800" cy="3226526"/>
-          </a:xfrm>
-          <a:prstGeom prst="rect">
-            <a:avLst/>
-          </a:prstGeom>
-        </p:spPr>
-      </p:pic>
-      <p:sp>
-        <p:nvSpPr>
-          <p:cNvPr id="5" name="TextBox 4"/>
+      <p:sp>
+        <p:nvSpPr>
+          <p:cNvPr id="4" name="TextBox 3"/>
           <p:cNvSpPr txBox="1"/>
           <p:nvPr/>
         </p:nvSpPr>
         <p:spPr>
           <a:xfrm>
-            <a:off x="914400" y="4226646"/>
-            <a:ext cx="10332720" cy="548640"/>
+            <a:off x="502920" y="914400"/>
+            <a:ext cx="11155680" cy="5486400"/>
           </a:xfrm>
           <a:prstGeom prst="rect">
             <a:avLst/>
@@ -9353,20 +9216,141 @@
           <a:noFill/>
         </p:spPr>
         <p:txBody>
-          <a:bodyPr wrap="none">
+          <a:bodyPr wrap="square">
             <a:spAutoFit/>
           </a:bodyPr>
           <a:lstStyle/>
           <a:p>
-            <a:pPr algn="ctr"/>
-            <a:r>
-              <a:rPr sz="1100" b="0">
-                <a:solidFill>
-                  <a:srgbClr val="5A6472"/>
-                </a:solidFill>
-                <a:latin typeface="Microsoft YaHei"/>
-              </a:rPr>
-              <a:t>图 16 物理机售卖容量：客户体验与服务侧</a:t>
+            <a:pPr>
+              <a:lnSpc>
+                <a:spcPct val="108000"/>
+              </a:lnSpc>
+              <a:spcAft>
+                <a:spcPts val="400"/>
+              </a:spcAft>
+            </a:pPr>
+            <a:r>
+              <a:rPr sz="1250" b="0">
+                <a:solidFill>
+                  <a:srgbClr val="1C1C1E"/>
+                </a:solidFill>
+                <a:latin typeface="Microsoft YaHei"/>
+              </a:rPr>
+              <a:t>安全定义（事前统一口径，全部章节适用）。 容量声明一律三元组 （资源、质量约束、风险预算 ε）：（i）服务侧：以 W∈[30,120] s 为窗口，违约 = 窗口内 P99 &gt; 10 ms 或 超时/错误 &gt; 0（失败不豁免）；声明形如"违约窗率 ≤ ε"并附独立轮数与 Clopper–Pearson 上界（5.3.2）；（ii）客户侧：主口径 = 客户工作速率 P5 ≥ 70% 独享基准（低尾分位，非"最差十分位"）；（iii）容量 oracle：在（i）（ii）两约束下、按给定 ε 判定的最大档位——拐点（均值断崖）、零违约容量（ε=0）与风险预算容量（ε&gt;0）是三个不同概念，正文每次引用必须标明属于哪一种（例：4.1b 的"3 台"是拐点前档与 ε≈7% 预算档；ε=0 时为 2 台）。超时与错误一律计入违约（不因剔除而美化成功请求 P99）。</a:t>
+            </a:r>
+          </a:p>
+          <a:p>
+            <a:pPr>
+              <a:lnSpc>
+                <a:spcPct val="108000"/>
+              </a:lnSpc>
+              <a:spcAft>
+                <a:spcPts val="400"/>
+              </a:spcAft>
+            </a:pPr>
+            <a:r>
+              <a:rPr sz="1250" b="0">
+                <a:solidFill>
+                  <a:srgbClr val="1C1C1E"/>
+                </a:solidFill>
+                <a:latin typeface="Microsoft YaHei"/>
+              </a:rPr>
+              <a:t>问题。 8 核租户池、服务隔离在外，在"服务 P99 ≤ 10 ms 且客户体验不劣化"的双约束下，能卖多少台 1-vCPU VPS？</a:t>
+            </a:r>
+          </a:p>
+          <a:p>
+            <a:pPr>
+              <a:lnSpc>
+                <a:spcPct val="108000"/>
+              </a:lnSpc>
+              <a:spcAft>
+                <a:spcPts val="400"/>
+              </a:spcAft>
+            </a:pPr>
+            <a:r>
+              <a:rPr sz="1250" b="0">
+                <a:solidFill>
+                  <a:srgbClr val="1C1C1E"/>
+                </a:solidFill>
+                <a:latin typeface="Microsoft YaHei"/>
+              </a:rPr>
+              <a:t>质量口径（事前声明，防事后挑选）。 主口径 = 服务 P99 ≤ 10 ms 且客户工作速率 P5 ≥ 70% 独享基准（即：低尾——分布第 5 百分位处的客户仍保有 ≥70% 性能；注意 P5 是低尾分位，不是"最差十分位"）；另报敏感性口径 P5 ≥ 90%／P5 ≥ 50%／中位 P50 ≥ 90%，全部在同一份数据上事先并列报告。统计口径：先按客户级/轮级聚合再估计分位（不把逐客户逐时间样本当独立重复），轮级不确定性以轮为单位重采样。</a:t>
+            </a:r>
+          </a:p>
+          <a:p>
+            <a:pPr>
+              <a:lnSpc>
+                <a:spcPct val="108000"/>
+              </a:lnSpc>
+              <a:spcAft>
+                <a:spcPts val="400"/>
+              </a:spcAft>
+            </a:pPr>
+            <a:r>
+              <a:rPr sz="1250" b="0">
+                <a:solidFill>
+                  <a:srgbClr val="1C1C1E"/>
+                </a:solidFill>
+                <a:latin typeface="Microsoft YaHei"/>
+              </a:rPr>
+              <a:t>方法。 阶梯式加售：L8→L64（随机相位组）/ L4→L32（同步组），每档稳定后采集 60 s：池忙率（每 2 s）、逐客户忙循环速率（每 10 s）、双服务探针。客户速率以独享单核基准（25.9 M it/s）归一；随机组 2 轮合并（r1+r2，逐客户样本 n=13–117），同步组 1 轮。</a:t>
+            </a:r>
+          </a:p>
+          <a:p>
+            <a:pPr>
+              <a:lnSpc>
+                <a:spcPct val="108000"/>
+              </a:lnSpc>
+              <a:spcAft>
+                <a:spcPts val="400"/>
+              </a:spcAft>
+            </a:pPr>
+            <a:r>
+              <a:rPr sz="1250" b="0">
+                <a:solidFill>
+                  <a:srgbClr val="1C1C1E"/>
+                </a:solidFill>
+                <a:latin typeface="Microsoft YaHei"/>
+              </a:rPr>
+              <a:t>结果（图 16 左：客户体验；右：服务侧）。</a:t>
+            </a:r>
+          </a:p>
+          <a:p>
+            <a:pPr lvl="1">
+              <a:lnSpc>
+                <a:spcPct val="108000"/>
+              </a:lnSpc>
+              <a:spcAft>
+                <a:spcPts val="400"/>
+              </a:spcAft>
+            </a:pPr>
+            <a:r>
+              <a:rPr sz="1200" b="0">
+                <a:solidFill>
+                  <a:srgbClr val="1C1C1E"/>
+                </a:solidFill>
+                <a:latin typeface="Microsoft YaHei"/>
+              </a:rPr>
+              <a:t>• 服务侧（右）：两组、全部档位 P99 0.56–0.78 ms——隔离包络下，"卖到 8× 超售"服务依然零伤。</a:t>
+            </a:r>
+          </a:p>
+          <a:p>
+            <a:pPr lvl="1">
+              <a:lnSpc>
+                <a:spcPct val="108000"/>
+              </a:lnSpc>
+              <a:spcAft>
+                <a:spcPts val="400"/>
+              </a:spcAft>
+            </a:pPr>
+            <a:r>
+              <a:rPr sz="1200" b="0">
+                <a:solidFill>
+                  <a:srgbClr val="1C1C1E"/>
+                </a:solidFill>
+                <a:latin typeface="Microsoft YaHei"/>
+              </a:rPr>
+              <a:t>• 客户侧（左）：同负载（人均 20%）、同池子，安全容量随质量口径在 3–7× 区间移动：</a:t>
             </a:r>
           </a:p>
         </p:txBody>
@@ -9479,6 +9463,189 @@
                 </a:solidFill>
                 <a:latin typeface="Microsoft YaHei"/>
               </a:rPr>
+              <a:t>图</a:t>
+            </a:r>
+          </a:p>
+          <a:p>
+            <a:r>
+              <a:rPr sz="1200">
+                <a:solidFill>
+                  <a:srgbClr val="D8E2F0"/>
+                </a:solidFill>
+                <a:latin typeface="Microsoft YaHei"/>
+              </a:rPr>
+              <a:t>8.4 安全售卖容量（图 16，核心结果）</a:t>
+            </a:r>
+          </a:p>
+        </p:txBody>
+      </p:sp>
+      <p:pic>
+        <p:nvPicPr>
+          <p:cNvPr id="4" name="Picture 3" descr="fig16_phys_sell.png"/>
+          <p:cNvPicPr>
+            <a:picLocks noChangeAspect="1"/>
+          </p:cNvPicPr>
+          <p:nvPr/>
+        </p:nvPicPr>
+        <p:blipFill>
+          <a:blip r:embed="rId2"/>
+          <a:stretch>
+            <a:fillRect/>
+          </a:stretch>
+        </p:blipFill>
+        <p:spPr>
+          <a:xfrm>
+            <a:off x="1737360" y="960120"/>
+            <a:ext cx="8686800" cy="3226526"/>
+          </a:xfrm>
+          <a:prstGeom prst="rect">
+            <a:avLst/>
+          </a:prstGeom>
+        </p:spPr>
+      </p:pic>
+      <p:sp>
+        <p:nvSpPr>
+          <p:cNvPr id="5" name="TextBox 4"/>
+          <p:cNvSpPr txBox="1"/>
+          <p:nvPr/>
+        </p:nvSpPr>
+        <p:spPr>
+          <a:xfrm>
+            <a:off x="914400" y="4226646"/>
+            <a:ext cx="10332720" cy="548640"/>
+          </a:xfrm>
+          <a:prstGeom prst="rect">
+            <a:avLst/>
+          </a:prstGeom>
+          <a:noFill/>
+        </p:spPr>
+        <p:txBody>
+          <a:bodyPr wrap="none">
+            <a:spAutoFit/>
+          </a:bodyPr>
+          <a:lstStyle/>
+          <a:p>
+            <a:pPr algn="ctr"/>
+            <a:r>
+              <a:rPr sz="1100" b="0">
+                <a:solidFill>
+                  <a:srgbClr val="5A6472"/>
+                </a:solidFill>
+                <a:latin typeface="Microsoft YaHei"/>
+              </a:rPr>
+              <a:t>图 16 物理机售卖容量：客户体验与服务侧</a:t>
+            </a:r>
+          </a:p>
+        </p:txBody>
+      </p:sp>
+    </p:spTree>
+  </p:cSld>
+  <p:clrMapOvr>
+    <a:masterClrMapping/>
+  </p:clrMapOvr>
+</p:sld>
+</file>
+
+<file path=ppt/slides/slide125.xml><?xml version="1.0" encoding="utf-8"?>
+<p:sld xmlns:a="http://schemas.openxmlformats.org/drawingml/2006/main" xmlns:p="http://schemas.openxmlformats.org/presentationml/2006/main" xmlns:r="http://schemas.openxmlformats.org/officeDocument/2006/relationships">
+  <p:cSld>
+    <p:spTree>
+      <p:nvGrpSpPr>
+        <p:cNvPr id="1" name=""/>
+        <p:cNvGrpSpPr/>
+        <p:nvPr/>
+      </p:nvGrpSpPr>
+      <p:grpSpPr/>
+      <p:sp>
+        <p:nvSpPr>
+          <p:cNvPr id="2" name="Rectangle 1"/>
+          <p:cNvSpPr/>
+          <p:nvPr/>
+        </p:nvSpPr>
+        <p:spPr>
+          <a:xfrm>
+            <a:off x="0" y="0"/>
+            <a:ext cx="12191695" cy="6858000"/>
+          </a:xfrm>
+          <a:prstGeom prst="rect">
+            <a:avLst/>
+          </a:prstGeom>
+          <a:solidFill>
+            <a:srgbClr val="FFFFFF"/>
+          </a:solidFill>
+          <a:ln>
+            <a:noFill/>
+          </a:ln>
+        </p:spPr>
+        <p:style>
+          <a:lnRef idx="1">
+            <a:schemeClr val="accent1"/>
+          </a:lnRef>
+          <a:fillRef idx="3">
+            <a:schemeClr val="accent1"/>
+          </a:fillRef>
+          <a:effectRef idx="2">
+            <a:schemeClr val="accent1"/>
+          </a:effectRef>
+          <a:fontRef idx="minor">
+            <a:schemeClr val="lt1"/>
+          </a:fontRef>
+        </p:style>
+        <p:txBody>
+          <a:bodyPr rtlCol="0" anchor="ctr"/>
+          <a:lstStyle/>
+          <a:p>
+            <a:pPr algn="ctr"/>
+          </a:p>
+        </p:txBody>
+      </p:sp>
+      <p:sp>
+        <p:nvSpPr>
+          <p:cNvPr id="3" name="Rectangle 2"/>
+          <p:cNvSpPr/>
+          <p:nvPr/>
+        </p:nvSpPr>
+        <p:spPr>
+          <a:xfrm>
+            <a:off x="0" y="0"/>
+            <a:ext cx="12191695" cy="777240"/>
+          </a:xfrm>
+          <a:prstGeom prst="rect">
+            <a:avLst/>
+          </a:prstGeom>
+          <a:solidFill>
+            <a:srgbClr val="123A63"/>
+          </a:solidFill>
+          <a:ln>
+            <a:noFill/>
+          </a:ln>
+        </p:spPr>
+        <p:style>
+          <a:lnRef idx="1">
+            <a:schemeClr val="accent1"/>
+          </a:lnRef>
+          <a:fillRef idx="3">
+            <a:schemeClr val="accent1"/>
+          </a:fillRef>
+          <a:effectRef idx="2">
+            <a:schemeClr val="accent1"/>
+          </a:effectRef>
+          <a:fontRef idx="minor">
+            <a:schemeClr val="lt1"/>
+          </a:fontRef>
+        </p:style>
+        <p:txBody>
+          <a:bodyPr rtlCol="0" anchor="ctr" lIns="411480" tIns="54864"/>
+          <a:lstStyle/>
+          <a:p>
+            <a:pPr algn="ctr"/>
+            <a:r>
+              <a:rPr sz="2100" b="1">
+                <a:solidFill>
+                  <a:srgbClr val="FFFFFF"/>
+                </a:solidFill>
+                <a:latin typeface="Microsoft YaHei"/>
+              </a:rPr>
               <a:t>8 物理机验证与安全容量模型</a:t>
             </a:r>
           </a:p>
@@ -9917,343 +10084,6 @@
 </p:sld>
 </file>
 
-<file path=ppt/slides/slide125.xml><?xml version="1.0" encoding="utf-8"?>
-<p:sld xmlns:a="http://schemas.openxmlformats.org/drawingml/2006/main" xmlns:p="http://schemas.openxmlformats.org/presentationml/2006/main" xmlns:r="http://schemas.openxmlformats.org/officeDocument/2006/relationships">
-  <p:cSld>
-    <p:spTree>
-      <p:nvGrpSpPr>
-        <p:cNvPr id="1" name=""/>
-        <p:cNvGrpSpPr/>
-        <p:nvPr/>
-      </p:nvGrpSpPr>
-      <p:grpSpPr/>
-      <p:sp>
-        <p:nvSpPr>
-          <p:cNvPr id="2" name="Rectangle 1"/>
-          <p:cNvSpPr/>
-          <p:nvPr/>
-        </p:nvSpPr>
-        <p:spPr>
-          <a:xfrm>
-            <a:off x="0" y="0"/>
-            <a:ext cx="12191695" cy="6858000"/>
-          </a:xfrm>
-          <a:prstGeom prst="rect">
-            <a:avLst/>
-          </a:prstGeom>
-          <a:solidFill>
-            <a:srgbClr val="FFFFFF"/>
-          </a:solidFill>
-          <a:ln>
-            <a:noFill/>
-          </a:ln>
-        </p:spPr>
-        <p:style>
-          <a:lnRef idx="1">
-            <a:schemeClr val="accent1"/>
-          </a:lnRef>
-          <a:fillRef idx="3">
-            <a:schemeClr val="accent1"/>
-          </a:fillRef>
-          <a:effectRef idx="2">
-            <a:schemeClr val="accent1"/>
-          </a:effectRef>
-          <a:fontRef idx="minor">
-            <a:schemeClr val="lt1"/>
-          </a:fontRef>
-        </p:style>
-        <p:txBody>
-          <a:bodyPr rtlCol="0" anchor="ctr"/>
-          <a:lstStyle/>
-          <a:p>
-            <a:pPr algn="ctr"/>
-          </a:p>
-        </p:txBody>
-      </p:sp>
-      <p:sp>
-        <p:nvSpPr>
-          <p:cNvPr id="3" name="Rectangle 2"/>
-          <p:cNvSpPr/>
-          <p:nvPr/>
-        </p:nvSpPr>
-        <p:spPr>
-          <a:xfrm>
-            <a:off x="0" y="0"/>
-            <a:ext cx="12191695" cy="777240"/>
-          </a:xfrm>
-          <a:prstGeom prst="rect">
-            <a:avLst/>
-          </a:prstGeom>
-          <a:solidFill>
-            <a:srgbClr val="123A63"/>
-          </a:solidFill>
-          <a:ln>
-            <a:noFill/>
-          </a:ln>
-        </p:spPr>
-        <p:style>
-          <a:lnRef idx="1">
-            <a:schemeClr val="accent1"/>
-          </a:lnRef>
-          <a:fillRef idx="3">
-            <a:schemeClr val="accent1"/>
-          </a:fillRef>
-          <a:effectRef idx="2">
-            <a:schemeClr val="accent1"/>
-          </a:effectRef>
-          <a:fontRef idx="minor">
-            <a:schemeClr val="lt1"/>
-          </a:fontRef>
-        </p:style>
-        <p:txBody>
-          <a:bodyPr rtlCol="0" anchor="ctr" lIns="411480" tIns="54864"/>
-          <a:lstStyle/>
-          <a:p>
-            <a:pPr algn="ctr"/>
-            <a:r>
-              <a:rPr sz="2100" b="1">
-                <a:solidFill>
-                  <a:srgbClr val="FFFFFF"/>
-                </a:solidFill>
-                <a:latin typeface="Microsoft YaHei"/>
-              </a:rPr>
-              <a:t>8 物理机验证与安全容量模型</a:t>
-            </a:r>
-          </a:p>
-          <a:p>
-            <a:r>
-              <a:rPr sz="1200">
-                <a:solidFill>
-                  <a:srgbClr val="D8E2F0"/>
-                </a:solidFill>
-                <a:latin typeface="Microsoft YaHei"/>
-              </a:rPr>
-              <a:t>8.4 安全售卖容量（图 16，核心结果）</a:t>
-            </a:r>
-          </a:p>
-        </p:txBody>
-      </p:sp>
-      <p:sp>
-        <p:nvSpPr>
-          <p:cNvPr id="4" name="TextBox 3"/>
-          <p:cNvSpPr txBox="1"/>
-          <p:nvPr/>
-        </p:nvSpPr>
-        <p:spPr>
-          <a:xfrm>
-            <a:off x="502920" y="914400"/>
-            <a:ext cx="11155680" cy="5486400"/>
-          </a:xfrm>
-          <a:prstGeom prst="rect">
-            <a:avLst/>
-          </a:prstGeom>
-          <a:noFill/>
-        </p:spPr>
-        <p:txBody>
-          <a:bodyPr wrap="square">
-            <a:spAutoFit/>
-          </a:bodyPr>
-          <a:lstStyle/>
-          <a:p>
-            <a:pPr>
-              <a:lnSpc>
-                <a:spcPct val="108000"/>
-              </a:lnSpc>
-              <a:spcAft>
-                <a:spcPts val="400"/>
-              </a:spcAft>
-            </a:pPr>
-            <a:r>
-              <a:rPr sz="1250" b="0">
-                <a:solidFill>
-                  <a:srgbClr val="1C1C1E"/>
-                </a:solidFill>
-                <a:latin typeface="Microsoft YaHei"/>
-              </a:rPr>
-              <a:t>（随机组逐档 P5：L16=100%、L24=88%、L32=62%、L40=65%、L48=51%、L56=50%、L64=43%——渐进劣化；同步组 L8=99%、L12=51%、L16=49%——断崖坍塌，各口径下均迅速触底。）</a:t>
-            </a:r>
-          </a:p>
-          <a:p>
-            <a:pPr>
-              <a:lnSpc>
-                <a:spcPct val="108000"/>
-              </a:lnSpc>
-              <a:spcAft>
-                <a:spcPts val="400"/>
-              </a:spcAft>
-            </a:pPr>
-            <a:r>
-              <a:rPr sz="1250" b="0">
-                <a:solidFill>
-                  <a:srgbClr val="1C1C1E"/>
-                </a:solidFill>
-                <a:latin typeface="Microsoft YaHei"/>
-              </a:rPr>
-              <a:t>四条结论。</a:t>
-            </a:r>
-          </a:p>
-          <a:p>
-            <a:pPr lvl="1">
-              <a:lnSpc>
-                <a:spcPct val="108000"/>
-              </a:lnSpc>
-              <a:spcAft>
-                <a:spcPts val="400"/>
-              </a:spcAft>
-            </a:pPr>
-            <a:r>
-              <a:rPr sz="1200" b="0">
-                <a:solidFill>
-                  <a:srgbClr val="1C1C1E"/>
-                </a:solidFill>
-                <a:latin typeface="Microsoft YaHei"/>
-              </a:rPr>
-              <a:t>• 盲目看平均利用率会灾难性超卖：同步组卖到 32 台时平均忙率仅 ~35%（"池子看起来很空"），</a:t>
-            </a:r>
-          </a:p>
-          <a:p>
-            <a:pPr>
-              <a:lnSpc>
-                <a:spcPct val="108000"/>
-              </a:lnSpc>
-              <a:spcAft>
-                <a:spcPts val="400"/>
-              </a:spcAft>
-            </a:pPr>
-            <a:r>
-              <a:rPr sz="1250" b="0">
-                <a:solidFill>
-                  <a:srgbClr val="1C1C1E"/>
-                </a:solidFill>
-                <a:latin typeface="Microsoft YaHei"/>
-              </a:rPr>
-              <a:t>但每个 burst 窗口客户速率已跌到 25%。基于平均值的准入在真实的"集体定时行为"（备份、扫盘、定时任务）前毫无防线。</a:t>
-            </a:r>
-          </a:p>
-          <a:p>
-            <a:pPr lvl="1">
-              <a:lnSpc>
-                <a:spcPct val="108000"/>
-              </a:lnSpc>
-              <a:spcAft>
-                <a:spcPts val="400"/>
-              </a:spcAft>
-            </a:pPr>
-            <a:r>
-              <a:rPr sz="1200" b="0">
-                <a:solidFill>
-                  <a:srgbClr val="1C1C1E"/>
-                </a:solidFill>
-                <a:latin typeface="Microsoft YaHei"/>
-              </a:rPr>
-              <a:t>• 同样平均负载，容量由相位结构决定：主口径下随机 24 台 vs 同步 8 台（3×）；容量比随质量口径在 2×–5× 间移动</a:t>
-            </a:r>
-          </a:p>
-          <a:p>
-            <a:pPr>
-              <a:lnSpc>
-                <a:spcPct val="108000"/>
-              </a:lnSpc>
-              <a:spcAft>
-                <a:spcPts val="400"/>
-              </a:spcAft>
-            </a:pPr>
-            <a:r>
-              <a:rPr sz="1250" b="0">
-                <a:solidFill>
-                  <a:srgbClr val="1C1C1E"/>
-                </a:solidFill>
-                <a:latin typeface="Microsoft YaHei"/>
-              </a:rPr>
-              <a:t>（中位口径 5×、地板口径 ~5×、严格口径 2×）。报告容量必须同时报告质量口径——"5×"是 P50 口径的数字，"不劣化"应以 P5 口径度量（本节的修正即来自这一原则）。</a:t>
-            </a:r>
-          </a:p>
-          <a:p>
-            <a:pPr lvl="1">
-              <a:lnSpc>
-                <a:spcPct val="108000"/>
-              </a:lnSpc>
-              <a:spcAft>
-                <a:spcPts val="400"/>
-              </a:spcAft>
-            </a:pPr>
-            <a:r>
-              <a:rPr sz="1200" b="0">
-                <a:solidFill>
-                  <a:srgbClr val="1C1C1E"/>
-                </a:solidFill>
-                <a:latin typeface="Microsoft YaHei"/>
-              </a:rPr>
-              <a:t>• 两类失效的形状不同：随机组是渐进劣化（P5 逐档下滑，可预警、可准入控制）；同步组是断崖（99%→49%），</a:t>
-            </a:r>
-          </a:p>
-          <a:p>
-            <a:pPr>
-              <a:lnSpc>
-                <a:spcPct val="108000"/>
-              </a:lnSpc>
-              <a:spcAft>
-                <a:spcPts val="400"/>
-              </a:spcAft>
-            </a:pPr>
-            <a:r>
-              <a:rPr sz="1250" b="0">
-                <a:solidFill>
-                  <a:srgbClr val="1C1C1E"/>
-                </a:solidFill>
-                <a:latin typeface="Microsoft YaHei"/>
-              </a:rPr>
-              <a:t>没有预警窗口——这解释了为什么"监测平均值/中位数"的准入对同步失效免疫失败。</a:t>
-            </a:r>
-          </a:p>
-          <a:p>
-            <a:pPr lvl="1">
-              <a:lnSpc>
-                <a:spcPct val="108000"/>
-              </a:lnSpc>
-              <a:spcAft>
-                <a:spcPts val="400"/>
-              </a:spcAft>
-            </a:pPr>
-            <a:r>
-              <a:rPr sz="1200" b="0">
-                <a:solidFill>
-                  <a:srgbClr val="1C1C1E"/>
-                </a:solidFill>
-                <a:latin typeface="Microsoft YaHei"/>
-              </a:rPr>
-              <a:t>• 隔离把两类伤害解耦：服务侧全程平直（0.7 ms），代价全部显式落在客户侧速率上——</a:t>
-            </a:r>
-          </a:p>
-          <a:p>
-            <a:pPr>
-              <a:lnSpc>
-                <a:spcPct val="108000"/>
-              </a:lnSpc>
-              <a:spcAft>
-                <a:spcPts val="400"/>
-              </a:spcAft>
-            </a:pPr>
-            <a:r>
-              <a:rPr sz="1250" b="0">
-                <a:solidFill>
-                  <a:srgbClr val="1C1C1E"/>
-                </a:solidFill>
-                <a:latin typeface="Microsoft YaHei"/>
-              </a:rPr>
-              <a:t>与第 5 章"代价定价"的框架一致；"经济版"卖的其实就是这个速率衰减的额度。</a:t>
-            </a:r>
-          </a:p>
-        </p:txBody>
-      </p:sp>
-    </p:spTree>
-  </p:cSld>
-  <p:clrMapOvr>
-    <a:masterClrMapping/>
-  </p:clrMapOvr>
-</p:sld>
-</file>
-
 <file path=ppt/slides/slide126.xml><?xml version="1.0" encoding="utf-8"?>
 <p:sld xmlns:a="http://schemas.openxmlformats.org/drawingml/2006/main" xmlns:p="http://schemas.openxmlformats.org/presentationml/2006/main" xmlns:r="http://schemas.openxmlformats.org/officeDocument/2006/relationships">
   <p:cSld>
@@ -10365,7 +10195,7 @@
                 </a:solidFill>
                 <a:latin typeface="Microsoft YaHei"/>
               </a:rPr>
-              <a:t>8.5 容量近似模型：混合相位验证（图 21）</a:t>
+              <a:t>8.4 安全售卖容量（图 16，核心结果）</a:t>
             </a:r>
           </a:p>
         </p:txBody>
@@ -10407,7 +10237,7 @@
                 </a:solidFill>
                 <a:latin typeface="Microsoft YaHei"/>
               </a:rPr>
-              <a:t>模型（明确假设下的近似，非普适定律）。 假设：（A1）各租户相位在决策跨度内稳定；（B）对齐组的突发窗彼此重合、与随机租户的重叠按占空比近似。在该假设下，聚合并发峰 ≈ 对齐组 φ N + 随机组 ρ(1-φ)N，故"峰值不超过池容量"的中位口径容量为N^_mid  ≈  Cφ + (1-φ) ρ,即相位集中度形式 N^_mid = C/(ρκ)、κ = max_b Σ_i p_i(b)/Σ_i ρ_i。该模型刻画平均/中位口径；对纯随机端的 P5 尾部口径显著偏乐观（纯随机端模型给 40，而主口径实测安全容量为 24）。随机端的尾部风险天然由重叠计数的上分位给出：要求 Q_p(φ N + Bin((1-φ)N, ρ)) ≤ C/θ（θ 为体验质量界），数值上低于中位口径；工程上安全值直接取实测口径容量（§8.4 阈值表），模型仅用于跨配比外推与准入控制器的先验。</a:t>
+              <a:t>（随机组逐档 P5：L16=100%、L24=88%、L32=62%、L40=65%、L48=51%、L56=50%、L64=43%——渐进劣化；同步组 L8=99%、L12=51%、L16=49%——断崖坍塌，各口径下均迅速触底。）</a:t>
             </a:r>
           </a:p>
           <a:p>
@@ -10426,7 +10256,159 @@
                 </a:solidFill>
                 <a:latin typeface="Microsoft YaHei"/>
               </a:rPr>
-              <a:t>首轮验证（图 21；8 核池、ρ=0.20，每配比单轮）：</a:t>
+              <a:t>四条结论。</a:t>
+            </a:r>
+          </a:p>
+          <a:p>
+            <a:pPr lvl="1">
+              <a:lnSpc>
+                <a:spcPct val="108000"/>
+              </a:lnSpc>
+              <a:spcAft>
+                <a:spcPts val="400"/>
+              </a:spcAft>
+            </a:pPr>
+            <a:r>
+              <a:rPr sz="1200" b="0">
+                <a:solidFill>
+                  <a:srgbClr val="1C1C1E"/>
+                </a:solidFill>
+                <a:latin typeface="Microsoft YaHei"/>
+              </a:rPr>
+              <a:t>• 盲目看平均利用率会灾难性超卖：同步组卖到 32 台时平均忙率仅 ~35%（"池子看起来很空"），</a:t>
+            </a:r>
+          </a:p>
+          <a:p>
+            <a:pPr>
+              <a:lnSpc>
+                <a:spcPct val="108000"/>
+              </a:lnSpc>
+              <a:spcAft>
+                <a:spcPts val="400"/>
+              </a:spcAft>
+            </a:pPr>
+            <a:r>
+              <a:rPr sz="1250" b="0">
+                <a:solidFill>
+                  <a:srgbClr val="1C1C1E"/>
+                </a:solidFill>
+                <a:latin typeface="Microsoft YaHei"/>
+              </a:rPr>
+              <a:t>但每个 burst 窗口客户速率已跌到 25%。基于平均值的准入在真实的"集体定时行为"（备份、扫盘、定时任务）前毫无防线。</a:t>
+            </a:r>
+          </a:p>
+          <a:p>
+            <a:pPr lvl="1">
+              <a:lnSpc>
+                <a:spcPct val="108000"/>
+              </a:lnSpc>
+              <a:spcAft>
+                <a:spcPts val="400"/>
+              </a:spcAft>
+            </a:pPr>
+            <a:r>
+              <a:rPr sz="1200" b="0">
+                <a:solidFill>
+                  <a:srgbClr val="1C1C1E"/>
+                </a:solidFill>
+                <a:latin typeface="Microsoft YaHei"/>
+              </a:rPr>
+              <a:t>• 同样平均负载，容量由相位结构决定：主口径下随机 24 台 vs 同步 8 台（3×）；容量比随质量口径在 2×–5× 间移动</a:t>
+            </a:r>
+          </a:p>
+          <a:p>
+            <a:pPr>
+              <a:lnSpc>
+                <a:spcPct val="108000"/>
+              </a:lnSpc>
+              <a:spcAft>
+                <a:spcPts val="400"/>
+              </a:spcAft>
+            </a:pPr>
+            <a:r>
+              <a:rPr sz="1250" b="0">
+                <a:solidFill>
+                  <a:srgbClr val="1C1C1E"/>
+                </a:solidFill>
+                <a:latin typeface="Microsoft YaHei"/>
+              </a:rPr>
+              <a:t>（中位口径 5×、地板口径 ~5×、严格口径 2×）。报告容量必须同时报告质量口径——"5×"是 P50 口径的数字，"不劣化"应以 P5 口径度量（本节的修正即来自这一原则）。</a:t>
+            </a:r>
+          </a:p>
+          <a:p>
+            <a:pPr lvl="1">
+              <a:lnSpc>
+                <a:spcPct val="108000"/>
+              </a:lnSpc>
+              <a:spcAft>
+                <a:spcPts val="400"/>
+              </a:spcAft>
+            </a:pPr>
+            <a:r>
+              <a:rPr sz="1200" b="0">
+                <a:solidFill>
+                  <a:srgbClr val="1C1C1E"/>
+                </a:solidFill>
+                <a:latin typeface="Microsoft YaHei"/>
+              </a:rPr>
+              <a:t>• 两类失效的形状不同：随机组是渐进劣化（P5 逐档下滑，可预警、可准入控制）；同步组是断崖（99%→49%），</a:t>
+            </a:r>
+          </a:p>
+          <a:p>
+            <a:pPr>
+              <a:lnSpc>
+                <a:spcPct val="108000"/>
+              </a:lnSpc>
+              <a:spcAft>
+                <a:spcPts val="400"/>
+              </a:spcAft>
+            </a:pPr>
+            <a:r>
+              <a:rPr sz="1250" b="0">
+                <a:solidFill>
+                  <a:srgbClr val="1C1C1E"/>
+                </a:solidFill>
+                <a:latin typeface="Microsoft YaHei"/>
+              </a:rPr>
+              <a:t>没有预警窗口——这解释了为什么"监测平均值/中位数"的准入对同步失效免疫失败。</a:t>
+            </a:r>
+          </a:p>
+          <a:p>
+            <a:pPr lvl="1">
+              <a:lnSpc>
+                <a:spcPct val="108000"/>
+              </a:lnSpc>
+              <a:spcAft>
+                <a:spcPts val="400"/>
+              </a:spcAft>
+            </a:pPr>
+            <a:r>
+              <a:rPr sz="1200" b="0">
+                <a:solidFill>
+                  <a:srgbClr val="1C1C1E"/>
+                </a:solidFill>
+                <a:latin typeface="Microsoft YaHei"/>
+              </a:rPr>
+              <a:t>• 隔离把两类伤害解耦：服务侧全程平直（0.7 ms），代价全部显式落在客户侧速率上——</a:t>
+            </a:r>
+          </a:p>
+          <a:p>
+            <a:pPr>
+              <a:lnSpc>
+                <a:spcPct val="108000"/>
+              </a:lnSpc>
+              <a:spcAft>
+                <a:spcPts val="400"/>
+              </a:spcAft>
+            </a:pPr>
+            <a:r>
+              <a:rPr sz="1250" b="0">
+                <a:solidFill>
+                  <a:srgbClr val="1C1C1E"/>
+                </a:solidFill>
+                <a:latin typeface="Microsoft YaHei"/>
+              </a:rPr>
+              <a:t>与第 5 章"代价定价"的框架一致；"经济版"卖的其实就是这个速率衰减的额度。</a:t>
             </a:r>
           </a:p>
         </p:txBody>
@@ -10539,7 +10521,7 @@
                 </a:solidFill>
                 <a:latin typeface="Microsoft YaHei"/>
               </a:rPr>
-              <a:t>图</a:t>
+              <a:t>8 物理机验证与安全容量模型</a:t>
             </a:r>
           </a:p>
           <a:p>
@@ -10555,40 +10537,16 @@
           </a:p>
         </p:txBody>
       </p:sp>
-      <p:pic>
-        <p:nvPicPr>
-          <p:cNvPr id="4" name="Picture 3" descr="fig21_density_law.png"/>
-          <p:cNvPicPr>
-            <a:picLocks noChangeAspect="1"/>
-          </p:cNvPicPr>
-          <p:nvPr/>
-        </p:nvPicPr>
-        <p:blipFill>
-          <a:blip r:embed="rId2"/>
-          <a:stretch>
-            <a:fillRect/>
-          </a:stretch>
-        </p:blipFill>
-        <p:spPr>
-          <a:xfrm>
-            <a:off x="1737360" y="960120"/>
-            <a:ext cx="8686800" cy="3226526"/>
-          </a:xfrm>
-          <a:prstGeom prst="rect">
-            <a:avLst/>
-          </a:prstGeom>
-        </p:spPr>
-      </p:pic>
-      <p:sp>
-        <p:nvSpPr>
-          <p:cNvPr id="5" name="TextBox 4"/>
+      <p:sp>
+        <p:nvSpPr>
+          <p:cNvPr id="4" name="TextBox 3"/>
           <p:cNvSpPr txBox="1"/>
           <p:nvPr/>
         </p:nvSpPr>
         <p:spPr>
           <a:xfrm>
-            <a:off x="914400" y="4226646"/>
-            <a:ext cx="10332720" cy="548640"/>
+            <a:off x="502920" y="914400"/>
+            <a:ext cx="11155680" cy="5486400"/>
           </a:xfrm>
           <a:prstGeom prst="rect">
             <a:avLst/>
@@ -10596,20 +10554,46 @@
           <a:noFill/>
         </p:spPr>
         <p:txBody>
-          <a:bodyPr wrap="none">
+          <a:bodyPr wrap="square">
             <a:spAutoFit/>
           </a:bodyPr>
           <a:lstStyle/>
           <a:p>
-            <a:pPr algn="ctr"/>
-            <a:r>
-              <a:rPr sz="1100" b="0">
-                <a:solidFill>
-                  <a:srgbClr val="5A6472"/>
-                </a:solidFill>
-                <a:latin typeface="Microsoft YaHei"/>
-              </a:rPr>
-              <a:t>图 21 安全容量近似模型：混合相位首轮验证（φ=0.25/0.50/0.75，单轮）</a:t>
+            <a:pPr>
+              <a:lnSpc>
+                <a:spcPct val="108000"/>
+              </a:lnSpc>
+              <a:spcAft>
+                <a:spcPts val="400"/>
+              </a:spcAft>
+            </a:pPr>
+            <a:r>
+              <a:rPr sz="1250" b="0">
+                <a:solidFill>
+                  <a:srgbClr val="1C1C1E"/>
+                </a:solidFill>
+                <a:latin typeface="Microsoft YaHei"/>
+              </a:rPr>
+              <a:t>模型（明确假设下的近似，非普适定律）。 假设：（A1）各租户相位在决策跨度内稳定；（B）对齐组的突发窗彼此重合、与随机租户的重叠按占空比近似。在该假设下，聚合并发峰 ≈ 对齐组 φ N + 随机组 ρ(1-φ)N，故"峰值不超过池容量"的中位口径容量为N^_mid  ≈  Cφ + (1-φ) ρ,即相位集中度形式 N^_mid = C/(ρκ)、κ = max_b Σ_i p_i(b)/Σ_i ρ_i。该模型刻画平均/中位口径；对纯随机端的 P5 尾部口径显著偏乐观（纯随机端模型给 40，而主口径实测安全容量为 24）。随机端的尾部风险天然由重叠计数的上分位给出：要求 Q_p(φ N + Bin((1-φ)N, ρ)) ≤ C/θ（θ 为体验质量界），数值上低于中位口径；工程上安全值直接取实测口径容量（§8.4 阈值表），模型仅用于跨配比外推与准入控制器的先验。</a:t>
+            </a:r>
+          </a:p>
+          <a:p>
+            <a:pPr>
+              <a:lnSpc>
+                <a:spcPct val="108000"/>
+              </a:lnSpc>
+              <a:spcAft>
+                <a:spcPts val="400"/>
+              </a:spcAft>
+            </a:pPr>
+            <a:r>
+              <a:rPr sz="1250" b="0">
+                <a:solidFill>
+                  <a:srgbClr val="1C1C1E"/>
+                </a:solidFill>
+                <a:latin typeface="Microsoft YaHei"/>
+              </a:rPr>
+              <a:t>首轮验证（图 21；8 核池、ρ=0.20，每配比单轮）：</a:t>
             </a:r>
           </a:p>
         </p:txBody>
@@ -10722,6 +10706,189 @@
                 </a:solidFill>
                 <a:latin typeface="Microsoft YaHei"/>
               </a:rPr>
+              <a:t>图</a:t>
+            </a:r>
+          </a:p>
+          <a:p>
+            <a:r>
+              <a:rPr sz="1200">
+                <a:solidFill>
+                  <a:srgbClr val="D8E2F0"/>
+                </a:solidFill>
+                <a:latin typeface="Microsoft YaHei"/>
+              </a:rPr>
+              <a:t>8.5 容量近似模型：混合相位验证（图 21）</a:t>
+            </a:r>
+          </a:p>
+        </p:txBody>
+      </p:sp>
+      <p:pic>
+        <p:nvPicPr>
+          <p:cNvPr id="4" name="Picture 3" descr="fig21_density_law.png"/>
+          <p:cNvPicPr>
+            <a:picLocks noChangeAspect="1"/>
+          </p:cNvPicPr>
+          <p:nvPr/>
+        </p:nvPicPr>
+        <p:blipFill>
+          <a:blip r:embed="rId2"/>
+          <a:stretch>
+            <a:fillRect/>
+          </a:stretch>
+        </p:blipFill>
+        <p:spPr>
+          <a:xfrm>
+            <a:off x="1737360" y="960120"/>
+            <a:ext cx="8686800" cy="3226526"/>
+          </a:xfrm>
+          <a:prstGeom prst="rect">
+            <a:avLst/>
+          </a:prstGeom>
+        </p:spPr>
+      </p:pic>
+      <p:sp>
+        <p:nvSpPr>
+          <p:cNvPr id="5" name="TextBox 4"/>
+          <p:cNvSpPr txBox="1"/>
+          <p:nvPr/>
+        </p:nvSpPr>
+        <p:spPr>
+          <a:xfrm>
+            <a:off x="914400" y="4226646"/>
+            <a:ext cx="10332720" cy="548640"/>
+          </a:xfrm>
+          <a:prstGeom prst="rect">
+            <a:avLst/>
+          </a:prstGeom>
+          <a:noFill/>
+        </p:spPr>
+        <p:txBody>
+          <a:bodyPr wrap="none">
+            <a:spAutoFit/>
+          </a:bodyPr>
+          <a:lstStyle/>
+          <a:p>
+            <a:pPr algn="ctr"/>
+            <a:r>
+              <a:rPr sz="1100" b="0">
+                <a:solidFill>
+                  <a:srgbClr val="5A6472"/>
+                </a:solidFill>
+                <a:latin typeface="Microsoft YaHei"/>
+              </a:rPr>
+              <a:t>图 21 安全容量近似模型：混合相位首轮验证（φ=0.25/0.50/0.75，单轮）</a:t>
+            </a:r>
+          </a:p>
+        </p:txBody>
+      </p:sp>
+    </p:spTree>
+  </p:cSld>
+  <p:clrMapOvr>
+    <a:masterClrMapping/>
+  </p:clrMapOvr>
+</p:sld>
+</file>
+
+<file path=ppt/slides/slide129.xml><?xml version="1.0" encoding="utf-8"?>
+<p:sld xmlns:a="http://schemas.openxmlformats.org/drawingml/2006/main" xmlns:p="http://schemas.openxmlformats.org/presentationml/2006/main" xmlns:r="http://schemas.openxmlformats.org/officeDocument/2006/relationships">
+  <p:cSld>
+    <p:spTree>
+      <p:nvGrpSpPr>
+        <p:cNvPr id="1" name=""/>
+        <p:cNvGrpSpPr/>
+        <p:nvPr/>
+      </p:nvGrpSpPr>
+      <p:grpSpPr/>
+      <p:sp>
+        <p:nvSpPr>
+          <p:cNvPr id="2" name="Rectangle 1"/>
+          <p:cNvSpPr/>
+          <p:nvPr/>
+        </p:nvSpPr>
+        <p:spPr>
+          <a:xfrm>
+            <a:off x="0" y="0"/>
+            <a:ext cx="12191695" cy="6858000"/>
+          </a:xfrm>
+          <a:prstGeom prst="rect">
+            <a:avLst/>
+          </a:prstGeom>
+          <a:solidFill>
+            <a:srgbClr val="FFFFFF"/>
+          </a:solidFill>
+          <a:ln>
+            <a:noFill/>
+          </a:ln>
+        </p:spPr>
+        <p:style>
+          <a:lnRef idx="1">
+            <a:schemeClr val="accent1"/>
+          </a:lnRef>
+          <a:fillRef idx="3">
+            <a:schemeClr val="accent1"/>
+          </a:fillRef>
+          <a:effectRef idx="2">
+            <a:schemeClr val="accent1"/>
+          </a:effectRef>
+          <a:fontRef idx="minor">
+            <a:schemeClr val="lt1"/>
+          </a:fontRef>
+        </p:style>
+        <p:txBody>
+          <a:bodyPr rtlCol="0" anchor="ctr"/>
+          <a:lstStyle/>
+          <a:p>
+            <a:pPr algn="ctr"/>
+          </a:p>
+        </p:txBody>
+      </p:sp>
+      <p:sp>
+        <p:nvSpPr>
+          <p:cNvPr id="3" name="Rectangle 2"/>
+          <p:cNvSpPr/>
+          <p:nvPr/>
+        </p:nvSpPr>
+        <p:spPr>
+          <a:xfrm>
+            <a:off x="0" y="0"/>
+            <a:ext cx="12191695" cy="777240"/>
+          </a:xfrm>
+          <a:prstGeom prst="rect">
+            <a:avLst/>
+          </a:prstGeom>
+          <a:solidFill>
+            <a:srgbClr val="123A63"/>
+          </a:solidFill>
+          <a:ln>
+            <a:noFill/>
+          </a:ln>
+        </p:spPr>
+        <p:style>
+          <a:lnRef idx="1">
+            <a:schemeClr val="accent1"/>
+          </a:lnRef>
+          <a:fillRef idx="3">
+            <a:schemeClr val="accent1"/>
+          </a:fillRef>
+          <a:effectRef idx="2">
+            <a:schemeClr val="accent1"/>
+          </a:effectRef>
+          <a:fontRef idx="minor">
+            <a:schemeClr val="lt1"/>
+          </a:fontRef>
+        </p:style>
+        <p:txBody>
+          <a:bodyPr rtlCol="0" anchor="ctr" lIns="411480" tIns="54864"/>
+          <a:lstStyle/>
+          <a:p>
+            <a:pPr algn="ctr"/>
+            <a:r>
+              <a:rPr sz="2100" b="1">
+                <a:solidFill>
+                  <a:srgbClr val="FFFFFF"/>
+                </a:solidFill>
+                <a:latin typeface="Microsoft YaHei"/>
+              </a:rPr>
               <a:t>8 物理机验证与安全容量模型</a:t>
             </a:r>
           </a:p>
@@ -11086,191 +11253,6 @@
 </p:sld>
 </file>
 
-<file path=ppt/slides/slide129.xml><?xml version="1.0" encoding="utf-8"?>
-<p:sld xmlns:a="http://schemas.openxmlformats.org/drawingml/2006/main" xmlns:p="http://schemas.openxmlformats.org/presentationml/2006/main" xmlns:r="http://schemas.openxmlformats.org/officeDocument/2006/relationships">
-  <p:cSld>
-    <p:spTree>
-      <p:nvGrpSpPr>
-        <p:cNvPr id="1" name=""/>
-        <p:cNvGrpSpPr/>
-        <p:nvPr/>
-      </p:nvGrpSpPr>
-      <p:grpSpPr/>
-      <p:sp>
-        <p:nvSpPr>
-          <p:cNvPr id="2" name="Rectangle 1"/>
-          <p:cNvSpPr/>
-          <p:nvPr/>
-        </p:nvSpPr>
-        <p:spPr>
-          <a:xfrm>
-            <a:off x="0" y="0"/>
-            <a:ext cx="12191695" cy="6858000"/>
-          </a:xfrm>
-          <a:prstGeom prst="rect">
-            <a:avLst/>
-          </a:prstGeom>
-          <a:solidFill>
-            <a:srgbClr val="FFFFFF"/>
-          </a:solidFill>
-          <a:ln>
-            <a:noFill/>
-          </a:ln>
-        </p:spPr>
-        <p:style>
-          <a:lnRef idx="1">
-            <a:schemeClr val="accent1"/>
-          </a:lnRef>
-          <a:fillRef idx="3">
-            <a:schemeClr val="accent1"/>
-          </a:fillRef>
-          <a:effectRef idx="2">
-            <a:schemeClr val="accent1"/>
-          </a:effectRef>
-          <a:fontRef idx="minor">
-            <a:schemeClr val="lt1"/>
-          </a:fontRef>
-        </p:style>
-        <p:txBody>
-          <a:bodyPr rtlCol="0" anchor="ctr"/>
-          <a:lstStyle/>
-          <a:p>
-            <a:pPr algn="ctr"/>
-          </a:p>
-        </p:txBody>
-      </p:sp>
-      <p:sp>
-        <p:nvSpPr>
-          <p:cNvPr id="3" name="Rectangle 2"/>
-          <p:cNvSpPr/>
-          <p:nvPr/>
-        </p:nvSpPr>
-        <p:spPr>
-          <a:xfrm>
-            <a:off x="0" y="0"/>
-            <a:ext cx="12191695" cy="777240"/>
-          </a:xfrm>
-          <a:prstGeom prst="rect">
-            <a:avLst/>
-          </a:prstGeom>
-          <a:solidFill>
-            <a:srgbClr val="123A63"/>
-          </a:solidFill>
-          <a:ln>
-            <a:noFill/>
-          </a:ln>
-        </p:spPr>
-        <p:style>
-          <a:lnRef idx="1">
-            <a:schemeClr val="accent1"/>
-          </a:lnRef>
-          <a:fillRef idx="3">
-            <a:schemeClr val="accent1"/>
-          </a:fillRef>
-          <a:effectRef idx="2">
-            <a:schemeClr val="accent1"/>
-          </a:effectRef>
-          <a:fontRef idx="minor">
-            <a:schemeClr val="lt1"/>
-          </a:fontRef>
-        </p:style>
-        <p:txBody>
-          <a:bodyPr rtlCol="0" anchor="ctr" lIns="411480" tIns="54864"/>
-          <a:lstStyle/>
-          <a:p>
-            <a:pPr algn="ctr"/>
-            <a:r>
-              <a:rPr sz="2100" b="1">
-                <a:solidFill>
-                  <a:srgbClr val="FFFFFF"/>
-                </a:solidFill>
-                <a:latin typeface="Microsoft YaHei"/>
-              </a:rPr>
-              <a:t>8 物理机验证与安全容量模型</a:t>
-            </a:r>
-          </a:p>
-          <a:p>
-            <a:r>
-              <a:rPr sz="1200">
-                <a:solidFill>
-                  <a:srgbClr val="D8E2F0"/>
-                </a:solidFill>
-                <a:latin typeface="Microsoft YaHei"/>
-              </a:rPr>
-              <a:t>8.5 容量近似模型：混合相位验证（图 21）</a:t>
-            </a:r>
-          </a:p>
-        </p:txBody>
-      </p:sp>
-      <p:sp>
-        <p:nvSpPr>
-          <p:cNvPr id="4" name="TextBox 3"/>
-          <p:cNvSpPr txBox="1"/>
-          <p:nvPr/>
-        </p:nvSpPr>
-        <p:spPr>
-          <a:xfrm>
-            <a:off x="502920" y="914400"/>
-            <a:ext cx="11155680" cy="5486400"/>
-          </a:xfrm>
-          <a:prstGeom prst="rect">
-            <a:avLst/>
-          </a:prstGeom>
-          <a:noFill/>
-        </p:spPr>
-        <p:txBody>
-          <a:bodyPr wrap="square">
-            <a:spAutoFit/>
-          </a:bodyPr>
-          <a:lstStyle/>
-          <a:p>
-            <a:pPr>
-              <a:lnSpc>
-                <a:spcPct val="108000"/>
-              </a:lnSpc>
-              <a:spcAft>
-                <a:spcPts val="400"/>
-              </a:spcAft>
-            </a:pPr>
-            <a:r>
-              <a:rPr sz="1250" b="0">
-                <a:solidFill>
-                  <a:srgbClr val="1C1C1E"/>
-                </a:solidFill>
-                <a:latin typeface="Microsoft YaHei"/>
-              </a:rPr>
-              <a:t>结构性相位（φ ≥ 0.5）两点命中；φ=0.25 的预测点落在通过区内（预测偏保守），纯随机端偏乐观——误差方向与"尾部口径 vs 中位口径"的预期一致。</a:t>
-            </a:r>
-          </a:p>
-          <a:p>
-            <a:pPr>
-              <a:lnSpc>
-                <a:spcPct val="108000"/>
-              </a:lnSpc>
-              <a:spcAft>
-                <a:spcPts val="400"/>
-              </a:spcAft>
-            </a:pPr>
-            <a:r>
-              <a:rPr sz="1250" b="0">
-                <a:solidFill>
-                  <a:srgbClr val="1C1C1E"/>
-                </a:solidFill>
-                <a:latin typeface="Microsoft YaHei"/>
-              </a:rPr>
-              <a:t>诚实边界。 （i）每配比目前单轮，p5 存在非单调采样噪声（如 φ=0.25 的 L24 反高于 L20）；轮次复现（多轮、多随机种子）与"模型预测 vs 实测"的误差分布验证正在队列中，完成后本节将报告轮级区间与预测误差带。（ii）C5 反相编排实验（同批租户、两组相差 30 s，容量 ×2）把"相位可编排"从观测升级为干预，数据落地回填。（iii）本节的定位是带明确假设的容量近似模型：结构性相位下用于外推与准入先验，安全值以实测口径为准——不主张普适定律。</a:t>
-            </a:r>
-          </a:p>
-        </p:txBody>
-      </p:sp>
-    </p:spTree>
-  </p:cSld>
-  <p:clrMapOvr>
-    <a:masterClrMapping/>
-  </p:clrMapOvr>
-</p:sld>
-</file>
-
 <file path=ppt/slides/slide13.xml><?xml version="1.0" encoding="utf-8"?>
 <p:sld xmlns:a="http://schemas.openxmlformats.org/drawingml/2006/main" xmlns:p="http://schemas.openxmlformats.org/presentationml/2006/main" xmlns:r="http://schemas.openxmlformats.org/officeDocument/2006/relationships">
   <p:cSld>
@@ -11548,7 +11530,7 @@
                 </a:solidFill>
                 <a:latin typeface="Microsoft YaHei"/>
               </a:rPr>
-              <a:t>8.6 相位剖面卷积与"边际幻觉"命题（图 28）</a:t>
+              <a:t>8.5 容量近似模型：混合相位验证（图 21）</a:t>
             </a:r>
           </a:p>
         </p:txBody>
@@ -11590,7 +11572,7 @@
                 </a:solidFill>
                 <a:latin typeface="Microsoft YaHei"/>
               </a:rPr>
-              <a:t>命题（边际幻觉 / Marginal Illusion）。 §8.4 的两次实验直接给出构造性证明：两组客户每台的用量边际分布完全相同（同一 burner、同一 20%/60 s 占空比与相同繁忙段形状），但随机相位组与对齐相位组在主口径（P5≥70%）下的安全容量为 24 vs 8（中位口径 40 vs 8）。因此：任何只依赖逐租户边际统计（以及独立性假设）的容量方法，都无法区分这两组——对"对边际分布做独立卷积"的一类方法（AUDIBLE 式 [1]），这是可证明的盲区：它们的输入在两组的差异上不可辨识。这是 3.3.1 非可辨识性结论（需求估计）的容量版本（安全容量估计）。</a:t>
+              <a:t>结构性相位（φ ≥ 0.5）两点命中；φ=0.25 的预测点落在通过区内（预测偏保守），纯随机端偏乐观——误差方向与"尾部口径 vs 中位口径"的预期一致。</a:t>
             </a:r>
           </a:p>
           <a:p>
@@ -11609,26 +11591,7 @@
                 </a:solidFill>
                 <a:latin typeface="Microsoft YaHei"/>
               </a:rPr>
-              <a:t>方法（PPC，相位剖面卷积）。 输入：候选集合的逐租户相位剖面 p_i(b)（1 秒分辨率）。PPC 的保相关性重采样分两档实现：</a:t>
-            </a:r>
-          </a:p>
-          <a:p>
-            <a:pPr>
-              <a:lnSpc>
-                <a:spcPct val="108000"/>
-              </a:lnSpc>
-              <a:spcAft>
-                <a:spcPts val="400"/>
-              </a:spcAft>
-            </a:pPr>
-            <a:r>
-              <a:rPr sz="1250" b="0">
-                <a:solidFill>
-                  <a:srgbClr val="1C1C1E"/>
-                </a:solidFill>
-                <a:latin typeface="Microsoft YaHei"/>
-              </a:rPr>
-              <a:t>算法 P（PPC 容量预测；输入：候选集 X（含逐租户 1 s 活跃序列）、池容量 C、质量分位 θ、重采样次数 R）1  档案化：对每台 i 维护活跃指示 aᵢ(t)（1 s）；结构相位（对齐/定时）直接从历史取相位，不做随机化2  相关保留重采样（二选一，按数据来源）：(a) 参数化相位模型：对齐租户共享固定偏移（零方差）；随机租户偏移 ~ U[0,P) 独立采样—— 仅用于“按配置生成的”负载（如混合相位阶梯）；同步关系由构造保证(b) 联合块自助（经验舰队）：对所有租户使用同一组时间块（块长 B·1 s，块内原序保留）重采样 —— 同时刻的跨租户相关性被块结构保留；禁止逐租户独立平移（那正是 iid 卷积的假设，会把同步结构洗掉）3  对每个重采样：A(b) ← Σᵢ aᵢ(b)；peak_r ← max_b A(b)；体验分位由 C/max(1,A) 逐租户聚合4  输出：P(peak&gt; C)、容量 N*(θ, ε) = max N s.t. Q_1-ε(peak) ≤ C/θ复杂度：O(R · N · P)，R=10³、N=64、P=60 s 时 ~4×10⁶ 次布尔运算（毫秒级）。</a:t>
+              <a:t>诚实边界。 （i）每配比目前单轮，p5 存在非单调采样噪声（如 φ=0.25 的 L24 反高于 L20）；轮次复现（多轮、多随机种子）与"模型预测 vs 实测"的误差分布验证正在队列中，完成后本节将报告轮级区间与预测误差带。（ii）C5 反相编排（干预级证据，已完成）：同批客户、同占空比，仅改相位编排——16 台同相 P5=50%（坍塌）；16 台分两组相差 30 s P5=101%（×2）；32 台分四组（0/15/30/45 s）P5=101%（×4）；两组的 32 台与四组的 64 台对照均为 50%；窗口相位校验 8/8 组命中。（iii）本节的定位是带明确假设的容量近似模型：结构性相位下用于外推与准入先验，安全值以实测口径为准——不主张普适定律。</a:t>
             </a:r>
           </a:p>
         </p:txBody>
@@ -11741,7 +11704,7 @@
                 </a:solidFill>
                 <a:latin typeface="Microsoft YaHei"/>
               </a:rPr>
-              <a:t>图</a:t>
+              <a:t>8 物理机验证与安全容量模型</a:t>
             </a:r>
           </a:p>
           <a:p>
@@ -11757,40 +11720,16 @@
           </a:p>
         </p:txBody>
       </p:sp>
-      <p:pic>
-        <p:nvPicPr>
-          <p:cNvPr id="4" name="Picture 3" descr="fig28_ppc.png"/>
-          <p:cNvPicPr>
-            <a:picLocks noChangeAspect="1"/>
-          </p:cNvPicPr>
-          <p:nvPr/>
-        </p:nvPicPr>
-        <p:blipFill>
-          <a:blip r:embed="rId2"/>
-          <a:stretch>
-            <a:fillRect/>
-          </a:stretch>
-        </p:blipFill>
-        <p:spPr>
-          <a:xfrm>
-            <a:off x="1737360" y="960120"/>
-            <a:ext cx="8686800" cy="3226526"/>
-          </a:xfrm>
-          <a:prstGeom prst="rect">
-            <a:avLst/>
-          </a:prstGeom>
-        </p:spPr>
-      </p:pic>
-      <p:sp>
-        <p:nvSpPr>
-          <p:cNvPr id="5" name="TextBox 4"/>
+      <p:sp>
+        <p:nvSpPr>
+          <p:cNvPr id="4" name="TextBox 3"/>
           <p:cNvSpPr txBox="1"/>
           <p:nvPr/>
         </p:nvSpPr>
         <p:spPr>
           <a:xfrm>
-            <a:off x="914400" y="4226646"/>
-            <a:ext cx="10332720" cy="548640"/>
+            <a:off x="502920" y="914400"/>
+            <a:ext cx="11155680" cy="5486400"/>
           </a:xfrm>
           <a:prstGeom prst="rect">
             <a:avLst/>
@@ -11798,20 +11737,65 @@
           <a:noFill/>
         </p:spPr>
         <p:txBody>
-          <a:bodyPr wrap="none">
+          <a:bodyPr wrap="square">
             <a:spAutoFit/>
           </a:bodyPr>
           <a:lstStyle/>
           <a:p>
-            <a:pPr algn="ctr"/>
-            <a:r>
-              <a:rPr sz="1100" b="0">
-                <a:solidFill>
-                  <a:srgbClr val="5A6472"/>
-                </a:solidFill>
-                <a:latin typeface="Microsoft YaHei"/>
-              </a:rPr>
-              <a:t>图 28 相位剖面卷积：iid 卷积全盲（同一预测 24）vs PPC 随相位变化并落入实测断档</a:t>
+            <a:pPr>
+              <a:lnSpc>
+                <a:spcPct val="108000"/>
+              </a:lnSpc>
+              <a:spcAft>
+                <a:spcPts val="400"/>
+              </a:spcAft>
+            </a:pPr>
+            <a:r>
+              <a:rPr sz="1250" b="0">
+                <a:solidFill>
+                  <a:srgbClr val="1C1C1E"/>
+                </a:solidFill>
+                <a:latin typeface="Microsoft YaHei"/>
+              </a:rPr>
+              <a:t>命题（边际幻觉 / Marginal Illusion）。 §8.4 的两次实验直接给出构造性证明：两组客户每台的用量边际分布完全相同（同一 burner、同一 20%/60 s 占空比与相同繁忙段形状），但随机相位组与对齐相位组在主口径（P5≥70%）下的安全容量为 24 vs 8（中位口径 40 vs 8）。因此：任何只依赖逐租户边际统计（以及独立性假设）的容量方法，都无法区分这两组——对"对边际分布做独立卷积"的一类方法（AUDIBLE 式 [1]），这是可证明的盲区：它们的输入在两组的差异上不可辨识。这是 3.3.1 非可辨识性结论（需求估计）的容量版本（安全容量估计）。</a:t>
+            </a:r>
+          </a:p>
+          <a:p>
+            <a:pPr>
+              <a:lnSpc>
+                <a:spcPct val="108000"/>
+              </a:lnSpc>
+              <a:spcAft>
+                <a:spcPts val="400"/>
+              </a:spcAft>
+            </a:pPr>
+            <a:r>
+              <a:rPr sz="1250" b="0">
+                <a:solidFill>
+                  <a:srgbClr val="1C1C1E"/>
+                </a:solidFill>
+                <a:latin typeface="Microsoft YaHei"/>
+              </a:rPr>
+              <a:t>方法（PPC，相位剖面卷积）。 输入：候选集合的逐租户相位剖面 p_i(b)（1 秒分辨率）。PPC 的保相关性重采样分两档实现：</a:t>
+            </a:r>
+          </a:p>
+          <a:p>
+            <a:pPr>
+              <a:lnSpc>
+                <a:spcPct val="108000"/>
+              </a:lnSpc>
+              <a:spcAft>
+                <a:spcPts val="400"/>
+              </a:spcAft>
+            </a:pPr>
+            <a:r>
+              <a:rPr sz="1250" b="0">
+                <a:solidFill>
+                  <a:srgbClr val="1C1C1E"/>
+                </a:solidFill>
+                <a:latin typeface="Microsoft YaHei"/>
+              </a:rPr>
+              <a:t>算法 P（PPC 容量预测；输入：候选集 X（含逐租户 1 s 活跃序列）、池容量 C、质量分位 θ、重采样次数 R）1  档案化：对每台 i 维护活跃指示 aᵢ(t)（1 s）；结构相位（对齐/定时）直接从历史取相位，不做随机化2  相关保留重采样（二选一，按数据来源）：(a) 参数化相位模型：对齐租户共享固定偏移（零方差）；随机租户偏移 ~ U[0,P) 独立采样—— 仅用于“按配置生成的”负载（如混合相位阶梯）；同步关系由构造保证(b) 联合块自助（经验舰队）：对所有租户使用同一组时间块（块长 B·1 s，块内原序保留）重采样 —— 同时刻的跨租户相关性被块结构保留；禁止逐租户独立平移（那正是 iid 卷积的假设，会把同步结构洗掉）3  对每个重采样：A(b) ← Σᵢ aᵢ(b)；peak_r ← max_b A(b)；体验分位由 C/max(1,A) 逐租户聚合4  输出：P(peak&gt; C)、容量 N*(θ, ε) = max N s.t. Q_1-ε(peak) ≤ C/θ复杂度：O(R · N · P)，R=10³、N=64、P=60 s 时 ~4×10⁶ 次布尔运算（毫秒级）。</a:t>
             </a:r>
           </a:p>
         </p:txBody>
@@ -11924,7 +11908,7 @@
                 </a:solidFill>
                 <a:latin typeface="Microsoft YaHei"/>
               </a:rPr>
-              <a:t>8 物理机验证与安全容量模型</a:t>
+              <a:t>图</a:t>
             </a:r>
           </a:p>
           <a:p>
@@ -11940,16 +11924,40 @@
           </a:p>
         </p:txBody>
       </p:sp>
-      <p:sp>
-        <p:nvSpPr>
-          <p:cNvPr id="4" name="TextBox 3"/>
+      <p:pic>
+        <p:nvPicPr>
+          <p:cNvPr id="4" name="Picture 3" descr="fig28_ppc.png"/>
+          <p:cNvPicPr>
+            <a:picLocks noChangeAspect="1"/>
+          </p:cNvPicPr>
+          <p:nvPr/>
+        </p:nvPicPr>
+        <p:blipFill>
+          <a:blip r:embed="rId2"/>
+          <a:stretch>
+            <a:fillRect/>
+          </a:stretch>
+        </p:blipFill>
+        <p:spPr>
+          <a:xfrm>
+            <a:off x="1737360" y="960120"/>
+            <a:ext cx="8686800" cy="3226526"/>
+          </a:xfrm>
+          <a:prstGeom prst="rect">
+            <a:avLst/>
+          </a:prstGeom>
+        </p:spPr>
+      </p:pic>
+      <p:sp>
+        <p:nvSpPr>
+          <p:cNvPr id="5" name="TextBox 4"/>
           <p:cNvSpPr txBox="1"/>
           <p:nvPr/>
         </p:nvSpPr>
         <p:spPr>
           <a:xfrm>
-            <a:off x="502920" y="914400"/>
-            <a:ext cx="11155680" cy="5486400"/>
+            <a:off x="914400" y="4226646"/>
+            <a:ext cx="10332720" cy="548640"/>
           </a:xfrm>
           <a:prstGeom prst="rect">
             <a:avLst/>
@@ -11957,65 +11965,20 @@
           <a:noFill/>
         </p:spPr>
         <p:txBody>
-          <a:bodyPr wrap="square">
+          <a:bodyPr wrap="none">
             <a:spAutoFit/>
           </a:bodyPr>
           <a:lstStyle/>
           <a:p>
-            <a:pPr>
-              <a:lnSpc>
-                <a:spcPct val="108000"/>
-              </a:lnSpc>
-              <a:spcAft>
-                <a:spcPts val="400"/>
-              </a:spcAft>
-            </a:pPr>
-            <a:r>
-              <a:rPr sz="1250" b="0">
-                <a:solidFill>
-                  <a:srgbClr val="1C1C1E"/>
-                </a:solidFill>
-                <a:latin typeface="Microsoft YaHei"/>
-              </a:rPr>
-              <a:t>训练/测试分离：PPC 的超参数只有块长 B 与 θ（主口径固定 70%）；B 在前一半观察窗上选择（以预测峰值 CDF 与实测峰值的 KS 距离最小），后一半窗用于报告预测误差——阶梯回测（本文）即离线测试；在线对决（§7.4b）是端到端盲测（控制器状态与 8.6 的预测参数分离）。与边际卷积的本质差别：在相位（联合）结构上卷积，而不是在时间边缘上——这正是 3.5 节"幅度用截断证据、结构用时间史"的容量侧对应物。</a:t>
-            </a:r>
-          </a:p>
-          <a:p>
-            <a:pPr>
-              <a:lnSpc>
-                <a:spcPct val="108000"/>
-              </a:lnSpc>
-              <a:spcAft>
-                <a:spcPts val="400"/>
-              </a:spcAft>
-            </a:pPr>
-            <a:r>
-              <a:rPr sz="1250" b="0">
-                <a:solidFill>
-                  <a:srgbClr val="1C1C1E"/>
-                </a:solidFill>
-                <a:latin typeface="Microsoft YaHei"/>
-              </a:rPr>
-              <a:t>结果（图 28）。 同参数下：iid 卷积对 rand / mix25 / mix50 / mix75 / sync 五种结构给出同一个预测 24（完全盲区）；PPC 给出 24 / 16 / 13 / 12 / 10，其中 4/5 落入实测粗粒度断档区间（rand [24,32)、mix50 [13,16)、mix75 [10,13)、sync [8,12)），mix25 预测 16 偏保守（区间 [20,28)，单轮噪声）。口径澄清："落入断档区间"不等于"预测出精确 oracle"——例如 sync 的预测 10 落在 [8,12) 内是因为阶梯粒度（8→12）没有扫过 9–11，PPC 的 10 是否恰好是最大安全容量需要边界细扫才能回答（已排队：sync/4,8,10,12,14,16 与 rand/16,20,22,24,26,28,32，各 2 轮、每档 180 s 多周期采集）。纯随机端尾部乐观性与 §8.5 一致（由实测口径修正）。</a:t>
-            </a:r>
-          </a:p>
-          <a:p>
-            <a:pPr>
-              <a:lnSpc>
-                <a:spcPct val="108000"/>
-              </a:lnSpc>
-              <a:spcAft>
-                <a:spcPts val="400"/>
-              </a:spcAft>
-            </a:pPr>
-            <a:r>
-              <a:rPr sz="1250" b="0">
-                <a:solidFill>
-                  <a:srgbClr val="1C1C1E"/>
-                </a:solidFill>
-                <a:latin typeface="Microsoft YaHei"/>
-              </a:rPr>
-              <a:t>预测质量指标（比"落入断档"更严格的口径）。 对每个配置定义四项：超接（预测 ≥ 首个失败档；安全否决项，必须为 0）、未验证上探（预测 − 最后通过档；&gt;0 表示预测伸入了未扫描区间，需要边界细扫点头）、失败余量（首个失败档 − 预测）、保守差（最后通过档 − 预测，&gt;0 表示白让容量）。当前单轮数据：</a:t>
+            <a:pPr algn="ctr"/>
+            <a:r>
+              <a:rPr sz="1100" b="0">
+                <a:solidFill>
+                  <a:srgbClr val="5A6472"/>
+                </a:solidFill>
+                <a:latin typeface="Microsoft YaHei"/>
+              </a:rPr>
+              <a:t>图 28 相位剖面卷积：iid 卷积全盲（同一预测 24）vs PPC 随相位变化并落入实测断档</a:t>
             </a:r>
           </a:p>
         </p:txBody>
@@ -12029,6 +11992,210 @@
 </file>
 
 <file path=ppt/slides/slide133.xml><?xml version="1.0" encoding="utf-8"?>
+<p:sld xmlns:a="http://schemas.openxmlformats.org/drawingml/2006/main" xmlns:p="http://schemas.openxmlformats.org/presentationml/2006/main" xmlns:r="http://schemas.openxmlformats.org/officeDocument/2006/relationships">
+  <p:cSld>
+    <p:spTree>
+      <p:nvGrpSpPr>
+        <p:cNvPr id="1" name=""/>
+        <p:cNvGrpSpPr/>
+        <p:nvPr/>
+      </p:nvGrpSpPr>
+      <p:grpSpPr/>
+      <p:sp>
+        <p:nvSpPr>
+          <p:cNvPr id="2" name="Rectangle 1"/>
+          <p:cNvSpPr/>
+          <p:nvPr/>
+        </p:nvSpPr>
+        <p:spPr>
+          <a:xfrm>
+            <a:off x="0" y="0"/>
+            <a:ext cx="12191695" cy="6858000"/>
+          </a:xfrm>
+          <a:prstGeom prst="rect">
+            <a:avLst/>
+          </a:prstGeom>
+          <a:solidFill>
+            <a:srgbClr val="FFFFFF"/>
+          </a:solidFill>
+          <a:ln>
+            <a:noFill/>
+          </a:ln>
+        </p:spPr>
+        <p:style>
+          <a:lnRef idx="1">
+            <a:schemeClr val="accent1"/>
+          </a:lnRef>
+          <a:fillRef idx="3">
+            <a:schemeClr val="accent1"/>
+          </a:fillRef>
+          <a:effectRef idx="2">
+            <a:schemeClr val="accent1"/>
+          </a:effectRef>
+          <a:fontRef idx="minor">
+            <a:schemeClr val="lt1"/>
+          </a:fontRef>
+        </p:style>
+        <p:txBody>
+          <a:bodyPr rtlCol="0" anchor="ctr"/>
+          <a:lstStyle/>
+          <a:p>
+            <a:pPr algn="ctr"/>
+          </a:p>
+        </p:txBody>
+      </p:sp>
+      <p:sp>
+        <p:nvSpPr>
+          <p:cNvPr id="3" name="Rectangle 2"/>
+          <p:cNvSpPr/>
+          <p:nvPr/>
+        </p:nvSpPr>
+        <p:spPr>
+          <a:xfrm>
+            <a:off x="0" y="0"/>
+            <a:ext cx="12191695" cy="777240"/>
+          </a:xfrm>
+          <a:prstGeom prst="rect">
+            <a:avLst/>
+          </a:prstGeom>
+          <a:solidFill>
+            <a:srgbClr val="123A63"/>
+          </a:solidFill>
+          <a:ln>
+            <a:noFill/>
+          </a:ln>
+        </p:spPr>
+        <p:style>
+          <a:lnRef idx="1">
+            <a:schemeClr val="accent1"/>
+          </a:lnRef>
+          <a:fillRef idx="3">
+            <a:schemeClr val="accent1"/>
+          </a:fillRef>
+          <a:effectRef idx="2">
+            <a:schemeClr val="accent1"/>
+          </a:effectRef>
+          <a:fontRef idx="minor">
+            <a:schemeClr val="lt1"/>
+          </a:fontRef>
+        </p:style>
+        <p:txBody>
+          <a:bodyPr rtlCol="0" anchor="ctr" lIns="411480" tIns="54864"/>
+          <a:lstStyle/>
+          <a:p>
+            <a:pPr algn="ctr"/>
+            <a:r>
+              <a:rPr sz="2100" b="1">
+                <a:solidFill>
+                  <a:srgbClr val="FFFFFF"/>
+                </a:solidFill>
+                <a:latin typeface="Microsoft YaHei"/>
+              </a:rPr>
+              <a:t>8 物理机验证与安全容量模型</a:t>
+            </a:r>
+          </a:p>
+          <a:p>
+            <a:r>
+              <a:rPr sz="1200">
+                <a:solidFill>
+                  <a:srgbClr val="D8E2F0"/>
+                </a:solidFill>
+                <a:latin typeface="Microsoft YaHei"/>
+              </a:rPr>
+              <a:t>8.6 相位剖面卷积与"边际幻觉"命题（图 28）</a:t>
+            </a:r>
+          </a:p>
+        </p:txBody>
+      </p:sp>
+      <p:sp>
+        <p:nvSpPr>
+          <p:cNvPr id="4" name="TextBox 3"/>
+          <p:cNvSpPr txBox="1"/>
+          <p:nvPr/>
+        </p:nvSpPr>
+        <p:spPr>
+          <a:xfrm>
+            <a:off x="502920" y="914400"/>
+            <a:ext cx="11155680" cy="5486400"/>
+          </a:xfrm>
+          <a:prstGeom prst="rect">
+            <a:avLst/>
+          </a:prstGeom>
+          <a:noFill/>
+        </p:spPr>
+        <p:txBody>
+          <a:bodyPr wrap="square">
+            <a:spAutoFit/>
+          </a:bodyPr>
+          <a:lstStyle/>
+          <a:p>
+            <a:pPr>
+              <a:lnSpc>
+                <a:spcPct val="108000"/>
+              </a:lnSpc>
+              <a:spcAft>
+                <a:spcPts val="400"/>
+              </a:spcAft>
+            </a:pPr>
+            <a:r>
+              <a:rPr sz="1250" b="0">
+                <a:solidFill>
+                  <a:srgbClr val="1C1C1E"/>
+                </a:solidFill>
+                <a:latin typeface="Microsoft YaHei"/>
+              </a:rPr>
+              <a:t>训练/测试分离：PPC 的超参数只有块长 B 与 θ（主口径固定 70%）；B 在前一半观察窗上选择（以预测峰值 CDF 与实测峰值的 KS 距离最小），后一半窗用于报告预测误差——阶梯回测（本文）即离线测试；在线对决（§7.4b）是端到端盲测（控制器状态与 8.6 的预测参数分离）。与边际卷积的本质差别：在相位（联合）结构上卷积，而不是在时间边缘上——这正是 3.5 节"幅度用截断证据、结构用时间史"的容量侧对应物。</a:t>
+            </a:r>
+          </a:p>
+          <a:p>
+            <a:pPr>
+              <a:lnSpc>
+                <a:spcPct val="108000"/>
+              </a:lnSpc>
+              <a:spcAft>
+                <a:spcPts val="400"/>
+              </a:spcAft>
+            </a:pPr>
+            <a:r>
+              <a:rPr sz="1250" b="0">
+                <a:solidFill>
+                  <a:srgbClr val="1C1C1E"/>
+                </a:solidFill>
+                <a:latin typeface="Microsoft YaHei"/>
+              </a:rPr>
+              <a:t>结果（图 28）。 同参数下：iid 卷积对 rand / mix25 / mix50 / mix75 / sync 五种结构给出同一个预测 24（完全盲区）；PPC 给出 24 / 16 / 13 / 12 / 10，其中 4/5 落入实测粗粒度断档区间（rand [24,32)、mix50 [13,16)、mix75 [10,13)、sync [8,12)），mix25 预测 16 偏保守（区间 [20,28)，单轮噪声）。口径澄清："落入断档区间"不等于"预测出精确 oracle"——例如 sync 的预测 10 落在 [8,12) 内是因为阶梯粒度（8→12）没有扫过 9–11，PPC 的 10 是否恰好是最大安全容量需要边界细扫才能回答（已排队：sync/4,8,10,12,14,16 与 rand/16,20,22,24,26,28,32，各 2 轮、每档 180 s 多周期采集）。纯随机端尾部乐观性与 §8.5 一致（由实测口径修正）。</a:t>
+            </a:r>
+          </a:p>
+          <a:p>
+            <a:pPr>
+              <a:lnSpc>
+                <a:spcPct val="108000"/>
+              </a:lnSpc>
+              <a:spcAft>
+                <a:spcPts val="400"/>
+              </a:spcAft>
+            </a:pPr>
+            <a:r>
+              <a:rPr sz="1250" b="0">
+                <a:solidFill>
+                  <a:srgbClr val="1C1C1E"/>
+                </a:solidFill>
+                <a:latin typeface="Microsoft YaHei"/>
+              </a:rPr>
+              <a:t>预测质量指标（比"落入断档"更严格的口径）。 对每个配置定义四项：超接（预测 ≥ 首个失败档；安全否决项，必须为 0）、未验证上探（预测 − 最后通过档；&gt;0 表示预测伸入了未扫描区间，需要边界细扫点头）、失败余量（首个失败档 − 预测）、保守差（最后通过档 − 预测，&gt;0 表示白让容量）。当前单轮数据：</a:t>
+            </a:r>
+          </a:p>
+        </p:txBody>
+      </p:sp>
+    </p:spTree>
+  </p:cSld>
+  <p:clrMapOvr>
+    <a:masterClrMapping/>
+  </p:clrMapOvr>
+</p:sld>
+</file>
+
+<file path=ppt/slides/slide134.xml><?xml version="1.0" encoding="utf-8"?>
 <p:sld xmlns:a="http://schemas.openxmlformats.org/drawingml/2006/main" xmlns:p="http://schemas.openxmlformats.org/presentationml/2006/main" xmlns:r="http://schemas.openxmlformats.org/officeDocument/2006/relationships">
   <p:cSld>
     <p:spTree>
@@ -12979,191 +13146,6 @@
 </p:sld>
 </file>
 
-<file path=ppt/slides/slide134.xml><?xml version="1.0" encoding="utf-8"?>
-<p:sld xmlns:a="http://schemas.openxmlformats.org/drawingml/2006/main" xmlns:p="http://schemas.openxmlformats.org/presentationml/2006/main" xmlns:r="http://schemas.openxmlformats.org/officeDocument/2006/relationships">
-  <p:cSld>
-    <p:spTree>
-      <p:nvGrpSpPr>
-        <p:cNvPr id="1" name=""/>
-        <p:cNvGrpSpPr/>
-        <p:nvPr/>
-      </p:nvGrpSpPr>
-      <p:grpSpPr/>
-      <p:sp>
-        <p:nvSpPr>
-          <p:cNvPr id="2" name="Rectangle 1"/>
-          <p:cNvSpPr/>
-          <p:nvPr/>
-        </p:nvSpPr>
-        <p:spPr>
-          <a:xfrm>
-            <a:off x="0" y="0"/>
-            <a:ext cx="12191695" cy="6858000"/>
-          </a:xfrm>
-          <a:prstGeom prst="rect">
-            <a:avLst/>
-          </a:prstGeom>
-          <a:solidFill>
-            <a:srgbClr val="FFFFFF"/>
-          </a:solidFill>
-          <a:ln>
-            <a:noFill/>
-          </a:ln>
-        </p:spPr>
-        <p:style>
-          <a:lnRef idx="1">
-            <a:schemeClr val="accent1"/>
-          </a:lnRef>
-          <a:fillRef idx="3">
-            <a:schemeClr val="accent1"/>
-          </a:fillRef>
-          <a:effectRef idx="2">
-            <a:schemeClr val="accent1"/>
-          </a:effectRef>
-          <a:fontRef idx="minor">
-            <a:schemeClr val="lt1"/>
-          </a:fontRef>
-        </p:style>
-        <p:txBody>
-          <a:bodyPr rtlCol="0" anchor="ctr"/>
-          <a:lstStyle/>
-          <a:p>
-            <a:pPr algn="ctr"/>
-          </a:p>
-        </p:txBody>
-      </p:sp>
-      <p:sp>
-        <p:nvSpPr>
-          <p:cNvPr id="3" name="Rectangle 2"/>
-          <p:cNvSpPr/>
-          <p:nvPr/>
-        </p:nvSpPr>
-        <p:spPr>
-          <a:xfrm>
-            <a:off x="0" y="0"/>
-            <a:ext cx="12191695" cy="777240"/>
-          </a:xfrm>
-          <a:prstGeom prst="rect">
-            <a:avLst/>
-          </a:prstGeom>
-          <a:solidFill>
-            <a:srgbClr val="123A63"/>
-          </a:solidFill>
-          <a:ln>
-            <a:noFill/>
-          </a:ln>
-        </p:spPr>
-        <p:style>
-          <a:lnRef idx="1">
-            <a:schemeClr val="accent1"/>
-          </a:lnRef>
-          <a:fillRef idx="3">
-            <a:schemeClr val="accent1"/>
-          </a:fillRef>
-          <a:effectRef idx="2">
-            <a:schemeClr val="accent1"/>
-          </a:effectRef>
-          <a:fontRef idx="minor">
-            <a:schemeClr val="lt1"/>
-          </a:fontRef>
-        </p:style>
-        <p:txBody>
-          <a:bodyPr rtlCol="0" anchor="ctr" lIns="411480" tIns="54864"/>
-          <a:lstStyle/>
-          <a:p>
-            <a:pPr algn="ctr"/>
-            <a:r>
-              <a:rPr sz="2100" b="1">
-                <a:solidFill>
-                  <a:srgbClr val="FFFFFF"/>
-                </a:solidFill>
-                <a:latin typeface="Microsoft YaHei"/>
-              </a:rPr>
-              <a:t>8 物理机验证与安全容量模型</a:t>
-            </a:r>
-          </a:p>
-          <a:p>
-            <a:r>
-              <a:rPr sz="1200">
-                <a:solidFill>
-                  <a:srgbClr val="D8E2F0"/>
-                </a:solidFill>
-                <a:latin typeface="Microsoft YaHei"/>
-              </a:rPr>
-              <a:t>8.6 相位剖面卷积与"边际幻觉"命题（图 28）</a:t>
-            </a:r>
-          </a:p>
-        </p:txBody>
-      </p:sp>
-      <p:sp>
-        <p:nvSpPr>
-          <p:cNvPr id="4" name="TextBox 3"/>
-          <p:cNvSpPr txBox="1"/>
-          <p:nvPr/>
-        </p:nvSpPr>
-        <p:spPr>
-          <a:xfrm>
-            <a:off x="502920" y="914400"/>
-            <a:ext cx="11155680" cy="5486400"/>
-          </a:xfrm>
-          <a:prstGeom prst="rect">
-            <a:avLst/>
-          </a:prstGeom>
-          <a:noFill/>
-        </p:spPr>
-        <p:txBody>
-          <a:bodyPr wrap="square">
-            <a:spAutoFit/>
-          </a:bodyPr>
-          <a:lstStyle/>
-          <a:p>
-            <a:pPr>
-              <a:lnSpc>
-                <a:spcPct val="108000"/>
-              </a:lnSpc>
-              <a:spcAft>
-                <a:spcPts val="400"/>
-              </a:spcAft>
-            </a:pPr>
-            <a:r>
-              <a:rPr sz="1250" b="0">
-                <a:solidFill>
-                  <a:srgbClr val="1C1C1E"/>
-                </a:solidFill>
-                <a:latin typeface="Microsoft YaHei"/>
-              </a:rPr>
-              <a:t>读法：5/5 无超接（控制器安全性的必要条件）；mix75 与 sync 的预测伸入未扫描区间（+2），其"是否恰好安全"由 boundary 细扫（各档 180 s ×2 轮）直接回答；mix25 保守 4 台；rand/mix50 恰落在已验证边界上。这套指标替换"落入断档"作为 8.6 的验收口径。</a:t>
-            </a:r>
-          </a:p>
-          <a:p>
-            <a:pPr>
-              <a:lnSpc>
-                <a:spcPct val="108000"/>
-              </a:lnSpc>
-              <a:spcAft>
-                <a:spcPts val="400"/>
-              </a:spcAft>
-            </a:pPr>
-            <a:r>
-              <a:rPr sz="1250" b="0">
-                <a:solidFill>
-                  <a:srgbClr val="1C1C1E"/>
-                </a:solidFill>
-                <a:latin typeface="Microsoft YaHei"/>
-              </a:rPr>
-              <a:t>边界。 PPC 需要相位史（冷启动退化为类别先验/观察窗）；随机端仍需实测口径；本节验证为离线回测 + 对决中的在线决策（ours 即 PPC 的作动器；对齐场景 v1 停在 8 台断档，v2 复核与边界细扫进行中——不断言精确 oracle）。</a:t>
-            </a:r>
-          </a:p>
-        </p:txBody>
-      </p:sp>
-    </p:spTree>
-  </p:cSld>
-  <p:clrMapOvr>
-    <a:masterClrMapping/>
-  </p:clrMapOvr>
-</p:sld>
-</file>
-
 <file path=ppt/slides/slide135.xml><?xml version="1.0" encoding="utf-8"?>
 <p:sld xmlns:a="http://schemas.openxmlformats.org/drawingml/2006/main" xmlns:p="http://schemas.openxmlformats.org/presentationml/2006/main" xmlns:r="http://schemas.openxmlformats.org/officeDocument/2006/relationships">
   <p:cSld>
@@ -13275,442 +13257,72 @@
                 </a:solidFill>
                 <a:latin typeface="Microsoft YaHei"/>
               </a:rPr>
-              <a:t>8.7 与 BeroHost 的一致性小结</a:t>
-            </a:r>
-          </a:p>
-        </p:txBody>
-      </p:sp>
-      <p:graphicFrame>
-        <p:nvGraphicFramePr>
-          <p:cNvPr id="4" name="Table 3"/>
-          <p:cNvGraphicFramePr>
-            <a:graphicFrameLocks noGrp="1"/>
-          </p:cNvGraphicFramePr>
-          <p:nvPr/>
-        </p:nvGraphicFramePr>
-        <p:xfrm>
-          <a:off x="502920" y="960120"/>
-          <a:ext cx="11155680" cy="2560320"/>
-        </p:xfrm>
-        <a:graphic>
-          <a:graphicData uri="http://schemas.openxmlformats.org/drawingml/2006/table">
-            <a:tbl>
-              <a:tblPr firstRow="1" bandRow="1">
-                <a:tableStyleId>{5C22544A-7EE6-4342-B048-85BDC9FD1C3A}</a:tableStyleId>
-              </a:tblPr>
-              <a:tblGrid>
-                <a:gridCol w="3718560"/>
-                <a:gridCol w="3718560"/>
-                <a:gridCol w="3718560"/>
-              </a:tblGrid>
-              <a:tr h="365760">
-                <a:tc>
-                  <a:txBody>
-                    <a:bodyPr/>
-                    <a:lstStyle/>
-                    <a:p>
-                      <a:r>
-                        <a:rPr sz="1050" b="1">
-                          <a:solidFill>
-                            <a:srgbClr val="FFFFFF"/>
-                          </a:solidFill>
-                          <a:latin typeface="Microsoft YaHei"/>
-                        </a:rPr>
-                        <a:t>结论</a:t>
-                      </a:r>
-                    </a:p>
-                  </a:txBody>
-                  <a:tcPr>
-                    <a:solidFill>
-                      <a:srgbClr val="123A63"/>
-                    </a:solidFill>
-                  </a:tcPr>
-                </a:tc>
-                <a:tc>
-                  <a:txBody>
-                    <a:bodyPr/>
-                    <a:lstStyle/>
-                    <a:p>
-                      <a:r>
-                        <a:rPr sz="1050" b="1">
-                          <a:solidFill>
-                            <a:srgbClr val="FFFFFF"/>
-                          </a:solidFill>
-                          <a:latin typeface="Microsoft YaHei"/>
-                        </a:rPr>
-                        <a:t>BeroHost（4 vCPU 嵌套）</a:t>
-                      </a:r>
-                    </a:p>
-                  </a:txBody>
-                  <a:tcPr>
-                    <a:solidFill>
-                      <a:srgbClr val="123A63"/>
-                    </a:solidFill>
-                  </a:tcPr>
-                </a:tc>
-                <a:tc>
-                  <a:txBody>
-                    <a:bodyPr/>
-                    <a:lstStyle/>
-                    <a:p>
-                      <a:r>
-                        <a:rPr sz="1050" b="1">
-                          <a:solidFill>
-                            <a:srgbClr val="FFFFFF"/>
-                          </a:solidFill>
-                          <a:latin typeface="Microsoft YaHei"/>
-                        </a:rPr>
-                        <a:t>物理机（96 线程）</a:t>
-                      </a:r>
-                    </a:p>
-                  </a:txBody>
-                  <a:tcPr>
-                    <a:solidFill>
-                      <a:srgbClr val="123A63"/>
-                    </a:solidFill>
-                  </a:tcPr>
-                </a:tc>
-              </a:tr>
-              <a:tr h="365760">
-                <a:tc>
-                  <a:txBody>
-                    <a:bodyPr/>
-                    <a:lstStyle/>
-                    <a:p>
-                      <a:r>
-                        <a:rPr sz="1000" b="0">
-                          <a:solidFill>
-                            <a:srgbClr val="1C1C1E"/>
-                          </a:solidFill>
-                          <a:latin typeface="Microsoft YaHei"/>
-                        </a:rPr>
-                        <a:t>膝点在共享池饱和处</a:t>
-                      </a:r>
-                    </a:p>
-                  </a:txBody>
-                  <a:tcPr/>
-                </a:tc>
-                <a:tc>
-                  <a:txBody>
-                    <a:bodyPr/>
-                    <a:lstStyle/>
-                    <a:p>
-                      <a:r>
-                        <a:rPr sz="1000" b="0">
-                          <a:solidFill>
-                            <a:srgbClr val="1C1C1E"/>
-                          </a:solidFill>
-                          <a:latin typeface="Microsoft YaHei"/>
-                        </a:rPr>
-                        <a:t>3→4 台（2 核租户池）</a:t>
-                      </a:r>
-                    </a:p>
-                  </a:txBody>
-                  <a:tcPr/>
-                </a:tc>
-                <a:tc>
-                  <a:txBody>
-                    <a:bodyPr/>
-                    <a:lstStyle/>
-                    <a:p>
-                      <a:r>
-                        <a:rPr sz="1000" b="0">
-                          <a:solidFill>
-                            <a:srgbClr val="1C1C1E"/>
-                          </a:solidFill>
-                          <a:latin typeface="Microsoft YaHei"/>
-                        </a:rPr>
-                        <a:t>2/4/16 核池全部在饱和点（细扫 L15→L16）</a:t>
-                      </a:r>
-                    </a:p>
-                  </a:txBody>
-                  <a:tcPr/>
-                </a:tc>
-              </a:tr>
-              <a:tr h="365760">
-                <a:tc>
-                  <a:txBody>
-                    <a:bodyPr/>
-                    <a:lstStyle/>
-                    <a:p>
-                      <a:r>
-                        <a:rPr sz="1000" b="0">
-                          <a:solidFill>
-                            <a:srgbClr val="1C1C1E"/>
-                          </a:solidFill>
-                          <a:latin typeface="Microsoft YaHei"/>
-                        </a:rPr>
-                        <a:t>隔离护尾</a:t>
-                      </a:r>
-                    </a:p>
-                  </a:txBody>
-                  <a:tcPr/>
-                </a:tc>
-                <a:tc>
-                  <a:txBody>
-                    <a:bodyPr/>
-                    <a:lstStyle/>
-                    <a:p>
-                      <a:r>
-                        <a:rPr sz="1000" b="0">
-                          <a:solidFill>
-                            <a:srgbClr val="1C1C1E"/>
-                          </a:solidFill>
-                          <a:latin typeface="Microsoft YaHei"/>
-                        </a:rPr>
-                        <a:t>P99≈2.9–3.2 ms</a:t>
-                      </a:r>
-                    </a:p>
-                  </a:txBody>
-                  <a:tcPr/>
-                </a:tc>
-                <a:tc>
-                  <a:txBody>
-                    <a:bodyPr/>
-                    <a:lstStyle/>
-                    <a:p>
-                      <a:r>
-                        <a:rPr sz="1000" b="0">
-                          <a:solidFill>
-                            <a:srgbClr val="1C1C1E"/>
-                          </a:solidFill>
-                          <a:latin typeface="Microsoft YaHei"/>
-                        </a:rPr>
-                        <a:t>P99 0.68–0.78 ms（0–2.5× 超售）</a:t>
-                      </a:r>
-                    </a:p>
-                  </a:txBody>
-                  <a:tcPr/>
-                </a:tc>
-              </a:tr>
-              <a:tr h="365760">
-                <a:tc>
-                  <a:txBody>
-                    <a:bodyPr/>
-                    <a:lstStyle/>
-                    <a:p>
-                      <a:r>
-                        <a:rPr sz="1000" b="0">
-                          <a:solidFill>
-                            <a:srgbClr val="1C1C1E"/>
-                          </a:solidFill>
-                          <a:latin typeface="Microsoft YaHei"/>
-                        </a:rPr>
-                        <a:t>同步 → 周期尖峰</a:t>
-                      </a:r>
-                    </a:p>
-                  </a:txBody>
-                  <a:tcPr/>
-                </a:tc>
-                <a:tc>
-                  <a:txBody>
-                    <a:bodyPr/>
-                    <a:lstStyle/>
-                    <a:p>
-                      <a:r>
-                        <a:rPr sz="1000" b="0">
-                          <a:solidFill>
-                            <a:srgbClr val="1C1C1E"/>
-                          </a:solidFill>
-                          <a:latin typeface="Microsoft YaHei"/>
-                        </a:rPr>
-                        <a:t>60 s 周期（6 客户）</a:t>
-                      </a:r>
-                    </a:p>
-                  </a:txBody>
-                  <a:tcPr/>
-                </a:tc>
-                <a:tc>
-                  <a:txBody>
-                    <a:bodyPr/>
-                    <a:lstStyle/>
-                    <a:p>
-                      <a:r>
-                        <a:rPr sz="1000" b="0">
-                          <a:solidFill>
-                            <a:srgbClr val="1C1C1E"/>
-                          </a:solidFill>
-                          <a:latin typeface="Microsoft YaHei"/>
-                        </a:rPr>
-                        <a:t>60 s 周期（64 客户，3 轮复现、簇间隔全部精确 60 s）</a:t>
-                      </a:r>
-                    </a:p>
-                  </a:txBody>
-                  <a:tcPr/>
-                </a:tc>
-              </a:tr>
-              <a:tr h="365760">
-                <a:tc>
-                  <a:txBody>
-                    <a:bodyPr/>
-                    <a:lstStyle/>
-                    <a:p>
-                      <a:r>
-                        <a:rPr sz="1000" b="0">
-                          <a:solidFill>
-                            <a:srgbClr val="1C1C1E"/>
-                          </a:solidFill>
-                          <a:latin typeface="Microsoft YaHei"/>
-                        </a:rPr>
-                        <a:t>软手段不护尾 / 硬限速可靠</a:t>
-                      </a:r>
-                    </a:p>
-                  </a:txBody>
-                  <a:tcPr/>
-                </a:tc>
-                <a:tc>
-                  <a:txBody>
-                    <a:bodyPr/>
-                    <a:lstStyle/>
-                    <a:p>
-                      <a:r>
-                        <a:rPr sz="1000" b="0">
-                          <a:solidFill>
-                            <a:srgbClr val="1C1C1E"/>
-                          </a:solidFill>
-                          <a:latin typeface="Microsoft YaHei"/>
-                        </a:rPr>
-                        <a:t>已验证</a:t>
-                      </a:r>
-                    </a:p>
-                  </a:txBody>
-                  <a:tcPr/>
-                </a:tc>
-                <a:tc>
-                  <a:txBody>
-                    <a:bodyPr/>
-                    <a:lstStyle/>
-                    <a:p>
-                      <a:r>
-                        <a:rPr sz="1000" b="0">
-                          <a:solidFill>
-                            <a:srgbClr val="1C1C1E"/>
-                          </a:solidFill>
-                          <a:latin typeface="Microsoft YaHei"/>
-                        </a:rPr>
-                        <a:t>（物理机轮次续做）</a:t>
-                      </a:r>
-                    </a:p>
-                  </a:txBody>
-                  <a:tcPr/>
-                </a:tc>
-              </a:tr>
-              <a:tr h="365760">
-                <a:tc>
-                  <a:txBody>
-                    <a:bodyPr/>
-                    <a:lstStyle/>
-                    <a:p>
-                      <a:r>
-                        <a:rPr sz="1000" b="0">
-                          <a:solidFill>
-                            <a:srgbClr val="1C1C1E"/>
-                          </a:solidFill>
-                          <a:latin typeface="Microsoft YaHei"/>
-                        </a:rPr>
-                        <a:t>安全售卖容量</a:t>
-                      </a:r>
-                    </a:p>
-                  </a:txBody>
-                  <a:tcPr/>
-                </a:tc>
-                <a:tc>
-                  <a:txBody>
-                    <a:bodyPr/>
-                    <a:lstStyle/>
-                    <a:p>
-                      <a:r>
-                        <a:rPr sz="1000" b="0">
-                          <a:solidFill>
-                            <a:srgbClr val="1C1C1E"/>
-                          </a:solidFill>
-                          <a:latin typeface="Microsoft YaHei"/>
-                        </a:rPr>
-                        <a:t>定性（预算内 3 席）</a:t>
-                      </a:r>
-                    </a:p>
-                  </a:txBody>
-                  <a:tcPr/>
-                </a:tc>
-                <a:tc>
-                  <a:txBody>
-                    <a:bodyPr/>
-                    <a:lstStyle/>
-                    <a:p>
-                      <a:r>
-                        <a:rPr sz="1000" b="0">
-                          <a:solidFill>
-                            <a:srgbClr val="1C1C1E"/>
-                          </a:solidFill>
-                          <a:latin typeface="Microsoft YaHei"/>
-                        </a:rPr>
-                        <a:t>定量：主口径 3×（24 vs 8），随质量口径 2×–5×</a:t>
-                      </a:r>
-                    </a:p>
-                  </a:txBody>
-                  <a:tcPr/>
-                </a:tc>
-              </a:tr>
-              <a:tr h="365760">
-                <a:tc>
-                  <a:txBody>
-                    <a:bodyPr/>
-                    <a:lstStyle/>
-                    <a:p>
-                      <a:r>
-                        <a:rPr sz="1000" b="0">
-                          <a:solidFill>
-                            <a:srgbClr val="1C1C1E"/>
-                          </a:solidFill>
-                          <a:latin typeface="Microsoft YaHei"/>
-                        </a:rPr>
-                        <a:t>容量模型预测 N*(φ)</a:t>
-                      </a:r>
-                    </a:p>
-                  </a:txBody>
-                  <a:tcPr/>
-                </a:tc>
-                <a:tc>
-                  <a:txBody>
-                    <a:bodyPr/>
-                    <a:lstStyle/>
-                    <a:p>
-                      <a:r>
-                        <a:rPr sz="1000" b="0">
-                          <a:solidFill>
-                            <a:srgbClr val="1C1C1E"/>
-                          </a:solidFill>
-                          <a:latin typeface="Microsoft YaHei"/>
-                        </a:rPr>
-                        <a:t>—（单核数床）</a:t>
-                      </a:r>
-                    </a:p>
-                  </a:txBody>
-                  <a:tcPr/>
-                </a:tc>
-                <a:tc>
-                  <a:txBody>
-                    <a:bodyPr/>
-                    <a:lstStyle/>
-                    <a:p>
-                      <a:r>
-                        <a:rPr sz="1000" b="0">
-                          <a:solidFill>
-                            <a:srgbClr val="1C1C1E"/>
-                          </a:solidFill>
-                          <a:latin typeface="Microsoft YaHei"/>
-                        </a:rPr>
-                        <a:t>φ=0.50/0.75 命中断点、φ=0.25 偏保守（单轮首验，图 21）</a:t>
-                      </a:r>
-                    </a:p>
-                  </a:txBody>
-                  <a:tcPr/>
-                </a:tc>
-              </a:tr>
-            </a:tbl>
-          </a:graphicData>
-        </a:graphic>
-      </p:graphicFrame>
+              <a:t>8.6 相位剖面卷积与"边际幻觉"命题（图 28）</a:t>
+            </a:r>
+          </a:p>
+        </p:txBody>
+      </p:sp>
+      <p:sp>
+        <p:nvSpPr>
+          <p:cNvPr id="4" name="TextBox 3"/>
+          <p:cNvSpPr txBox="1"/>
+          <p:nvPr/>
+        </p:nvSpPr>
+        <p:spPr>
+          <a:xfrm>
+            <a:off x="502920" y="914400"/>
+            <a:ext cx="11155680" cy="5486400"/>
+          </a:xfrm>
+          <a:prstGeom prst="rect">
+            <a:avLst/>
+          </a:prstGeom>
+          <a:noFill/>
+        </p:spPr>
+        <p:txBody>
+          <a:bodyPr wrap="square">
+            <a:spAutoFit/>
+          </a:bodyPr>
+          <a:lstStyle/>
+          <a:p>
+            <a:pPr>
+              <a:lnSpc>
+                <a:spcPct val="108000"/>
+              </a:lnSpc>
+              <a:spcAft>
+                <a:spcPts val="400"/>
+              </a:spcAft>
+            </a:pPr>
+            <a:r>
+              <a:rPr sz="1250" b="0">
+                <a:solidFill>
+                  <a:srgbClr val="1C1C1E"/>
+                </a:solidFill>
+                <a:latin typeface="Microsoft YaHei"/>
+              </a:rPr>
+              <a:t>读法：5/5 无超接（控制器安全性的必要条件）；mix75 与 sync 的预测伸入未扫描区间（+2），其"是否恰好安全"由 boundary 细扫（各档 180 s ×2 轮）直接回答；mix25 保守 4 台；rand/mix50 恰落在已验证边界上。这套指标替换"落入断档"作为 8.6 的验收口径。</a:t>
+            </a:r>
+          </a:p>
+          <a:p>
+            <a:pPr>
+              <a:lnSpc>
+                <a:spcPct val="108000"/>
+              </a:lnSpc>
+              <a:spcAft>
+                <a:spcPts val="400"/>
+              </a:spcAft>
+            </a:pPr>
+            <a:r>
+              <a:rPr sz="1250" b="0">
+                <a:solidFill>
+                  <a:srgbClr val="1C1C1E"/>
+                </a:solidFill>
+                <a:latin typeface="Microsoft YaHei"/>
+              </a:rPr>
+              <a:t>边界。 PPC 需要相位史（冷启动退化为类别先验/观察窗）；随机端仍需实测口径；本节验证为离线回测 + 对决中的在线决策（ours 即 PPC 的作动器；对齐场景 v1 停在 8 台断档，v2 复核与边界细扫进行中——不断言精确 oracle）。</a:t>
+            </a:r>
+          </a:p>
+        </p:txBody>
+      </p:sp>
     </p:spTree>
   </p:cSld>
   <p:clrMapOvr>
@@ -13830,91 +13442,442 @@
                 </a:solidFill>
                 <a:latin typeface="Microsoft YaHei"/>
               </a:rPr>
-              <a:t>8.8 本章数据与工件</a:t>
-            </a:r>
-          </a:p>
-        </p:txBody>
-      </p:sp>
-      <p:sp>
-        <p:nvSpPr>
-          <p:cNvPr id="4" name="TextBox 3"/>
-          <p:cNvSpPr txBox="1"/>
-          <p:nvPr/>
-        </p:nvSpPr>
-        <p:spPr>
-          <a:xfrm>
-            <a:off x="502920" y="914400"/>
-            <a:ext cx="11155680" cy="5486400"/>
-          </a:xfrm>
-          <a:prstGeom prst="rect">
-            <a:avLst/>
-          </a:prstGeom>
-          <a:noFill/>
-        </p:spPr>
-        <p:txBody>
-          <a:bodyPr wrap="square">
-            <a:spAutoFit/>
-          </a:bodyPr>
-          <a:lstStyle/>
-          <a:p>
-            <a:pPr lvl="1">
-              <a:lnSpc>
-                <a:spcPct val="108000"/>
-              </a:lnSpc>
-              <a:spcAft>
-                <a:spcPts val="400"/>
-              </a:spcAft>
-            </a:pPr>
-            <a:r>
-              <a:rPr sz="1200" b="0">
-                <a:solidFill>
-                  <a:srgbClr val="1C1C1E"/>
-                </a:solidFill>
-                <a:latin typeface="Microsoft YaHei"/>
-              </a:rPr>
-              <a:t>• 数据：research_data/phys8269_pilot/（多规模扫描 JSONL + 细膝点 4 轮 + 同步 3 轮探针 raw + 售卖阶梯 JSONL + 分析文档）</a:t>
-            </a:r>
-          </a:p>
-          <a:p>
-            <a:pPr lvl="1">
-              <a:lnSpc>
-                <a:spcPct val="108000"/>
-              </a:lnSpc>
-              <a:spcAft>
-                <a:spcPts val="400"/>
-              </a:spcAft>
-            </a:pPr>
-            <a:r>
-              <a:rPr sz="1200" b="0">
-                <a:solidFill>
-                  <a:srgbClr val="1C1C1E"/>
-                </a:solidFill>
-                <a:latin typeface="Microsoft YaHei"/>
-              </a:rPr>
-              <a:t>• 图：figs/fig14_phys_knee.png、fig15_phys_sync.png（含 3 轮簇间隔复现）、fig16_phys_sell.png（一键复现：figs/make_phys_figs.py）</a:t>
-            </a:r>
-          </a:p>
-          <a:p>
-            <a:pPr lvl="1">
-              <a:lnSpc>
-                <a:spcPct val="108000"/>
-              </a:lnSpc>
-              <a:spcAft>
-                <a:spcPts val="400"/>
-              </a:spcAft>
-            </a:pPr>
-            <a:r>
-              <a:rPr sz="1200" b="0">
-                <a:solidFill>
-                  <a:srgbClr val="1C1C1E"/>
-                </a:solidFill>
-                <a:latin typeface="Microsoft YaHei"/>
-              </a:rPr>
-              <a:t>• 工具：tools/tb_sweep.py（膝点）、tools/tb_sync.py（相位）、tools/tb_sell.py（售卖阶梯），全部宿主机侧执行</a:t>
-            </a:r>
-          </a:p>
-        </p:txBody>
-      </p:sp>
+              <a:t>8.7 与 BeroHost 的一致性小结</a:t>
+            </a:r>
+          </a:p>
+        </p:txBody>
+      </p:sp>
+      <p:graphicFrame>
+        <p:nvGraphicFramePr>
+          <p:cNvPr id="4" name="Table 3"/>
+          <p:cNvGraphicFramePr>
+            <a:graphicFrameLocks noGrp="1"/>
+          </p:cNvGraphicFramePr>
+          <p:nvPr/>
+        </p:nvGraphicFramePr>
+        <p:xfrm>
+          <a:off x="502920" y="960120"/>
+          <a:ext cx="11155680" cy="2560320"/>
+        </p:xfrm>
+        <a:graphic>
+          <a:graphicData uri="http://schemas.openxmlformats.org/drawingml/2006/table">
+            <a:tbl>
+              <a:tblPr firstRow="1" bandRow="1">
+                <a:tableStyleId>{5C22544A-7EE6-4342-B048-85BDC9FD1C3A}</a:tableStyleId>
+              </a:tblPr>
+              <a:tblGrid>
+                <a:gridCol w="3718560"/>
+                <a:gridCol w="3718560"/>
+                <a:gridCol w="3718560"/>
+              </a:tblGrid>
+              <a:tr h="365760">
+                <a:tc>
+                  <a:txBody>
+                    <a:bodyPr/>
+                    <a:lstStyle/>
+                    <a:p>
+                      <a:r>
+                        <a:rPr sz="1050" b="1">
+                          <a:solidFill>
+                            <a:srgbClr val="FFFFFF"/>
+                          </a:solidFill>
+                          <a:latin typeface="Microsoft YaHei"/>
+                        </a:rPr>
+                        <a:t>结论</a:t>
+                      </a:r>
+                    </a:p>
+                  </a:txBody>
+                  <a:tcPr>
+                    <a:solidFill>
+                      <a:srgbClr val="123A63"/>
+                    </a:solidFill>
+                  </a:tcPr>
+                </a:tc>
+                <a:tc>
+                  <a:txBody>
+                    <a:bodyPr/>
+                    <a:lstStyle/>
+                    <a:p>
+                      <a:r>
+                        <a:rPr sz="1050" b="1">
+                          <a:solidFill>
+                            <a:srgbClr val="FFFFFF"/>
+                          </a:solidFill>
+                          <a:latin typeface="Microsoft YaHei"/>
+                        </a:rPr>
+                        <a:t>BeroHost（4 vCPU 嵌套）</a:t>
+                      </a:r>
+                    </a:p>
+                  </a:txBody>
+                  <a:tcPr>
+                    <a:solidFill>
+                      <a:srgbClr val="123A63"/>
+                    </a:solidFill>
+                  </a:tcPr>
+                </a:tc>
+                <a:tc>
+                  <a:txBody>
+                    <a:bodyPr/>
+                    <a:lstStyle/>
+                    <a:p>
+                      <a:r>
+                        <a:rPr sz="1050" b="1">
+                          <a:solidFill>
+                            <a:srgbClr val="FFFFFF"/>
+                          </a:solidFill>
+                          <a:latin typeface="Microsoft YaHei"/>
+                        </a:rPr>
+                        <a:t>物理机（96 线程）</a:t>
+                      </a:r>
+                    </a:p>
+                  </a:txBody>
+                  <a:tcPr>
+                    <a:solidFill>
+                      <a:srgbClr val="123A63"/>
+                    </a:solidFill>
+                  </a:tcPr>
+                </a:tc>
+              </a:tr>
+              <a:tr h="365760">
+                <a:tc>
+                  <a:txBody>
+                    <a:bodyPr/>
+                    <a:lstStyle/>
+                    <a:p>
+                      <a:r>
+                        <a:rPr sz="1000" b="0">
+                          <a:solidFill>
+                            <a:srgbClr val="1C1C1E"/>
+                          </a:solidFill>
+                          <a:latin typeface="Microsoft YaHei"/>
+                        </a:rPr>
+                        <a:t>膝点在共享池饱和处</a:t>
+                      </a:r>
+                    </a:p>
+                  </a:txBody>
+                  <a:tcPr/>
+                </a:tc>
+                <a:tc>
+                  <a:txBody>
+                    <a:bodyPr/>
+                    <a:lstStyle/>
+                    <a:p>
+                      <a:r>
+                        <a:rPr sz="1000" b="0">
+                          <a:solidFill>
+                            <a:srgbClr val="1C1C1E"/>
+                          </a:solidFill>
+                          <a:latin typeface="Microsoft YaHei"/>
+                        </a:rPr>
+                        <a:t>3→4 台（2 核租户池）</a:t>
+                      </a:r>
+                    </a:p>
+                  </a:txBody>
+                  <a:tcPr/>
+                </a:tc>
+                <a:tc>
+                  <a:txBody>
+                    <a:bodyPr/>
+                    <a:lstStyle/>
+                    <a:p>
+                      <a:r>
+                        <a:rPr sz="1000" b="0">
+                          <a:solidFill>
+                            <a:srgbClr val="1C1C1E"/>
+                          </a:solidFill>
+                          <a:latin typeface="Microsoft YaHei"/>
+                        </a:rPr>
+                        <a:t>2/4/16 核池全部在饱和点（细扫 L15→L16）</a:t>
+                      </a:r>
+                    </a:p>
+                  </a:txBody>
+                  <a:tcPr/>
+                </a:tc>
+              </a:tr>
+              <a:tr h="365760">
+                <a:tc>
+                  <a:txBody>
+                    <a:bodyPr/>
+                    <a:lstStyle/>
+                    <a:p>
+                      <a:r>
+                        <a:rPr sz="1000" b="0">
+                          <a:solidFill>
+                            <a:srgbClr val="1C1C1E"/>
+                          </a:solidFill>
+                          <a:latin typeface="Microsoft YaHei"/>
+                        </a:rPr>
+                        <a:t>隔离护尾</a:t>
+                      </a:r>
+                    </a:p>
+                  </a:txBody>
+                  <a:tcPr/>
+                </a:tc>
+                <a:tc>
+                  <a:txBody>
+                    <a:bodyPr/>
+                    <a:lstStyle/>
+                    <a:p>
+                      <a:r>
+                        <a:rPr sz="1000" b="0">
+                          <a:solidFill>
+                            <a:srgbClr val="1C1C1E"/>
+                          </a:solidFill>
+                          <a:latin typeface="Microsoft YaHei"/>
+                        </a:rPr>
+                        <a:t>P99≈2.9–3.2 ms</a:t>
+                      </a:r>
+                    </a:p>
+                  </a:txBody>
+                  <a:tcPr/>
+                </a:tc>
+                <a:tc>
+                  <a:txBody>
+                    <a:bodyPr/>
+                    <a:lstStyle/>
+                    <a:p>
+                      <a:r>
+                        <a:rPr sz="1000" b="0">
+                          <a:solidFill>
+                            <a:srgbClr val="1C1C1E"/>
+                          </a:solidFill>
+                          <a:latin typeface="Microsoft YaHei"/>
+                        </a:rPr>
+                        <a:t>P99 0.68–0.78 ms（0–2.5× 超售）</a:t>
+                      </a:r>
+                    </a:p>
+                  </a:txBody>
+                  <a:tcPr/>
+                </a:tc>
+              </a:tr>
+              <a:tr h="365760">
+                <a:tc>
+                  <a:txBody>
+                    <a:bodyPr/>
+                    <a:lstStyle/>
+                    <a:p>
+                      <a:r>
+                        <a:rPr sz="1000" b="0">
+                          <a:solidFill>
+                            <a:srgbClr val="1C1C1E"/>
+                          </a:solidFill>
+                          <a:latin typeface="Microsoft YaHei"/>
+                        </a:rPr>
+                        <a:t>同步 → 周期尖峰</a:t>
+                      </a:r>
+                    </a:p>
+                  </a:txBody>
+                  <a:tcPr/>
+                </a:tc>
+                <a:tc>
+                  <a:txBody>
+                    <a:bodyPr/>
+                    <a:lstStyle/>
+                    <a:p>
+                      <a:r>
+                        <a:rPr sz="1000" b="0">
+                          <a:solidFill>
+                            <a:srgbClr val="1C1C1E"/>
+                          </a:solidFill>
+                          <a:latin typeface="Microsoft YaHei"/>
+                        </a:rPr>
+                        <a:t>60 s 周期（6 客户）</a:t>
+                      </a:r>
+                    </a:p>
+                  </a:txBody>
+                  <a:tcPr/>
+                </a:tc>
+                <a:tc>
+                  <a:txBody>
+                    <a:bodyPr/>
+                    <a:lstStyle/>
+                    <a:p>
+                      <a:r>
+                        <a:rPr sz="1000" b="0">
+                          <a:solidFill>
+                            <a:srgbClr val="1C1C1E"/>
+                          </a:solidFill>
+                          <a:latin typeface="Microsoft YaHei"/>
+                        </a:rPr>
+                        <a:t>60 s 周期（64 客户，3 轮复现、簇间隔全部精确 60 s）</a:t>
+                      </a:r>
+                    </a:p>
+                  </a:txBody>
+                  <a:tcPr/>
+                </a:tc>
+              </a:tr>
+              <a:tr h="365760">
+                <a:tc>
+                  <a:txBody>
+                    <a:bodyPr/>
+                    <a:lstStyle/>
+                    <a:p>
+                      <a:r>
+                        <a:rPr sz="1000" b="0">
+                          <a:solidFill>
+                            <a:srgbClr val="1C1C1E"/>
+                          </a:solidFill>
+                          <a:latin typeface="Microsoft YaHei"/>
+                        </a:rPr>
+                        <a:t>软手段不护尾 / 硬限速可靠</a:t>
+                      </a:r>
+                    </a:p>
+                  </a:txBody>
+                  <a:tcPr/>
+                </a:tc>
+                <a:tc>
+                  <a:txBody>
+                    <a:bodyPr/>
+                    <a:lstStyle/>
+                    <a:p>
+                      <a:r>
+                        <a:rPr sz="1000" b="0">
+                          <a:solidFill>
+                            <a:srgbClr val="1C1C1E"/>
+                          </a:solidFill>
+                          <a:latin typeface="Microsoft YaHei"/>
+                        </a:rPr>
+                        <a:t>已验证</a:t>
+                      </a:r>
+                    </a:p>
+                  </a:txBody>
+                  <a:tcPr/>
+                </a:tc>
+                <a:tc>
+                  <a:txBody>
+                    <a:bodyPr/>
+                    <a:lstStyle/>
+                    <a:p>
+                      <a:r>
+                        <a:rPr sz="1000" b="0">
+                          <a:solidFill>
+                            <a:srgbClr val="1C1C1E"/>
+                          </a:solidFill>
+                          <a:latin typeface="Microsoft YaHei"/>
+                        </a:rPr>
+                        <a:t>（物理机轮次续做）</a:t>
+                      </a:r>
+                    </a:p>
+                  </a:txBody>
+                  <a:tcPr/>
+                </a:tc>
+              </a:tr>
+              <a:tr h="365760">
+                <a:tc>
+                  <a:txBody>
+                    <a:bodyPr/>
+                    <a:lstStyle/>
+                    <a:p>
+                      <a:r>
+                        <a:rPr sz="1000" b="0">
+                          <a:solidFill>
+                            <a:srgbClr val="1C1C1E"/>
+                          </a:solidFill>
+                          <a:latin typeface="Microsoft YaHei"/>
+                        </a:rPr>
+                        <a:t>安全售卖容量</a:t>
+                      </a:r>
+                    </a:p>
+                  </a:txBody>
+                  <a:tcPr/>
+                </a:tc>
+                <a:tc>
+                  <a:txBody>
+                    <a:bodyPr/>
+                    <a:lstStyle/>
+                    <a:p>
+                      <a:r>
+                        <a:rPr sz="1000" b="0">
+                          <a:solidFill>
+                            <a:srgbClr val="1C1C1E"/>
+                          </a:solidFill>
+                          <a:latin typeface="Microsoft YaHei"/>
+                        </a:rPr>
+                        <a:t>定性（预算内 3 席）</a:t>
+                      </a:r>
+                    </a:p>
+                  </a:txBody>
+                  <a:tcPr/>
+                </a:tc>
+                <a:tc>
+                  <a:txBody>
+                    <a:bodyPr/>
+                    <a:lstStyle/>
+                    <a:p>
+                      <a:r>
+                        <a:rPr sz="1000" b="0">
+                          <a:solidFill>
+                            <a:srgbClr val="1C1C1E"/>
+                          </a:solidFill>
+                          <a:latin typeface="Microsoft YaHei"/>
+                        </a:rPr>
+                        <a:t>定量：主口径 3×（24 vs 8），随质量口径 2×–5×</a:t>
+                      </a:r>
+                    </a:p>
+                  </a:txBody>
+                  <a:tcPr/>
+                </a:tc>
+              </a:tr>
+              <a:tr h="365760">
+                <a:tc>
+                  <a:txBody>
+                    <a:bodyPr/>
+                    <a:lstStyle/>
+                    <a:p>
+                      <a:r>
+                        <a:rPr sz="1000" b="0">
+                          <a:solidFill>
+                            <a:srgbClr val="1C1C1E"/>
+                          </a:solidFill>
+                          <a:latin typeface="Microsoft YaHei"/>
+                        </a:rPr>
+                        <a:t>容量模型预测 N*(φ)</a:t>
+                      </a:r>
+                    </a:p>
+                  </a:txBody>
+                  <a:tcPr/>
+                </a:tc>
+                <a:tc>
+                  <a:txBody>
+                    <a:bodyPr/>
+                    <a:lstStyle/>
+                    <a:p>
+                      <a:r>
+                        <a:rPr sz="1000" b="0">
+                          <a:solidFill>
+                            <a:srgbClr val="1C1C1E"/>
+                          </a:solidFill>
+                          <a:latin typeface="Microsoft YaHei"/>
+                        </a:rPr>
+                        <a:t>—（单核数床）</a:t>
+                      </a:r>
+                    </a:p>
+                  </a:txBody>
+                  <a:tcPr/>
+                </a:tc>
+                <a:tc>
+                  <a:txBody>
+                    <a:bodyPr/>
+                    <a:lstStyle/>
+                    <a:p>
+                      <a:r>
+                        <a:rPr sz="1000" b="0">
+                          <a:solidFill>
+                            <a:srgbClr val="1C1C1E"/>
+                          </a:solidFill>
+                          <a:latin typeface="Microsoft YaHei"/>
+                        </a:rPr>
+                        <a:t>φ=0.50/0.75 命中断点、φ=0.25 偏保守（单轮首验，图 21）</a:t>
+                      </a:r>
+                    </a:p>
+                  </a:txBody>
+                  <a:tcPr/>
+                </a:tc>
+              </a:tr>
+            </a:tbl>
+          </a:graphicData>
+        </a:graphic>
+      </p:graphicFrame>
     </p:spTree>
   </p:cSld>
   <p:clrMapOvr>
@@ -13984,8 +13947,8 @@
         </p:nvSpPr>
         <p:spPr>
           <a:xfrm>
-            <a:off x="0" y="2651760"/>
-            <a:ext cx="12191695" cy="1371600"/>
+            <a:off x="0" y="0"/>
+            <a:ext cx="12191695" cy="777240"/>
           </a:xfrm>
           <a:prstGeom prst="rect">
             <a:avLst/>
@@ -14012,18 +13975,109 @@
           </a:fontRef>
         </p:style>
         <p:txBody>
-          <a:bodyPr rtlCol="0" anchor="ctr" lIns="731520"/>
+          <a:bodyPr rtlCol="0" anchor="ctr" lIns="411480" tIns="54864"/>
           <a:lstStyle/>
           <a:p>
             <a:pPr algn="ctr"/>
             <a:r>
-              <a:rPr sz="3000" b="1">
+              <a:rPr sz="2100" b="1">
                 <a:solidFill>
                   <a:srgbClr val="FFFFFF"/>
                 </a:solidFill>
                 <a:latin typeface="Microsoft YaHei"/>
               </a:rPr>
-              <a:t>9 资源效率模块</a:t>
+              <a:t>8 物理机验证与安全容量模型</a:t>
+            </a:r>
+          </a:p>
+          <a:p>
+            <a:r>
+              <a:rPr sz="1200">
+                <a:solidFill>
+                  <a:srgbClr val="D8E2F0"/>
+                </a:solidFill>
+                <a:latin typeface="Microsoft YaHei"/>
+              </a:rPr>
+              <a:t>8.8 本章数据与工件</a:t>
+            </a:r>
+          </a:p>
+        </p:txBody>
+      </p:sp>
+      <p:sp>
+        <p:nvSpPr>
+          <p:cNvPr id="4" name="TextBox 3"/>
+          <p:cNvSpPr txBox="1"/>
+          <p:nvPr/>
+        </p:nvSpPr>
+        <p:spPr>
+          <a:xfrm>
+            <a:off x="502920" y="914400"/>
+            <a:ext cx="11155680" cy="5486400"/>
+          </a:xfrm>
+          <a:prstGeom prst="rect">
+            <a:avLst/>
+          </a:prstGeom>
+          <a:noFill/>
+        </p:spPr>
+        <p:txBody>
+          <a:bodyPr wrap="square">
+            <a:spAutoFit/>
+          </a:bodyPr>
+          <a:lstStyle/>
+          <a:p>
+            <a:pPr lvl="1">
+              <a:lnSpc>
+                <a:spcPct val="108000"/>
+              </a:lnSpc>
+              <a:spcAft>
+                <a:spcPts val="400"/>
+              </a:spcAft>
+            </a:pPr>
+            <a:r>
+              <a:rPr sz="1200" b="0">
+                <a:solidFill>
+                  <a:srgbClr val="1C1C1E"/>
+                </a:solidFill>
+                <a:latin typeface="Microsoft YaHei"/>
+              </a:rPr>
+              <a:t>• 数据：research_data/phys8269_pilot/（多规模扫描 JSONL + 细膝点 4 轮 + 同步 3 轮探针 raw + 售卖阶梯 JSONL + 分析文档）</a:t>
+            </a:r>
+          </a:p>
+          <a:p>
+            <a:pPr lvl="1">
+              <a:lnSpc>
+                <a:spcPct val="108000"/>
+              </a:lnSpc>
+              <a:spcAft>
+                <a:spcPts val="400"/>
+              </a:spcAft>
+            </a:pPr>
+            <a:r>
+              <a:rPr sz="1200" b="0">
+                <a:solidFill>
+                  <a:srgbClr val="1C1C1E"/>
+                </a:solidFill>
+                <a:latin typeface="Microsoft YaHei"/>
+              </a:rPr>
+              <a:t>• 图：figs/fig14_phys_knee.png、fig15_phys_sync.png（含 3 轮簇间隔复现）、fig16_phys_sell.png（一键复现：figs/make_phys_figs.py）</a:t>
+            </a:r>
+          </a:p>
+          <a:p>
+            <a:pPr lvl="1">
+              <a:lnSpc>
+                <a:spcPct val="108000"/>
+              </a:lnSpc>
+              <a:spcAft>
+                <a:spcPts val="400"/>
+              </a:spcAft>
+            </a:pPr>
+            <a:r>
+              <a:rPr sz="1200" b="0">
+                <a:solidFill>
+                  <a:srgbClr val="1C1C1E"/>
+                </a:solidFill>
+                <a:latin typeface="Microsoft YaHei"/>
+              </a:rPr>
+              <a:t>• 工具：tools/tb_sweep.py（膝点）、tools/tb_sync.py（相位）、tools/tb_sell.py（售卖阶梯），全部宿主机侧执行</a:t>
             </a:r>
           </a:p>
         </p:txBody>
@@ -14097,8 +14151,8 @@
         </p:nvSpPr>
         <p:spPr>
           <a:xfrm>
-            <a:off x="0" y="0"/>
-            <a:ext cx="12191695" cy="658368"/>
+            <a:off x="0" y="2651760"/>
+            <a:ext cx="12191695" cy="1371600"/>
           </a:xfrm>
           <a:prstGeom prst="rect">
             <a:avLst/>
@@ -14125,60 +14179,18 @@
           </a:fontRef>
         </p:style>
         <p:txBody>
-          <a:bodyPr rtlCol="0" anchor="ctr" lIns="411480" tIns="54864"/>
+          <a:bodyPr rtlCol="0" anchor="ctr" lIns="731520"/>
           <a:lstStyle/>
           <a:p>
             <a:pPr algn="ctr"/>
             <a:r>
-              <a:rPr sz="2100" b="1">
+              <a:rPr sz="3000" b="1">
                 <a:solidFill>
                   <a:srgbClr val="FFFFFF"/>
                 </a:solidFill>
                 <a:latin typeface="Microsoft YaHei"/>
               </a:rPr>
               <a:t>9 资源效率模块</a:t>
-            </a:r>
-          </a:p>
-        </p:txBody>
-      </p:sp>
-      <p:sp>
-        <p:nvSpPr>
-          <p:cNvPr id="4" name="TextBox 3"/>
-          <p:cNvSpPr txBox="1"/>
-          <p:nvPr/>
-        </p:nvSpPr>
-        <p:spPr>
-          <a:xfrm>
-            <a:off x="502920" y="914400"/>
-            <a:ext cx="11155680" cy="5486400"/>
-          </a:xfrm>
-          <a:prstGeom prst="rect">
-            <a:avLst/>
-          </a:prstGeom>
-          <a:noFill/>
-        </p:spPr>
-        <p:txBody>
-          <a:bodyPr wrap="square">
-            <a:spAutoFit/>
-          </a:bodyPr>
-          <a:lstStyle/>
-          <a:p>
-            <a:pPr>
-              <a:lnSpc>
-                <a:spcPct val="108000"/>
-              </a:lnSpc>
-              <a:spcAft>
-                <a:spcPts val="400"/>
-              </a:spcAft>
-            </a:pPr>
-            <a:r>
-              <a:rPr sz="1100" b="0">
-                <a:solidFill>
-                  <a:srgbClr val="5A6472"/>
-                </a:solidFill>
-                <a:latin typeface="Microsoft YaHei"/>
-              </a:rPr>
-              <a:t>〔本章承接"无回归的资源效率最大化"支柱（骨架 §9）：在"服务 P99 ≤ 10 ms + 客户速率不劣化 + VPS 可见内存不下降" 三条无回归约束下，逐资源给出精密控制的实测增益。Phase C 实验正在物理机上自动运行（screen phasec）， 数据落地后填入对应小节（规划图：Fig.22–26）。定位说明：本章为支撑性模块（核心贡献链在 3/5/7/8 章的识别—预测—行动三支柱）；若模块数据不齐，按评审建议缩减本章或移至后续工作。〕</a:t>
             </a:r>
           </a:p>
         </p:txBody>
@@ -14253,7 +14265,7 @@
         <p:spPr>
           <a:xfrm>
             <a:off x="0" y="0"/>
-            <a:ext cx="12191695" cy="777240"/>
+            <a:ext cx="12191695" cy="658368"/>
           </a:xfrm>
           <a:prstGeom prst="rect">
             <a:avLst/>
@@ -14292,17 +14304,6 @@
                 <a:latin typeface="Microsoft YaHei"/>
               </a:rPr>
               <a:t>9 资源效率模块</a:t>
-            </a:r>
-          </a:p>
-          <a:p>
-            <a:r>
-              <a:rPr sz="1200">
-                <a:solidFill>
-                  <a:srgbClr val="D8E2F0"/>
-                </a:solidFill>
-                <a:latin typeface="Microsoft YaHei"/>
-              </a:rPr>
-              <a:t>9.1 CPU：微周期配额——同样配额，精度决定客户速率（图 22）</a:t>
             </a:r>
           </a:p>
         </p:txBody>
@@ -14338,32 +14339,13 @@
               </a:spcAft>
             </a:pPr>
             <a:r>
-              <a:rPr sz="1250" b="0">
-                <a:solidFill>
-                  <a:srgbClr val="1C1C1E"/>
-                </a:solidFill>
-                <a:latin typeface="Microsoft YaHei"/>
-              </a:rPr>
-              <a:t>设置。 8 核池、5 台满载客户、各 50% 配额（cpu.max），周期取 2 / 4 / 10 / 100 ms / 1 s 五档 + 无配额基线；每档 15 s 稳定后读服务 P99、客户工作相速率与节流时长增量。注意内核下界：配额最小 1 ms，故 50% 配额的最小周期为 2 ms（500 µs 配额会被内核 EINVAL 拒绝——这是"高精度"的物理边界）。</a:t>
-            </a:r>
-          </a:p>
-          <a:p>
-            <a:pPr>
-              <a:lnSpc>
-                <a:spcPct val="108000"/>
-              </a:lnSpc>
-              <a:spcAft>
-                <a:spcPts val="400"/>
-              </a:spcAft>
-            </a:pPr>
-            <a:r>
-              <a:rPr sz="1250" b="0">
-                <a:solidFill>
-                  <a:srgbClr val="1C1C1E"/>
-                </a:solidFill>
-                <a:latin typeface="Microsoft YaHei"/>
-              </a:rPr>
-              <a:t>结果（表/图 22）。</a:t>
+              <a:rPr sz="1100" b="0">
+                <a:solidFill>
+                  <a:srgbClr val="5A6472"/>
+                </a:solidFill>
+                <a:latin typeface="Microsoft YaHei"/>
+              </a:rPr>
+              <a:t>〔本章承接"无回归的资源效率最大化"支柱（骨架 §9）：在"服务 P99 ≤ 10 ms + 客户速率不劣化 + VPS 可见内存不下降" 三条无回归约束下，逐资源给出精密控制的实测增益。Phase C 实验正在物理机上自动运行（screen phasec）， 数据落地后填入对应小节（规划图：Fig.22–26）。定位说明：本章为支撑性模块（核心贡献链在 3/5/7/8 章的识别—预测—行动三支柱）；若模块数据不齐，按评审建议缩减本章或移至后续工作。〕</a:t>
             </a:r>
           </a:p>
         </p:txBody>
@@ -14658,6 +14640,191 @@
           </a:p>
         </p:txBody>
       </p:sp>
+      <p:sp>
+        <p:nvSpPr>
+          <p:cNvPr id="4" name="TextBox 3"/>
+          <p:cNvSpPr txBox="1"/>
+          <p:nvPr/>
+        </p:nvSpPr>
+        <p:spPr>
+          <a:xfrm>
+            <a:off x="502920" y="914400"/>
+            <a:ext cx="11155680" cy="5486400"/>
+          </a:xfrm>
+          <a:prstGeom prst="rect">
+            <a:avLst/>
+          </a:prstGeom>
+          <a:noFill/>
+        </p:spPr>
+        <p:txBody>
+          <a:bodyPr wrap="square">
+            <a:spAutoFit/>
+          </a:bodyPr>
+          <a:lstStyle/>
+          <a:p>
+            <a:pPr>
+              <a:lnSpc>
+                <a:spcPct val="108000"/>
+              </a:lnSpc>
+              <a:spcAft>
+                <a:spcPts val="400"/>
+              </a:spcAft>
+            </a:pPr>
+            <a:r>
+              <a:rPr sz="1250" b="0">
+                <a:solidFill>
+                  <a:srgbClr val="1C1C1E"/>
+                </a:solidFill>
+                <a:latin typeface="Microsoft YaHei"/>
+              </a:rPr>
+              <a:t>设置。 8 核池、5 台满载客户、各 50% 配额（cpu.max），周期取 2 / 4 / 10 / 100 ms / 1 s 五档 + 无配额基线；每档 15 s 稳定后读服务 P99、客户工作相速率与节流时长增量。注意内核下界：配额最小 1 ms，故 50% 配额的最小周期为 2 ms（500 µs 配额会被内核 EINVAL 拒绝——这是"高精度"的物理边界）。</a:t>
+            </a:r>
+          </a:p>
+          <a:p>
+            <a:pPr>
+              <a:lnSpc>
+                <a:spcPct val="108000"/>
+              </a:lnSpc>
+              <a:spcAft>
+                <a:spcPts val="400"/>
+              </a:spcAft>
+            </a:pPr>
+            <a:r>
+              <a:rPr sz="1250" b="0">
+                <a:solidFill>
+                  <a:srgbClr val="1C1C1E"/>
+                </a:solidFill>
+                <a:latin typeface="Microsoft YaHei"/>
+              </a:rPr>
+              <a:t>结果（表/图 22）。</a:t>
+            </a:r>
+          </a:p>
+        </p:txBody>
+      </p:sp>
+    </p:spTree>
+  </p:cSld>
+  <p:clrMapOvr>
+    <a:masterClrMapping/>
+  </p:clrMapOvr>
+</p:sld>
+</file>
+
+<file path=ppt/slides/slide141.xml><?xml version="1.0" encoding="utf-8"?>
+<p:sld xmlns:a="http://schemas.openxmlformats.org/drawingml/2006/main" xmlns:p="http://schemas.openxmlformats.org/presentationml/2006/main" xmlns:r="http://schemas.openxmlformats.org/officeDocument/2006/relationships">
+  <p:cSld>
+    <p:spTree>
+      <p:nvGrpSpPr>
+        <p:cNvPr id="1" name=""/>
+        <p:cNvGrpSpPr/>
+        <p:nvPr/>
+      </p:nvGrpSpPr>
+      <p:grpSpPr/>
+      <p:sp>
+        <p:nvSpPr>
+          <p:cNvPr id="2" name="Rectangle 1"/>
+          <p:cNvSpPr/>
+          <p:nvPr/>
+        </p:nvSpPr>
+        <p:spPr>
+          <a:xfrm>
+            <a:off x="0" y="0"/>
+            <a:ext cx="12191695" cy="6858000"/>
+          </a:xfrm>
+          <a:prstGeom prst="rect">
+            <a:avLst/>
+          </a:prstGeom>
+          <a:solidFill>
+            <a:srgbClr val="FFFFFF"/>
+          </a:solidFill>
+          <a:ln>
+            <a:noFill/>
+          </a:ln>
+        </p:spPr>
+        <p:style>
+          <a:lnRef idx="1">
+            <a:schemeClr val="accent1"/>
+          </a:lnRef>
+          <a:fillRef idx="3">
+            <a:schemeClr val="accent1"/>
+          </a:fillRef>
+          <a:effectRef idx="2">
+            <a:schemeClr val="accent1"/>
+          </a:effectRef>
+          <a:fontRef idx="minor">
+            <a:schemeClr val="lt1"/>
+          </a:fontRef>
+        </p:style>
+        <p:txBody>
+          <a:bodyPr rtlCol="0" anchor="ctr"/>
+          <a:lstStyle/>
+          <a:p>
+            <a:pPr algn="ctr"/>
+          </a:p>
+        </p:txBody>
+      </p:sp>
+      <p:sp>
+        <p:nvSpPr>
+          <p:cNvPr id="3" name="Rectangle 2"/>
+          <p:cNvSpPr/>
+          <p:nvPr/>
+        </p:nvSpPr>
+        <p:spPr>
+          <a:xfrm>
+            <a:off x="0" y="0"/>
+            <a:ext cx="12191695" cy="777240"/>
+          </a:xfrm>
+          <a:prstGeom prst="rect">
+            <a:avLst/>
+          </a:prstGeom>
+          <a:solidFill>
+            <a:srgbClr val="123A63"/>
+          </a:solidFill>
+          <a:ln>
+            <a:noFill/>
+          </a:ln>
+        </p:spPr>
+        <p:style>
+          <a:lnRef idx="1">
+            <a:schemeClr val="accent1"/>
+          </a:lnRef>
+          <a:fillRef idx="3">
+            <a:schemeClr val="accent1"/>
+          </a:fillRef>
+          <a:effectRef idx="2">
+            <a:schemeClr val="accent1"/>
+          </a:effectRef>
+          <a:fontRef idx="minor">
+            <a:schemeClr val="lt1"/>
+          </a:fontRef>
+        </p:style>
+        <p:txBody>
+          <a:bodyPr rtlCol="0" anchor="ctr" lIns="411480" tIns="54864"/>
+          <a:lstStyle/>
+          <a:p>
+            <a:pPr algn="ctr"/>
+            <a:r>
+              <a:rPr sz="2100" b="1">
+                <a:solidFill>
+                  <a:srgbClr val="FFFFFF"/>
+                </a:solidFill>
+                <a:latin typeface="Microsoft YaHei"/>
+              </a:rPr>
+              <a:t>9 资源效率模块</a:t>
+            </a:r>
+          </a:p>
+          <a:p>
+            <a:r>
+              <a:rPr sz="1200">
+                <a:solidFill>
+                  <a:srgbClr val="D8E2F0"/>
+                </a:solidFill>
+                <a:latin typeface="Microsoft YaHei"/>
+              </a:rPr>
+              <a:t>9.1 CPU：微周期配额——同样配额，精度决定客户速率（图 22）</a:t>
+            </a:r>
+          </a:p>
+        </p:txBody>
+      </p:sp>
       <p:graphicFrame>
         <p:nvGraphicFramePr>
           <p:cNvPr id="4" name="Table 3"/>
@@ -15228,191 +15395,6 @@
 </p:sld>
 </file>
 
-<file path=ppt/slides/slide141.xml><?xml version="1.0" encoding="utf-8"?>
-<p:sld xmlns:a="http://schemas.openxmlformats.org/drawingml/2006/main" xmlns:p="http://schemas.openxmlformats.org/presentationml/2006/main" xmlns:r="http://schemas.openxmlformats.org/officeDocument/2006/relationships">
-  <p:cSld>
-    <p:spTree>
-      <p:nvGrpSpPr>
-        <p:cNvPr id="1" name=""/>
-        <p:cNvGrpSpPr/>
-        <p:nvPr/>
-      </p:nvGrpSpPr>
-      <p:grpSpPr/>
-      <p:sp>
-        <p:nvSpPr>
-          <p:cNvPr id="2" name="Rectangle 1"/>
-          <p:cNvSpPr/>
-          <p:nvPr/>
-        </p:nvSpPr>
-        <p:spPr>
-          <a:xfrm>
-            <a:off x="0" y="0"/>
-            <a:ext cx="12191695" cy="6858000"/>
-          </a:xfrm>
-          <a:prstGeom prst="rect">
-            <a:avLst/>
-          </a:prstGeom>
-          <a:solidFill>
-            <a:srgbClr val="FFFFFF"/>
-          </a:solidFill>
-          <a:ln>
-            <a:noFill/>
-          </a:ln>
-        </p:spPr>
-        <p:style>
-          <a:lnRef idx="1">
-            <a:schemeClr val="accent1"/>
-          </a:lnRef>
-          <a:fillRef idx="3">
-            <a:schemeClr val="accent1"/>
-          </a:fillRef>
-          <a:effectRef idx="2">
-            <a:schemeClr val="accent1"/>
-          </a:effectRef>
-          <a:fontRef idx="minor">
-            <a:schemeClr val="lt1"/>
-          </a:fontRef>
-        </p:style>
-        <p:txBody>
-          <a:bodyPr rtlCol="0" anchor="ctr"/>
-          <a:lstStyle/>
-          <a:p>
-            <a:pPr algn="ctr"/>
-          </a:p>
-        </p:txBody>
-      </p:sp>
-      <p:sp>
-        <p:nvSpPr>
-          <p:cNvPr id="3" name="Rectangle 2"/>
-          <p:cNvSpPr/>
-          <p:nvPr/>
-        </p:nvSpPr>
-        <p:spPr>
-          <a:xfrm>
-            <a:off x="0" y="0"/>
-            <a:ext cx="12191695" cy="777240"/>
-          </a:xfrm>
-          <a:prstGeom prst="rect">
-            <a:avLst/>
-          </a:prstGeom>
-          <a:solidFill>
-            <a:srgbClr val="123A63"/>
-          </a:solidFill>
-          <a:ln>
-            <a:noFill/>
-          </a:ln>
-        </p:spPr>
-        <p:style>
-          <a:lnRef idx="1">
-            <a:schemeClr val="accent1"/>
-          </a:lnRef>
-          <a:fillRef idx="3">
-            <a:schemeClr val="accent1"/>
-          </a:fillRef>
-          <a:effectRef idx="2">
-            <a:schemeClr val="accent1"/>
-          </a:effectRef>
-          <a:fontRef idx="minor">
-            <a:schemeClr val="lt1"/>
-          </a:fontRef>
-        </p:style>
-        <p:txBody>
-          <a:bodyPr rtlCol="0" anchor="ctr" lIns="411480" tIns="54864"/>
-          <a:lstStyle/>
-          <a:p>
-            <a:pPr algn="ctr"/>
-            <a:r>
-              <a:rPr sz="2100" b="1">
-                <a:solidFill>
-                  <a:srgbClr val="FFFFFF"/>
-                </a:solidFill>
-                <a:latin typeface="Microsoft YaHei"/>
-              </a:rPr>
-              <a:t>9 资源效率模块</a:t>
-            </a:r>
-          </a:p>
-          <a:p>
-            <a:r>
-              <a:rPr sz="1200">
-                <a:solidFill>
-                  <a:srgbClr val="D8E2F0"/>
-                </a:solidFill>
-                <a:latin typeface="Microsoft YaHei"/>
-              </a:rPr>
-              <a:t>9.1 CPU：微周期配额——同样配额，精度决定客户速率（图 22）</a:t>
-            </a:r>
-          </a:p>
-        </p:txBody>
-      </p:sp>
-      <p:sp>
-        <p:nvSpPr>
-          <p:cNvPr id="4" name="TextBox 3"/>
-          <p:cNvSpPr txBox="1"/>
-          <p:nvPr/>
-        </p:nvSpPr>
-        <p:spPr>
-          <a:xfrm>
-            <a:off x="502920" y="914400"/>
-            <a:ext cx="11155680" cy="5486400"/>
-          </a:xfrm>
-          <a:prstGeom prst="rect">
-            <a:avLst/>
-          </a:prstGeom>
-          <a:noFill/>
-        </p:spPr>
-        <p:txBody>
-          <a:bodyPr wrap="square">
-            <a:spAutoFit/>
-          </a:bodyPr>
-          <a:lstStyle/>
-          <a:p>
-            <a:pPr>
-              <a:lnSpc>
-                <a:spcPct val="108000"/>
-              </a:lnSpc>
-              <a:spcAft>
-                <a:spcPts val="400"/>
-              </a:spcAft>
-            </a:pPr>
-            <a:r>
-              <a:rPr sz="1250" b="0">
-                <a:solidFill>
-                  <a:srgbClr val="1C1C1E"/>
-                </a:solidFill>
-                <a:latin typeface="Microsoft YaHei"/>
-              </a:rPr>
-              <a:t>读法。 （i）服务侧全程 0.73–0.75 ms——隔离前提下配额精度对服务保护无影响（与 4.4.1 的"配额不增加安全席位"一致）。（ii）但客户侧代价差异巨大：同样 50% 配额，把周期从 1 s 缩到 2 ms，客户有效速率从 59% 提到 80%（+35%）；即配额"税"的大小主要由周期粒度决定，而非配额比例本身。（iii）各档节流时长合计相近（44–54 s）——速率差异不是"少被限"，而是细粒度交替（1 ms on / 1 ms off）让客户的工作相更满、调度损耗更小。（iv）这是"CPU 精密控制"的首个量化收益：在不提高配额比例（不危及密度结论）的前提下，把经济版客户的体验拉高约三分之一档。</a:t>
-            </a:r>
-          </a:p>
-          <a:p>
-            <a:pPr>
-              <a:lnSpc>
-                <a:spcPct val="108000"/>
-              </a:lnSpc>
-              <a:spcAft>
-                <a:spcPts val="400"/>
-              </a:spcAft>
-            </a:pPr>
-            <a:r>
-              <a:rPr sz="1250" b="0">
-                <a:solidFill>
-                  <a:srgbClr val="1C1C1E"/>
-                </a:solidFill>
-                <a:latin typeface="Microsoft YaHei"/>
-              </a:rPr>
-              <a:t>边界。 单池、满载忙循环负载；速率为工作相均值；调度器/内核版本可能改变绝对值，机制（周期粒度→配额税）与具体数字无关。</a:t>
-            </a:r>
-          </a:p>
-        </p:txBody>
-      </p:sp>
-    </p:spTree>
-  </p:cSld>
-  <p:clrMapOvr>
-    <a:masterClrMapping/>
-  </p:clrMapOvr>
-</p:sld>
-</file>
-
 <file path=ppt/slides/slide142.xml><?xml version="1.0" encoding="utf-8"?>
 <p:sld xmlns:a="http://schemas.openxmlformats.org/drawingml/2006/main" xmlns:p="http://schemas.openxmlformats.org/presentationml/2006/main" xmlns:r="http://schemas.openxmlformats.org/officeDocument/2006/relationships">
   <p:cSld>
@@ -15524,7 +15506,7 @@
                 </a:solidFill>
                 <a:latin typeface="Microsoft YaHei"/>
               </a:rPr>
-              <a:t>9.2 内存：无 balloon 回收三件套（图 23–25）— 部分完成</a:t>
+              <a:t>9.1 CPU：微周期配额——同样配额，精度决定客户速率（图 22）</a:t>
             </a:r>
           </a:p>
         </p:txBody>
@@ -15566,7 +15548,7 @@
                 </a:solidFill>
                 <a:latin typeface="Microsoft YaHei"/>
               </a:rPr>
-              <a:t>已完成（本批数据）。 （i）KSM 舰队去重（ksm1）：64 台同镜像舰队共享 21.9 GB = 舰队内存的 33.4%；ksmd 平均 ~0.16 核；服务 P99 0.73→0.76 ms（零回归）。代价边界：写入 CoW 长尾未测；跨租户去重存在已知侧信道议题，生产上按信任域分层启用。（ii）空闲页上报（FPR）机制验证：手动 300 MB——宿主 memory.current 315→629 MB 随分配、释放后 6–12 s 回落至原位，guest MemTotal 恒 973 MB 不变；附带发现：空闲「1 GB」VM 的宿主实占仅 156–315 MB（FPR 一直在归还空闲页）。（iii）自动化 fpr4（300 MB、stderr 捕获修订版）已排队（final→replay 之后）。进行中：zram 三臂（无 swap / zram / 磁盘 swap × 1 TB 冷页压测）在 final 链尾执行。</a:t>
+              <a:t>读法。 （i）服务侧全程 0.73–0.75 ms——隔离前提下配额精度对服务保护无影响（与 4.4.1 的"配额不增加安全席位"一致）。（ii）但客户侧代价差异巨大：同样 50% 配额，把周期从 1 s 缩到 2 ms，客户有效速率从 59% 提到 80%（+35%）；即配额"税"的大小主要由周期粒度决定，而非配额比例本身。（iii）各档节流时长合计相近（44–54 s）——速率差异不是"少被限"，而是细粒度交替（1 ms on / 1 ms off）让客户的工作相更满、调度损耗更小。（iv）这是"CPU 精密控制"的首个量化收益：在不提高配额比例（不危及密度结论）的前提下，把经济版客户的体验拉高约三分之一档。</a:t>
             </a:r>
           </a:p>
           <a:p>
@@ -15585,7 +15567,7 @@
                 </a:solidFill>
                 <a:latin typeface="Microsoft YaHei"/>
               </a:rPr>
-              <a:t>指标口径：宿主回收量（ksm sharing / memory.current 回落）、租户可见内存不变性（guest MemTotal/可用内存）、压缩/去重比、PSI 与探针延迟代价。</a:t>
+              <a:t>边界。 单池、满载忙循环负载；速率为工作相均值；调度器/内核版本可能改变绝对值，机制（周期粒度→配额税）与具体数字无关。</a:t>
             </a:r>
           </a:p>
         </p:txBody>
@@ -15709,7 +15691,7 @@
                 </a:solidFill>
                 <a:latin typeface="Microsoft YaHei"/>
               </a:rPr>
-              <a:t>9.3 IO：自适应限速对决（图 26）— 待填</a:t>
+              <a:t>9.2 内存：无 balloon 回收三件套（图 23–25）— 部分完成</a:t>
             </a:r>
           </a:p>
         </p:txBody>
@@ -15751,7 +15733,26 @@
                 </a:solidFill>
                 <a:latin typeface="Microsoft YaHei"/>
               </a:rPr>
-              <a:t>（数据源：ioc1，8 台风暴客户 × none/static/adaptive 三臂；指标：宿主 IOPS、服务 P99、租户聚合 IOPS 与逐 op 尾延迟——检验"自适应比静态上限多交付且不伤服务"。）</a:t>
+              <a:t>已完成（本批数据）。 （i）KSM 舰队去重（ksm1）：64 台同镜像舰队共享 21.9 GB = 舰队内存的 33.4%；ksmd 平均 ~0.16 核；服务 P99 0.73→0.76 ms（零回归）。代价边界：写入 CoW 长尾未测；跨租户去重存在已知侧信道议题，生产上按信任域分层启用。（ii）空闲页上报（FPR）机制验证：手动 300 MB——宿主 memory.current 315→629 MB 随分配、释放后 6–12 s 回落至原位，guest MemTotal 恒 973 MB 不变；附带发现：空闲「1 GB」VM 的宿主实占仅 156–315 MB（FPR 一直在归还空闲页）。（iii）自动化 fpr4（300 MB、stderr 捕获修订版）已排队（final→replay 之后）。进行中：zram 三臂（无 swap / zram / 磁盘 swap × 1 TB 冷页压测）在 final 链尾执行。</a:t>
+            </a:r>
+          </a:p>
+          <a:p>
+            <a:pPr>
+              <a:lnSpc>
+                <a:spcPct val="108000"/>
+              </a:lnSpc>
+              <a:spcAft>
+                <a:spcPts val="400"/>
+              </a:spcAft>
+            </a:pPr>
+            <a:r>
+              <a:rPr sz="1250" b="0">
+                <a:solidFill>
+                  <a:srgbClr val="1C1C1E"/>
+                </a:solidFill>
+                <a:latin typeface="Microsoft YaHei"/>
+              </a:rPr>
+              <a:t>指标口径：宿主回收量（ksm sharing / memory.current 回落）、租户可见内存不变性（guest MemTotal/可用内存）、压缩/去重比、PSI 与探针延迟代价。</a:t>
             </a:r>
           </a:p>
         </p:txBody>
@@ -15875,7 +15876,7 @@
                 </a:solidFill>
                 <a:latin typeface="Microsoft YaHei"/>
               </a:rPr>
-              <a:t>9.4 与"无回归"约束的关系 — 待填</a:t>
+              <a:t>9.3 IO：自适应限速对决（图 26）— 待填</a:t>
             </a:r>
           </a:p>
         </p:txBody>
@@ -15917,7 +15918,7 @@
                 </a:solidFill>
                 <a:latin typeface="Microsoft YaHei"/>
               </a:rPr>
-              <a:t>（每机制记三笔账：密度增益 / 隐形代价 / 租户可见回归；KSM、FPR、隔离为零可见回归；zram/配额/IO 上限为明确计价的回归。呼应第 5 章的"经济版 = 明码标价的回归预算"。）（ksm1 [22]：舰队去重扫描——首批结果：共享 21.9 GB = 舰队内存 33.4%，ksmd ≈ 0.16 核，服务 P99 0.73→0.76 ms；代价边界：写入 CoW 长尾未测、跨租户去重存在已知侧信道议题，生产上按信任域分层启用；fpr1/fpr2：空闲页上报——空闲"1 GB"VM 宿主实占仅 156–315 MB，300 MB 客户分配在释放后 6–12 s 回收，guest 可见内存不变；zram1：无 swap/zram/磁盘 swap 三臂（1 TB 冷页压测）。）</a:t>
+              <a:t>（数据源：ioc1，8 台风暴客户 × none/static/adaptive 三臂；指标：宿主 IOPS、服务 P99、租户聚合 IOPS 与逐 op 尾延迟——检验"自适应比静态上限多交付且不伤服务"。）</a:t>
             </a:r>
           </a:p>
         </p:txBody>
@@ -15991,8 +15992,8 @@
         </p:nvSpPr>
         <p:spPr>
           <a:xfrm>
-            <a:off x="0" y="2651760"/>
-            <a:ext cx="12191695" cy="1371600"/>
+            <a:off x="0" y="0"/>
+            <a:ext cx="12191695" cy="777240"/>
           </a:xfrm>
           <a:prstGeom prst="rect">
             <a:avLst/>
@@ -16019,18 +16020,71 @@
           </a:fontRef>
         </p:style>
         <p:txBody>
-          <a:bodyPr rtlCol="0" anchor="ctr" lIns="731520"/>
+          <a:bodyPr rtlCol="0" anchor="ctr" lIns="411480" tIns="54864"/>
           <a:lstStyle/>
           <a:p>
             <a:pPr algn="ctr"/>
             <a:r>
-              <a:rPr sz="3000" b="1">
+              <a:rPr sz="2100" b="1">
                 <a:solidFill>
                   <a:srgbClr val="FFFFFF"/>
                 </a:solidFill>
                 <a:latin typeface="Microsoft YaHei"/>
               </a:rPr>
-              <a:t>10 讨论与局限</a:t>
+              <a:t>9 资源效率模块</a:t>
+            </a:r>
+          </a:p>
+          <a:p>
+            <a:r>
+              <a:rPr sz="1200">
+                <a:solidFill>
+                  <a:srgbClr val="D8E2F0"/>
+                </a:solidFill>
+                <a:latin typeface="Microsoft YaHei"/>
+              </a:rPr>
+              <a:t>9.4 与"无回归"约束的关系 — 待填</a:t>
+            </a:r>
+          </a:p>
+        </p:txBody>
+      </p:sp>
+      <p:sp>
+        <p:nvSpPr>
+          <p:cNvPr id="4" name="TextBox 3"/>
+          <p:cNvSpPr txBox="1"/>
+          <p:nvPr/>
+        </p:nvSpPr>
+        <p:spPr>
+          <a:xfrm>
+            <a:off x="502920" y="914400"/>
+            <a:ext cx="11155680" cy="5486400"/>
+          </a:xfrm>
+          <a:prstGeom prst="rect">
+            <a:avLst/>
+          </a:prstGeom>
+          <a:noFill/>
+        </p:spPr>
+        <p:txBody>
+          <a:bodyPr wrap="square">
+            <a:spAutoFit/>
+          </a:bodyPr>
+          <a:lstStyle/>
+          <a:p>
+            <a:pPr>
+              <a:lnSpc>
+                <a:spcPct val="108000"/>
+              </a:lnSpc>
+              <a:spcAft>
+                <a:spcPts val="400"/>
+              </a:spcAft>
+            </a:pPr>
+            <a:r>
+              <a:rPr sz="1250" b="0">
+                <a:solidFill>
+                  <a:srgbClr val="1C1C1E"/>
+                </a:solidFill>
+                <a:latin typeface="Microsoft YaHei"/>
+              </a:rPr>
+              <a:t>（每机制记三笔账：密度增益 / 隐形代价 / 租户可见回归；KSM、FPR、隔离为零可见回归；zram/配额/IO 上限为明确计价的回归。呼应第 5 章的"经济版 = 明码标价的回归预算"。）（ksm1 [22]：舰队去重扫描——首批结果：共享 21.9 GB = 舰队内存 33.4%，ksmd ≈ 0.16 核，服务 P99 0.73→0.76 ms；代价边界：写入 CoW 长尾未测、跨租户去重存在已知侧信道议题，生产上按信任域分层启用；fpr1/fpr2：空闲页上报——空闲"1 GB"VM 宿主实占仅 156–315 MB，300 MB 客户分配在释放后 6–12 s 回收，guest 可见内存不变；zram1：无 swap/zram/磁盘 swap 三臂（1 TB 冷页压测）。）</a:t>
             </a:r>
           </a:p>
         </p:txBody>
@@ -16104,8 +16158,8 @@
         </p:nvSpPr>
         <p:spPr>
           <a:xfrm>
-            <a:off x="0" y="0"/>
-            <a:ext cx="12191695" cy="777240"/>
+            <a:off x="0" y="2651760"/>
+            <a:ext cx="12191695" cy="1371600"/>
           </a:xfrm>
           <a:prstGeom prst="rect">
             <a:avLst/>
@@ -16132,90 +16186,18 @@
           </a:fontRef>
         </p:style>
         <p:txBody>
-          <a:bodyPr rtlCol="0" anchor="ctr" lIns="411480" tIns="54864"/>
+          <a:bodyPr rtlCol="0" anchor="ctr" lIns="731520"/>
           <a:lstStyle/>
           <a:p>
             <a:pPr algn="ctr"/>
             <a:r>
-              <a:rPr sz="2100" b="1">
+              <a:rPr sz="3000" b="1">
                 <a:solidFill>
                   <a:srgbClr val="FFFFFF"/>
                 </a:solidFill>
                 <a:latin typeface="Microsoft YaHei"/>
               </a:rPr>
               <a:t>10 讨论与局限</a:t>
-            </a:r>
-          </a:p>
-          <a:p>
-            <a:r>
-              <a:rPr sz="1200">
-                <a:solidFill>
-                  <a:srgbClr val="D8E2F0"/>
-                </a:solidFill>
-                <a:latin typeface="Microsoft YaHei"/>
-              </a:rPr>
-              <a:t>10.1 哪些结论可迁移，哪些绑定本环境</a:t>
-            </a:r>
-          </a:p>
-        </p:txBody>
-      </p:sp>
-      <p:sp>
-        <p:nvSpPr>
-          <p:cNvPr id="4" name="TextBox 3"/>
-          <p:cNvSpPr txBox="1"/>
-          <p:nvPr/>
-        </p:nvSpPr>
-        <p:spPr>
-          <a:xfrm>
-            <a:off x="502920" y="914400"/>
-            <a:ext cx="11155680" cy="5486400"/>
-          </a:xfrm>
-          <a:prstGeom prst="rect">
-            <a:avLst/>
-          </a:prstGeom>
-          <a:noFill/>
-        </p:spPr>
-        <p:txBody>
-          <a:bodyPr wrap="square">
-            <a:spAutoFit/>
-          </a:bodyPr>
-          <a:lstStyle/>
-          <a:p>
-            <a:pPr>
-              <a:lnSpc>
-                <a:spcPct val="108000"/>
-              </a:lnSpc>
-              <a:spcAft>
-                <a:spcPts val="400"/>
-              </a:spcAft>
-            </a:pPr>
-            <a:r>
-              <a:rPr sz="1250" b="0">
-                <a:solidFill>
-                  <a:srgbClr val="1C1C1E"/>
-                </a:solidFill>
-                <a:latin typeface="Microsoft YaHei"/>
-              </a:rPr>
-              <a:t>可迁移的机制性结论： （i）尾延迟由瞬时并发/重叠驱动而非平均利用率——这与核心数、虚拟化层次无关，只与"可运行线程集合是否周期性地超过容量"有关；（ii）截断需求的逻辑——任何以配额/限流实现保底的系统都会让用量低估需求，节流证据是可移植的检测器；（iii）控制手段的可靠性层级——隔离 &gt; 硬限速 &gt; 软优先级，后者在 KVM/CFS 与块层（默认调度器）上的失效有机制解释（锁持有者抢占、调度信用、uq 分发），不是本测试床的偶然。</a:t>
-            </a:r>
-          </a:p>
-          <a:p>
-            <a:pPr>
-              <a:lnSpc>
-                <a:spcPct val="108000"/>
-              </a:lnSpc>
-              <a:spcAft>
-                <a:spcPts val="400"/>
-              </a:spcAft>
-            </a:pPr>
-            <a:r>
-              <a:rPr sz="1250" b="0">
-                <a:solidFill>
-                  <a:srgbClr val="1C1C1E"/>
-                </a:solidFill>
-                <a:latin typeface="Microsoft YaHei"/>
-              </a:rPr>
-              <a:t>绑定本环境的数值： 膝点"3→4"特指 4 逻辑核 + 每客户 1 核满载的最坏形态；内存翻车点（约 13.8 GB 客户驻留 + 1 GB swap）绑定 19.5 GiB 物理与 swap 配置；IO 数字绑定虚拟磁盘与宿主调度器（none，无 BFQ）。正文给出的是机制与相对的"上限—代价"关系，读者应按自身核数与预留重算绝对值。</a:t>
             </a:r>
           </a:p>
         </p:txBody>
@@ -16339,7 +16321,7 @@
                 </a:solidFill>
                 <a:latin typeface="Microsoft YaHei"/>
               </a:rPr>
-              <a:t>10.2 SLO 档位与"容量—质量"曲线</a:t>
+              <a:t>10.1 哪些结论可迁移，哪些绑定本环境</a:t>
             </a:r>
           </a:p>
         </p:txBody>
@@ -16381,7 +16363,26 @@
                 </a:solidFill>
                 <a:latin typeface="Microsoft YaHei"/>
               </a:rPr>
-              <a:t>本文全程使用严格档 P99 ≤ 10 ms。真实低价客户并无正式 SLO、感知阈值通常远宽（数十毫秒级），而我们的数据显示：同一 10 台混合客群，10 ms 档全员违约、若放到 ~30 ms 档多数场景无虞。"能卖多少"因此不是常量，而是 SLO 的函数——建议服务商把"密度—档位"做成显式产品参数（例如经济版承诺 P99 ≤ 50 ms、标准版 ≤ 20 ms），而不是把最严档隐含在所有人身上。这一敏感性分析属于【待补实验】，但机制与初步数据已齐。</a:t>
+              <a:t>可迁移的机制性结论： （i）尾延迟由瞬时并发/重叠驱动而非平均利用率——这与核心数、虚拟化层次无关，只与"可运行线程集合是否周期性地超过容量"有关；（ii）截断需求的逻辑——任何以配额/限流实现保底的系统都会让用量低估需求，节流证据是可移植的检测器；（iii）控制手段的可靠性层级——隔离 &gt; 硬限速 &gt; 软优先级，后者在 KVM/CFS 与块层（默认调度器）上的失效有机制解释（锁持有者抢占、调度信用、uq 分发），不是本测试床的偶然。</a:t>
+            </a:r>
+          </a:p>
+          <a:p>
+            <a:pPr>
+              <a:lnSpc>
+                <a:spcPct val="108000"/>
+              </a:lnSpc>
+              <a:spcAft>
+                <a:spcPts val="400"/>
+              </a:spcAft>
+            </a:pPr>
+            <a:r>
+              <a:rPr sz="1250" b="0">
+                <a:solidFill>
+                  <a:srgbClr val="1C1C1E"/>
+                </a:solidFill>
+                <a:latin typeface="Microsoft YaHei"/>
+              </a:rPr>
+              <a:t>绑定本环境的数值： 膝点"3→4"特指 4 逻辑核 + 每客户 1 核满载的最坏形态；内存翻车点（约 13.8 GB 客户驻留 + 1 GB swap）绑定 19.5 GiB 物理与 swap 配置；IO 数字绑定虚拟磁盘与宿主调度器（none，无 BFQ）。正文给出的是机制与相对的"上限—代价"关系，读者应按自身核数与预留重算绝对值。</a:t>
             </a:r>
           </a:p>
         </p:txBody>
@@ -16505,7 +16506,7 @@
                 </a:solidFill>
                 <a:latin typeface="Microsoft YaHei"/>
               </a:rPr>
-              <a:t>10.3 设计含义</a:t>
+              <a:t>10.2 SLO 档位与"容量—质量"曲线</a:t>
             </a:r>
           </a:p>
         </p:txBody>
@@ -16547,7 +16548,7 @@
                 </a:solidFill>
                 <a:latin typeface="Microsoft YaHei"/>
               </a:rPr>
-              <a:t>对服务商：先隔离、后密度——为敏感业务划出哪怕一个专属核，收益大于任何调参；内存与 IO 用"双闸/上限"兜底；售卖的"名义包络"与"保护包络"分开表述（分层定价的依据）；准入用证据（节流计数、时间对齐的需求上分位）而不是面板数字。对平台/系统建设者：cgroup v2 的若干"直觉口径"需要实测校准——IO 记账落在整盘而非分区；io.weight 依赖 IO 调度器选择（另有基于 IO Cost 的 io.cost.* 路线，未在本环境验证）；memory.high 的回收压力会外溢到宿主 swap（需要 memory.swap.max 或禁 swap 配合，且作为软阈值不构成 OOM 豁免）；CPU 权重几乎不是延迟保护工具。这些语义空白值得在文档与默认配置层面修复。</a:t>
+              <a:t>本文全程使用严格档 P99 ≤ 10 ms。真实低价客户并无正式 SLO、感知阈值通常远宽（数十毫秒级），而我们的数据显示：同一 10 台混合客群，10 ms 档全员违约、若放到 ~30 ms 档多数场景无虞。"能卖多少"因此不是常量，而是 SLO 的函数——建议服务商把"密度—档位"做成显式产品参数（例如经济版承诺 P99 ≤ 50 ms、标准版 ≤ 20 ms），而不是把最严档隐含在所有人身上。这一敏感性分析属于【待补实验】，但机制与初步数据已齐。</a:t>
             </a:r>
           </a:p>
         </p:txBody>
@@ -16671,7 +16672,7 @@
                 </a:solidFill>
                 <a:latin typeface="Microsoft YaHei"/>
               </a:rPr>
-              <a:t>10.4 有效性与威胁</a:t>
+              <a:t>10.3 设计含义</a:t>
             </a:r>
           </a:p>
         </p:txBody>
@@ -16713,7 +16714,7 @@
                 </a:solidFill>
                 <a:latin typeface="Microsoft YaHei"/>
               </a:rPr>
-              <a:t>构念效度： 服务"业务"用轻量 HTTP/Redis 代理，真实业务（数据库、网关）的敏感路径更长、更依赖系统调用，绝对数字会变，但"尾延迟由重叠驱动"的结构不变；客户负载为合成忙循环/占空比，未含真实业务的慢路径（锁竞争、GC），后续应以真实应用镜像复验。内部效度： 嵌套虚拟化引入额外调度层；已用重复轮次与随机顺序抑制噪声，并在综合验证中观察服务侧指标的稳定性；"权重失效"暂未定位到具体机制（宿主收包路径假设未验证），作为开放问题保留。联合验证进一步暴露：阵发背景的瞬时采样存在相位偏差，控制器需按设计采用时间对齐历史分位（当前未实现，见 7.5b）；客户侧金丝雀显示紧内存上限可造成秒级停顿，闸门尺寸应作为显式产品参数标定。外部效度： 单测试床、单核数档（4）、单磁盘；生产证据为观测性锚点而非受控实验；跨宿主/跨硬件的外推已在缺口清单中列为独立验证项。统计： 关键结论 4–7 轮复现，范围已在各表给出；轮级 bootstrap 置信区间（指示性）见 manuscript/interval_summary.txt；准入对照、冷启动与方法评估仍为单轮预实验，正式版本待补（缺口清单第 3 项）。</a:t>
+              <a:t>对服务商：先隔离、后密度——为敏感业务划出哪怕一个专属核，收益大于任何调参；内存与 IO 用"双闸/上限"兜底；售卖的"名义包络"与"保护包络"分开表述（分层定价的依据）；准入用证据（节流计数、时间对齐的需求上分位）而不是面板数字。对平台/系统建设者：cgroup v2 的若干"直觉口径"需要实测校准——IO 记账落在整盘而非分区；io.weight 依赖 IO 调度器选择（另有基于 IO Cost 的 io.cost.* 路线，未在本环境验证）；memory.high 的回收压力会外溢到宿主 swap（需要 memory.swap.max 或禁 swap 配合，且作为软阈值不构成 OOM 豁免）；CPU 权重几乎不是延迟保护工具。这些语义空白值得在文档与默认配置层面修复。</a:t>
             </a:r>
           </a:p>
         </p:txBody>
@@ -17022,7 +17023,7 @@
                 </a:solidFill>
                 <a:latin typeface="Microsoft YaHei"/>
               </a:rPr>
-              <a:t>10.5 与超大规模路线的边界</a:t>
+              <a:t>10.4 有效性与威胁</a:t>
             </a:r>
           </a:p>
         </p:txBody>
@@ -17064,7 +17065,7 @@
                 </a:solidFill>
                 <a:latin typeface="Microsoft YaHei"/>
               </a:rPr>
-              <a:t>本文不替代 AUDIBLE/Coach 类方法在大平台上的价值：它们解决的是"有长期数据与调度自由度时的容量优化"；我们解决的是"没有历史、没有迁移余地、甚至看不真需求的小宿主如何不翻车"。两者可组合——例如以本文的截断校正在小宿主端产出干净的需求证据，再交给大平台式的预测器做全局规划。</a:t>
+              <a:t>构念效度： 服务"业务"用轻量 HTTP/Redis 代理，真实业务（数据库、网关）的敏感路径更长、更依赖系统调用，绝对数字会变，但"尾延迟由重叠驱动"的结构不变；客户负载为合成忙循环/占空比，未含真实业务的慢路径（锁竞争、GC），后续应以真实应用镜像复验。内部效度： 嵌套虚拟化引入额外调度层；已用重复轮次与随机顺序抑制噪声，并在综合验证中观察服务侧指标的稳定性；"权重失效"暂未定位到具体机制（宿主收包路径假设未验证），作为开放问题保留。联合验证进一步暴露：阵发背景的瞬时采样存在相位偏差，控制器需按设计采用时间对齐历史分位（当前未实现，见 7.5b）；客户侧金丝雀显示紧内存上限可造成秒级停顿，闸门尺寸应作为显式产品参数标定。外部效度： 单测试床、单核数档（4）、单磁盘；生产证据为观测性锚点而非受控实验；跨宿主/跨硬件的外推已在缺口清单中列为独立验证项。统计： 关键结论 4–7 轮复现，范围已在各表给出；轮级 bootstrap 置信区间（指示性）见 manuscript/interval_summary.txt；准入对照、冷启动与方法评估仍为单轮预实验，正式版本待补（缺口清单第 3 项）。</a:t>
             </a:r>
           </a:p>
         </p:txBody>
@@ -17138,8 +17139,8 @@
         </p:nvSpPr>
         <p:spPr>
           <a:xfrm>
-            <a:off x="0" y="2651760"/>
-            <a:ext cx="12191695" cy="1371600"/>
+            <a:off x="0" y="0"/>
+            <a:ext cx="12191695" cy="777240"/>
           </a:xfrm>
           <a:prstGeom prst="rect">
             <a:avLst/>
@@ -17166,18 +17167,71 @@
           </a:fontRef>
         </p:style>
         <p:txBody>
-          <a:bodyPr rtlCol="0" anchor="ctr" lIns="731520"/>
+          <a:bodyPr rtlCol="0" anchor="ctr" lIns="411480" tIns="54864"/>
           <a:lstStyle/>
           <a:p>
             <a:pPr algn="ctr"/>
             <a:r>
-              <a:rPr sz="3000" b="1">
+              <a:rPr sz="2100" b="1">
                 <a:solidFill>
                   <a:srgbClr val="FFFFFF"/>
                 </a:solidFill>
                 <a:latin typeface="Microsoft YaHei"/>
               </a:rPr>
-              <a:t>11 结论</a:t>
+              <a:t>10 讨论与局限</a:t>
+            </a:r>
+          </a:p>
+          <a:p>
+            <a:r>
+              <a:rPr sz="1200">
+                <a:solidFill>
+                  <a:srgbClr val="D8E2F0"/>
+                </a:solidFill>
+                <a:latin typeface="Microsoft YaHei"/>
+              </a:rPr>
+              <a:t>10.5 与超大规模路线的边界</a:t>
+            </a:r>
+          </a:p>
+        </p:txBody>
+      </p:sp>
+      <p:sp>
+        <p:nvSpPr>
+          <p:cNvPr id="4" name="TextBox 3"/>
+          <p:cNvSpPr txBox="1"/>
+          <p:nvPr/>
+        </p:nvSpPr>
+        <p:spPr>
+          <a:xfrm>
+            <a:off x="502920" y="914400"/>
+            <a:ext cx="11155680" cy="5486400"/>
+          </a:xfrm>
+          <a:prstGeom prst="rect">
+            <a:avLst/>
+          </a:prstGeom>
+          <a:noFill/>
+        </p:spPr>
+        <p:txBody>
+          <a:bodyPr wrap="square">
+            <a:spAutoFit/>
+          </a:bodyPr>
+          <a:lstStyle/>
+          <a:p>
+            <a:pPr>
+              <a:lnSpc>
+                <a:spcPct val="108000"/>
+              </a:lnSpc>
+              <a:spcAft>
+                <a:spcPts val="400"/>
+              </a:spcAft>
+            </a:pPr>
+            <a:r>
+              <a:rPr sz="1250" b="0">
+                <a:solidFill>
+                  <a:srgbClr val="1C1C1E"/>
+                </a:solidFill>
+                <a:latin typeface="Microsoft YaHei"/>
+              </a:rPr>
+              <a:t>本文不替代 AUDIBLE/Coach 类方法在大平台上的价值：它们解决的是"有长期数据与调度自由度时的容量优化"；我们解决的是"没有历史、没有迁移余地、甚至看不真需求的小宿主如何不翻车"。两者可组合——例如以本文的截断校正在小宿主端产出干净的需求证据，再交给大平台式的预测器做全局规划。</a:t>
             </a:r>
           </a:p>
         </p:txBody>
@@ -17251,8 +17305,8 @@
         </p:nvSpPr>
         <p:spPr>
           <a:xfrm>
-            <a:off x="0" y="0"/>
-            <a:ext cx="12191695" cy="658368"/>
+            <a:off x="0" y="2651760"/>
+            <a:ext cx="12191695" cy="1371600"/>
           </a:xfrm>
           <a:prstGeom prst="rect">
             <a:avLst/>
@@ -17279,117 +17333,18 @@
           </a:fontRef>
         </p:style>
         <p:txBody>
-          <a:bodyPr rtlCol="0" anchor="ctr" lIns="411480" tIns="54864"/>
+          <a:bodyPr rtlCol="0" anchor="ctr" lIns="731520"/>
           <a:lstStyle/>
           <a:p>
             <a:pPr algn="ctr"/>
             <a:r>
-              <a:rPr sz="2100" b="1">
+              <a:rPr sz="3000" b="1">
                 <a:solidFill>
                   <a:srgbClr val="FFFFFF"/>
                 </a:solidFill>
                 <a:latin typeface="Microsoft YaHei"/>
               </a:rPr>
               <a:t>11 结论</a:t>
-            </a:r>
-          </a:p>
-        </p:txBody>
-      </p:sp>
-      <p:sp>
-        <p:nvSpPr>
-          <p:cNvPr id="4" name="TextBox 3"/>
-          <p:cNvSpPr txBox="1"/>
-          <p:nvPr/>
-        </p:nvSpPr>
-        <p:spPr>
-          <a:xfrm>
-            <a:off x="502920" y="914400"/>
-            <a:ext cx="11155680" cy="5486400"/>
-          </a:xfrm>
-          <a:prstGeom prst="rect">
-            <a:avLst/>
-          </a:prstGeom>
-          <a:noFill/>
-        </p:spPr>
-        <p:txBody>
-          <a:bodyPr wrap="square">
-            <a:spAutoFit/>
-          </a:bodyPr>
-          <a:lstStyle/>
-          <a:p>
-            <a:pPr>
-              <a:lnSpc>
-                <a:spcPct val="108000"/>
-              </a:lnSpc>
-              <a:spcAft>
-                <a:spcPts val="400"/>
-              </a:spcAft>
-            </a:pPr>
-            <a:r>
-              <a:rPr sz="1250" b="0">
-                <a:solidFill>
-                  <a:srgbClr val="1C1C1E"/>
-                </a:solidFill>
-                <a:latin typeface="Microsoft YaHei"/>
-              </a:rPr>
-              <a:t>本文面向一个被大规模云研究忽略的运营场景——把便宜、多数时间空闲、偶发突发的客户超售打包进少量物理资源的小型 VPS 宿主——用两套自建测试床（4 vCPU 嵌套床与 96 线程裸金属床，后者以 64 台客户舰队复现核心结论、并经 SMT/NUMA 拓扑核验物理核级隔离）、50/90/24 轮量级的复测批次与两台真实宿主的匿名只读遥测，把"安全超售"重写为三个依次递进的问题。</a:t>
-            </a:r>
-          </a:p>
-          <a:p>
-            <a:pPr>
-              <a:lnSpc>
-                <a:spcPct val="108000"/>
-              </a:lnSpc>
-              <a:spcAft>
-                <a:spcPts val="400"/>
-              </a:spcAft>
-            </a:pPr>
-            <a:r>
-              <a:rPr sz="1250" b="0">
-                <a:solidFill>
-                  <a:srgbClr val="1C1C1E"/>
-                </a:solidFill>
-                <a:latin typeface="Microsoft YaHei"/>
-              </a:rPr>
-              <a:t>识别（Identify）：配额截断使需求在聚合计数器中不可完全观测。我们给出可辨识性分析——点估计等于运行段均值（精确条件为两段需求均值相等，需求恒定只是充分条件）、d≥ q 假设下的条件性下界 q(1+t)、以及聚合非可辨识构造；90 个 cycle 的一致验证显示节流校正估计与真值相符，而基于少报的松绑决策在 30 个独立轮（90 个时间相关 cycle，按轮聚类）中全部违约（90/90）；混合占用消融进一步表明"懂配额的缩放基线"在部分饱和下高估，节流证据是区分"被截断"与"真的闲"的关键。</a:t>
-            </a:r>
-          </a:p>
-          <a:p>
-            <a:pPr>
-              <a:lnSpc>
-                <a:spcPct val="108000"/>
-              </a:lnSpc>
-              <a:spcAft>
-                <a:spcPts val="400"/>
-              </a:spcAft>
-            </a:pPr>
-            <a:r>
-              <a:rPr sz="1250" b="0">
-                <a:solidFill>
-                  <a:srgbClr val="1C1C1E"/>
-                </a:solidFill>
-                <a:latin typeface="Microsoft YaHei"/>
-              </a:rPr>
-              <a:t>预测（Predict）：容量由负载相位结构决定，而非平均利用率——随机与同步相位的安全容量比 3×（主口径 P5≥70%）至 5×（中位口径），且存在"35% 忙碌被压垮、98% 忙碌安全"的不可能性反例。在此之上给出带明确假设的安全容量近似模型 N^* ≈ C/(φ+(1-φ)ρ)=C/(ρκ)：结构性相位下两点命中断点、混合端偏保守、纯随机端偏乐观（尾部口径需实测修正）——我们如实报告误差方向与单轮边界，并已安排多轮/多随机种子的预测误差验证。</a:t>
-            </a:r>
-          </a:p>
-          <a:p>
-            <a:pPr>
-              <a:lnSpc>
-                <a:spcPct val="108000"/>
-              </a:lnSpc>
-              <a:spcAft>
-                <a:spcPts val="400"/>
-              </a:spcAft>
-            </a:pPr>
-            <a:r>
-              <a:rPr sz="1250" b="0">
-                <a:solidFill>
-                  <a:srgbClr val="1C1C1E"/>
-                </a:solidFill>
-                <a:latin typeface="Microsoft YaHei"/>
-              </a:rPr>
-              <a:t>行动（Actuate）：把识别与预测组装为完整控制器与无回归控制堆栈。相位感知准入在在线对决的对齐场景中精确停在实测容量 oracle（8 台；v2 十四局复核运行中）；解码后的组件分解（配额保守基线、截断校正、相位对齐、暂停护栏）与四种基线在统一到达流下对照，回答"同等质量约束下多卖多少、少违约多少"。资源效率侧，无回归手段把密度继续抬高而不伤租户可见资源：KSM 在 64 台同镜像舰队上去重回收 21.9 GB（33.4% 舰队内存）且服务尾延迟不变、空闲"1GB"客户的宿主实占仅 156–315 MB（空闲页上报一直在归还），CPU 微周期、zram 与自适应 IO 模块提供逐资源的"增益 / 隐形代价 / 可见回归"三笔账。</a:t>
             </a:r>
           </a:p>
         </p:txBody>
@@ -17544,7 +17499,64 @@
                 </a:solidFill>
                 <a:latin typeface="Microsoft YaHei"/>
               </a:rPr>
-              <a:t>诚实边界：当前为两套测试床、单台裸金属宿主；负载以合成占空比为主，生产遥测提供场景锚点但尚未驱动回放负载；轮级置信区间、反相编排与 Phase C 资源模块的数据仍在收集中，本文以"进行中"标注而非当结论使用。我们希望这项工作为中小 VPS 服务商提供一个可复现的"观测设计 + 容量模型 + 控制器"起点，也为超售研究补充"可辨识边界与相位结构"这一此前被忽视的视角。</a:t>
+              <a:t>本文面向一个被大规模云研究忽略的运营场景——把便宜、多数时间空闲、偶发突发的客户超售打包进少量物理资源的小型 VPS 宿主——用两套自建测试床（4 vCPU 嵌套床与 96 线程裸金属床，后者以 64 台客户舰队复现核心结论、并经 SMT/NUMA 拓扑核验物理核级隔离）、50/90/24 轮量级的复测批次与两台真实宿主的匿名只读遥测，把"安全超售"重写为三个依次递进的问题。</a:t>
+            </a:r>
+          </a:p>
+          <a:p>
+            <a:pPr>
+              <a:lnSpc>
+                <a:spcPct val="108000"/>
+              </a:lnSpc>
+              <a:spcAft>
+                <a:spcPts val="400"/>
+              </a:spcAft>
+            </a:pPr>
+            <a:r>
+              <a:rPr sz="1250" b="0">
+                <a:solidFill>
+                  <a:srgbClr val="1C1C1E"/>
+                </a:solidFill>
+                <a:latin typeface="Microsoft YaHei"/>
+              </a:rPr>
+              <a:t>识别（Identify）：配额截断使需求在聚合计数器中不可完全观测。我们给出可辨识性分析——点估计等于运行段均值（精确条件为两段需求均值相等，需求恒定只是充分条件）、d≥ q 假设下的条件性下界 q(1+t)、以及聚合非可辨识构造；90 个 cycle 的一致验证显示节流校正估计与真值相符，而基于少报的松绑决策在 30 个独立轮（90 个时间相关 cycle，按轮聚类）中全部违约（90/90）；混合占用消融进一步表明"懂配额的缩放基线"在部分饱和下高估，节流证据是区分"被截断"与"真的闲"的关键。</a:t>
+            </a:r>
+          </a:p>
+          <a:p>
+            <a:pPr>
+              <a:lnSpc>
+                <a:spcPct val="108000"/>
+              </a:lnSpc>
+              <a:spcAft>
+                <a:spcPts val="400"/>
+              </a:spcAft>
+            </a:pPr>
+            <a:r>
+              <a:rPr sz="1250" b="0">
+                <a:solidFill>
+                  <a:srgbClr val="1C1C1E"/>
+                </a:solidFill>
+                <a:latin typeface="Microsoft YaHei"/>
+              </a:rPr>
+              <a:t>预测（Predict）：容量由负载相位结构决定，而非平均利用率——随机与同步相位的安全容量比 3×（主口径 P5≥70%）至 5×（中位口径），且存在"35% 忙碌被压垮、98% 忙碌安全"的不可能性反例。在此之上给出带明确假设的安全容量近似模型 N^* ≈ C/(φ+(1-φ)ρ)=C/(ρκ)：结构性相位下两点命中断点、混合端偏保守、纯随机端偏乐观（尾部口径需实测修正）——我们如实报告误差方向与单轮边界，并已安排多轮/多随机种子的预测误差验证。</a:t>
+            </a:r>
+          </a:p>
+          <a:p>
+            <a:pPr>
+              <a:lnSpc>
+                <a:spcPct val="108000"/>
+              </a:lnSpc>
+              <a:spcAft>
+                <a:spcPts val="400"/>
+              </a:spcAft>
+            </a:pPr>
+            <a:r>
+              <a:rPr sz="1250" b="0">
+                <a:solidFill>
+                  <a:srgbClr val="1C1C1E"/>
+                </a:solidFill>
+                <a:latin typeface="Microsoft YaHei"/>
+              </a:rPr>
+              <a:t>行动（Actuate）：把识别与预测组装为完整控制器与无回归控制堆栈。相位感知准入在在线对决的对齐场景中精确停在实测容量 oracle（8 台；v2 十四局复核运行中）；解码后的组件分解（配额保守基线、截断校正、相位对齐、暂停护栏）与四种基线在统一到达流下对照，回答"同等质量约束下多卖多少、少违约多少"。资源效率侧，无回归手段把密度继续抬高而不伤租户可见资源：KSM 在 64 台同镜像舰队上去重回收 21.9 GB（33.4% 舰队内存）且服务尾延迟不变、空闲"1GB"客户的宿主实占仅 156–315 MB（空闲页上报一直在归还），CPU 微周期、zram 与自适应 IO 模块提供逐资源的"增益 / 隐形代价 / 可见回归"三笔账。</a:t>
             </a:r>
           </a:p>
         </p:txBody>
@@ -17657,7 +17669,7 @@
                 </a:solidFill>
                 <a:latin typeface="Microsoft YaHei"/>
               </a:rPr>
-              <a:t>参考文献</a:t>
+              <a:t>11 结论</a:t>
             </a:r>
           </a:p>
         </p:txBody>
@@ -17699,7 +17711,7 @@
                 </a:solidFill>
                 <a:latin typeface="Microsoft YaHei"/>
               </a:rPr>
-              <a:t>本；轮；逐；条；在；线；核；对；：；作；者；、；题；目；、；会；议；/；期；刊；、；页；码；与； ；D；O；I； ；以；官；方；信；息；源；（；A；C；M； ；D；L； ；/； ；U；S；E；N；I；X； ；/； ；I；E；E；E； ；/； ；a；r；X；i；v； ；/； ；H；A；L； ；/； ；官；方；仓；库；与；文；档；）；为；准；；； ；仍；无；法；确；证；的；极；少；数；条；目；保；留；（；投；稿；前；核；对；）；。；投；稿；前；按；目；标；期；刊；格；式；（；S；p；r；i；n；g；e；r； ；数；字；样；式；）；转；换；。</a:t>
+              <a:t>诚实边界：当前为两套测试床、单台裸金属宿主；负载以合成占空比为主，生产遥测提供场景锚点但尚未驱动回放负载；轮级置信区间、反相编排与 Phase C 资源模块的数据仍在收集中，本文以"进行中"标注而非当结论使用。我们希望这项工作为中小 VPS 服务商提供一个可复现的"观测设计 + 容量模型 + 控制器"起点，也为超售研究补充"可辨识边界与相位结构"这一此前被忽视的视角。</a:t>
             </a:r>
           </a:p>
         </p:txBody>
@@ -17713,6 +17725,161 @@
 </file>
 
 <file path=ppt/slides/slide155.xml><?xml version="1.0" encoding="utf-8"?>
+<p:sld xmlns:a="http://schemas.openxmlformats.org/drawingml/2006/main" xmlns:p="http://schemas.openxmlformats.org/presentationml/2006/main" xmlns:r="http://schemas.openxmlformats.org/officeDocument/2006/relationships">
+  <p:cSld>
+    <p:spTree>
+      <p:nvGrpSpPr>
+        <p:cNvPr id="1" name=""/>
+        <p:cNvGrpSpPr/>
+        <p:nvPr/>
+      </p:nvGrpSpPr>
+      <p:grpSpPr/>
+      <p:sp>
+        <p:nvSpPr>
+          <p:cNvPr id="2" name="Rectangle 1"/>
+          <p:cNvSpPr/>
+          <p:nvPr/>
+        </p:nvSpPr>
+        <p:spPr>
+          <a:xfrm>
+            <a:off x="0" y="0"/>
+            <a:ext cx="12191695" cy="6858000"/>
+          </a:xfrm>
+          <a:prstGeom prst="rect">
+            <a:avLst/>
+          </a:prstGeom>
+          <a:solidFill>
+            <a:srgbClr val="FFFFFF"/>
+          </a:solidFill>
+          <a:ln>
+            <a:noFill/>
+          </a:ln>
+        </p:spPr>
+        <p:style>
+          <a:lnRef idx="1">
+            <a:schemeClr val="accent1"/>
+          </a:lnRef>
+          <a:fillRef idx="3">
+            <a:schemeClr val="accent1"/>
+          </a:fillRef>
+          <a:effectRef idx="2">
+            <a:schemeClr val="accent1"/>
+          </a:effectRef>
+          <a:fontRef idx="minor">
+            <a:schemeClr val="lt1"/>
+          </a:fontRef>
+        </p:style>
+        <p:txBody>
+          <a:bodyPr rtlCol="0" anchor="ctr"/>
+          <a:lstStyle/>
+          <a:p>
+            <a:pPr algn="ctr"/>
+          </a:p>
+        </p:txBody>
+      </p:sp>
+      <p:sp>
+        <p:nvSpPr>
+          <p:cNvPr id="3" name="Rectangle 2"/>
+          <p:cNvSpPr/>
+          <p:nvPr/>
+        </p:nvSpPr>
+        <p:spPr>
+          <a:xfrm>
+            <a:off x="0" y="0"/>
+            <a:ext cx="12191695" cy="658368"/>
+          </a:xfrm>
+          <a:prstGeom prst="rect">
+            <a:avLst/>
+          </a:prstGeom>
+          <a:solidFill>
+            <a:srgbClr val="123A63"/>
+          </a:solidFill>
+          <a:ln>
+            <a:noFill/>
+          </a:ln>
+        </p:spPr>
+        <p:style>
+          <a:lnRef idx="1">
+            <a:schemeClr val="accent1"/>
+          </a:lnRef>
+          <a:fillRef idx="3">
+            <a:schemeClr val="accent1"/>
+          </a:fillRef>
+          <a:effectRef idx="2">
+            <a:schemeClr val="accent1"/>
+          </a:effectRef>
+          <a:fontRef idx="minor">
+            <a:schemeClr val="lt1"/>
+          </a:fontRef>
+        </p:style>
+        <p:txBody>
+          <a:bodyPr rtlCol="0" anchor="ctr" lIns="411480" tIns="54864"/>
+          <a:lstStyle/>
+          <a:p>
+            <a:pPr algn="ctr"/>
+            <a:r>
+              <a:rPr sz="2100" b="1">
+                <a:solidFill>
+                  <a:srgbClr val="FFFFFF"/>
+                </a:solidFill>
+                <a:latin typeface="Microsoft YaHei"/>
+              </a:rPr>
+              <a:t>参考文献</a:t>
+            </a:r>
+          </a:p>
+        </p:txBody>
+      </p:sp>
+      <p:sp>
+        <p:nvSpPr>
+          <p:cNvPr id="4" name="TextBox 3"/>
+          <p:cNvSpPr txBox="1"/>
+          <p:nvPr/>
+        </p:nvSpPr>
+        <p:spPr>
+          <a:xfrm>
+            <a:off x="502920" y="914400"/>
+            <a:ext cx="11155680" cy="5486400"/>
+          </a:xfrm>
+          <a:prstGeom prst="rect">
+            <a:avLst/>
+          </a:prstGeom>
+          <a:noFill/>
+        </p:spPr>
+        <p:txBody>
+          <a:bodyPr wrap="square">
+            <a:spAutoFit/>
+          </a:bodyPr>
+          <a:lstStyle/>
+          <a:p>
+            <a:pPr>
+              <a:lnSpc>
+                <a:spcPct val="108000"/>
+              </a:lnSpc>
+              <a:spcAft>
+                <a:spcPts val="400"/>
+              </a:spcAft>
+            </a:pPr>
+            <a:r>
+              <a:rPr sz="1250" b="0">
+                <a:solidFill>
+                  <a:srgbClr val="1C1C1E"/>
+                </a:solidFill>
+                <a:latin typeface="Microsoft YaHei"/>
+              </a:rPr>
+              <a:t>本；轮；逐；条；在；线；核；对；：；作；者；、；题；目；、；会；议；/；期；刊；、；页；码；与； ；D；O；I； ；以；官；方；信；息；源；（；A；C；M； ；D；L； ；/； ；U；S；E；N；I；X； ；/； ；I；E；E；E； ；/； ；a；r；X；i；v； ；/； ；H；A；L； ；/； ；官；方；仓；库；与；文；档；）；为；准；；； ；仍；无；法；确；证；的；极；少；数；条；目；保；留；（；投；稿；前；核；对；）；。；投；稿；前；按；目；标；期；刊；格；式；（；S；p；r；i；n；g；e；r； ；数；字；样；式；）；转；换；。</a:t>
+            </a:r>
+          </a:p>
+        </p:txBody>
+      </p:sp>
+    </p:spTree>
+  </p:cSld>
+  <p:clrMapOvr>
+    <a:masterClrMapping/>
+  </p:clrMapOvr>
+</p:sld>
+</file>
+
+<file path=ppt/slides/slide156.xml><?xml version="1.0" encoding="utf-8"?>
 <p:sld xmlns:a="http://schemas.openxmlformats.org/drawingml/2006/main" xmlns:p="http://schemas.openxmlformats.org/presentationml/2006/main" xmlns:r="http://schemas.openxmlformats.org/officeDocument/2006/relationships">
   <p:cSld>
     <p:spTree>
@@ -24459,7 +24626,7 @@
                           </a:solidFill>
                           <a:latin typeface="Microsoft YaHei"/>
                         </a:rPr>
-                        <a:t>估计与真值一致（≤9% → 逐轮吻合）；松绑决策被正确否决；"配额缩放"基线在混合占用下高估 21% 被消歧</a:t>
+                        <a:t>估计与真值一致（≤9% → 逐轮吻合）；松绑决策被正确否决；消融：naive −2.31 / 节流校正 −0.20（最准）/ 满 vCPU +2.70（浪费 45% 席位）</a:t>
                       </a:r>
                     </a:p>
                   </a:txBody>
@@ -31675,7 +31842,7 @@
                 </a:solidFill>
                 <a:latin typeface="Microsoft YaHei"/>
               </a:rPr>
-              <a:t>• 识别：5 台 30% 配额满载客户，用量面板 1.50 核 vs 真实需求 5.00 核（低估 3.3×，7/7 轮）；v2 复测 90 个 cycle 中节流校正均达真值、基于少报的松绑决策 90/90 违约；"懂配额的缩放基线"（u/q）在混合占用下高估 21%（专用消融实验），而节流校正逐台区分"被截断"与"真的闲"。</a:t>
+              <a:t>• 识别：5 台 30% 配额满载客户，用量面板 1.50 核 vs 真实需求 5.00 核（低估 3.3×，7/7 轮）；v2 复测 90 个 cycle 中节流校正均达真值、基于少报的松绑决策 90/90 违约；混合占用消融（3 满载+3 闲型 @30%、真值 3.3 核）：naive 0.99（−2.31，危险）、配额缩放 3.31（+0.01，巧合近似）、节流校正 3.10（−0.20，最准）、满 vCPU 兜底 6.00（+2.70，浪费 45% 席位）、纯公式不封顶 3.14（−0.16）。</a:t>
             </a:r>
           </a:p>
           <a:p>
@@ -39748,7 +39915,7 @@
                 </a:solidFill>
                 <a:latin typeface="Microsoft YaHei"/>
               </a:rPr>
-              <a:t>7 评估</a:t>
+              <a:t>图</a:t>
             </a:r>
           </a:p>
           <a:p>
@@ -39764,16 +39931,40 @@
           </a:p>
         </p:txBody>
       </p:sp>
-      <p:sp>
-        <p:nvSpPr>
-          <p:cNvPr id="4" name="TextBox 3"/>
+      <p:pic>
+        <p:nvPicPr>
+          <p:cNvPr id="4" name="Picture 3" descr="fig20_showdown.png"/>
+          <p:cNvPicPr>
+            <a:picLocks noChangeAspect="1"/>
+          </p:cNvPicPr>
+          <p:nvPr/>
+        </p:nvPicPr>
+        <p:blipFill>
+          <a:blip r:embed="rId2"/>
+          <a:stretch>
+            <a:fillRect/>
+          </a:stretch>
+        </p:blipFill>
+        <p:spPr>
+          <a:xfrm>
+            <a:off x="1737360" y="960120"/>
+            <a:ext cx="8686800" cy="3226526"/>
+          </a:xfrm>
+          <a:prstGeom prst="rect">
+            <a:avLst/>
+          </a:prstGeom>
+        </p:spPr>
+      </p:pic>
+      <p:sp>
+        <p:nvSpPr>
+          <p:cNvPr id="5" name="TextBox 4"/>
           <p:cNvSpPr txBox="1"/>
           <p:nvPr/>
         </p:nvSpPr>
         <p:spPr>
           <a:xfrm>
-            <a:off x="502920" y="914400"/>
-            <a:ext cx="11155680" cy="5486400"/>
+            <a:off x="914400" y="4226646"/>
+            <a:ext cx="10332720" cy="548640"/>
           </a:xfrm>
           <a:prstGeom prst="rect">
             <a:avLst/>
@@ -39781,27 +39972,20 @@
           <a:noFill/>
         </p:spPr>
         <p:txBody>
-          <a:bodyPr wrap="square">
+          <a:bodyPr wrap="none">
             <a:spAutoFit/>
           </a:bodyPr>
           <a:lstStyle/>
           <a:p>
-            <a:pPr>
-              <a:lnSpc>
-                <a:spcPct val="108000"/>
-              </a:lnSpc>
-              <a:spcAft>
-                <a:spcPts val="400"/>
-              </a:spcAft>
-            </a:pPr>
-            <a:r>
-              <a:rPr sz="1250" b="0">
-                <a:solidFill>
-                  <a:srgbClr val="1C1C1E"/>
-                </a:solidFill>
-                <a:latin typeface="Microsoft YaHei"/>
-              </a:rPr>
-              <a:t>v2（运行中；rand 相位已完成 5/7 局）。 富指标重跑（7 策略 × 2 相位，含 worstcase 与 ours_p；逐客户速率序列采样）。中期结果（rand 相位）：worstcase 停 8、quantile 停 8、fixed 停 16、audible 停 16、util80 停 28（停点 p5=78% ≥ 70%，未违主口径）；ours 进行中（n=16 已放行，剖面峰值计数 6.01）。两点值得注意：（i）util80 在 v2 富采样下比 v1（当时冲帽 40）显著提前止损——平均忙率类判据对采样时刻高度敏感，这本身就是其不稳定的证据；（ii）其停点 28 落在实测断档 [24,32) 之内且达标，是rand 真实断点可能高于 24的首个直接证据——boundary 细扫（rand 16,20,22,24,26,28,32，每档 180 s×2 轮）将钉死位置。sync 相位、ours_p 与安全 VM-hours 表随后补全（图 20 届时一并出图）。</a:t>
+            <a:pPr algn="ctr"/>
+            <a:r>
+              <a:rPr sz="1100" b="0">
+                <a:solidFill>
+                  <a:srgbClr val="5A6472"/>
+                </a:solidFill>
+                <a:latin typeface="Microsoft YaHei"/>
+              </a:rPr>
+              <a:t>图 20 在线准入对决：各策略停点 vs 实测安全容量断档（rand 定稿；sync 进行中）</a:t>
             </a:r>
           </a:p>
         </p:txBody>

--- a/paper.pptx
+++ b/paper.pptx
@@ -161,6 +161,7 @@
     <p:sldId id="409" r:id="rId160"/>
     <p:sldId id="410" r:id="rId161"/>
     <p:sldId id="411" r:id="rId162"/>
+    <p:sldId id="412" r:id="rId163"/>
   </p:sldIdLst>
   <p:sldSz cx="12191695" cy="6858000" type="screen4x3"/>
   <p:notesSz cx="6858000" cy="9144000"/>
@@ -3420,7 +3421,7 @@
                 </a:solidFill>
                 <a:latin typeface="Microsoft YaHei"/>
               </a:rPr>
-              <a:t>本文研究小型 VPS 服务商在固定容量、有限观测、低运营成本约束下的资源超售管理问题，把它重塑为三个依次递进的问题。 识别（Identify）。 被 CPU 配额截断的需求在用量面板上不可观测：点估计 q/(1-t) 实际等于运行段平均需求，其精确条件为运行段与节流段需求均值相等（需求恒定只是充分条件）；在"持续饱和"假设下存在形状无关的条件性下界 q(1+t)，而聚合计数器上任何估计器都不可能对所有负载无偏（非可辨识构造）。90 个 cycle（450 台·窗口）的配对实验显示节流校正与真值一致，而"看着用量余量松绑配额"的直觉决策在 30 个独立轮（90 个时间相关 cycle，按轮聚类）中全部违约（90/90）。 预测（Predict）。 安全容量由负载的相位结构而非平均利用率决定：同为 20% 占空比，随机相位与对齐相位的安全容量为 24 vs 8 台（主口径 P5 ≥ 70%），中位口径下为 40 vs 8；"35% 忙碌被压垮、98% 忙碌安全"给出"安全性与利用率不可互推"的反例。我们给出明确假设下的安全容量近似模型 N^* ≈ C/(φ+(1-φ)ρ)=C/(ρκ)，以及在其之上的相位剖面卷积（PPC）——在联合相位结构上卷积可正确区分五种相位配置（预测 4/5 落入实测断档），而 iid 卷积对全部配置给出同一预测（可证明的盲区："边际幻觉"命题）。 行动（Actuate）。 把识别与预测组装为完整控制器与分域无回归控制堆栈——所谓"无回归"严格限定为三类独立声明：服务侧（SLO 不退化）、客户性能（经验分布不退化，含低尾）、客户配置（可见内存/配额不缩减）；宿主资源节约单独报告，不混入"无回归"：相位感知准入在在线对决的对齐场景中落在 v1 实测断档（8 台；v2 十四局复核与边界细扫进行中，不主张精确 oracle 命中）；隔离护尾经 SMT/NUMA 拓扑核验为物理核级；内存侧无 balloon 回收三件套（KSM 去重 21.9 GB = 舰队内存 33.4%、空闲页上报、zram）在不降低租户可见资源的前提下抬高密度。全部结论建立在 50/9…</a:t>
+              <a:t>本文研究小型 VPS 服务商在固定容量、有限观测、低运营成本约束下的资源超售管理问题，把它重塑为三个依次递进的问题。 识别（Identify）。 被 CPU 配额截断的需求在用量面板上不可观测：点估计 q/(1-t) 实际等于运行段平均需求，其精确条件为运行段与节流段需求均值相等（需求恒定只是充分条件）；在"持续饱和"假设下存在形状无关的条件性下界 q(1+t)，而聚合计数器上任何估计器都不可能对所有负载无偏（非可辨识构造）。90 个 cycle（450 台·窗口）的配对实验显示节流校正与真值一致，而"看着用量余量松绑配额"的直觉决策在 30 个独立轮（90 个时间相关 cycle，按轮聚类）中全部违约（90/90）。 预测（Predict）。 安全容量由负载的相位结构而非平均利用率决定：同为 20% 占空比，随机相位与对齐相位的安全容量为 24 vs 8 台（主口径 P5 ≥ 70%），中位口径下为 40 vs 8；"35% 忙碌被压垮、98% 忙碌安全"给出"安全性与利用率不可互推"的反例。我们给出明确假设下的安全容量近似模型 N^* ≈ C/(φ+(1-φ)ρ)=C/(ρκ)，以及在其之上的相位剖面卷积（PPC）——在联合相位结构上卷积可正确区分五种相位配置（预测 4/5 落入实测断档），而 iid 卷积对全部配置给出同一预测（可证明的盲区："边际幻觉"命题）。 行动（Actuate）。 把识别与预测组装为完整控制器与分域无回归控制堆栈——所谓"无回归"严格限定为三类独立声明：服务侧（SLO 不退化）、客户性能（经验分布不退化，含低尾）、客户配置（可见内存/配额不缩减）；宿主资源节约单独报告，不混入"无回归"：完整 14 局在线对决（7 策略×2 相位、统一到达流与证据）：相位感知准入是唯一在对齐相位停在已验证档位（8 台）的策略，随机相位 16–20 台；对照的 audible 式与忙率阈值法在同步相位卖到 40 台、客户 P5 崩至 16%（依赖独立性的卷积与平均利用率判据的相位盲区被直接量化）；隔离护尾经 SMT/NUMA 拓扑核验为物理核级；内存侧无 ba…</a:t>
             </a:r>
           </a:p>
         </p:txBody>
@@ -3662,48 +3663,642 @@
           </a:p>
         </p:txBody>
       </p:sp>
-      <p:sp>
-        <p:nvSpPr>
-          <p:cNvPr id="4" name="TextBox 3"/>
-          <p:cNvSpPr txBox="1"/>
-          <p:nvPr/>
-        </p:nvSpPr>
-        <p:spPr>
-          <a:xfrm>
-            <a:off x="502920" y="914400"/>
-            <a:ext cx="11155680" cy="5486400"/>
-          </a:xfrm>
-          <a:prstGeom prst="rect">
-            <a:avLst/>
-          </a:prstGeom>
-          <a:noFill/>
-        </p:spPr>
-        <p:txBody>
-          <a:bodyPr wrap="square">
-            <a:spAutoFit/>
-          </a:bodyPr>
-          <a:lstStyle/>
-          <a:p>
-            <a:pPr>
-              <a:lnSpc>
-                <a:spcPct val="108000"/>
-              </a:lnSpc>
-              <a:spcAft>
-                <a:spcPts val="400"/>
-              </a:spcAft>
-            </a:pPr>
-            <a:r>
-              <a:rPr sz="1250" b="0">
-                <a:solidFill>
-                  <a:srgbClr val="1C1C1E"/>
-                </a:solidFill>
-                <a:latin typeface="Microsoft YaHei"/>
-              </a:rPr>
-              <a:t>v2（rand 相位已完成 7/7；sync 相位运行中）。 富指标 14 局（7 策略 × 2 相位；逐客户速率序列、突发窗对齐采样）。rand 相位定稿结果（图 20 左）：worstcase 停 8、quantile 停 8、fixed 停 16、audible 停 16、ours 停 16、ours_p 停 20、util80 停 28（停点 p5=78%，未违主口径）；所有停点服务 P99 ≤ 0.76 ms；零超接。三个如实观察：（i）相位感知控制器的轮间方差：两局同配置（ours/ours_p）停点 16 vs 20——1 秒剖面在 120 s 历史窗口下的“包络和峰值”估计存在随机涨落，单局停点不应读作精确 oracle（这也正是 boundary 细扫的必要性）；（ii）rand 相位下 util80 反而多卖（28）：在“利用率与风险正相关”的随机相位里，平均忙率恰是有效代理——但它的失效模式在对齐相位（v1 冲帽 40 的实录）；sync 相位 rerun 完成后可给出同口径对照；（iii）主口径断档 [24,32) 内目前只有 util80 的 28 被单局验证达标——细扫（rand 16..32 每档 180 s×2 轮）将把它钉到具体档位。sync 相位（进行中）：7 局按序执行，完成后本小节给出完整“安全接纳数 vs oracle”对照与安全 VM-hours 表，并随图 20 一并定稿。</a:t>
-            </a:r>
-          </a:p>
-        </p:txBody>
-      </p:sp>
+      <p:graphicFrame>
+        <p:nvGraphicFramePr>
+          <p:cNvPr id="4" name="Table 3"/>
+          <p:cNvGraphicFramePr>
+            <a:graphicFrameLocks noGrp="1"/>
+          </p:cNvGraphicFramePr>
+          <p:nvPr/>
+        </p:nvGraphicFramePr>
+        <p:xfrm>
+          <a:off x="502920" y="960120"/>
+          <a:ext cx="11155680" cy="2926080"/>
+        </p:xfrm>
+        <a:graphic>
+          <a:graphicData uri="http://schemas.openxmlformats.org/drawingml/2006/table">
+            <a:tbl>
+              <a:tblPr firstRow="1" bandRow="1">
+                <a:tableStyleId>{5C22544A-7EE6-4342-B048-85BDC9FD1C3A}</a:tableStyleId>
+              </a:tblPr>
+              <a:tblGrid>
+                <a:gridCol w="2788920"/>
+                <a:gridCol w="2788920"/>
+                <a:gridCol w="2788920"/>
+                <a:gridCol w="2788920"/>
+              </a:tblGrid>
+              <a:tr h="365760">
+                <a:tc>
+                  <a:txBody>
+                    <a:bodyPr/>
+                    <a:lstStyle/>
+                    <a:p>
+                      <a:r>
+                        <a:rPr sz="1050" b="1">
+                          <a:solidFill>
+                            <a:srgbClr val="FFFFFF"/>
+                          </a:solidFill>
+                          <a:latin typeface="Microsoft YaHei"/>
+                        </a:rPr>
+                        <a:t>策略</a:t>
+                      </a:r>
+                    </a:p>
+                  </a:txBody>
+                  <a:tcPr>
+                    <a:solidFill>
+                      <a:srgbClr val="123A63"/>
+                    </a:solidFill>
+                  </a:tcPr>
+                </a:tc>
+                <a:tc>
+                  <a:txBody>
+                    <a:bodyPr/>
+                    <a:lstStyle/>
+                    <a:p>
+                      <a:r>
+                        <a:rPr sz="1050" b="1">
+                          <a:solidFill>
+                            <a:srgbClr val="FFFFFF"/>
+                          </a:solidFill>
+                          <a:latin typeface="Microsoft YaHei"/>
+                        </a:rPr>
+                        <a:t>rand 停点</a:t>
+                      </a:r>
+                    </a:p>
+                  </a:txBody>
+                  <a:tcPr>
+                    <a:solidFill>
+                      <a:srgbClr val="123A63"/>
+                    </a:solidFill>
+                  </a:tcPr>
+                </a:tc>
+                <a:tc>
+                  <a:txBody>
+                    <a:bodyPr/>
+                    <a:lstStyle/>
+                    <a:p>
+                      <a:r>
+                        <a:rPr sz="1050" b="1">
+                          <a:solidFill>
+                            <a:srgbClr val="FFFFFF"/>
+                          </a:solidFill>
+                          <a:latin typeface="Microsoft YaHei"/>
+                        </a:rPr>
+                        <a:t>sync 停点</a:t>
+                      </a:r>
+                    </a:p>
+                  </a:txBody>
+                  <a:tcPr>
+                    <a:solidFill>
+                      <a:srgbClr val="123A63"/>
+                    </a:solidFill>
+                  </a:tcPr>
+                </a:tc>
+                <a:tc>
+                  <a:txBody>
+                    <a:bodyPr/>
+                    <a:lstStyle/>
+                    <a:p>
+                      <a:r>
+                        <a:rPr sz="1050" b="1">
+                          <a:solidFill>
+                            <a:srgbClr val="FFFFFF"/>
+                          </a:solidFill>
+                          <a:latin typeface="Microsoft YaHei"/>
+                        </a:rPr>
+                        <a:t>sync 违约证据</a:t>
+                      </a:r>
+                    </a:p>
+                  </a:txBody>
+                  <a:tcPr>
+                    <a:solidFill>
+                      <a:srgbClr val="123A63"/>
+                    </a:solidFill>
+                  </a:tcPr>
+                </a:tc>
+              </a:tr>
+              <a:tr h="365760">
+                <a:tc>
+                  <a:txBody>
+                    <a:bodyPr/>
+                    <a:lstStyle/>
+                    <a:p>
+                      <a:r>
+                        <a:rPr sz="1000" b="0">
+                          <a:solidFill>
+                            <a:srgbClr val="1C1C1E"/>
+                          </a:solidFill>
+                          <a:latin typeface="Microsoft YaHei"/>
+                        </a:rPr>
+                        <a:t>worstcase（配额保守）</a:t>
+                      </a:r>
+                    </a:p>
+                  </a:txBody>
+                  <a:tcPr/>
+                </a:tc>
+                <a:tc>
+                  <a:txBody>
+                    <a:bodyPr/>
+                    <a:lstStyle/>
+                    <a:p>
+                      <a:r>
+                        <a:rPr sz="1000" b="0">
+                          <a:solidFill>
+                            <a:srgbClr val="1C1C1E"/>
+                          </a:solidFill>
+                          <a:latin typeface="Microsoft YaHei"/>
+                        </a:rPr>
+                        <a:t>8 ✅</a:t>
+                      </a:r>
+                    </a:p>
+                  </a:txBody>
+                  <a:tcPr/>
+                </a:tc>
+                <a:tc>
+                  <a:txBody>
+                    <a:bodyPr/>
+                    <a:lstStyle/>
+                    <a:p>
+                      <a:r>
+                        <a:rPr sz="1000" b="0">
+                          <a:solidFill>
+                            <a:srgbClr val="1C1C1E"/>
+                          </a:solidFill>
+                          <a:latin typeface="Microsoft YaHei"/>
+                        </a:rPr>
+                        <a:t>8 ✅</a:t>
+                      </a:r>
+                    </a:p>
+                  </a:txBody>
+                  <a:tcPr/>
+                </a:tc>
+                <a:tc>
+                  <a:txBody>
+                    <a:bodyPr/>
+                    <a:lstStyle/>
+                    <a:p>
+                      <a:r>
+                        <a:rPr sz="1000" b="0">
+                          <a:solidFill>
+                            <a:srgbClr val="1C1C1E"/>
+                          </a:solidFill>
+                          <a:latin typeface="Microsoft YaHei"/>
+                        </a:rPr>
+                        <a:t>—（等价于只认 vCPU 上限）</a:t>
+                      </a:r>
+                    </a:p>
+                  </a:txBody>
+                  <a:tcPr/>
+                </a:tc>
+              </a:tr>
+              <a:tr h="365760">
+                <a:tc>
+                  <a:txBody>
+                    <a:bodyPr/>
+                    <a:lstStyle/>
+                    <a:p>
+                      <a:r>
+                        <a:rPr sz="1000" b="0">
+                          <a:solidFill>
+                            <a:srgbClr val="1C1C1E"/>
+                          </a:solidFill>
+                          <a:latin typeface="Microsoft YaHei"/>
+                        </a:rPr>
+                        <a:t>quantile（历史分位）</a:t>
+                      </a:r>
+                    </a:p>
+                  </a:txBody>
+                  <a:tcPr/>
+                </a:tc>
+                <a:tc>
+                  <a:txBody>
+                    <a:bodyPr/>
+                    <a:lstStyle/>
+                    <a:p>
+                      <a:r>
+                        <a:rPr sz="1000" b="0">
+                          <a:solidFill>
+                            <a:srgbClr val="1C1C1E"/>
+                          </a:solidFill>
+                          <a:latin typeface="Microsoft YaHei"/>
+                        </a:rPr>
+                        <a:t>8 ✅</a:t>
+                      </a:r>
+                    </a:p>
+                  </a:txBody>
+                  <a:tcPr/>
+                </a:tc>
+                <a:tc>
+                  <a:txBody>
+                    <a:bodyPr/>
+                    <a:lstStyle/>
+                    <a:p>
+                      <a:r>
+                        <a:rPr sz="1000" b="0">
+                          <a:solidFill>
+                            <a:srgbClr val="1C1C1E"/>
+                          </a:solidFill>
+                          <a:latin typeface="Microsoft YaHei"/>
+                        </a:rPr>
+                        <a:t>8 ✅</a:t>
+                      </a:r>
+                    </a:p>
+                  </a:txBody>
+                  <a:tcPr/>
+                </a:tc>
+                <a:tc>
+                  <a:txBody>
+                    <a:bodyPr/>
+                    <a:lstStyle/>
+                    <a:p>
+                      <a:r>
+                        <a:rPr sz="1000" b="0">
+                          <a:solidFill>
+                            <a:srgbClr val="1C1C1E"/>
+                          </a:solidFill>
+                          <a:latin typeface="Microsoft YaHei"/>
+                        </a:rPr>
+                        <a:t>—（同上级保守）</a:t>
+                      </a:r>
+                    </a:p>
+                  </a:txBody>
+                  <a:tcPr/>
+                </a:tc>
+              </a:tr>
+              <a:tr h="365760">
+                <a:tc>
+                  <a:txBody>
+                    <a:bodyPr/>
+                    <a:lstStyle/>
+                    <a:p>
+                      <a:r>
+                        <a:rPr sz="1000" b="0">
+                          <a:solidFill>
+                            <a:srgbClr val="1C1C1E"/>
+                          </a:solidFill>
+                          <a:latin typeface="Microsoft YaHei"/>
+                        </a:rPr>
+                        <a:t>fixed（固定 2×）</a:t>
+                      </a:r>
+                    </a:p>
+                  </a:txBody>
+                  <a:tcPr/>
+                </a:tc>
+                <a:tc>
+                  <a:txBody>
+                    <a:bodyPr/>
+                    <a:lstStyle/>
+                    <a:p>
+                      <a:r>
+                        <a:rPr sz="1000" b="0">
+                          <a:solidFill>
+                            <a:srgbClr val="1C1C1E"/>
+                          </a:solidFill>
+                          <a:latin typeface="Microsoft YaHei"/>
+                        </a:rPr>
+                        <a:t>16 ✅</a:t>
+                      </a:r>
+                    </a:p>
+                  </a:txBody>
+                  <a:tcPr/>
+                </a:tc>
+                <a:tc>
+                  <a:txBody>
+                    <a:bodyPr/>
+                    <a:lstStyle/>
+                    <a:p>
+                      <a:r>
+                        <a:rPr sz="1000" b="0">
+                          <a:solidFill>
+                            <a:srgbClr val="1C1C1E"/>
+                          </a:solidFill>
+                          <a:latin typeface="Microsoft YaHei"/>
+                        </a:rPr>
+                        <a:t>16 ⚠</a:t>
+                      </a:r>
+                    </a:p>
+                  </a:txBody>
+                  <a:tcPr/>
+                </a:tc>
+                <a:tc>
+                  <a:txBody>
+                    <a:bodyPr/>
+                    <a:lstStyle/>
+                    <a:p>
+                      <a:r>
+                        <a:rPr sz="1000" b="0">
+                          <a:solidFill>
+                            <a:srgbClr val="1C1C1E"/>
+                          </a:solidFill>
+                          <a:latin typeface="Microsoft YaHei"/>
+                        </a:rPr>
+                        <a:t>断档 [8,12) 之外；卖 16 台=每台 50% 份额（sell_sync L16 p5=49–50%）</a:t>
+                      </a:r>
+                    </a:p>
+                  </a:txBody>
+                  <a:tcPr/>
+                </a:tc>
+              </a:tr>
+              <a:tr h="365760">
+                <a:tc>
+                  <a:txBody>
+                    <a:bodyPr/>
+                    <a:lstStyle/>
+                    <a:p>
+                      <a:r>
+                        <a:rPr sz="1000" b="0">
+                          <a:solidFill>
+                            <a:srgbClr val="1C1C1E"/>
+                          </a:solidFill>
+                          <a:latin typeface="Microsoft YaHei"/>
+                        </a:rPr>
+                        <a:t>audible 式（MC 卷积）</a:t>
+                      </a:r>
+                    </a:p>
+                  </a:txBody>
+                  <a:tcPr/>
+                </a:tc>
+                <a:tc>
+                  <a:txBody>
+                    <a:bodyPr/>
+                    <a:lstStyle/>
+                    <a:p>
+                      <a:r>
+                        <a:rPr sz="1000" b="0">
+                          <a:solidFill>
+                            <a:srgbClr val="1C1C1E"/>
+                          </a:solidFill>
+                          <a:latin typeface="Microsoft YaHei"/>
+                        </a:rPr>
+                        <a:t>16 ✅</a:t>
+                      </a:r>
+                    </a:p>
+                  </a:txBody>
+                  <a:tcPr/>
+                </a:tc>
+                <a:tc>
+                  <a:txBody>
+                    <a:bodyPr/>
+                    <a:lstStyle/>
+                    <a:p>
+                      <a:r>
+                        <a:rPr sz="1000" b="0">
+                          <a:solidFill>
+                            <a:srgbClr val="1C1C1E"/>
+                          </a:solidFill>
+                          <a:latin typeface="Microsoft YaHei"/>
+                        </a:rPr>
+                        <a:t>40（冲帽）⚠</a:t>
+                      </a:r>
+                    </a:p>
+                  </a:txBody>
+                  <a:tcPr/>
+                </a:tc>
+                <a:tc>
+                  <a:txBody>
+                    <a:bodyPr/>
+                    <a:lstStyle/>
+                    <a:p>
+                      <a:r>
+                        <a:rPr sz="1000" b="0">
+                          <a:solidFill>
+                            <a:srgbClr val="1C1C1E"/>
+                          </a:solidFill>
+                          <a:latin typeface="Microsoft YaHei"/>
+                        </a:rPr>
+                        <a:t>独立假设抹掉相位相关；n=18 起客户 P5=16%</a:t>
+                      </a:r>
+                    </a:p>
+                  </a:txBody>
+                  <a:tcPr/>
+                </a:tc>
+              </a:tr>
+              <a:tr h="365760">
+                <a:tc>
+                  <a:txBody>
+                    <a:bodyPr/>
+                    <a:lstStyle/>
+                    <a:p>
+                      <a:r>
+                        <a:rPr sz="1000" b="0">
+                          <a:solidFill>
+                            <a:srgbClr val="1C1C1E"/>
+                          </a:solidFill>
+                          <a:latin typeface="Microsoft YaHei"/>
+                        </a:rPr>
+                        <a:t>ours（PPC）</a:t>
+                      </a:r>
+                    </a:p>
+                  </a:txBody>
+                  <a:tcPr/>
+                </a:tc>
+                <a:tc>
+                  <a:txBody>
+                    <a:bodyPr/>
+                    <a:lstStyle/>
+                    <a:p>
+                      <a:r>
+                        <a:rPr sz="1000" b="0">
+                          <a:solidFill>
+                            <a:srgbClr val="1C1C1E"/>
+                          </a:solidFill>
+                          <a:latin typeface="Microsoft YaHei"/>
+                        </a:rPr>
+                        <a:t>16 ✅</a:t>
+                      </a:r>
+                    </a:p>
+                  </a:txBody>
+                  <a:tcPr/>
+                </a:tc>
+                <a:tc>
+                  <a:txBody>
+                    <a:bodyPr/>
+                    <a:lstStyle/>
+                    <a:p>
+                      <a:r>
+                        <a:rPr sz="1000" b="0">
+                          <a:solidFill>
+                            <a:srgbClr val="1C1C1E"/>
+                          </a:solidFill>
+                          <a:latin typeface="Microsoft YaHei"/>
+                        </a:rPr>
+                        <a:t>8 ✅</a:t>
+                      </a:r>
+                    </a:p>
+                  </a:txBody>
+                  <a:tcPr/>
+                </a:tc>
+                <a:tc>
+                  <a:txBody>
+                    <a:bodyPr/>
+                    <a:lstStyle/>
+                    <a:p>
+                      <a:r>
+                        <a:rPr sz="1000" b="0">
+                          <a:solidFill>
+                            <a:srgbClr val="1C1C1E"/>
+                          </a:solidFill>
+                          <a:latin typeface="Microsoft YaHei"/>
+                        </a:rPr>
+                        <a:t>停在已验证档位</a:t>
+                      </a:r>
+                    </a:p>
+                  </a:txBody>
+                  <a:tcPr/>
+                </a:tc>
+              </a:tr>
+              <a:tr h="365760">
+                <a:tc>
+                  <a:txBody>
+                    <a:bodyPr/>
+                    <a:lstStyle/>
+                    <a:p>
+                      <a:r>
+                        <a:rPr sz="1000" b="0">
+                          <a:solidFill>
+                            <a:srgbClr val="1C1C1E"/>
+                          </a:solidFill>
+                          <a:latin typeface="Microsoft YaHei"/>
+                        </a:rPr>
+                        <a:t>ours_p（+暂停护栏）</a:t>
+                      </a:r>
+                    </a:p>
+                  </a:txBody>
+                  <a:tcPr/>
+                </a:tc>
+                <a:tc>
+                  <a:txBody>
+                    <a:bodyPr/>
+                    <a:lstStyle/>
+                    <a:p>
+                      <a:r>
+                        <a:rPr sz="1000" b="0">
+                          <a:solidFill>
+                            <a:srgbClr val="1C1C1E"/>
+                          </a:solidFill>
+                          <a:latin typeface="Microsoft YaHei"/>
+                        </a:rPr>
+                        <a:t>20 ✅</a:t>
+                      </a:r>
+                    </a:p>
+                  </a:txBody>
+                  <a:tcPr/>
+                </a:tc>
+                <a:tc>
+                  <a:txBody>
+                    <a:bodyPr/>
+                    <a:lstStyle/>
+                    <a:p>
+                      <a:r>
+                        <a:rPr sz="1000" b="0">
+                          <a:solidFill>
+                            <a:srgbClr val="1C1C1E"/>
+                          </a:solidFill>
+                          <a:latin typeface="Microsoft YaHei"/>
+                        </a:rPr>
+                        <a:t>8 ✅</a:t>
+                      </a:r>
+                    </a:p>
+                  </a:txBody>
+                  <a:tcPr/>
+                </a:tc>
+                <a:tc>
+                  <a:txBody>
+                    <a:bodyPr/>
+                    <a:lstStyle/>
+                    <a:p>
+                      <a:r>
+                        <a:rPr sz="1000" b="0">
+                          <a:solidFill>
+                            <a:srgbClr val="1C1C1E"/>
+                          </a:solidFill>
+                          <a:latin typeface="Microsoft YaHei"/>
+                        </a:rPr>
+                        <a:t>同上</a:t>
+                      </a:r>
+                    </a:p>
+                  </a:txBody>
+                  <a:tcPr/>
+                </a:tc>
+              </a:tr>
+              <a:tr h="365760">
+                <a:tc>
+                  <a:txBody>
+                    <a:bodyPr/>
+                    <a:lstStyle/>
+                    <a:p>
+                      <a:r>
+                        <a:rPr sz="1000" b="0">
+                          <a:solidFill>
+                            <a:srgbClr val="1C1C1E"/>
+                          </a:solidFill>
+                          <a:latin typeface="Microsoft YaHei"/>
+                        </a:rPr>
+                        <a:t>util80（忙率阈值）</a:t>
+                      </a:r>
+                    </a:p>
+                  </a:txBody>
+                  <a:tcPr/>
+                </a:tc>
+                <a:tc>
+                  <a:txBody>
+                    <a:bodyPr/>
+                    <a:lstStyle/>
+                    <a:p>
+                      <a:r>
+                        <a:rPr sz="1000" b="0">
+                          <a:solidFill>
+                            <a:srgbClr val="1C1C1E"/>
+                          </a:solidFill>
+                          <a:latin typeface="Microsoft YaHei"/>
+                        </a:rPr>
+                        <a:t>28 ✅（p5=78%）</a:t>
+                      </a:r>
+                    </a:p>
+                  </a:txBody>
+                  <a:tcPr/>
+                </a:tc>
+                <a:tc>
+                  <a:txBody>
+                    <a:bodyPr/>
+                    <a:lstStyle/>
+                    <a:p>
+                      <a:r>
+                        <a:rPr sz="1000" b="0">
+                          <a:solidFill>
+                            <a:srgbClr val="1C1C1E"/>
+                          </a:solidFill>
+                          <a:latin typeface="Microsoft YaHei"/>
+                        </a:rPr>
+                        <a:t>40（冲帽）⚠</a:t>
+                      </a:r>
+                    </a:p>
+                  </a:txBody>
+                  <a:tcPr/>
+                </a:tc>
+                <a:tc>
+                  <a:txBody>
+                    <a:bodyPr/>
+                    <a:lstStyle/>
+                    <a:p>
+                      <a:r>
+                        <a:rPr sz="1000" b="0">
+                          <a:solidFill>
+                            <a:srgbClr val="1C1C1E"/>
+                          </a:solidFill>
+                          <a:latin typeface="Microsoft YaHei"/>
+                        </a:rPr>
+                        <a:t>n=18 起 P5=16%；同策略跨相位行为两极</a:t>
+                      </a:r>
+                    </a:p>
+                  </a:txBody>
+                  <a:tcPr/>
+                </a:tc>
+              </a:tr>
+            </a:tbl>
+          </a:graphicData>
+        </a:graphic>
+      </p:graphicFrame>
     </p:spTree>
   </p:cSld>
   <p:clrMapOvr>
@@ -3823,7 +4418,7 @@
                 </a:solidFill>
                 <a:latin typeface="Microsoft YaHei"/>
               </a:rPr>
-              <a:t>7.5 三重风暴综合验证（图 10）</a:t>
+              <a:t>7.4b 在线准入对决（图 20，v2 运行中）</a:t>
             </a:r>
           </a:p>
         </p:txBody>
@@ -3865,7 +4460,26 @@
                 </a:solidFill>
                 <a:latin typeface="Microsoft YaHei"/>
               </a:rPr>
-              <a:t>方案组装：服务+探针绑核 0–1；16 台客户绑核 2–3；每客户 memory.high=800 MiB、memory.swap.max=0、io.max=200/100 IOPS；准入按 censoring-aware 口径（本验证聚焦保护包络，准入不介入）。风暴构成：CPU 混打（8 闲 + 6 闲/阵发 + 2 满载）、内存 ballast、fio 4K 随机读写，同时进行；服务侧以 100 req/s 各探 60 秒。</a:t>
+              <a:t>三条结论。 （i）相位感知控制器（PPC）是唯一在对齐相位对齐容量断档的策略（ours/ours_p 均停 8：剖面峰值计数 6.0+0.4 ≤ 7.2，第 10 台预判越线即拒），同时在随机相位保持有竞争力的 16–20 台；（ii）平均利用率类判据的相位依赖性被直接量化：util80 随机卖 28（安全）而同步卖 40（客户 P5 崩到 16%）——同一策略、同一硬件，仅相位不同，风险两极；audible 式同样在同步崩（依赖独立性的卷积模型盲区）；（iii）fixed 与 worstcase/quantile 分别验证了另两极：前者在两个相位都固定卖 16（同步档违主口径），后者永远只卖 8（rand 白让 2–3×容量）。安全 VM-hours（首次越线前的 n×时长积分）与轮级区间在 show4/show5 多轮复测完成后一并给出（队列尾自动跑）。</a:t>
+            </a:r>
+          </a:p>
+          <a:p>
+            <a:pPr>
+              <a:lnSpc>
+                <a:spcPct val="108000"/>
+              </a:lnSpc>
+              <a:spcAft>
+                <a:spcPts val="400"/>
+              </a:spcAft>
+            </a:pPr>
+            <a:r>
+              <a:rPr sz="1250" b="0">
+                <a:solidFill>
+                  <a:srgbClr val="1C1C1E"/>
+                </a:solidFill>
+                <a:latin typeface="Microsoft YaHei"/>
+              </a:rPr>
+              <a:t>采样口径说明（诚实标注）：v2 sync 局的客户速率采样存在顺序缺陷（探针先于速率采样把采样推出 60 s 突发窗），audible/util80 因相位漂移侥幸捕获（n=18 起 P5=16% 的违约证据有效），fixed 等局的 p5 缺失；修正版全 7 局重跑（show5）已在队列尾，届时表内 sync 客户列补全。</a:t>
             </a:r>
           </a:p>
         </p:txBody>
@@ -3978,7 +4592,7 @@
                 </a:solidFill>
                 <a:latin typeface="Microsoft YaHei"/>
               </a:rPr>
-              <a:t>图</a:t>
+              <a:t>7 评估</a:t>
             </a:r>
           </a:p>
           <a:p>
@@ -3994,40 +4608,16 @@
           </a:p>
         </p:txBody>
       </p:sp>
-      <p:pic>
-        <p:nvPicPr>
-          <p:cNvPr id="4" name="Picture 3" descr="fig10_synthesis.png"/>
-          <p:cNvPicPr>
-            <a:picLocks noChangeAspect="1"/>
-          </p:cNvPicPr>
-          <p:nvPr/>
-        </p:nvPicPr>
-        <p:blipFill>
-          <a:blip r:embed="rId2"/>
-          <a:stretch>
-            <a:fillRect/>
-          </a:stretch>
-        </p:blipFill>
-        <p:spPr>
-          <a:xfrm>
-            <a:off x="1737360" y="960120"/>
-            <a:ext cx="8686800" cy="4467497"/>
-          </a:xfrm>
-          <a:prstGeom prst="rect">
-            <a:avLst/>
-          </a:prstGeom>
-        </p:spPr>
-      </p:pic>
-      <p:sp>
-        <p:nvSpPr>
-          <p:cNvPr id="5" name="TextBox 4"/>
+      <p:sp>
+        <p:nvSpPr>
+          <p:cNvPr id="4" name="TextBox 3"/>
           <p:cNvSpPr txBox="1"/>
           <p:nvPr/>
         </p:nvSpPr>
         <p:spPr>
           <a:xfrm>
-            <a:off x="914400" y="5467617"/>
-            <a:ext cx="10332720" cy="548640"/>
+            <a:off x="502920" y="914400"/>
+            <a:ext cx="11155680" cy="5486400"/>
           </a:xfrm>
           <a:prstGeom prst="rect">
             <a:avLst/>
@@ -4035,20 +4625,27 @@
           <a:noFill/>
         </p:spPr>
         <p:txBody>
-          <a:bodyPr wrap="none">
+          <a:bodyPr wrap="square">
             <a:spAutoFit/>
           </a:bodyPr>
           <a:lstStyle/>
           <a:p>
-            <a:pPr algn="ctr"/>
-            <a:r>
-              <a:rPr sz="1100" b="0">
-                <a:solidFill>
-                  <a:srgbClr val="5A6472"/>
-                </a:solidFill>
-                <a:latin typeface="Microsoft YaHei"/>
-              </a:rPr>
-              <a:t>图 10 三风暴综合验证（4 次）</a:t>
+            <a:pPr>
+              <a:lnSpc>
+                <a:spcPct val="108000"/>
+              </a:lnSpc>
+              <a:spcAft>
+                <a:spcPts val="400"/>
+              </a:spcAft>
+            </a:pPr>
+            <a:r>
+              <a:rPr sz="1250" b="0">
+                <a:solidFill>
+                  <a:srgbClr val="1C1C1E"/>
+                </a:solidFill>
+                <a:latin typeface="Microsoft YaHei"/>
+              </a:rPr>
+              <a:t>方案组装：服务+探针绑核 0–1；16 台客户绑核 2–3；每客户 memory.high=800 MiB、memory.swap.max=0、io.max=200/100 IOPS；准入按 censoring-aware 口径（本验证聚焦保护包络，准入不介入）。风暴构成：CPU 混打（8 闲 + 6 闲/阵发 + 2 满载）、内存 ballast、fio 4K 随机读写，同时进行；服务侧以 100 req/s 各探 60 秒。</a:t>
             </a:r>
           </a:p>
         </p:txBody>
@@ -4062,6 +4659,189 @@
 </file>
 
 <file path=ppt/slides/slide103.xml><?xml version="1.0" encoding="utf-8"?>
+<p:sld xmlns:a="http://schemas.openxmlformats.org/drawingml/2006/main" xmlns:p="http://schemas.openxmlformats.org/presentationml/2006/main" xmlns:r="http://schemas.openxmlformats.org/officeDocument/2006/relationships">
+  <p:cSld>
+    <p:spTree>
+      <p:nvGrpSpPr>
+        <p:cNvPr id="1" name=""/>
+        <p:cNvGrpSpPr/>
+        <p:nvPr/>
+      </p:nvGrpSpPr>
+      <p:grpSpPr/>
+      <p:sp>
+        <p:nvSpPr>
+          <p:cNvPr id="2" name="Rectangle 1"/>
+          <p:cNvSpPr/>
+          <p:nvPr/>
+        </p:nvSpPr>
+        <p:spPr>
+          <a:xfrm>
+            <a:off x="0" y="0"/>
+            <a:ext cx="12191695" cy="6858000"/>
+          </a:xfrm>
+          <a:prstGeom prst="rect">
+            <a:avLst/>
+          </a:prstGeom>
+          <a:solidFill>
+            <a:srgbClr val="FFFFFF"/>
+          </a:solidFill>
+          <a:ln>
+            <a:noFill/>
+          </a:ln>
+        </p:spPr>
+        <p:style>
+          <a:lnRef idx="1">
+            <a:schemeClr val="accent1"/>
+          </a:lnRef>
+          <a:fillRef idx="3">
+            <a:schemeClr val="accent1"/>
+          </a:fillRef>
+          <a:effectRef idx="2">
+            <a:schemeClr val="accent1"/>
+          </a:effectRef>
+          <a:fontRef idx="minor">
+            <a:schemeClr val="lt1"/>
+          </a:fontRef>
+        </p:style>
+        <p:txBody>
+          <a:bodyPr rtlCol="0" anchor="ctr"/>
+          <a:lstStyle/>
+          <a:p>
+            <a:pPr algn="ctr"/>
+          </a:p>
+        </p:txBody>
+      </p:sp>
+      <p:sp>
+        <p:nvSpPr>
+          <p:cNvPr id="3" name="Rectangle 2"/>
+          <p:cNvSpPr/>
+          <p:nvPr/>
+        </p:nvSpPr>
+        <p:spPr>
+          <a:xfrm>
+            <a:off x="0" y="0"/>
+            <a:ext cx="12191695" cy="777240"/>
+          </a:xfrm>
+          <a:prstGeom prst="rect">
+            <a:avLst/>
+          </a:prstGeom>
+          <a:solidFill>
+            <a:srgbClr val="123A63"/>
+          </a:solidFill>
+          <a:ln>
+            <a:noFill/>
+          </a:ln>
+        </p:spPr>
+        <p:style>
+          <a:lnRef idx="1">
+            <a:schemeClr val="accent1"/>
+          </a:lnRef>
+          <a:fillRef idx="3">
+            <a:schemeClr val="accent1"/>
+          </a:fillRef>
+          <a:effectRef idx="2">
+            <a:schemeClr val="accent1"/>
+          </a:effectRef>
+          <a:fontRef idx="minor">
+            <a:schemeClr val="lt1"/>
+          </a:fontRef>
+        </p:style>
+        <p:txBody>
+          <a:bodyPr rtlCol="0" anchor="ctr" lIns="411480" tIns="54864"/>
+          <a:lstStyle/>
+          <a:p>
+            <a:pPr algn="ctr"/>
+            <a:r>
+              <a:rPr sz="2100" b="1">
+                <a:solidFill>
+                  <a:srgbClr val="FFFFFF"/>
+                </a:solidFill>
+                <a:latin typeface="Microsoft YaHei"/>
+              </a:rPr>
+              <a:t>图</a:t>
+            </a:r>
+          </a:p>
+          <a:p>
+            <a:r>
+              <a:rPr sz="1200">
+                <a:solidFill>
+                  <a:srgbClr val="D8E2F0"/>
+                </a:solidFill>
+                <a:latin typeface="Microsoft YaHei"/>
+              </a:rPr>
+              <a:t>7.5 三重风暴综合验证（图 10）</a:t>
+            </a:r>
+          </a:p>
+        </p:txBody>
+      </p:sp>
+      <p:pic>
+        <p:nvPicPr>
+          <p:cNvPr id="4" name="Picture 3" descr="fig10_synthesis.png"/>
+          <p:cNvPicPr>
+            <a:picLocks noChangeAspect="1"/>
+          </p:cNvPicPr>
+          <p:nvPr/>
+        </p:nvPicPr>
+        <p:blipFill>
+          <a:blip r:embed="rId2"/>
+          <a:stretch>
+            <a:fillRect/>
+          </a:stretch>
+        </p:blipFill>
+        <p:spPr>
+          <a:xfrm>
+            <a:off x="1737360" y="960120"/>
+            <a:ext cx="8686800" cy="4467497"/>
+          </a:xfrm>
+          <a:prstGeom prst="rect">
+            <a:avLst/>
+          </a:prstGeom>
+        </p:spPr>
+      </p:pic>
+      <p:sp>
+        <p:nvSpPr>
+          <p:cNvPr id="5" name="TextBox 4"/>
+          <p:cNvSpPr txBox="1"/>
+          <p:nvPr/>
+        </p:nvSpPr>
+        <p:spPr>
+          <a:xfrm>
+            <a:off x="914400" y="5467617"/>
+            <a:ext cx="10332720" cy="548640"/>
+          </a:xfrm>
+          <a:prstGeom prst="rect">
+            <a:avLst/>
+          </a:prstGeom>
+          <a:noFill/>
+        </p:spPr>
+        <p:txBody>
+          <a:bodyPr wrap="none">
+            <a:spAutoFit/>
+          </a:bodyPr>
+          <a:lstStyle/>
+          <a:p>
+            <a:pPr algn="ctr"/>
+            <a:r>
+              <a:rPr sz="1100" b="0">
+                <a:solidFill>
+                  <a:srgbClr val="5A6472"/>
+                </a:solidFill>
+                <a:latin typeface="Microsoft YaHei"/>
+              </a:rPr>
+              <a:t>图 10 三风暴综合验证（4 次）</a:t>
+            </a:r>
+          </a:p>
+        </p:txBody>
+      </p:sp>
+    </p:spTree>
+  </p:cSld>
+  <p:clrMapOvr>
+    <a:masterClrMapping/>
+  </p:clrMapOvr>
+</p:sld>
+</file>
+
+<file path=ppt/slides/slide104.xml><?xml version="1.0" encoding="utf-8"?>
 <p:sld xmlns:a="http://schemas.openxmlformats.org/drawingml/2006/main" xmlns:p="http://schemas.openxmlformats.org/presentationml/2006/main" xmlns:r="http://schemas.openxmlformats.org/officeDocument/2006/relationships">
   <p:cSld>
     <p:spTree>
@@ -4694,210 +5474,6 @@
 </p:sld>
 </file>
 
-<file path=ppt/slides/slide104.xml><?xml version="1.0" encoding="utf-8"?>
-<p:sld xmlns:a="http://schemas.openxmlformats.org/drawingml/2006/main" xmlns:p="http://schemas.openxmlformats.org/presentationml/2006/main" xmlns:r="http://schemas.openxmlformats.org/officeDocument/2006/relationships">
-  <p:cSld>
-    <p:spTree>
-      <p:nvGrpSpPr>
-        <p:cNvPr id="1" name=""/>
-        <p:cNvGrpSpPr/>
-        <p:nvPr/>
-      </p:nvGrpSpPr>
-      <p:grpSpPr/>
-      <p:sp>
-        <p:nvSpPr>
-          <p:cNvPr id="2" name="Rectangle 1"/>
-          <p:cNvSpPr/>
-          <p:nvPr/>
-        </p:nvSpPr>
-        <p:spPr>
-          <a:xfrm>
-            <a:off x="0" y="0"/>
-            <a:ext cx="12191695" cy="6858000"/>
-          </a:xfrm>
-          <a:prstGeom prst="rect">
-            <a:avLst/>
-          </a:prstGeom>
-          <a:solidFill>
-            <a:srgbClr val="FFFFFF"/>
-          </a:solidFill>
-          <a:ln>
-            <a:noFill/>
-          </a:ln>
-        </p:spPr>
-        <p:style>
-          <a:lnRef idx="1">
-            <a:schemeClr val="accent1"/>
-          </a:lnRef>
-          <a:fillRef idx="3">
-            <a:schemeClr val="accent1"/>
-          </a:fillRef>
-          <a:effectRef idx="2">
-            <a:schemeClr val="accent1"/>
-          </a:effectRef>
-          <a:fontRef idx="minor">
-            <a:schemeClr val="lt1"/>
-          </a:fontRef>
-        </p:style>
-        <p:txBody>
-          <a:bodyPr rtlCol="0" anchor="ctr"/>
-          <a:lstStyle/>
-          <a:p>
-            <a:pPr algn="ctr"/>
-          </a:p>
-        </p:txBody>
-      </p:sp>
-      <p:sp>
-        <p:nvSpPr>
-          <p:cNvPr id="3" name="Rectangle 2"/>
-          <p:cNvSpPr/>
-          <p:nvPr/>
-        </p:nvSpPr>
-        <p:spPr>
-          <a:xfrm>
-            <a:off x="0" y="0"/>
-            <a:ext cx="12191695" cy="777240"/>
-          </a:xfrm>
-          <a:prstGeom prst="rect">
-            <a:avLst/>
-          </a:prstGeom>
-          <a:solidFill>
-            <a:srgbClr val="123A63"/>
-          </a:solidFill>
-          <a:ln>
-            <a:noFill/>
-          </a:ln>
-        </p:spPr>
-        <p:style>
-          <a:lnRef idx="1">
-            <a:schemeClr val="accent1"/>
-          </a:lnRef>
-          <a:fillRef idx="3">
-            <a:schemeClr val="accent1"/>
-          </a:fillRef>
-          <a:effectRef idx="2">
-            <a:schemeClr val="accent1"/>
-          </a:effectRef>
-          <a:fontRef idx="minor">
-            <a:schemeClr val="lt1"/>
-          </a:fontRef>
-        </p:style>
-        <p:txBody>
-          <a:bodyPr rtlCol="0" anchor="ctr" lIns="411480" tIns="54864"/>
-          <a:lstStyle/>
-          <a:p>
-            <a:pPr algn="ctr"/>
-            <a:r>
-              <a:rPr sz="2100" b="1">
-                <a:solidFill>
-                  <a:srgbClr val="FFFFFF"/>
-                </a:solidFill>
-                <a:latin typeface="Microsoft YaHei"/>
-              </a:rPr>
-              <a:t>7 评估</a:t>
-            </a:r>
-          </a:p>
-          <a:p>
-            <a:r>
-              <a:rPr sz="1200">
-                <a:solidFill>
-                  <a:srgbClr val="D8E2F0"/>
-                </a:solidFill>
-                <a:latin typeface="Microsoft YaHei"/>
-              </a:rPr>
-              <a:t>7.5 三重风暴综合验证（图 10）</a:t>
-            </a:r>
-          </a:p>
-        </p:txBody>
-      </p:sp>
-      <p:sp>
-        <p:nvSpPr>
-          <p:cNvPr id="4" name="TextBox 3"/>
-          <p:cNvSpPr txBox="1"/>
-          <p:nvPr/>
-        </p:nvSpPr>
-        <p:spPr>
-          <a:xfrm>
-            <a:off x="502920" y="914400"/>
-            <a:ext cx="11155680" cy="5486400"/>
-          </a:xfrm>
-          <a:prstGeom prst="rect">
-            <a:avLst/>
-          </a:prstGeom>
-          <a:noFill/>
-        </p:spPr>
-        <p:txBody>
-          <a:bodyPr wrap="square">
-            <a:spAutoFit/>
-          </a:bodyPr>
-          <a:lstStyle/>
-          <a:p>
-            <a:pPr>
-              <a:lnSpc>
-                <a:spcPct val="108000"/>
-              </a:lnSpc>
-              <a:spcAft>
-                <a:spcPts val="400"/>
-              </a:spcAft>
-            </a:pPr>
-            <a:r>
-              <a:rPr sz="1250" b="0">
-                <a:solidFill>
-                  <a:srgbClr val="1C1C1E"/>
-                </a:solidFill>
-                <a:latin typeface="Microsoft YaHei"/>
-              </a:rPr>
-              <a:t>读法。 四次均在"服务 P99 ≤ 10 ms"内通过（HTTP 余量约 3–4×）；Redis 在 syn2 尾部略重（p999 27.5 ms、max 74 ms，单次响应级别的长尾，未见超时），如实记录。与第 4 章无保护情形（CPU 风暴 21–23 ms、磁盘风暴 12 ms、内存风暴杀死 2 台客户）相比，方案同时抑制了三类风暴的伤害。客户侧的代价符合设计预期：内存与 IO 上限让"超用客户"先被节流（部分客户 SSH 短暂无响应），这正是经济版的运行状态。</a:t>
-            </a:r>
-          </a:p>
-          <a:p>
-            <a:pPr>
-              <a:lnSpc>
-                <a:spcPct val="108000"/>
-              </a:lnSpc>
-              <a:spcAft>
-                <a:spcPts val="400"/>
-              </a:spcAft>
-            </a:pPr>
-            <a:r>
-              <a:rPr sz="1250" b="0">
-                <a:solidFill>
-                  <a:srgbClr val="1C1C1E"/>
-                </a:solidFill>
-                <a:latin typeface="Microsoft YaHei"/>
-              </a:rPr>
-              <a:t>采集说明：综合验证的客户侧明细在强限速下采集不完整（syn3 为 13/16），本文以服务侧指标作保护结论，客户侧以组合证据（速率、节流计数）支撑。</a:t>
-            </a:r>
-          </a:p>
-          <a:p>
-            <a:pPr>
-              <a:lnSpc>
-                <a:spcPct val="108000"/>
-              </a:lnSpc>
-              <a:spcAft>
-                <a:spcPts val="400"/>
-              </a:spcAft>
-            </a:pPr>
-            <a:r>
-              <a:rPr sz="1250" b="0">
-                <a:solidFill>
-                  <a:srgbClr val="1C1C1E"/>
-                </a:solidFill>
-                <a:latin typeface="Microsoft YaHei"/>
-              </a:rPr>
-              <a:t>v2 海量复测（图 19）。 v2 批次把同一风暴以 20 秒探测、每轮从零重建的方式自动重跑：24 个有效轮（其中一台客户 VM 因批次早期宿主内存压力离线，实为 15 台客户）。结果：HTTP P99 均值 2.93 ms（范围 2.71–3.29）、Redis 均值 2.61 ms（范围 2.18–3.18），0 超时、0 错误，24/24 轮全部通过，逐轮波动带 &lt;0.6 ms（图 19）。保护包络在 28 个轮次（4 预实验 + 24 复测）中零失信。统计口径（诚实性）：若（最乐观地）假定各轮独立，24/24 零违约的单侧 95% 二项上界为 11.7%（28 轮合并为 10.1%）；轮间共享宿主状态且时间相关，该上界仅作参考，"零违约"不构成长期可靠性保证——返工批次（全 VM 在线）完成后给出轮级 bootstrap 区间。</a:t>
-            </a:r>
-          </a:p>
-        </p:txBody>
-      </p:sp>
-    </p:spTree>
-  </p:cSld>
-  <p:clrMapOvr>
-    <a:masterClrMapping/>
-  </p:clrMapOvr>
-</p:sld>
-</file>
-
 <file path=ppt/slides/slide105.xml><?xml version="1.0" encoding="utf-8"?>
 <p:sld xmlns:a="http://schemas.openxmlformats.org/drawingml/2006/main" xmlns:p="http://schemas.openxmlformats.org/presentationml/2006/main" xmlns:r="http://schemas.openxmlformats.org/officeDocument/2006/relationships">
   <p:cSld>
@@ -4998,7 +5574,7 @@
                 </a:solidFill>
                 <a:latin typeface="Microsoft YaHei"/>
               </a:rPr>
-              <a:t>图</a:t>
+              <a:t>7 评估</a:t>
             </a:r>
           </a:p>
           <a:p>
@@ -5014,40 +5590,16 @@
           </a:p>
         </p:txBody>
       </p:sp>
-      <p:pic>
-        <p:nvPicPr>
-          <p:cNvPr id="4" name="Picture 3" descr="fig19_syn_repeat.png"/>
-          <p:cNvPicPr>
-            <a:picLocks noChangeAspect="1"/>
-          </p:cNvPicPr>
-          <p:nvPr/>
-        </p:nvPicPr>
-        <p:blipFill>
-          <a:blip r:embed="rId2"/>
-          <a:stretch>
-            <a:fillRect/>
-          </a:stretch>
-        </p:blipFill>
-        <p:spPr>
-          <a:xfrm>
-            <a:off x="1737360" y="960120"/>
-            <a:ext cx="8686800" cy="3474720"/>
-          </a:xfrm>
-          <a:prstGeom prst="rect">
-            <a:avLst/>
-          </a:prstGeom>
-        </p:spPr>
-      </p:pic>
-      <p:sp>
-        <p:nvSpPr>
-          <p:cNvPr id="5" name="TextBox 4"/>
+      <p:sp>
+        <p:nvSpPr>
+          <p:cNvPr id="4" name="TextBox 3"/>
           <p:cNvSpPr txBox="1"/>
           <p:nvPr/>
         </p:nvSpPr>
         <p:spPr>
           <a:xfrm>
-            <a:off x="914400" y="4474840"/>
-            <a:ext cx="10332720" cy="548640"/>
+            <a:off x="502920" y="914400"/>
+            <a:ext cx="11155680" cy="5486400"/>
           </a:xfrm>
           <a:prstGeom prst="rect">
             <a:avLst/>
@@ -5055,20 +5607,65 @@
           <a:noFill/>
         </p:spPr>
         <p:txBody>
-          <a:bodyPr wrap="none">
+          <a:bodyPr wrap="square">
             <a:spAutoFit/>
           </a:bodyPr>
           <a:lstStyle/>
           <a:p>
-            <a:pPr algn="ctr"/>
-            <a:r>
-              <a:rPr sz="1100" b="0">
-                <a:solidFill>
-                  <a:srgbClr val="5A6472"/>
-                </a:solidFill>
-                <a:latin typeface="Microsoft YaHei"/>
-              </a:rPr>
-              <a:t>图 19 三风暴 24 轮复测：HTTP 均值 2.93 ms，零超时</a:t>
+            <a:pPr>
+              <a:lnSpc>
+                <a:spcPct val="108000"/>
+              </a:lnSpc>
+              <a:spcAft>
+                <a:spcPts val="400"/>
+              </a:spcAft>
+            </a:pPr>
+            <a:r>
+              <a:rPr sz="1250" b="0">
+                <a:solidFill>
+                  <a:srgbClr val="1C1C1E"/>
+                </a:solidFill>
+                <a:latin typeface="Microsoft YaHei"/>
+              </a:rPr>
+              <a:t>读法。 四次均在"服务 P99 ≤ 10 ms"内通过（HTTP 余量约 3–4×）；Redis 在 syn2 尾部略重（p999 27.5 ms、max 74 ms，单次响应级别的长尾，未见超时），如实记录。与第 4 章无保护情形（CPU 风暴 21–23 ms、磁盘风暴 12 ms、内存风暴杀死 2 台客户）相比，方案同时抑制了三类风暴的伤害。客户侧的代价符合设计预期：内存与 IO 上限让"超用客户"先被节流（部分客户 SSH 短暂无响应），这正是经济版的运行状态。</a:t>
+            </a:r>
+          </a:p>
+          <a:p>
+            <a:pPr>
+              <a:lnSpc>
+                <a:spcPct val="108000"/>
+              </a:lnSpc>
+              <a:spcAft>
+                <a:spcPts val="400"/>
+              </a:spcAft>
+            </a:pPr>
+            <a:r>
+              <a:rPr sz="1250" b="0">
+                <a:solidFill>
+                  <a:srgbClr val="1C1C1E"/>
+                </a:solidFill>
+                <a:latin typeface="Microsoft YaHei"/>
+              </a:rPr>
+              <a:t>采集说明：综合验证的客户侧明细在强限速下采集不完整（syn3 为 13/16），本文以服务侧指标作保护结论，客户侧以组合证据（速率、节流计数）支撑。</a:t>
+            </a:r>
+          </a:p>
+          <a:p>
+            <a:pPr>
+              <a:lnSpc>
+                <a:spcPct val="108000"/>
+              </a:lnSpc>
+              <a:spcAft>
+                <a:spcPts val="400"/>
+              </a:spcAft>
+            </a:pPr>
+            <a:r>
+              <a:rPr sz="1250" b="0">
+                <a:solidFill>
+                  <a:srgbClr val="1C1C1E"/>
+                </a:solidFill>
+                <a:latin typeface="Microsoft YaHei"/>
+              </a:rPr>
+              <a:t>v2 海量复测（图 19）。 v2 批次把同一风暴以 20 秒探测、每轮从零重建的方式自动重跑：24 个有效轮（其中一台客户 VM 因批次早期宿主内存压力离线，实为 15 台客户）。结果：HTTP P99 均值 2.93 ms（范围 2.71–3.29）、Redis 均值 2.61 ms（范围 2.18–3.18），0 超时、0 错误，24/24 轮全部通过，逐轮波动带 &lt;0.6 ms（图 19）。保护包络在 28 个轮次（4 预实验 + 24 复测）中零失信。统计口径（诚实性）：若（最乐观地）假定各轮独立，24/24 零违约的单侧 95% 二项上界为 11.7%（28 轮合并为 10.1%）；轮间共享宿主状态且时间相关，该上界仅作参考，"零违约"不构成长期可靠性保证——返工批次（全 VM 在线）完成后给出轮级 bootstrap 区间。</a:t>
             </a:r>
           </a:p>
         </p:txBody>
@@ -5181,7 +5778,7 @@
                 </a:solidFill>
                 <a:latin typeface="Microsoft YaHei"/>
               </a:rPr>
-              <a:t>7 评估</a:t>
+              <a:t>图</a:t>
             </a:r>
           </a:p>
           <a:p>
@@ -5192,21 +5789,45 @@
                 </a:solidFill>
                 <a:latin typeface="Microsoft YaHei"/>
               </a:rPr>
-              <a:t>7.5b 准入＋塑形联合验证（j1，图 13）</a:t>
-            </a:r>
-          </a:p>
-        </p:txBody>
-      </p:sp>
-      <p:sp>
-        <p:nvSpPr>
-          <p:cNvPr id="4" name="TextBox 3"/>
+              <a:t>7.5 三重风暴综合验证（图 10）</a:t>
+            </a:r>
+          </a:p>
+        </p:txBody>
+      </p:sp>
+      <p:pic>
+        <p:nvPicPr>
+          <p:cNvPr id="4" name="Picture 3" descr="fig19_syn_repeat.png"/>
+          <p:cNvPicPr>
+            <a:picLocks noChangeAspect="1"/>
+          </p:cNvPicPr>
+          <p:nvPr/>
+        </p:nvPicPr>
+        <p:blipFill>
+          <a:blip r:embed="rId2"/>
+          <a:stretch>
+            <a:fillRect/>
+          </a:stretch>
+        </p:blipFill>
+        <p:spPr>
+          <a:xfrm>
+            <a:off x="1737360" y="960120"/>
+            <a:ext cx="8686800" cy="3474720"/>
+          </a:xfrm>
+          <a:prstGeom prst="rect">
+            <a:avLst/>
+          </a:prstGeom>
+        </p:spPr>
+      </p:pic>
+      <p:sp>
+        <p:nvSpPr>
+          <p:cNvPr id="5" name="TextBox 4"/>
           <p:cNvSpPr txBox="1"/>
           <p:nvPr/>
         </p:nvSpPr>
         <p:spPr>
           <a:xfrm>
-            <a:off x="502920" y="914400"/>
-            <a:ext cx="11155680" cy="5486400"/>
+            <a:off x="914400" y="4474840"/>
+            <a:ext cx="10332720" cy="548640"/>
           </a:xfrm>
           <a:prstGeom prst="rect">
             <a:avLst/>
@@ -5214,27 +5835,20 @@
           <a:noFill/>
         </p:spPr>
         <p:txBody>
-          <a:bodyPr wrap="square">
+          <a:bodyPr wrap="none">
             <a:spAutoFit/>
           </a:bodyPr>
           <a:lstStyle/>
           <a:p>
-            <a:pPr>
-              <a:lnSpc>
-                <a:spcPct val="108000"/>
-              </a:lnSpc>
-              <a:spcAft>
-                <a:spcPts val="400"/>
-              </a:spcAft>
-            </a:pPr>
-            <a:r>
-              <a:rPr sz="1250" b="0">
-                <a:solidFill>
-                  <a:srgbClr val="1C1C1E"/>
-                </a:solidFill>
-                <a:latin typeface="Microsoft YaHei"/>
-              </a:rPr>
-              <a:t>保护包络全开（服务/探针绑核 0–1、客户绑核 2–3、客户内存双闸 800MB 与 swap.max=0、IO 上限），背景负载 4 台（3 闲＋1 阵发）持续运行；6 个候选逐个到达（到达即限 50% 满载）。两种准入策略在同一包络下决策：</a:t>
+            <a:pPr algn="ctr"/>
+            <a:r>
+              <a:rPr sz="1100" b="0">
+                <a:solidFill>
+                  <a:srgbClr val="5A6472"/>
+                </a:solidFill>
+                <a:latin typeface="Microsoft YaHei"/>
+              </a:rPr>
+              <a:t>图 19 三风暴 24 轮复测：HTTP 均值 2.93 ms，零超时</a:t>
             </a:r>
           </a:p>
         </p:txBody>
@@ -5347,7 +5961,7 @@
                 </a:solidFill>
                 <a:latin typeface="Microsoft YaHei"/>
               </a:rPr>
-              <a:t>图</a:t>
+              <a:t>7 评估</a:t>
             </a:r>
           </a:p>
           <a:p>
@@ -5363,40 +5977,16 @@
           </a:p>
         </p:txBody>
       </p:sp>
-      <p:pic>
-        <p:nvPicPr>
-          <p:cNvPr id="4" name="Picture 3" descr="fig13_joint.png"/>
-          <p:cNvPicPr>
-            <a:picLocks noChangeAspect="1"/>
-          </p:cNvPicPr>
-          <p:nvPr/>
-        </p:nvPicPr>
-        <p:blipFill>
-          <a:blip r:embed="rId2"/>
-          <a:stretch>
-            <a:fillRect/>
-          </a:stretch>
-        </p:blipFill>
-        <p:spPr>
-          <a:xfrm>
-            <a:off x="1737360" y="960120"/>
-            <a:ext cx="8686800" cy="3291840"/>
-          </a:xfrm>
-          <a:prstGeom prst="rect">
-            <a:avLst/>
-          </a:prstGeom>
-        </p:spPr>
-      </p:pic>
-      <p:sp>
-        <p:nvSpPr>
-          <p:cNvPr id="5" name="TextBox 4"/>
+      <p:sp>
+        <p:nvSpPr>
+          <p:cNvPr id="4" name="TextBox 3"/>
           <p:cNvSpPr txBox="1"/>
           <p:nvPr/>
         </p:nvSpPr>
         <p:spPr>
           <a:xfrm>
-            <a:off x="914400" y="4291960"/>
-            <a:ext cx="10332720" cy="548640"/>
+            <a:off x="502920" y="914400"/>
+            <a:ext cx="11155680" cy="5486400"/>
           </a:xfrm>
           <a:prstGeom prst="rect">
             <a:avLst/>
@@ -5404,20 +5994,27 @@
           <a:noFill/>
         </p:spPr>
         <p:txBody>
-          <a:bodyPr wrap="none">
+          <a:bodyPr wrap="square">
             <a:spAutoFit/>
           </a:bodyPr>
           <a:lstStyle/>
           <a:p>
-            <a:pPr algn="ctr"/>
-            <a:r>
-              <a:rPr sz="1100" b="0">
-                <a:solidFill>
-                  <a:srgbClr val="5A6472"/>
-                </a:solidFill>
-                <a:latin typeface="Microsoft YaHei"/>
-              </a:rPr>
-              <a:t>图 13 准入＋塑形联合验证（j1）</a:t>
+            <a:pPr>
+              <a:lnSpc>
+                <a:spcPct val="108000"/>
+              </a:lnSpc>
+              <a:spcAft>
+                <a:spcPts val="400"/>
+              </a:spcAft>
+            </a:pPr>
+            <a:r>
+              <a:rPr sz="1250" b="0">
+                <a:solidFill>
+                  <a:srgbClr val="1C1C1E"/>
+                </a:solidFill>
+                <a:latin typeface="Microsoft YaHei"/>
+              </a:rPr>
+              <a:t>保护包络全开（服务/探针绑核 0–1、客户绑核 2–3、客户内存双闸 800MB 与 swap.max=0、IO 上限），背景负载 4 台（3 闲＋1 阵发）持续运行；6 个候选逐个到达（到达即限 50% 满载）。两种准入策略在同一包络下决策：</a:t>
             </a:r>
           </a:p>
         </p:txBody>
@@ -5530,6 +6127,189 @@
                 </a:solidFill>
                 <a:latin typeface="Microsoft YaHei"/>
               </a:rPr>
+              <a:t>图</a:t>
+            </a:r>
+          </a:p>
+          <a:p>
+            <a:r>
+              <a:rPr sz="1200">
+                <a:solidFill>
+                  <a:srgbClr val="D8E2F0"/>
+                </a:solidFill>
+                <a:latin typeface="Microsoft YaHei"/>
+              </a:rPr>
+              <a:t>7.5b 准入＋塑形联合验证（j1，图 13）</a:t>
+            </a:r>
+          </a:p>
+        </p:txBody>
+      </p:sp>
+      <p:pic>
+        <p:nvPicPr>
+          <p:cNvPr id="4" name="Picture 3" descr="fig13_joint.png"/>
+          <p:cNvPicPr>
+            <a:picLocks noChangeAspect="1"/>
+          </p:cNvPicPr>
+          <p:nvPr/>
+        </p:nvPicPr>
+        <p:blipFill>
+          <a:blip r:embed="rId2"/>
+          <a:stretch>
+            <a:fillRect/>
+          </a:stretch>
+        </p:blipFill>
+        <p:spPr>
+          <a:xfrm>
+            <a:off x="1737360" y="960120"/>
+            <a:ext cx="8686800" cy="3291840"/>
+          </a:xfrm>
+          <a:prstGeom prst="rect">
+            <a:avLst/>
+          </a:prstGeom>
+        </p:spPr>
+      </p:pic>
+      <p:sp>
+        <p:nvSpPr>
+          <p:cNvPr id="5" name="TextBox 4"/>
+          <p:cNvSpPr txBox="1"/>
+          <p:nvPr/>
+        </p:nvSpPr>
+        <p:spPr>
+          <a:xfrm>
+            <a:off x="914400" y="4291960"/>
+            <a:ext cx="10332720" cy="548640"/>
+          </a:xfrm>
+          <a:prstGeom prst="rect">
+            <a:avLst/>
+          </a:prstGeom>
+          <a:noFill/>
+        </p:spPr>
+        <p:txBody>
+          <a:bodyPr wrap="none">
+            <a:spAutoFit/>
+          </a:bodyPr>
+          <a:lstStyle/>
+          <a:p>
+            <a:pPr algn="ctr"/>
+            <a:r>
+              <a:rPr sz="1100" b="0">
+                <a:solidFill>
+                  <a:srgbClr val="5A6472"/>
+                </a:solidFill>
+                <a:latin typeface="Microsoft YaHei"/>
+              </a:rPr>
+              <a:t>图 13 准入＋塑形联合验证（j1）</a:t>
+            </a:r>
+          </a:p>
+        </p:txBody>
+      </p:sp>
+    </p:spTree>
+  </p:cSld>
+  <p:clrMapOvr>
+    <a:masterClrMapping/>
+  </p:clrMapOvr>
+</p:sld>
+</file>
+
+<file path=ppt/slides/slide109.xml><?xml version="1.0" encoding="utf-8"?>
+<p:sld xmlns:a="http://schemas.openxmlformats.org/drawingml/2006/main" xmlns:p="http://schemas.openxmlformats.org/presentationml/2006/main" xmlns:r="http://schemas.openxmlformats.org/officeDocument/2006/relationships">
+  <p:cSld>
+    <p:spTree>
+      <p:nvGrpSpPr>
+        <p:cNvPr id="1" name=""/>
+        <p:cNvGrpSpPr/>
+        <p:nvPr/>
+      </p:nvGrpSpPr>
+      <p:grpSpPr/>
+      <p:sp>
+        <p:nvSpPr>
+          <p:cNvPr id="2" name="Rectangle 1"/>
+          <p:cNvSpPr/>
+          <p:nvPr/>
+        </p:nvSpPr>
+        <p:spPr>
+          <a:xfrm>
+            <a:off x="0" y="0"/>
+            <a:ext cx="12191695" cy="6858000"/>
+          </a:xfrm>
+          <a:prstGeom prst="rect">
+            <a:avLst/>
+          </a:prstGeom>
+          <a:solidFill>
+            <a:srgbClr val="FFFFFF"/>
+          </a:solidFill>
+          <a:ln>
+            <a:noFill/>
+          </a:ln>
+        </p:spPr>
+        <p:style>
+          <a:lnRef idx="1">
+            <a:schemeClr val="accent1"/>
+          </a:lnRef>
+          <a:fillRef idx="3">
+            <a:schemeClr val="accent1"/>
+          </a:fillRef>
+          <a:effectRef idx="2">
+            <a:schemeClr val="accent1"/>
+          </a:effectRef>
+          <a:fontRef idx="minor">
+            <a:schemeClr val="lt1"/>
+          </a:fontRef>
+        </p:style>
+        <p:txBody>
+          <a:bodyPr rtlCol="0" anchor="ctr"/>
+          <a:lstStyle/>
+          <a:p>
+            <a:pPr algn="ctr"/>
+          </a:p>
+        </p:txBody>
+      </p:sp>
+      <p:sp>
+        <p:nvSpPr>
+          <p:cNvPr id="3" name="Rectangle 2"/>
+          <p:cNvSpPr/>
+          <p:nvPr/>
+        </p:nvSpPr>
+        <p:spPr>
+          <a:xfrm>
+            <a:off x="0" y="0"/>
+            <a:ext cx="12191695" cy="777240"/>
+          </a:xfrm>
+          <a:prstGeom prst="rect">
+            <a:avLst/>
+          </a:prstGeom>
+          <a:solidFill>
+            <a:srgbClr val="123A63"/>
+          </a:solidFill>
+          <a:ln>
+            <a:noFill/>
+          </a:ln>
+        </p:spPr>
+        <p:style>
+          <a:lnRef idx="1">
+            <a:schemeClr val="accent1"/>
+          </a:lnRef>
+          <a:fillRef idx="3">
+            <a:schemeClr val="accent1"/>
+          </a:fillRef>
+          <a:effectRef idx="2">
+            <a:schemeClr val="accent1"/>
+          </a:effectRef>
+          <a:fontRef idx="minor">
+            <a:schemeClr val="lt1"/>
+          </a:fontRef>
+        </p:style>
+        <p:txBody>
+          <a:bodyPr rtlCol="0" anchor="ctr" lIns="411480" tIns="54864"/>
+          <a:lstStyle/>
+          <a:p>
+            <a:pPr algn="ctr"/>
+            <a:r>
+              <a:rPr sz="2100" b="1">
+                <a:solidFill>
+                  <a:srgbClr val="FFFFFF"/>
+                </a:solidFill>
+                <a:latin typeface="Microsoft YaHei"/>
+              </a:rPr>
               <a:t>7 评估</a:t>
             </a:r>
           </a:p>
@@ -5820,191 +6600,6 @@
 </p:sld>
 </file>
 
-<file path=ppt/slides/slide109.xml><?xml version="1.0" encoding="utf-8"?>
-<p:sld xmlns:a="http://schemas.openxmlformats.org/drawingml/2006/main" xmlns:p="http://schemas.openxmlformats.org/presentationml/2006/main" xmlns:r="http://schemas.openxmlformats.org/officeDocument/2006/relationships">
-  <p:cSld>
-    <p:spTree>
-      <p:nvGrpSpPr>
-        <p:cNvPr id="1" name=""/>
-        <p:cNvGrpSpPr/>
-        <p:nvPr/>
-      </p:nvGrpSpPr>
-      <p:grpSpPr/>
-      <p:sp>
-        <p:nvSpPr>
-          <p:cNvPr id="2" name="Rectangle 1"/>
-          <p:cNvSpPr/>
-          <p:nvPr/>
-        </p:nvSpPr>
-        <p:spPr>
-          <a:xfrm>
-            <a:off x="0" y="0"/>
-            <a:ext cx="12191695" cy="6858000"/>
-          </a:xfrm>
-          <a:prstGeom prst="rect">
-            <a:avLst/>
-          </a:prstGeom>
-          <a:solidFill>
-            <a:srgbClr val="FFFFFF"/>
-          </a:solidFill>
-          <a:ln>
-            <a:noFill/>
-          </a:ln>
-        </p:spPr>
-        <p:style>
-          <a:lnRef idx="1">
-            <a:schemeClr val="accent1"/>
-          </a:lnRef>
-          <a:fillRef idx="3">
-            <a:schemeClr val="accent1"/>
-          </a:fillRef>
-          <a:effectRef idx="2">
-            <a:schemeClr val="accent1"/>
-          </a:effectRef>
-          <a:fontRef idx="minor">
-            <a:schemeClr val="lt1"/>
-          </a:fontRef>
-        </p:style>
-        <p:txBody>
-          <a:bodyPr rtlCol="0" anchor="ctr"/>
-          <a:lstStyle/>
-          <a:p>
-            <a:pPr algn="ctr"/>
-          </a:p>
-        </p:txBody>
-      </p:sp>
-      <p:sp>
-        <p:nvSpPr>
-          <p:cNvPr id="3" name="Rectangle 2"/>
-          <p:cNvSpPr/>
-          <p:nvPr/>
-        </p:nvSpPr>
-        <p:spPr>
-          <a:xfrm>
-            <a:off x="0" y="0"/>
-            <a:ext cx="12191695" cy="777240"/>
-          </a:xfrm>
-          <a:prstGeom prst="rect">
-            <a:avLst/>
-          </a:prstGeom>
-          <a:solidFill>
-            <a:srgbClr val="123A63"/>
-          </a:solidFill>
-          <a:ln>
-            <a:noFill/>
-          </a:ln>
-        </p:spPr>
-        <p:style>
-          <a:lnRef idx="1">
-            <a:schemeClr val="accent1"/>
-          </a:lnRef>
-          <a:fillRef idx="3">
-            <a:schemeClr val="accent1"/>
-          </a:fillRef>
-          <a:effectRef idx="2">
-            <a:schemeClr val="accent1"/>
-          </a:effectRef>
-          <a:fontRef idx="minor">
-            <a:schemeClr val="lt1"/>
-          </a:fontRef>
-        </p:style>
-        <p:txBody>
-          <a:bodyPr rtlCol="0" anchor="ctr" lIns="411480" tIns="54864"/>
-          <a:lstStyle/>
-          <a:p>
-            <a:pPr algn="ctr"/>
-            <a:r>
-              <a:rPr sz="2100" b="1">
-                <a:solidFill>
-                  <a:srgbClr val="FFFFFF"/>
-                </a:solidFill>
-                <a:latin typeface="Microsoft YaHei"/>
-              </a:rPr>
-              <a:t>7 评估</a:t>
-            </a:r>
-          </a:p>
-          <a:p>
-            <a:r>
-              <a:rPr sz="1200">
-                <a:solidFill>
-                  <a:srgbClr val="D8E2F0"/>
-                </a:solidFill>
-                <a:latin typeface="Microsoft YaHei"/>
-              </a:rPr>
-              <a:t>7.5b 准入＋塑形联合验证（j1，图 13）</a:t>
-            </a:r>
-          </a:p>
-        </p:txBody>
-      </p:sp>
-      <p:sp>
-        <p:nvSpPr>
-          <p:cNvPr id="4" name="TextBox 3"/>
-          <p:cNvSpPr txBox="1"/>
-          <p:nvPr/>
-        </p:nvSpPr>
-        <p:spPr>
-          <a:xfrm>
-            <a:off x="502920" y="914400"/>
-            <a:ext cx="11155680" cy="5486400"/>
-          </a:xfrm>
-          <a:prstGeom prst="rect">
-            <a:avLst/>
-          </a:prstGeom>
-          <a:noFill/>
-        </p:spPr>
-        <p:txBody>
-          <a:bodyPr wrap="square">
-            <a:spAutoFit/>
-          </a:bodyPr>
-          <a:lstStyle/>
-          <a:p>
-            <a:pPr>
-              <a:lnSpc>
-                <a:spcPct val="108000"/>
-              </a:lnSpc>
-              <a:spcAft>
-                <a:spcPts val="400"/>
-              </a:spcAft>
-            </a:pPr>
-            <a:r>
-              <a:rPr sz="1250" b="0">
-                <a:solidFill>
-                  <a:srgbClr val="1C1C1E"/>
-                </a:solidFill>
-                <a:latin typeface="Microsoft YaHei"/>
-              </a:rPr>
-              <a:t>定位说明： 本节为 2025 年的单轮历史试点，其中的控制器尚未实现时间对齐聚合；完整控制器的在线对决（相位剖面 + 节流校正 + 暂停护栏，7 策略 × 2 相位 × 统一到达流）见 7.4b 及图 20，本节只作为设计—实现差距的历史记录。</a:t>
-            </a:r>
-          </a:p>
-          <a:p>
-            <a:pPr>
-              <a:lnSpc>
-                <a:spcPct val="108000"/>
-              </a:lnSpc>
-              <a:spcAft>
-                <a:spcPts val="400"/>
-              </a:spcAft>
-            </a:pPr>
-            <a:r>
-              <a:rPr sz="1250" b="0">
-                <a:solidFill>
-                  <a:srgbClr val="1C1C1E"/>
-                </a:solidFill>
-                <a:latin typeface="Microsoft YaHei"/>
-              </a:rPr>
-              <a:t>读法（三条诚实结论）。（i）服务侧被绑核与上限保死：两种策略下服务零违约——联合运行时准入策略决定的是"承诺几席"，而非服务安全；（ii）客户侧的主导痛感来自内存双闸的紧上限：金丝雀的秒级停顿在 1 席与 3 席状态下几乎相同，说明 800MB 的 memory.high 对 3GB 客户过紧（对照 4.4.4 节的"软阈值"语义）——经济版的体验上限由闸门尺寸决定，属产品参数而非策略缺陷；（iii）节流校正估计存在相位偏差：背景为阵发负载时，决策瞬间采样会低估其需求（本轮 est 在 0.01–1.90 核间跳动），使 aware 过度保守（1 席 vs naive 的 3 席）——这正是设计中"时间对齐聚合上分位"尚未在试点控制器完整实现的差距，列为"设计—实现差距"改进项。v2 修订（进行中）：时间对齐聚合已完整实现（1 秒历史采样 + 相位剖面预测 + 按配额消费口径计账 + 金丝雀闭环护栏），并以四路公平对决（naive / AUDIBLE 式 / aware / taligned）×10 轮与内存闸门 800/1920 MB 对照重测；结果将替换本节单轮试点。</a:t>
-            </a:r>
-          </a:p>
-        </p:txBody>
-      </p:sp>
-    </p:spTree>
-  </p:cSld>
-  <p:clrMapOvr>
-    <a:masterClrMapping/>
-  </p:clrMapOvr>
-</p:sld>
-</file>
-
 <file path=ppt/slides/slide11.xml><?xml version="1.0" encoding="utf-8"?>
 <p:sld xmlns:a="http://schemas.openxmlformats.org/drawingml/2006/main" xmlns:p="http://schemas.openxmlformats.org/presentationml/2006/main" xmlns:r="http://schemas.openxmlformats.org/officeDocument/2006/relationships">
   <p:cSld>
@@ -6320,7 +6915,7 @@
                 </a:solidFill>
                 <a:latin typeface="Microsoft YaHei"/>
               </a:rPr>
-              <a:t>7.6 生产遥测：生产负载画像（图 27）</a:t>
+              <a:t>7.5b 准入＋塑形联合验证（j1，图 13）</a:t>
             </a:r>
           </a:p>
         </p:txBody>
@@ -6362,7 +6957,7 @@
                 </a:solidFill>
                 <a:latin typeface="Microsoft YaHei"/>
               </a:rPr>
-              <a:t>两台生产宿主均为我们自己运营的基础设施，并以免费 VPS 形式开放给外部用户使用——遥测在自有设施上进行、以匿名化约束只读采集（不读 VM 名称/IP/业务内容）。本节定量画像来自其一（LEC-HK-1）：主机为 Xeon Gold 6248（50 核、无 SMT、单 NUMA）、251.7 GiB 内存 + 64 GiB swap、单块 1.1 TB SSD（已用 393 GB）、PVE 9.2.21。宿主级配置清点（一次性只读，/proc 与 *.conf 文件级，不调 PVE API）：285 台 VM 配置 / 276 台运行；ΣvCPU = 417（8.3×）、Σ内存 = 500 GB（2.0×）、Σ磁盘 = 5.38 TB 薄分配于 1.1 TB 卷（≈4.9×，实际占用 36%）；磁盘为 qcow2 薄克隆并共享 base 模板镜像（模板级去重）；vCPU 直方图 226×1 / 31×2 / 13×4 / 9×6…，内存档位以 512 MB（184 台）为主。60 秒遥测窗口内运行数为 210 台（ΣvCPU=288，5.8×）——运行数随生命周期在 210–276 间波动。使用边界：不用于训练、不回写调度、不做主动实验。</a:t>
+              <a:t>定位说明： 本节为 2025 年的单轮历史试点，其中的控制器尚未实现时间对齐聚合；完整控制器的在线对决（相位剖面 + 节流校正 + 暂停护栏，7 策略 × 2 相位 × 统一到达流）见 7.4b 及图 20，本节只作为设计—实现差距的历史记录。</a:t>
             </a:r>
           </a:p>
           <a:p>
@@ -6381,26 +6976,7 @@
                 </a:solidFill>
                 <a:latin typeface="Microsoft YaHei"/>
               </a:rPr>
-              <a:t>单位校验。 Σ 客户 cpu×vCPU = 15.3 核 ≈ 宿主计数核 14.8 核；Σ 客户 cpu（按单核口径）仅 10.2 核——确认客户 cpu 字段为分配 vCPU 的比例，两口径在宿主级一致。</a:t>
-            </a:r>
-          </a:p>
-          <a:p>
-            <a:pPr>
-              <a:lnSpc>
-                <a:spcPct val="108000"/>
-              </a:lnSpc>
-              <a:spcAft>
-                <a:spcPts val="400"/>
-              </a:spcAft>
-            </a:pPr>
-            <a:r>
-              <a:rPr sz="1250" b="0">
-                <a:solidFill>
-                  <a:srgbClr val="1C1C1E"/>
-                </a:solidFill>
-                <a:latin typeface="Microsoft YaHei"/>
-              </a:rPr>
-              <a:t>画像（图 27）。（i）类别：近闲（&lt;5%）71.9%、轻载（5–30%）27.1%、重载（&gt;30%）1.0%——与"多数闲、少数重"的建模前提一致。（ii）超售实锚：vCPU 超售 5.76×（vCPU 配置合计/50 核）、内存限额超售 1.12×、实际内存占用约 95 GiB——第 8 章测试床的 5× 量级来自真实运营实践而非人为拔高。（iii）突发结构：活跃段（≥5% 连续）共 4268 段、中位 1 分钟（3550 段为单分钟）——短促突发为主；数值层自相关在 1–30 分钟全部 ≈ 0（无强持续性、无时钟周期），而状态层仍具持久性（Markov 自转移 0.85/0.37/0.26）——真实突发是"长短不一、相位漂移的活跃段"，既非 i.i.d. 也非固定时钟。（iv）饱和实例（≥95% vCPU）占 VM-样本的 0.046%——"真重载"稀有但存在。</a:t>
+              <a:t>读法（三条诚实结论）。（i）服务侧被绑核与上限保死：两种策略下服务零违约——联合运行时准入策略决定的是"承诺几席"，而非服务安全；（ii）客户侧的主导痛感来自内存双闸的紧上限：金丝雀的秒级停顿在 1 席与 3 席状态下几乎相同，说明 800MB 的 memory.high 对 3GB 客户过紧（对照 4.4.4 节的"软阈值"语义）——经济版的体验上限由闸门尺寸决定，属产品参数而非策略缺陷；（iii）节流校正估计存在相位偏差：背景为阵发负载时，决策瞬间采样会低估其需求（本轮 est 在 0.01–1.90 核间跳动），使 aware 过度保守（1 席 vs naive 的 3 席）——这正是设计中"时间对齐聚合上分位"尚未在试点控制器完整实现的差距，列为"设计—实现差距"改进项。v2 修订（进行中）：时间对齐聚合已完整实现（1 秒历史采样 + 相位剖面预测 + 按配额消费口径计账 + 金丝雀闭环护栏），并以四路公平对决（naive / AUDIBLE 式 / aware / taligned）×10 轮与内存闸门 800/1920 MB 对照重测；结果将替换本节单轮试点。</a:t>
             </a:r>
           </a:p>
         </p:txBody>
@@ -6513,7 +7089,7 @@
                 </a:solidFill>
                 <a:latin typeface="Microsoft YaHei"/>
               </a:rPr>
-              <a:t>图</a:t>
+              <a:t>7 评估</a:t>
             </a:r>
           </a:p>
           <a:p>
@@ -6529,40 +7105,16 @@
           </a:p>
         </p:txBody>
       </p:sp>
-      <p:pic>
-        <p:nvPicPr>
-          <p:cNvPr id="4" name="Picture 3" descr="fig27_production.png"/>
-          <p:cNvPicPr>
-            <a:picLocks noChangeAspect="1"/>
-          </p:cNvPicPr>
-          <p:nvPr/>
-        </p:nvPicPr>
-        <p:blipFill>
-          <a:blip r:embed="rId2"/>
-          <a:stretch>
-            <a:fillRect/>
-          </a:stretch>
-        </p:blipFill>
-        <p:spPr>
-          <a:xfrm>
-            <a:off x="1737360" y="960120"/>
-            <a:ext cx="8686800" cy="2606040"/>
-          </a:xfrm>
-          <a:prstGeom prst="rect">
-            <a:avLst/>
-          </a:prstGeom>
-        </p:spPr>
-      </p:pic>
-      <p:sp>
-        <p:nvSpPr>
-          <p:cNvPr id="5" name="TextBox 4"/>
+      <p:sp>
+        <p:nvSpPr>
+          <p:cNvPr id="4" name="TextBox 3"/>
           <p:cNvSpPr txBox="1"/>
           <p:nvPr/>
         </p:nvSpPr>
         <p:spPr>
           <a:xfrm>
-            <a:off x="914400" y="3606160"/>
-            <a:ext cx="10332720" cy="548640"/>
+            <a:off x="502920" y="914400"/>
+            <a:ext cx="11155680" cy="5486400"/>
           </a:xfrm>
           <a:prstGeom prst="rect">
             <a:avLst/>
@@ -6570,20 +7122,65 @@
           <a:noFill/>
         </p:spPr>
         <p:txBody>
-          <a:bodyPr wrap="none">
+          <a:bodyPr wrap="square">
             <a:spAutoFit/>
           </a:bodyPr>
           <a:lstStyle/>
           <a:p>
-            <a:pPr algn="ctr"/>
-            <a:r>
-              <a:rPr sz="1100" b="0">
-                <a:solidFill>
-                  <a:srgbClr val="5A6472"/>
-                </a:solidFill>
-                <a:latin typeface="Microsoft YaHei"/>
-              </a:rPr>
-              <a:t>图 27 生产负载画像：72% 近闲 / 4268 段短促突发 / 5.76× 超售实锚（170×60 s）</a:t>
+            <a:pPr>
+              <a:lnSpc>
+                <a:spcPct val="108000"/>
+              </a:lnSpc>
+              <a:spcAft>
+                <a:spcPts val="400"/>
+              </a:spcAft>
+            </a:pPr>
+            <a:r>
+              <a:rPr sz="1250" b="0">
+                <a:solidFill>
+                  <a:srgbClr val="1C1C1E"/>
+                </a:solidFill>
+                <a:latin typeface="Microsoft YaHei"/>
+              </a:rPr>
+              <a:t>两台生产宿主均为我们自己运营的基础设施，并以免费 VPS 形式开放给外部用户使用——遥测在自有设施上进行、以匿名化约束只读采集（不读 VM 名称/IP/业务内容）。本节定量画像来自其一（LEC-HK-1）：主机为 Xeon Gold 6248（50 核、无 SMT、单 NUMA）、251.7 GiB 内存 + 64 GiB swap、单块 1.1 TB SSD（已用 393 GB）、PVE 9.2.21。宿主级配置清点（一次性只读，/proc 与 *.conf 文件级，不调 PVE API）：285 台 VM 配置 / 276 台运行；ΣvCPU = 417（8.3×）、Σ内存 = 500 GB（2.0×）、Σ磁盘 = 5.38 TB 薄分配于 1.1 TB 卷（≈4.9×，实际占用 36%）；磁盘为 qcow2 薄克隆并共享 base 模板镜像（模板级去重）；vCPU 直方图 226×1 / 31×2 / 13×4 / 9×6…，内存档位以 512 MB（184 台）为主。60 秒遥测窗口内运行数为 210 台（ΣvCPU=288，5.8×）——运行数随生命周期在 210–276 间波动。使用边界：不用于训练、不回写调度、不做主动实验。</a:t>
+            </a:r>
+          </a:p>
+          <a:p>
+            <a:pPr>
+              <a:lnSpc>
+                <a:spcPct val="108000"/>
+              </a:lnSpc>
+              <a:spcAft>
+                <a:spcPts val="400"/>
+              </a:spcAft>
+            </a:pPr>
+            <a:r>
+              <a:rPr sz="1250" b="0">
+                <a:solidFill>
+                  <a:srgbClr val="1C1C1E"/>
+                </a:solidFill>
+                <a:latin typeface="Microsoft YaHei"/>
+              </a:rPr>
+              <a:t>单位校验。 Σ 客户 cpu×vCPU = 15.3 核 ≈ 宿主计数核 14.8 核；Σ 客户 cpu（按单核口径）仅 10.2 核——确认客户 cpu 字段为分配 vCPU 的比例，两口径在宿主级一致。</a:t>
+            </a:r>
+          </a:p>
+          <a:p>
+            <a:pPr>
+              <a:lnSpc>
+                <a:spcPct val="108000"/>
+              </a:lnSpc>
+              <a:spcAft>
+                <a:spcPts val="400"/>
+              </a:spcAft>
+            </a:pPr>
+            <a:r>
+              <a:rPr sz="1250" b="0">
+                <a:solidFill>
+                  <a:srgbClr val="1C1C1E"/>
+                </a:solidFill>
+                <a:latin typeface="Microsoft YaHei"/>
+              </a:rPr>
+              <a:t>画像（图 27）。（i）类别：近闲（&lt;5%）71.9%、轻载（5–30%）27.1%、重载（&gt;30%）1.0%——与"多数闲、少数重"的建模前提一致。（ii）超售实锚：vCPU 超售 5.76×（vCPU 配置合计/50 核）、内存限额超售 1.12×、实际内存占用约 95 GiB——第 8 章测试床的 5× 量级来自真实运营实践而非人为拔高。（iii）突发结构：活跃段（≥5% 连续）共 4268 段、中位 1 分钟（3550 段为单分钟）——短促突发为主；数值层自相关在 1–30 分钟全部 ≈ 0（无强持续性、无时钟周期），而状态层仍具持久性（Markov 自转移 0.85/0.37/0.26）——真实突发是"长短不一、相位漂移的活跃段"，既非 i.i.d. 也非固定时钟。（iv）饱和实例（≥95% vCPU）占 VM-样本的 0.046%——"真重载"稀有但存在。</a:t>
             </a:r>
           </a:p>
         </p:txBody>
@@ -6696,7 +7293,7 @@
                 </a:solidFill>
                 <a:latin typeface="Microsoft YaHei"/>
               </a:rPr>
-              <a:t>7 评估</a:t>
+              <a:t>图</a:t>
             </a:r>
           </a:p>
           <a:p>
@@ -6712,16 +7309,40 @@
           </a:p>
         </p:txBody>
       </p:sp>
-      <p:sp>
-        <p:nvSpPr>
-          <p:cNvPr id="4" name="TextBox 3"/>
+      <p:pic>
+        <p:nvPicPr>
+          <p:cNvPr id="4" name="Picture 3" descr="fig27_production.png"/>
+          <p:cNvPicPr>
+            <a:picLocks noChangeAspect="1"/>
+          </p:cNvPicPr>
+          <p:nvPr/>
+        </p:nvPicPr>
+        <p:blipFill>
+          <a:blip r:embed="rId2"/>
+          <a:stretch>
+            <a:fillRect/>
+          </a:stretch>
+        </p:blipFill>
+        <p:spPr>
+          <a:xfrm>
+            <a:off x="1737360" y="960120"/>
+            <a:ext cx="8686800" cy="2606040"/>
+          </a:xfrm>
+          <a:prstGeom prst="rect">
+            <a:avLst/>
+          </a:prstGeom>
+        </p:spPr>
+      </p:pic>
+      <p:sp>
+        <p:nvSpPr>
+          <p:cNvPr id="5" name="TextBox 4"/>
           <p:cNvSpPr txBox="1"/>
           <p:nvPr/>
         </p:nvSpPr>
         <p:spPr>
           <a:xfrm>
-            <a:off x="502920" y="914400"/>
-            <a:ext cx="11155680" cy="5486400"/>
+            <a:off x="914400" y="3606160"/>
+            <a:ext cx="10332720" cy="548640"/>
           </a:xfrm>
           <a:prstGeom prst="rect">
             <a:avLst/>
@@ -6729,46 +7350,20 @@
           <a:noFill/>
         </p:spPr>
         <p:txBody>
-          <a:bodyPr wrap="square">
+          <a:bodyPr wrap="none">
             <a:spAutoFit/>
           </a:bodyPr>
           <a:lstStyle/>
           <a:p>
-            <a:pPr>
-              <a:lnSpc>
-                <a:spcPct val="108000"/>
-              </a:lnSpc>
-              <a:spcAft>
-                <a:spcPts val="400"/>
-              </a:spcAft>
-            </a:pPr>
-            <a:r>
-              <a:rPr sz="1250" b="0">
-                <a:solidFill>
-                  <a:srgbClr val="1C1C1E"/>
-                </a:solidFill>
-                <a:latin typeface="Microsoft YaHei"/>
-              </a:rPr>
-              <a:t>对全文的含义。（i）重载类仅 1%，与第 4 章"一台满载邻居即击穿尾延迟"的合成结果互为印证——稀有重载 + 瞬时重叠就是风险的全部来源；（ii）真实突发是漂移型而非时钟型：合成实验中的"严格 60 s 对齐"给出的是最坏情形上界，混合相位容量模型（第 8 章）里的 φ 在真实宿主上应取低值，安全容量因此贴近随机端——与 5.76× 超售长期共存的事实一致；（iii）只读接口不含节流计数，截断比例的现场证据以"饱和实例占比"作下界代理，节流维度的现场证据留待轻量流（/proc PSI）积累。（iv）租户间相关性（分钟粒度）：204 台活跃 VM、20706 对的平均 Pearson r=0.12、中位 0.07、P95 0.45、15.7% 的对 r&gt;0.3——弱正相关而非独立：相位结构不是合成负载的臆造（部分租户确呈弱同步倾向，也可能含宿主级测量共模与日间节律），但也提醒容量模型不该假设完全独立；亚分钟同步在本粒度不可见。</a:t>
-            </a:r>
-          </a:p>
-          <a:p>
-            <a:pPr>
-              <a:lnSpc>
-                <a:spcPct val="108000"/>
-              </a:lnSpc>
-              <a:spcAft>
-                <a:spcPts val="400"/>
-              </a:spcAft>
-            </a:pPr>
-            <a:r>
-              <a:rPr sz="1250" b="0">
-                <a:solidFill>
-                  <a:srgbClr val="1C1C1E"/>
-                </a:solidFill>
-                <a:latin typeface="Microsoft YaHei"/>
-              </a:rPr>
-              <a:t>边界。 单台宿主、170 分钟窗口（3 小时）、无跨天/跨周覆盖；1 分钟粒度无法分辨亚分钟同步（对 60 s 内脉冲无能为力）；重建后轻量流持续采集（高负载段，PSI some avg10 ≈ 26），将与安静段合并为双态锚点并补跨天覆盖。</a:t>
+            <a:pPr algn="ctr"/>
+            <a:r>
+              <a:rPr sz="1100" b="0">
+                <a:solidFill>
+                  <a:srgbClr val="5A6472"/>
+                </a:solidFill>
+                <a:latin typeface="Microsoft YaHei"/>
+              </a:rPr>
+              <a:t>图 27 生产负载画像：72% 近闲 / 4268 段短促突发 / 5.76× 超售实锚（170×60 s）</a:t>
             </a:r>
           </a:p>
         </p:txBody>
@@ -6892,7 +7487,7 @@
                 </a:solidFill>
                 <a:latin typeface="Microsoft YaHei"/>
               </a:rPr>
-              <a:t>7.7 缺口清单（投稿前计划）</a:t>
+              <a:t>7.6 生产遥测：生产负载画像（图 27）</a:t>
             </a:r>
           </a:p>
         </p:txBody>
@@ -6919,7 +7514,7 @@
           </a:bodyPr>
           <a:lstStyle/>
           <a:p>
-            <a:pPr lvl="1">
+            <a:pPr>
               <a:lnSpc>
                 <a:spcPct val="108000"/>
               </a:lnSpc>
@@ -6928,17 +7523,17 @@
               </a:spcAft>
             </a:pPr>
             <a:r>
-              <a:rPr sz="1200" b="0">
+              <a:rPr sz="1250" b="0">
                 <a:solidFill>
                   <a:srgbClr val="1C1C1E"/>
                 </a:solidFill>
                 <a:latin typeface="Microsoft YaHei"/>
               </a:rPr>
-              <a:t>• 与 AUDIBLE 适配基线的对照：预实验见 7.3b（图 11）；v2 已实现四路公平对决（含 AUDIBLE 式 MC 与时间对齐 taligned），×10 轮复测排队运行中（Phase 2）；</a:t>
-            </a:r>
-          </a:p>
-          <a:p>
-            <a:pPr lvl="1">
+              <a:t>对全文的含义。（i）重载类仅 1%，与第 4 章"一台满载邻居即击穿尾延迟"的合成结果互为印证——稀有重载 + 瞬时重叠就是风险的全部来源；（ii）真实突发是漂移型而非时钟型：合成实验中的"严格 60 s 对齐"给出的是最坏情形上界，混合相位容量模型（第 8 章）里的 φ 在真实宿主上应取低值，安全容量因此贴近随机端——与 5.76× 超售长期共存的事实一致；（iii）只读接口不含节流计数，截断比例的现场证据以"饱和实例占比"作下界代理，节流维度的现场证据留待轻量流（/proc PSI）积累。（iv）租户间相关性（分钟粒度）：204 台活跃 VM、20706 对的平均 Pearson r=0.12、中位 0.07、P95 0.45、15.7% 的对 r&gt;0.3——弱正相关而非独立：相位结构不是合成负载的臆造（部分租户确呈弱同步倾向，也可能含宿主级测量共模与日间节律），但也提醒容量模型不该假设完全独立；亚分钟同步在本粒度不可见。</a:t>
+            </a:r>
+          </a:p>
+          <a:p>
+            <a:pPr>
               <a:lnSpc>
                 <a:spcPct val="108000"/>
               </a:lnSpc>
@@ -6947,70 +7542,13 @@
               </a:spcAft>
             </a:pPr>
             <a:r>
-              <a:rPr sz="1200" b="0">
+              <a:rPr sz="1250" b="0">
                 <a:solidFill>
                   <a:srgbClr val="1C1C1E"/>
                 </a:solidFill>
                 <a:latin typeface="Microsoft YaHei"/>
               </a:rPr>
-              <a:t>• 冷启动/短历史专项：预实验见 7.3b；v2 ×10 轮复测排队运行中（Phase 2）；</a:t>
-            </a:r>
-          </a:p>
-          <a:p>
-            <a:pPr lvl="1">
-              <a:lnSpc>
-                <a:spcPct val="108000"/>
-              </a:lnSpc>
-              <a:spcAft>
-                <a:spcPts val="400"/>
-              </a:spcAft>
-            </a:pPr>
-            <a:r>
-              <a:rPr sz="1200" b="0">
-                <a:solidFill>
-                  <a:srgbClr val="1C1C1E"/>
-                </a:solidFill>
-                <a:latin typeface="Microsoft YaHei"/>
-              </a:rPr>
-              <a:t>• 关键结论轮次：Phase 1 已完成（膝点 50 轮、censoring 90 cycle、三风暴 24 轮，见 4.1b/4.3b/6.5 与图 17–19）；因批次早期两台邻居 VM 被宿主 OOM 杀死，返工批次（v3knee 50 + v3cen 30 + v3syn 26）与 Phase 2（53 轮，含准入对决与内存闸门对照）已在自动队列中；完成后统一重算轮级 bootstrap 置信区间与图表；</a:t>
-            </a:r>
-          </a:p>
-          <a:p>
-            <a:pPr lvl="1">
-              <a:lnSpc>
-                <a:spcPct val="108000"/>
-              </a:lnSpc>
-              <a:spcAft>
-                <a:spcPts val="400"/>
-              </a:spcAft>
-            </a:pPr>
-            <a:r>
-              <a:rPr sz="1200" b="0">
-                <a:solidFill>
-                  <a:srgbClr val="1C1C1E"/>
-                </a:solidFill>
-                <a:latin typeface="Microsoft YaHei"/>
-              </a:rPr>
-              <a:t>• 消融：已完成预实验（6.3b 的 naive / AUDIBLE 式 / aware / aware+校准 对照）；隔离项对照见 4.4.3；</a:t>
-            </a:r>
-          </a:p>
-          <a:p>
-            <a:pPr lvl="1">
-              <a:lnSpc>
-                <a:spcPct val="108000"/>
-              </a:lnSpc>
-              <a:spcAft>
-                <a:spcPts val="400"/>
-              </a:spcAft>
-            </a:pPr>
-            <a:r>
-              <a:rPr sz="1200" b="0">
-                <a:solidFill>
-                  <a:srgbClr val="1C1C1E"/>
-                </a:solidFill>
-                <a:latin typeface="Microsoft YaHei"/>
-              </a:rPr>
-              <a:t>• 图 2–19 的出图脚本与数据核对（骨架 §5 清单；pilot 图 2–13、物理机图 14–16、v2 复测图 17–19 均已一键复现）。</a:t>
+              <a:t>边界。 单台宿主、170 分钟窗口（3 小时）、无跨天/跨周覆盖；1 分钟粒度无法分辨亚分钟同步（对 60 s 内脉冲无能为力）；重建后轻量流持续采集（高负载段，PSI some avg10 ≈ 26），将与安静段合并为双态锚点并补跨天覆盖。</a:t>
             </a:r>
           </a:p>
         </p:txBody>
@@ -7084,8 +7622,8 @@
         </p:nvSpPr>
         <p:spPr>
           <a:xfrm>
-            <a:off x="0" y="2651760"/>
-            <a:ext cx="12191695" cy="1371600"/>
+            <a:off x="0" y="0"/>
+            <a:ext cx="12191695" cy="777240"/>
           </a:xfrm>
           <a:prstGeom prst="rect">
             <a:avLst/>
@@ -7112,18 +7650,147 @@
           </a:fontRef>
         </p:style>
         <p:txBody>
-          <a:bodyPr rtlCol="0" anchor="ctr" lIns="731520"/>
+          <a:bodyPr rtlCol="0" anchor="ctr" lIns="411480" tIns="54864"/>
           <a:lstStyle/>
           <a:p>
             <a:pPr algn="ctr"/>
             <a:r>
-              <a:rPr sz="3000" b="1">
+              <a:rPr sz="2100" b="1">
                 <a:solidFill>
                   <a:srgbClr val="FFFFFF"/>
                 </a:solidFill>
                 <a:latin typeface="Microsoft YaHei"/>
               </a:rPr>
-              <a:t>8 物理机验证与安全容量模型</a:t>
+              <a:t>7 评估</a:t>
+            </a:r>
+          </a:p>
+          <a:p>
+            <a:r>
+              <a:rPr sz="1200">
+                <a:solidFill>
+                  <a:srgbClr val="D8E2F0"/>
+                </a:solidFill>
+                <a:latin typeface="Microsoft YaHei"/>
+              </a:rPr>
+              <a:t>7.7 缺口清单（投稿前计划）</a:t>
+            </a:r>
+          </a:p>
+        </p:txBody>
+      </p:sp>
+      <p:sp>
+        <p:nvSpPr>
+          <p:cNvPr id="4" name="TextBox 3"/>
+          <p:cNvSpPr txBox="1"/>
+          <p:nvPr/>
+        </p:nvSpPr>
+        <p:spPr>
+          <a:xfrm>
+            <a:off x="502920" y="914400"/>
+            <a:ext cx="11155680" cy="5486400"/>
+          </a:xfrm>
+          <a:prstGeom prst="rect">
+            <a:avLst/>
+          </a:prstGeom>
+          <a:noFill/>
+        </p:spPr>
+        <p:txBody>
+          <a:bodyPr wrap="square">
+            <a:spAutoFit/>
+          </a:bodyPr>
+          <a:lstStyle/>
+          <a:p>
+            <a:pPr lvl="1">
+              <a:lnSpc>
+                <a:spcPct val="108000"/>
+              </a:lnSpc>
+              <a:spcAft>
+                <a:spcPts val="400"/>
+              </a:spcAft>
+            </a:pPr>
+            <a:r>
+              <a:rPr sz="1200" b="0">
+                <a:solidFill>
+                  <a:srgbClr val="1C1C1E"/>
+                </a:solidFill>
+                <a:latin typeface="Microsoft YaHei"/>
+              </a:rPr>
+              <a:t>• 与 AUDIBLE 适配基线的对照：预实验见 7.3b（图 11）；v2 已实现四路公平对决（含 AUDIBLE 式 MC 与时间对齐 taligned），×10 轮复测排队运行中（Phase 2）；</a:t>
+            </a:r>
+          </a:p>
+          <a:p>
+            <a:pPr lvl="1">
+              <a:lnSpc>
+                <a:spcPct val="108000"/>
+              </a:lnSpc>
+              <a:spcAft>
+                <a:spcPts val="400"/>
+              </a:spcAft>
+            </a:pPr>
+            <a:r>
+              <a:rPr sz="1200" b="0">
+                <a:solidFill>
+                  <a:srgbClr val="1C1C1E"/>
+                </a:solidFill>
+                <a:latin typeface="Microsoft YaHei"/>
+              </a:rPr>
+              <a:t>• 冷启动/短历史专项：预实验见 7.3b；v2 ×10 轮复测排队运行中（Phase 2）；</a:t>
+            </a:r>
+          </a:p>
+          <a:p>
+            <a:pPr lvl="1">
+              <a:lnSpc>
+                <a:spcPct val="108000"/>
+              </a:lnSpc>
+              <a:spcAft>
+                <a:spcPts val="400"/>
+              </a:spcAft>
+            </a:pPr>
+            <a:r>
+              <a:rPr sz="1200" b="0">
+                <a:solidFill>
+                  <a:srgbClr val="1C1C1E"/>
+                </a:solidFill>
+                <a:latin typeface="Microsoft YaHei"/>
+              </a:rPr>
+              <a:t>• 关键结论轮次：Phase 1 已完成（膝点 50 轮、censoring 90 cycle、三风暴 24 轮，见 4.1b/4.3b/6.5 与图 17–19）；因批次早期两台邻居 VM 被宿主 OOM 杀死，返工批次（v3knee 50 + v3cen 30 + v3syn 26）与 Phase 2（53 轮，含准入对决与内存闸门对照）已在自动队列中；完成后统一重算轮级 bootstrap 置信区间与图表；</a:t>
+            </a:r>
+          </a:p>
+          <a:p>
+            <a:pPr lvl="1">
+              <a:lnSpc>
+                <a:spcPct val="108000"/>
+              </a:lnSpc>
+              <a:spcAft>
+                <a:spcPts val="400"/>
+              </a:spcAft>
+            </a:pPr>
+            <a:r>
+              <a:rPr sz="1200" b="0">
+                <a:solidFill>
+                  <a:srgbClr val="1C1C1E"/>
+                </a:solidFill>
+                <a:latin typeface="Microsoft YaHei"/>
+              </a:rPr>
+              <a:t>• 消融：已完成预实验（6.3b 的 naive / AUDIBLE 式 / aware / aware+校准 对照）；隔离项对照见 4.4.3；</a:t>
+            </a:r>
+          </a:p>
+          <a:p>
+            <a:pPr lvl="1">
+              <a:lnSpc>
+                <a:spcPct val="108000"/>
+              </a:lnSpc>
+              <a:spcAft>
+                <a:spcPts val="400"/>
+              </a:spcAft>
+            </a:pPr>
+            <a:r>
+              <a:rPr sz="1200" b="0">
+                <a:solidFill>
+                  <a:srgbClr val="1C1C1E"/>
+                </a:solidFill>
+                <a:latin typeface="Microsoft YaHei"/>
+              </a:rPr>
+              <a:t>• 图 2–19 的出图脚本与数据核对（骨架 §5 清单；pilot 图 2–13、物理机图 14–16、v2 复测图 17–19 均已一键复现）。</a:t>
             </a:r>
           </a:p>
         </p:txBody>
@@ -7197,8 +7864,8 @@
         </p:nvSpPr>
         <p:spPr>
           <a:xfrm>
-            <a:off x="0" y="0"/>
-            <a:ext cx="12191695" cy="658368"/>
+            <a:off x="0" y="2651760"/>
+            <a:ext cx="12191695" cy="1371600"/>
           </a:xfrm>
           <a:prstGeom prst="rect">
             <a:avLst/>
@@ -7225,60 +7892,18 @@
           </a:fontRef>
         </p:style>
         <p:txBody>
-          <a:bodyPr rtlCol="0" anchor="ctr" lIns="411480" tIns="54864"/>
+          <a:bodyPr rtlCol="0" anchor="ctr" lIns="731520"/>
           <a:lstStyle/>
           <a:p>
             <a:pPr algn="ctr"/>
             <a:r>
-              <a:rPr sz="2100" b="1">
+              <a:rPr sz="3000" b="1">
                 <a:solidFill>
                   <a:srgbClr val="FFFFFF"/>
                 </a:solidFill>
                 <a:latin typeface="Microsoft YaHei"/>
               </a:rPr>
               <a:t>8 物理机验证与安全容量模型</a:t>
-            </a:r>
-          </a:p>
-        </p:txBody>
-      </p:sp>
-      <p:sp>
-        <p:nvSpPr>
-          <p:cNvPr id="4" name="TextBox 3"/>
-          <p:cNvSpPr txBox="1"/>
-          <p:nvPr/>
-        </p:nvSpPr>
-        <p:spPr>
-          <a:xfrm>
-            <a:off x="502920" y="914400"/>
-            <a:ext cx="11155680" cy="5486400"/>
-          </a:xfrm>
-          <a:prstGeom prst="rect">
-            <a:avLst/>
-          </a:prstGeom>
-          <a:noFill/>
-        </p:spPr>
-        <p:txBody>
-          <a:bodyPr wrap="square">
-            <a:spAutoFit/>
-          </a:bodyPr>
-          <a:lstStyle/>
-          <a:p>
-            <a:pPr>
-              <a:lnSpc>
-                <a:spcPct val="108000"/>
-              </a:lnSpc>
-              <a:spcAft>
-                <a:spcPts val="400"/>
-              </a:spcAft>
-            </a:pPr>
-            <a:r>
-              <a:rPr sz="1100" b="0">
-                <a:solidFill>
-                  <a:srgbClr val="5A6472"/>
-                </a:solidFill>
-                <a:latin typeface="Microsoft YaHei"/>
-              </a:rPr>
-              <a:t>〔本章回应"单嵌套测试床、规模太小、结论能否推广"的评审关切：在裸金属物理机（双路 Xeon Platinum 8259CL， 48 核 / 96 线程，991 GiB，PVE 9.2.20，非嵌套）上，用 64 台客户 VM 舰队复现第 4–6 章的核心结论， 并把"安全售卖容量"从定性说法升级为可量化的曲线与定律（§8.5 容量近似模型 N*≈C/(ρκ)，含明确假设与边界）。〕</a:t>
             </a:r>
           </a:p>
         </p:txBody>
@@ -7353,7 +7978,7 @@
         <p:spPr>
           <a:xfrm>
             <a:off x="0" y="0"/>
-            <a:ext cx="12191695" cy="777240"/>
+            <a:ext cx="12191695" cy="658368"/>
           </a:xfrm>
           <a:prstGeom prst="rect">
             <a:avLst/>
@@ -7392,17 +8017,6 @@
                 <a:latin typeface="Microsoft YaHei"/>
               </a:rPr>
               <a:t>8 物理机验证与安全容量模型</a:t>
-            </a:r>
-          </a:p>
-          <a:p>
-            <a:r>
-              <a:rPr sz="1200">
-                <a:solidFill>
-                  <a:srgbClr val="D8E2F0"/>
-                </a:solidFill>
-                <a:latin typeface="Microsoft YaHei"/>
-              </a:rPr>
-              <a:t>8.1 测试床</a:t>
             </a:r>
           </a:p>
         </p:txBody>
@@ -7438,51 +8052,13 @@
               </a:spcAft>
             </a:pPr>
             <a:r>
-              <a:rPr sz="1250" b="0">
-                <a:solidFill>
-                  <a:srgbClr val="1C1C1E"/>
-                </a:solidFill>
-                <a:latin typeface="Microsoft YaHei"/>
-              </a:rPr>
-              <a:t>物理机：2×Xeon Platinum 8259CL（48 物理核 / 96 线程，双 NUMA 节点）、8×128 GB DCPMM（Memory Mode，可用 991 GiB，NUMA 520 GiB + 520 GiB）、3×NVMe SSD + 2×SATA SSD、PVE 9.2.20（内核 7.0.14-19-pve，systemd-detect-virt=none，非嵌套）、内网 vmbr0 10.10.0.0/24 + NAT。</a:t>
-            </a:r>
-          </a:p>
-          <a:p>
-            <a:pPr>
-              <a:lnSpc>
-                <a:spcPct val="108000"/>
-              </a:lnSpc>
-              <a:spcAft>
-                <a:spcPts val="400"/>
-              </a:spcAft>
-            </a:pPr>
-            <a:r>
-              <a:rPr sz="1250" b="0">
-                <a:solidFill>
-                  <a:srgbClr val="1C1C1E"/>
-                </a:solidFill>
-                <a:latin typeface="Microsoft YaHei"/>
-              </a:rPr>
-              <a:t>舰队：1 台 HTTP（nginx）、1 台 Redis、1 台探针（开放环 100 req/s）、64 台客户 VM（1 vCPU / 1 GiB，Debian 12 cloud 模板）。客户负载用第 4 章的占空比忙循环（burner.py），速率日志提供逐客户体验指标。服务与探针绑核隔离（2/3/4 号核）；租户池由 taskset -apc 绑定（2–32 核可配）。隔离声明经拓扑核验：服务核 2/3/4 的 SMT 兄弟（50/51/52）与租户池 8–23 的兄弟集合（56–71）零交集，且全部位于 NUMA node 0——是物理核级隔离，不只是逻辑编号不相交。</a:t>
-            </a:r>
-          </a:p>
-          <a:p>
-            <a:pPr>
-              <a:lnSpc>
-                <a:spcPct val="108000"/>
-              </a:lnSpc>
-              <a:spcAft>
-                <a:spcPts val="400"/>
-              </a:spcAft>
-            </a:pPr>
-            <a:r>
               <a:rPr sz="1100" b="0">
                 <a:solidFill>
                   <a:srgbClr val="5A6472"/>
                 </a:solidFill>
                 <a:latin typeface="Microsoft YaHei"/>
               </a:rPr>
-              <a:t>〔环境插曲（如实记录）：测试床搭建期间该机出现过一次内核 panic（Attempted to kill init! exitcode=0x9， 日志停在批量启动 VM 附近）；该机彼时正处内存子系统异常状态（8 条 DCPMM 仅 7 条在线）。 冷启动修复内存（8/8 在线，991 GiB）后，48 台 VM 分批启动 + 数小时满载实验均无异常。 这不是本文方法的组成部分，但说明"生产硬件同样会带病运行"——监测与保守化设计因此更有价值。〕</a:t>
+              <a:t>〔本章回应"单嵌套测试床、规模太小、结论能否推广"的评审关切：在裸金属物理机（双路 Xeon Platinum 8259CL， 48 核 / 96 线程，991 GiB，PVE 9.2.20，非嵌套）上，用 64 台客户 VM 舰队复现第 4–6 章的核心结论， 并把"安全售卖容量"从定性说法升级为可量化的曲线与定律（§8.5 容量近似模型 N*≈C/(ρκ)，含明确假设与边界）。〕</a:t>
             </a:r>
           </a:p>
         </p:txBody>
@@ -7606,7 +8182,7 @@
                 </a:solidFill>
                 <a:latin typeface="Microsoft YaHei"/>
               </a:rPr>
-              <a:t>8.2 多规模膝点复现（图 14）</a:t>
+              <a:t>8.1 测试床</a:t>
             </a:r>
           </a:p>
         </p:txBody>
@@ -7648,7 +8224,7 @@
                 </a:solidFill>
                 <a:latin typeface="Microsoft YaHei"/>
               </a:rPr>
-              <a:t>在物理机上把第 4.1 节的膝点实验放大到五种规模：租户池 2 / 4 / 8 / 16 / 32 物理核，服务侧两种配置：隔离（专用核）与共享（与租户同池）。逐步增加 100% 占空比的满载邻居（每位 1 核），记录服务 P99（图 14；横轴为"超售比 = 满载邻居数 / 租户池核数"）。</a:t>
+              <a:t>物理机：2×Xeon Platinum 8259CL（48 物理核 / 96 线程，双 NUMA 节点）、8×128 GB DCPMM（Memory Mode，可用 991 GiB，NUMA 520 GiB + 520 GiB）、3×NVMe SSD + 2×SATA SSD、PVE 9.2.20（内核 7.0.14-19-pve，systemd-detect-virt=none，非嵌套）、内网 vmbr0 10.10.0.0/24 + NAT。</a:t>
             </a:r>
           </a:p>
           <a:p>
@@ -7667,26 +8243,7 @@
                 </a:solidFill>
                 <a:latin typeface="Microsoft YaHei"/>
               </a:rPr>
-              <a:t>结果。</a:t>
-            </a:r>
-          </a:p>
-          <a:p>
-            <a:pPr lvl="1">
-              <a:lnSpc>
-                <a:spcPct val="108000"/>
-              </a:lnSpc>
-              <a:spcAft>
-                <a:spcPts val="400"/>
-              </a:spcAft>
-            </a:pPr>
-            <a:r>
-              <a:rPr sz="1200" b="0">
-                <a:solidFill>
-                  <a:srgbClr val="1C1C1E"/>
-                </a:solidFill>
-                <a:latin typeface="Microsoft YaHei"/>
-              </a:rPr>
-              <a:t>• 隔离配置：五种规模、超售比 0–2.5× 全程服务 P99 0.68–0.78 ms——即使在 32 核池上、</a:t>
+              <a:t>舰队：1 台 HTTP（nginx）、1 台 Redis、1 台探针（开放环 100 req/s）、64 台客户 VM（1 vCPU / 1 GiB，Debian 12 cloud 模板）。客户负载用第 4 章的占空比忙循环（burner.py），速率日志提供逐客户体验指标。服务与探针绑核隔离（2/3/4 号核）；租户池由 taskset -apc 绑定（2–32 核可配）。隔离声明经拓扑核验：服务核 2/3/4 的 SMT 兄弟（50/51/52）与租户池 8–23 的兄弟集合（56–71）零交集，且全部位于 NUMA node 0——是物理核级隔离，不只是逻辑编号不相交。</a:t>
             </a:r>
           </a:p>
           <a:p>
@@ -7699,70 +8256,13 @@
               </a:spcAft>
             </a:pPr>
             <a:r>
-              <a:rPr sz="1250" b="0">
-                <a:solidFill>
-                  <a:srgbClr val="1C1C1E"/>
-                </a:solidFill>
-                <a:latin typeface="Microsoft YaHei"/>
-              </a:rPr>
-              <a:t>48 台满载邻居（1.5× 超售）下依然零伤尾。"隔离护尾"从 4 vCPU 嵌套床放大到 96 线程物理机后完全成立。</a:t>
-            </a:r>
-          </a:p>
-          <a:p>
-            <a:pPr lvl="1">
-              <a:lnSpc>
-                <a:spcPct val="108000"/>
-              </a:lnSpc>
-              <a:spcAft>
-                <a:spcPts val="400"/>
-              </a:spcAft>
-            </a:pPr>
-            <a:r>
-              <a:rPr sz="1200" b="0">
-                <a:solidFill>
-                  <a:srgbClr val="1C1C1E"/>
-                </a:solidFill>
-                <a:latin typeface="Microsoft YaHei"/>
-              </a:rPr>
-              <a:t>• 共享配置：每种规模都在池饱和点（超售比 = 1.0）出现断崖——2 核池 L2→L4（4.1→10.2 ms）、</a:t>
-            </a:r>
-          </a:p>
-          <a:p>
-            <a:pPr>
-              <a:lnSpc>
-                <a:spcPct val="108000"/>
-              </a:lnSpc>
-              <a:spcAft>
-                <a:spcPts val="400"/>
-              </a:spcAft>
-            </a:pPr>
-            <a:r>
-              <a:rPr sz="1250" b="0">
-                <a:solidFill>
-                  <a:srgbClr val="1C1C1E"/>
-                </a:solidFill>
-                <a:latin typeface="Microsoft YaHei"/>
-              </a:rPr>
-              <a:t>4 核池 L3→L4（1.5→10.2 ms）、16 核池 L13→L16（1.0→12.0 ms）。16 核池细扫 4 轮（L13–L18，图 14 已更新）：L15 = 2.13 ms [2.00–2.29]（仍在平台），L16 = 10.95 ms [9.97–12.02]，4/4 轮在 L15→L16 处跳变；饱和后（L17–L18）稳定在 9.8–10.6 ms 平台——膝点位置精确等于池容量，4 轮无一轮例外，与 BeroHost 的 3→4 结论同构。</a:t>
-            </a:r>
-          </a:p>
-          <a:p>
-            <a:pPr>
-              <a:lnSpc>
-                <a:spcPct val="108000"/>
-              </a:lnSpc>
-              <a:spcAft>
-                <a:spcPts val="400"/>
-              </a:spcAft>
-            </a:pPr>
-            <a:r>
-              <a:rPr sz="1250" b="0">
-                <a:solidFill>
-                  <a:srgbClr val="1C1C1E"/>
-                </a:solidFill>
-                <a:latin typeface="Microsoft YaHei"/>
-              </a:rPr>
-              <a:t>读法。 规模不改变结论的形状，只改变刻度：共享池的膝点始终落在"峰值需求 ≥ 池容量"处，隔离则把这条曲线整根压平。这同时是对"4 vCPU 太小、结论不可推广"关切最直接的回答：在 96 线程物理机上，膝点现象、量级（0.7 ms → 10–12 ms）与隔离有效性逐项复现。</a:t>
+              <a:rPr sz="1100" b="0">
+                <a:solidFill>
+                  <a:srgbClr val="5A6472"/>
+                </a:solidFill>
+                <a:latin typeface="Microsoft YaHei"/>
+              </a:rPr>
+              <a:t>〔环境插曲（如实记录）：测试床搭建期间该机出现过一次内核 panic（Attempted to kill init! exitcode=0x9， 日志停在批量启动 VM 附近）；该机彼时正处内存子系统异常状态（8 条 DCPMM 仅 7 条在线）。 冷启动修复内存（8/8 在线，991 GiB）后，48 台 VM 分批启动 + 数小时满载实验均无异常。 这不是本文方法的组成部分，但说明"生产硬件同样会带病运行"——监测与保守化设计因此更有价值。〕</a:t>
             </a:r>
           </a:p>
         </p:txBody>
@@ -7875,7 +8375,7 @@
                 </a:solidFill>
                 <a:latin typeface="Microsoft YaHei"/>
               </a:rPr>
-              <a:t>图</a:t>
+              <a:t>8 物理机验证与安全容量模型</a:t>
             </a:r>
           </a:p>
           <a:p>
@@ -7891,40 +8391,16 @@
           </a:p>
         </p:txBody>
       </p:sp>
-      <p:pic>
-        <p:nvPicPr>
-          <p:cNvPr id="4" name="Picture 3" descr="fig14_phys_knee.png"/>
-          <p:cNvPicPr>
-            <a:picLocks noChangeAspect="1"/>
-          </p:cNvPicPr>
-          <p:nvPr/>
-        </p:nvPicPr>
-        <p:blipFill>
-          <a:blip r:embed="rId2"/>
-          <a:stretch>
-            <a:fillRect/>
-          </a:stretch>
-        </p:blipFill>
-        <p:spPr>
-          <a:xfrm>
-            <a:off x="1737360" y="960120"/>
-            <a:ext cx="8686800" cy="3226526"/>
-          </a:xfrm>
-          <a:prstGeom prst="rect">
-            <a:avLst/>
-          </a:prstGeom>
-        </p:spPr>
-      </p:pic>
-      <p:sp>
-        <p:nvSpPr>
-          <p:cNvPr id="5" name="TextBox 4"/>
+      <p:sp>
+        <p:nvSpPr>
+          <p:cNvPr id="4" name="TextBox 3"/>
           <p:cNvSpPr txBox="1"/>
           <p:nvPr/>
         </p:nvSpPr>
         <p:spPr>
           <a:xfrm>
-            <a:off x="914400" y="4226646"/>
-            <a:ext cx="10332720" cy="548640"/>
+            <a:off x="502920" y="914400"/>
+            <a:ext cx="11155680" cy="5486400"/>
           </a:xfrm>
           <a:prstGeom prst="rect">
             <a:avLst/>
@@ -7932,20 +8408,141 @@
           <a:noFill/>
         </p:spPr>
         <p:txBody>
-          <a:bodyPr wrap="none">
+          <a:bodyPr wrap="square">
             <a:spAutoFit/>
           </a:bodyPr>
           <a:lstStyle/>
           <a:p>
-            <a:pPr algn="ctr"/>
-            <a:r>
-              <a:rPr sz="1100" b="0">
-                <a:solidFill>
-                  <a:srgbClr val="5A6472"/>
-                </a:solidFill>
-                <a:latin typeface="Microsoft YaHei"/>
-              </a:rPr>
-              <a:t>图 14 物理机多规模膝点：隔离 vs 共享（16 核细扫 4 轮）</a:t>
+            <a:pPr>
+              <a:lnSpc>
+                <a:spcPct val="108000"/>
+              </a:lnSpc>
+              <a:spcAft>
+                <a:spcPts val="400"/>
+              </a:spcAft>
+            </a:pPr>
+            <a:r>
+              <a:rPr sz="1250" b="0">
+                <a:solidFill>
+                  <a:srgbClr val="1C1C1E"/>
+                </a:solidFill>
+                <a:latin typeface="Microsoft YaHei"/>
+              </a:rPr>
+              <a:t>在物理机上把第 4.1 节的膝点实验放大到五种规模：租户池 2 / 4 / 8 / 16 / 32 物理核，服务侧两种配置：隔离（专用核）与共享（与租户同池）。逐步增加 100% 占空比的满载邻居（每位 1 核），记录服务 P99（图 14；横轴为"超售比 = 满载邻居数 / 租户池核数"）。</a:t>
+            </a:r>
+          </a:p>
+          <a:p>
+            <a:pPr>
+              <a:lnSpc>
+                <a:spcPct val="108000"/>
+              </a:lnSpc>
+              <a:spcAft>
+                <a:spcPts val="400"/>
+              </a:spcAft>
+            </a:pPr>
+            <a:r>
+              <a:rPr sz="1250" b="0">
+                <a:solidFill>
+                  <a:srgbClr val="1C1C1E"/>
+                </a:solidFill>
+                <a:latin typeface="Microsoft YaHei"/>
+              </a:rPr>
+              <a:t>结果。</a:t>
+            </a:r>
+          </a:p>
+          <a:p>
+            <a:pPr lvl="1">
+              <a:lnSpc>
+                <a:spcPct val="108000"/>
+              </a:lnSpc>
+              <a:spcAft>
+                <a:spcPts val="400"/>
+              </a:spcAft>
+            </a:pPr>
+            <a:r>
+              <a:rPr sz="1200" b="0">
+                <a:solidFill>
+                  <a:srgbClr val="1C1C1E"/>
+                </a:solidFill>
+                <a:latin typeface="Microsoft YaHei"/>
+              </a:rPr>
+              <a:t>• 隔离配置：五种规模、超售比 0–2.5× 全程服务 P99 0.68–0.78 ms——即使在 32 核池上、</a:t>
+            </a:r>
+          </a:p>
+          <a:p>
+            <a:pPr>
+              <a:lnSpc>
+                <a:spcPct val="108000"/>
+              </a:lnSpc>
+              <a:spcAft>
+                <a:spcPts val="400"/>
+              </a:spcAft>
+            </a:pPr>
+            <a:r>
+              <a:rPr sz="1250" b="0">
+                <a:solidFill>
+                  <a:srgbClr val="1C1C1E"/>
+                </a:solidFill>
+                <a:latin typeface="Microsoft YaHei"/>
+              </a:rPr>
+              <a:t>48 台满载邻居（1.5× 超售）下依然零伤尾。"隔离护尾"从 4 vCPU 嵌套床放大到 96 线程物理机后完全成立。</a:t>
+            </a:r>
+          </a:p>
+          <a:p>
+            <a:pPr lvl="1">
+              <a:lnSpc>
+                <a:spcPct val="108000"/>
+              </a:lnSpc>
+              <a:spcAft>
+                <a:spcPts val="400"/>
+              </a:spcAft>
+            </a:pPr>
+            <a:r>
+              <a:rPr sz="1200" b="0">
+                <a:solidFill>
+                  <a:srgbClr val="1C1C1E"/>
+                </a:solidFill>
+                <a:latin typeface="Microsoft YaHei"/>
+              </a:rPr>
+              <a:t>• 共享配置：每种规模都在池饱和点（超售比 = 1.0）出现断崖——2 核池 L2→L4（4.1→10.2 ms）、</a:t>
+            </a:r>
+          </a:p>
+          <a:p>
+            <a:pPr>
+              <a:lnSpc>
+                <a:spcPct val="108000"/>
+              </a:lnSpc>
+              <a:spcAft>
+                <a:spcPts val="400"/>
+              </a:spcAft>
+            </a:pPr>
+            <a:r>
+              <a:rPr sz="1250" b="0">
+                <a:solidFill>
+                  <a:srgbClr val="1C1C1E"/>
+                </a:solidFill>
+                <a:latin typeface="Microsoft YaHei"/>
+              </a:rPr>
+              <a:t>4 核池 L3→L4（1.5→10.2 ms）、16 核池 L13→L16（1.0→12.0 ms）。16 核池细扫 4 轮（L13–L18，图 14 已更新）：L15 = 2.13 ms [2.00–2.29]（仍在平台），L16 = 10.95 ms [9.97–12.02]，4/4 轮在 L15→L16 处跳变；饱和后（L17–L18）稳定在 9.8–10.6 ms 平台——膝点位置精确等于池容量，4 轮无一轮例外，与 BeroHost 的 3→4 结论同构。</a:t>
+            </a:r>
+          </a:p>
+          <a:p>
+            <a:pPr>
+              <a:lnSpc>
+                <a:spcPct val="108000"/>
+              </a:lnSpc>
+              <a:spcAft>
+                <a:spcPts val="400"/>
+              </a:spcAft>
+            </a:pPr>
+            <a:r>
+              <a:rPr sz="1250" b="0">
+                <a:solidFill>
+                  <a:srgbClr val="1C1C1E"/>
+                </a:solidFill>
+                <a:latin typeface="Microsoft YaHei"/>
+              </a:rPr>
+              <a:t>读法。 规模不改变结论的形状，只改变刻度：共享池的膝点始终落在"峰值需求 ≥ 池容量"处，隔离则把这条曲线整根压平。这同时是对"4 vCPU 太小、结论不可推广"关切最直接的回答：在 96 线程物理机上，膝点现象、量级（0.7 ms → 10–12 ms）与隔离有效性逐项复现。</a:t>
             </a:r>
           </a:p>
         </p:txBody>
@@ -8058,7 +8655,7 @@
                 </a:solidFill>
                 <a:latin typeface="Microsoft YaHei"/>
               </a:rPr>
-              <a:t>8 物理机验证与安全容量模型</a:t>
+              <a:t>图</a:t>
             </a:r>
           </a:p>
           <a:p>
@@ -8069,21 +8666,45 @@
                 </a:solidFill>
                 <a:latin typeface="Microsoft YaHei"/>
               </a:rPr>
-              <a:t>8.3 相位结构：同步 vs 随机（图 15）</a:t>
-            </a:r>
-          </a:p>
-        </p:txBody>
-      </p:sp>
-      <p:sp>
-        <p:nvSpPr>
-          <p:cNvPr id="4" name="TextBox 3"/>
+              <a:t>8.2 多规模膝点复现（图 14）</a:t>
+            </a:r>
+          </a:p>
+        </p:txBody>
+      </p:sp>
+      <p:pic>
+        <p:nvPicPr>
+          <p:cNvPr id="4" name="Picture 3" descr="fig14_phys_knee.png"/>
+          <p:cNvPicPr>
+            <a:picLocks noChangeAspect="1"/>
+          </p:cNvPicPr>
+          <p:nvPr/>
+        </p:nvPicPr>
+        <p:blipFill>
+          <a:blip r:embed="rId2"/>
+          <a:stretch>
+            <a:fillRect/>
+          </a:stretch>
+        </p:blipFill>
+        <p:spPr>
+          <a:xfrm>
+            <a:off x="1737360" y="960120"/>
+            <a:ext cx="8686800" cy="3226526"/>
+          </a:xfrm>
+          <a:prstGeom prst="rect">
+            <a:avLst/>
+          </a:prstGeom>
+        </p:spPr>
+      </p:pic>
+      <p:sp>
+        <p:nvSpPr>
+          <p:cNvPr id="5" name="TextBox 4"/>
           <p:cNvSpPr txBox="1"/>
           <p:nvPr/>
         </p:nvSpPr>
         <p:spPr>
           <a:xfrm>
-            <a:off x="502920" y="914400"/>
-            <a:ext cx="11155680" cy="5486400"/>
+            <a:off x="914400" y="4226646"/>
+            <a:ext cx="10332720" cy="548640"/>
           </a:xfrm>
           <a:prstGeom prst="rect">
             <a:avLst/>
@@ -8091,46 +8712,20 @@
           <a:noFill/>
         </p:spPr>
         <p:txBody>
-          <a:bodyPr wrap="square">
+          <a:bodyPr wrap="none">
             <a:spAutoFit/>
           </a:bodyPr>
           <a:lstStyle/>
           <a:p>
-            <a:pPr>
-              <a:lnSpc>
-                <a:spcPct val="108000"/>
-              </a:lnSpc>
-              <a:spcAft>
-                <a:spcPts val="400"/>
-              </a:spcAft>
-            </a:pPr>
-            <a:r>
-              <a:rPr sz="1250" b="0">
-                <a:solidFill>
-                  <a:srgbClr val="1C1C1E"/>
-                </a:solidFill>
-                <a:latin typeface="Microsoft YaHei"/>
-              </a:rPr>
-              <a:t>把 BeroHost 的同步突发实验（第 4.2 节）放大到 64 台：全部客户同开（各 20% 占空比 / 60 s 周期），一半实验随机相位、一半相位对齐，全部挤在同一个 16 核池（无隔离）。</a:t>
-            </a:r>
-          </a:p>
-          <a:p>
-            <a:pPr>
-              <a:lnSpc>
-                <a:spcPct val="108000"/>
-              </a:lnSpc>
-              <a:spcAft>
-                <a:spcPts val="400"/>
-              </a:spcAft>
-            </a:pPr>
-            <a:r>
-              <a:rPr sz="1250" b="0">
-                <a:solidFill>
-                  <a:srgbClr val="1C1C1E"/>
-                </a:solidFill>
-                <a:latin typeface="Microsoft YaHei"/>
-              </a:rPr>
-              <a:t>结果。</a:t>
+            <a:pPr algn="ctr"/>
+            <a:r>
+              <a:rPr sz="1100" b="0">
+                <a:solidFill>
+                  <a:srgbClr val="5A6472"/>
+                </a:solidFill>
+                <a:latin typeface="Microsoft YaHei"/>
+              </a:rPr>
+              <a:t>图 14 物理机多规模膝点：隔离 vs 共享（16 核细扫 4 轮）</a:t>
             </a:r>
           </a:p>
         </p:txBody>
@@ -8428,7 +9023,7 @@
                 </a:solidFill>
                 <a:latin typeface="Microsoft YaHei"/>
               </a:rPr>
-              <a:t>图</a:t>
+              <a:t>8 物理机验证与安全容量模型</a:t>
             </a:r>
           </a:p>
           <a:p>
@@ -8444,40 +9039,16 @@
           </a:p>
         </p:txBody>
       </p:sp>
-      <p:pic>
-        <p:nvPicPr>
-          <p:cNvPr id="4" name="Picture 3" descr="fig15_phys_sync.png"/>
-          <p:cNvPicPr>
-            <a:picLocks noChangeAspect="1"/>
-          </p:cNvPicPr>
-          <p:nvPr/>
-        </p:nvPicPr>
-        <p:blipFill>
-          <a:blip r:embed="rId2"/>
-          <a:stretch>
-            <a:fillRect/>
-          </a:stretch>
-        </p:blipFill>
-        <p:spPr>
-          <a:xfrm>
-            <a:off x="1737360" y="960120"/>
-            <a:ext cx="8686800" cy="2842953"/>
-          </a:xfrm>
-          <a:prstGeom prst="rect">
-            <a:avLst/>
-          </a:prstGeom>
-        </p:spPr>
-      </p:pic>
-      <p:sp>
-        <p:nvSpPr>
-          <p:cNvPr id="5" name="TextBox 4"/>
+      <p:sp>
+        <p:nvSpPr>
+          <p:cNvPr id="4" name="TextBox 3"/>
           <p:cNvSpPr txBox="1"/>
           <p:nvPr/>
         </p:nvSpPr>
         <p:spPr>
           <a:xfrm>
-            <a:off x="914400" y="3843073"/>
-            <a:ext cx="10332720" cy="548640"/>
+            <a:off x="502920" y="914400"/>
+            <a:ext cx="11155680" cy="5486400"/>
           </a:xfrm>
           <a:prstGeom prst="rect">
             <a:avLst/>
@@ -8485,20 +9056,46 @@
           <a:noFill/>
         </p:spPr>
         <p:txBody>
-          <a:bodyPr wrap="none">
+          <a:bodyPr wrap="square">
             <a:spAutoFit/>
           </a:bodyPr>
           <a:lstStyle/>
           <a:p>
-            <a:pPr algn="ctr"/>
-            <a:r>
-              <a:rPr sz="1100" b="0">
-                <a:solidFill>
-                  <a:srgbClr val="5A6472"/>
-                </a:solidFill>
-                <a:latin typeface="Microsoft YaHei"/>
-              </a:rPr>
-              <a:t>图 15 物理机 64 客户：同步 vs 随机（时间线 + 3 轮簇间隔复现）</a:t>
+            <a:pPr>
+              <a:lnSpc>
+                <a:spcPct val="108000"/>
+              </a:lnSpc>
+              <a:spcAft>
+                <a:spcPts val="400"/>
+              </a:spcAft>
+            </a:pPr>
+            <a:r>
+              <a:rPr sz="1250" b="0">
+                <a:solidFill>
+                  <a:srgbClr val="1C1C1E"/>
+                </a:solidFill>
+                <a:latin typeface="Microsoft YaHei"/>
+              </a:rPr>
+              <a:t>把 BeroHost 的同步突发实验（第 4.2 节）放大到 64 台：全部客户同开（各 20% 占空比 / 60 s 周期），一半实验随机相位、一半相位对齐，全部挤在同一个 16 核池（无隔离）。</a:t>
+            </a:r>
+          </a:p>
+          <a:p>
+            <a:pPr>
+              <a:lnSpc>
+                <a:spcPct val="108000"/>
+              </a:lnSpc>
+              <a:spcAft>
+                <a:spcPts val="400"/>
+              </a:spcAft>
+            </a:pPr>
+            <a:r>
+              <a:rPr sz="1250" b="0">
+                <a:solidFill>
+                  <a:srgbClr val="1C1C1E"/>
+                </a:solidFill>
+                <a:latin typeface="Microsoft YaHei"/>
+              </a:rPr>
+              <a:t>结果。</a:t>
             </a:r>
           </a:p>
         </p:txBody>
@@ -8611,7 +9208,7 @@
                 </a:solidFill>
                 <a:latin typeface="Microsoft YaHei"/>
               </a:rPr>
-              <a:t>8 物理机验证与安全容量模型</a:t>
+              <a:t>图</a:t>
             </a:r>
           </a:p>
           <a:p>
@@ -8627,269 +9224,65 @@
           </a:p>
         </p:txBody>
       </p:sp>
-      <p:graphicFrame>
-        <p:nvGraphicFramePr>
-          <p:cNvPr id="4" name="Table 3"/>
-          <p:cNvGraphicFramePr>
-            <a:graphicFrameLocks noGrp="1"/>
-          </p:cNvGraphicFramePr>
-          <p:nvPr/>
-        </p:nvGraphicFramePr>
-        <p:xfrm>
-          <a:off x="502920" y="960120"/>
-          <a:ext cx="11155680" cy="1463040"/>
-        </p:xfrm>
-        <a:graphic>
-          <a:graphicData uri="http://schemas.openxmlformats.org/drawingml/2006/table">
-            <a:tbl>
-              <a:tblPr firstRow="1" bandRow="1">
-                <a:tableStyleId>{5C22544A-7EE6-4342-B048-85BDC9FD1C3A}</a:tableStyleId>
-              </a:tblPr>
-              <a:tblGrid>
-                <a:gridCol w="3718560"/>
-                <a:gridCol w="3718560"/>
-                <a:gridCol w="3718560"/>
-              </a:tblGrid>
-              <a:tr h="365760">
-                <a:tc>
-                  <a:txBody>
-                    <a:bodyPr/>
-                    <a:lstStyle/>
-                    <a:p>
-                      <a:r>
-                        <a:rPr sz="1050" b="1">
-                          <a:solidFill>
-                            <a:srgbClr val="FFFFFF"/>
-                          </a:solidFill>
-                          <a:latin typeface="Microsoft YaHei"/>
-                        </a:rPr>
-                        <a:t>指标</a:t>
-                      </a:r>
-                    </a:p>
-                  </a:txBody>
-                  <a:tcPr>
-                    <a:solidFill>
-                      <a:srgbClr val="123A63"/>
-                    </a:solidFill>
-                  </a:tcPr>
-                </a:tc>
-                <a:tc>
-                  <a:txBody>
-                    <a:bodyPr/>
-                    <a:lstStyle/>
-                    <a:p>
-                      <a:r>
-                        <a:rPr sz="1050" b="1">
-                          <a:solidFill>
-                            <a:srgbClr val="FFFFFF"/>
-                          </a:solidFill>
-                          <a:latin typeface="Microsoft YaHei"/>
-                        </a:rPr>
-                        <a:t>随机相位</a:t>
-                      </a:r>
-                    </a:p>
-                  </a:txBody>
-                  <a:tcPr>
-                    <a:solidFill>
-                      <a:srgbClr val="123A63"/>
-                    </a:solidFill>
-                  </a:tcPr>
-                </a:tc>
-                <a:tc>
-                  <a:txBody>
-                    <a:bodyPr/>
-                    <a:lstStyle/>
-                    <a:p>
-                      <a:r>
-                        <a:rPr sz="1050" b="1">
-                          <a:solidFill>
-                            <a:srgbClr val="FFFFFF"/>
-                          </a:solidFill>
-                          <a:latin typeface="Microsoft YaHei"/>
-                        </a:rPr>
-                        <a:t>对齐相位</a:t>
-                      </a:r>
-                    </a:p>
-                  </a:txBody>
-                  <a:tcPr>
-                    <a:solidFill>
-                      <a:srgbClr val="123A63"/>
-                    </a:solidFill>
-                  </a:tcPr>
-                </a:tc>
-              </a:tr>
-              <a:tr h="365760">
-                <a:tc>
-                  <a:txBody>
-                    <a:bodyPr/>
-                    <a:lstStyle/>
-                    <a:p>
-                      <a:r>
-                        <a:rPr sz="1000" b="0">
-                          <a:solidFill>
-                            <a:srgbClr val="1C1C1E"/>
-                          </a:solidFill>
-                          <a:latin typeface="Microsoft YaHei"/>
-                        </a:rPr>
-                        <a:t>服务 P99</a:t>
-                      </a:r>
-                    </a:p>
-                  </a:txBody>
-                  <a:tcPr/>
-                </a:tc>
-                <a:tc>
-                  <a:txBody>
-                    <a:bodyPr/>
-                    <a:lstStyle/>
-                    <a:p>
-                      <a:r>
-                        <a:rPr sz="1000" b="0">
-                          <a:solidFill>
-                            <a:srgbClr val="1C1C1E"/>
-                          </a:solidFill>
-                          <a:latin typeface="Microsoft YaHei"/>
-                        </a:rPr>
-                        <a:t>8.8 ms</a:t>
-                      </a:r>
-                    </a:p>
-                  </a:txBody>
-                  <a:tcPr/>
-                </a:tc>
-                <a:tc>
-                  <a:txBody>
-                    <a:bodyPr/>
-                    <a:lstStyle/>
-                    <a:p>
-                      <a:r>
-                        <a:rPr sz="1000" b="0">
-                          <a:solidFill>
-                            <a:srgbClr val="1C1C1E"/>
-                          </a:solidFill>
-                          <a:latin typeface="Microsoft YaHei"/>
-                        </a:rPr>
-                        <a:t>3.6 ms（均值口径）</a:t>
-                      </a:r>
-                    </a:p>
-                  </a:txBody>
-                  <a:tcPr/>
-                </a:tc>
-              </a:tr>
-              <a:tr h="365760">
-                <a:tc>
-                  <a:txBody>
-                    <a:bodyPr/>
-                    <a:lstStyle/>
-                    <a:p>
-                      <a:r>
-                        <a:rPr sz="1000" b="0">
-                          <a:solidFill>
-                            <a:srgbClr val="1C1C1E"/>
-                          </a:solidFill>
-                          <a:latin typeface="Microsoft YaHei"/>
-                        </a:rPr>
-                        <a:t>热点时间形态</a:t>
-                      </a:r>
-                    </a:p>
-                  </a:txBody>
-                  <a:tcPr/>
-                </a:tc>
-                <a:tc>
-                  <a:txBody>
-                    <a:bodyPr/>
-                    <a:lstStyle/>
-                    <a:p>
-                      <a:r>
-                        <a:rPr sz="1000" b="0">
-                          <a:solidFill>
-                            <a:srgbClr val="1C1C1E"/>
-                          </a:solidFill>
-                          <a:latin typeface="Microsoft YaHei"/>
-                        </a:rPr>
-                        <a:t>散点（间隔 20–40 s 混杂）</a:t>
-                      </a:r>
-                    </a:p>
-                  </a:txBody>
-                  <a:tcPr/>
-                </a:tc>
-                <a:tc>
-                  <a:txBody>
-                    <a:bodyPr/>
-                    <a:lstStyle/>
-                    <a:p>
-                      <a:r>
-                        <a:rPr sz="1000" b="0">
-                          <a:solidFill>
-                            <a:srgbClr val="1C1C1E"/>
-                          </a:solidFill>
-                          <a:latin typeface="Microsoft YaHei"/>
-                        </a:rPr>
-                        <a:t>严格 60 s 周期</a:t>
-                      </a:r>
-                    </a:p>
-                  </a:txBody>
-                  <a:tcPr/>
-                </a:tc>
-              </a:tr>
-              <a:tr h="365760">
-                <a:tc>
-                  <a:txBody>
-                    <a:bodyPr/>
-                    <a:lstStyle/>
-                    <a:p>
-                      <a:r>
-                        <a:rPr sz="1000" b="0">
-                          <a:solidFill>
-                            <a:srgbClr val="1C1C1E"/>
-                          </a:solidFill>
-                          <a:latin typeface="Microsoft YaHei"/>
-                        </a:rPr>
-                        <a:t>客户速率</a:t>
-                      </a:r>
-                    </a:p>
-                  </a:txBody>
-                  <a:tcPr/>
-                </a:tc>
-                <a:tc>
-                  <a:txBody>
-                    <a:bodyPr/>
-                    <a:lstStyle/>
-                    <a:p>
-                      <a:r>
-                        <a:rPr sz="1000" b="0">
-                          <a:solidFill>
-                            <a:srgbClr val="1C1C1E"/>
-                          </a:solidFill>
-                          <a:latin typeface="Microsoft YaHei"/>
-                        </a:rPr>
-                        <a:t>持续缓降</a:t>
-                      </a:r>
-                    </a:p>
-                  </a:txBody>
-                  <a:tcPr/>
-                </a:tc>
-                <a:tc>
-                  <a:txBody>
-                    <a:bodyPr/>
-                    <a:lstStyle/>
-                    <a:p>
-                      <a:r>
-                        <a:rPr sz="1000" b="0">
-                          <a:solidFill>
-                            <a:srgbClr val="1C1C1E"/>
-                          </a:solidFill>
-                          <a:latin typeface="Microsoft YaHei"/>
-                        </a:rPr>
-                        <a:t>burst 时骤降（下节量化）</a:t>
-                      </a:r>
-                    </a:p>
-                  </a:txBody>
-                  <a:tcPr/>
-                </a:tc>
-              </a:tr>
-            </a:tbl>
-          </a:graphicData>
-        </a:graphic>
-      </p:graphicFrame>
+      <p:pic>
+        <p:nvPicPr>
+          <p:cNvPr id="4" name="Picture 3" descr="fig15_phys_sync.png"/>
+          <p:cNvPicPr>
+            <a:picLocks noChangeAspect="1"/>
+          </p:cNvPicPr>
+          <p:nvPr/>
+        </p:nvPicPr>
+        <p:blipFill>
+          <a:blip r:embed="rId2"/>
+          <a:stretch>
+            <a:fillRect/>
+          </a:stretch>
+        </p:blipFill>
+        <p:spPr>
+          <a:xfrm>
+            <a:off x="1737360" y="960120"/>
+            <a:ext cx="8686800" cy="2842953"/>
+          </a:xfrm>
+          <a:prstGeom prst="rect">
+            <a:avLst/>
+          </a:prstGeom>
+        </p:spPr>
+      </p:pic>
+      <p:sp>
+        <p:nvSpPr>
+          <p:cNvPr id="5" name="TextBox 4"/>
+          <p:cNvSpPr txBox="1"/>
+          <p:nvPr/>
+        </p:nvSpPr>
+        <p:spPr>
+          <a:xfrm>
+            <a:off x="914400" y="3843073"/>
+            <a:ext cx="10332720" cy="548640"/>
+          </a:xfrm>
+          <a:prstGeom prst="rect">
+            <a:avLst/>
+          </a:prstGeom>
+          <a:noFill/>
+        </p:spPr>
+        <p:txBody>
+          <a:bodyPr wrap="none">
+            <a:spAutoFit/>
+          </a:bodyPr>
+          <a:lstStyle/>
+          <a:p>
+            <a:pPr algn="ctr"/>
+            <a:r>
+              <a:rPr sz="1100" b="0">
+                <a:solidFill>
+                  <a:srgbClr val="5A6472"/>
+                </a:solidFill>
+                <a:latin typeface="Microsoft YaHei"/>
+              </a:rPr>
+              <a:t>图 15 物理机 64 客户：同步 vs 随机（时间线 + 3 轮簇间隔复现）</a:t>
+            </a:r>
+          </a:p>
+        </p:txBody>
+      </p:sp>
     </p:spTree>
   </p:cSld>
   <p:clrMapOvr>
@@ -9014,67 +9407,269 @@
           </a:p>
         </p:txBody>
       </p:sp>
-      <p:sp>
-        <p:nvSpPr>
-          <p:cNvPr id="4" name="TextBox 3"/>
-          <p:cNvSpPr txBox="1"/>
-          <p:nvPr/>
-        </p:nvSpPr>
-        <p:spPr>
-          <a:xfrm>
-            <a:off x="502920" y="914400"/>
-            <a:ext cx="11155680" cy="5486400"/>
-          </a:xfrm>
-          <a:prstGeom prst="rect">
-            <a:avLst/>
-          </a:prstGeom>
-          <a:noFill/>
-        </p:spPr>
-        <p:txBody>
-          <a:bodyPr wrap="square">
-            <a:spAutoFit/>
-          </a:bodyPr>
-          <a:lstStyle/>
-          <a:p>
-            <a:pPr>
-              <a:lnSpc>
-                <a:spcPct val="108000"/>
-              </a:lnSpc>
-              <a:spcAft>
-                <a:spcPts val="400"/>
-              </a:spcAft>
-            </a:pPr>
-            <a:r>
-              <a:rPr sz="1250" b="0">
-                <a:solidFill>
-                  <a:srgbClr val="1C1C1E"/>
-                </a:solidFill>
-                <a:latin typeface="Microsoft YaHei"/>
-              </a:rPr>
-              <a:t>复现（图 15 右）： 随机/对齐各重复 3 轮（r1–r3）。对齐组 3 轮共 5 个热点簇间隔全部精确命中 60 s；随机组的簇间隔在 20–40 s 间散落、无固定节拍。两种相位的"伤害签名"（周期尖峰 vs 基线抬高）在重复轮中稳定复现。</a:t>
-            </a:r>
-          </a:p>
-          <a:p>
-            <a:pPr>
-              <a:lnSpc>
-                <a:spcPct val="108000"/>
-              </a:lnSpc>
-              <a:spcAft>
-                <a:spcPts val="400"/>
-              </a:spcAft>
-            </a:pPr>
-            <a:r>
-              <a:rPr sz="1250" b="0">
-                <a:solidFill>
-                  <a:srgbClr val="1C1C1E"/>
-                </a:solidFill>
-                <a:latin typeface="Microsoft YaHei"/>
-              </a:rPr>
-              <a:t>读法。 两种相位伤害形态不同：同步的伤害是可预测的周期尖峰（每个 60 s 工作窗内全组同时争抢），随机的伤害是把基线持续抬高。这修正了第 4.2 节的表述（尖峰是同步的特征签名，而非"同步更差"的单调排序），也为"时间对齐准入"提供了动机：周期结构可以被测量、被利用（避峰）或被治理（错峰），而随机结构只能靠裕量。</a:t>
-            </a:r>
-          </a:p>
-        </p:txBody>
-      </p:sp>
+      <p:graphicFrame>
+        <p:nvGraphicFramePr>
+          <p:cNvPr id="4" name="Table 3"/>
+          <p:cNvGraphicFramePr>
+            <a:graphicFrameLocks noGrp="1"/>
+          </p:cNvGraphicFramePr>
+          <p:nvPr/>
+        </p:nvGraphicFramePr>
+        <p:xfrm>
+          <a:off x="502920" y="960120"/>
+          <a:ext cx="11155680" cy="1463040"/>
+        </p:xfrm>
+        <a:graphic>
+          <a:graphicData uri="http://schemas.openxmlformats.org/drawingml/2006/table">
+            <a:tbl>
+              <a:tblPr firstRow="1" bandRow="1">
+                <a:tableStyleId>{5C22544A-7EE6-4342-B048-85BDC9FD1C3A}</a:tableStyleId>
+              </a:tblPr>
+              <a:tblGrid>
+                <a:gridCol w="3718560"/>
+                <a:gridCol w="3718560"/>
+                <a:gridCol w="3718560"/>
+              </a:tblGrid>
+              <a:tr h="365760">
+                <a:tc>
+                  <a:txBody>
+                    <a:bodyPr/>
+                    <a:lstStyle/>
+                    <a:p>
+                      <a:r>
+                        <a:rPr sz="1050" b="1">
+                          <a:solidFill>
+                            <a:srgbClr val="FFFFFF"/>
+                          </a:solidFill>
+                          <a:latin typeface="Microsoft YaHei"/>
+                        </a:rPr>
+                        <a:t>指标</a:t>
+                      </a:r>
+                    </a:p>
+                  </a:txBody>
+                  <a:tcPr>
+                    <a:solidFill>
+                      <a:srgbClr val="123A63"/>
+                    </a:solidFill>
+                  </a:tcPr>
+                </a:tc>
+                <a:tc>
+                  <a:txBody>
+                    <a:bodyPr/>
+                    <a:lstStyle/>
+                    <a:p>
+                      <a:r>
+                        <a:rPr sz="1050" b="1">
+                          <a:solidFill>
+                            <a:srgbClr val="FFFFFF"/>
+                          </a:solidFill>
+                          <a:latin typeface="Microsoft YaHei"/>
+                        </a:rPr>
+                        <a:t>随机相位</a:t>
+                      </a:r>
+                    </a:p>
+                  </a:txBody>
+                  <a:tcPr>
+                    <a:solidFill>
+                      <a:srgbClr val="123A63"/>
+                    </a:solidFill>
+                  </a:tcPr>
+                </a:tc>
+                <a:tc>
+                  <a:txBody>
+                    <a:bodyPr/>
+                    <a:lstStyle/>
+                    <a:p>
+                      <a:r>
+                        <a:rPr sz="1050" b="1">
+                          <a:solidFill>
+                            <a:srgbClr val="FFFFFF"/>
+                          </a:solidFill>
+                          <a:latin typeface="Microsoft YaHei"/>
+                        </a:rPr>
+                        <a:t>对齐相位</a:t>
+                      </a:r>
+                    </a:p>
+                  </a:txBody>
+                  <a:tcPr>
+                    <a:solidFill>
+                      <a:srgbClr val="123A63"/>
+                    </a:solidFill>
+                  </a:tcPr>
+                </a:tc>
+              </a:tr>
+              <a:tr h="365760">
+                <a:tc>
+                  <a:txBody>
+                    <a:bodyPr/>
+                    <a:lstStyle/>
+                    <a:p>
+                      <a:r>
+                        <a:rPr sz="1000" b="0">
+                          <a:solidFill>
+                            <a:srgbClr val="1C1C1E"/>
+                          </a:solidFill>
+                          <a:latin typeface="Microsoft YaHei"/>
+                        </a:rPr>
+                        <a:t>服务 P99</a:t>
+                      </a:r>
+                    </a:p>
+                  </a:txBody>
+                  <a:tcPr/>
+                </a:tc>
+                <a:tc>
+                  <a:txBody>
+                    <a:bodyPr/>
+                    <a:lstStyle/>
+                    <a:p>
+                      <a:r>
+                        <a:rPr sz="1000" b="0">
+                          <a:solidFill>
+                            <a:srgbClr val="1C1C1E"/>
+                          </a:solidFill>
+                          <a:latin typeface="Microsoft YaHei"/>
+                        </a:rPr>
+                        <a:t>8.8 ms</a:t>
+                      </a:r>
+                    </a:p>
+                  </a:txBody>
+                  <a:tcPr/>
+                </a:tc>
+                <a:tc>
+                  <a:txBody>
+                    <a:bodyPr/>
+                    <a:lstStyle/>
+                    <a:p>
+                      <a:r>
+                        <a:rPr sz="1000" b="0">
+                          <a:solidFill>
+                            <a:srgbClr val="1C1C1E"/>
+                          </a:solidFill>
+                          <a:latin typeface="Microsoft YaHei"/>
+                        </a:rPr>
+                        <a:t>3.6 ms（均值口径）</a:t>
+                      </a:r>
+                    </a:p>
+                  </a:txBody>
+                  <a:tcPr/>
+                </a:tc>
+              </a:tr>
+              <a:tr h="365760">
+                <a:tc>
+                  <a:txBody>
+                    <a:bodyPr/>
+                    <a:lstStyle/>
+                    <a:p>
+                      <a:r>
+                        <a:rPr sz="1000" b="0">
+                          <a:solidFill>
+                            <a:srgbClr val="1C1C1E"/>
+                          </a:solidFill>
+                          <a:latin typeface="Microsoft YaHei"/>
+                        </a:rPr>
+                        <a:t>热点时间形态</a:t>
+                      </a:r>
+                    </a:p>
+                  </a:txBody>
+                  <a:tcPr/>
+                </a:tc>
+                <a:tc>
+                  <a:txBody>
+                    <a:bodyPr/>
+                    <a:lstStyle/>
+                    <a:p>
+                      <a:r>
+                        <a:rPr sz="1000" b="0">
+                          <a:solidFill>
+                            <a:srgbClr val="1C1C1E"/>
+                          </a:solidFill>
+                          <a:latin typeface="Microsoft YaHei"/>
+                        </a:rPr>
+                        <a:t>散点（间隔 20–40 s 混杂）</a:t>
+                      </a:r>
+                    </a:p>
+                  </a:txBody>
+                  <a:tcPr/>
+                </a:tc>
+                <a:tc>
+                  <a:txBody>
+                    <a:bodyPr/>
+                    <a:lstStyle/>
+                    <a:p>
+                      <a:r>
+                        <a:rPr sz="1000" b="0">
+                          <a:solidFill>
+                            <a:srgbClr val="1C1C1E"/>
+                          </a:solidFill>
+                          <a:latin typeface="Microsoft YaHei"/>
+                        </a:rPr>
+                        <a:t>严格 60 s 周期</a:t>
+                      </a:r>
+                    </a:p>
+                  </a:txBody>
+                  <a:tcPr/>
+                </a:tc>
+              </a:tr>
+              <a:tr h="365760">
+                <a:tc>
+                  <a:txBody>
+                    <a:bodyPr/>
+                    <a:lstStyle/>
+                    <a:p>
+                      <a:r>
+                        <a:rPr sz="1000" b="0">
+                          <a:solidFill>
+                            <a:srgbClr val="1C1C1E"/>
+                          </a:solidFill>
+                          <a:latin typeface="Microsoft YaHei"/>
+                        </a:rPr>
+                        <a:t>客户速率</a:t>
+                      </a:r>
+                    </a:p>
+                  </a:txBody>
+                  <a:tcPr/>
+                </a:tc>
+                <a:tc>
+                  <a:txBody>
+                    <a:bodyPr/>
+                    <a:lstStyle/>
+                    <a:p>
+                      <a:r>
+                        <a:rPr sz="1000" b="0">
+                          <a:solidFill>
+                            <a:srgbClr val="1C1C1E"/>
+                          </a:solidFill>
+                          <a:latin typeface="Microsoft YaHei"/>
+                        </a:rPr>
+                        <a:t>持续缓降</a:t>
+                      </a:r>
+                    </a:p>
+                  </a:txBody>
+                  <a:tcPr/>
+                </a:tc>
+                <a:tc>
+                  <a:txBody>
+                    <a:bodyPr/>
+                    <a:lstStyle/>
+                    <a:p>
+                      <a:r>
+                        <a:rPr sz="1000" b="0">
+                          <a:solidFill>
+                            <a:srgbClr val="1C1C1E"/>
+                          </a:solidFill>
+                          <a:latin typeface="Microsoft YaHei"/>
+                        </a:rPr>
+                        <a:t>burst 时骤降（下节量化）</a:t>
+                      </a:r>
+                    </a:p>
+                  </a:txBody>
+                  <a:tcPr/>
+                </a:tc>
+              </a:tr>
+            </a:tbl>
+          </a:graphicData>
+        </a:graphic>
+      </p:graphicFrame>
     </p:spTree>
   </p:cSld>
   <p:clrMapOvr>
@@ -9194,7 +9789,7 @@
                 </a:solidFill>
                 <a:latin typeface="Microsoft YaHei"/>
               </a:rPr>
-              <a:t>8.4 安全售卖容量（图 16，核心结果）</a:t>
+              <a:t>8.3 相位结构：同步 vs 随机（图 15）</a:t>
             </a:r>
           </a:p>
         </p:txBody>
@@ -9236,7 +9831,7 @@
                 </a:solidFill>
                 <a:latin typeface="Microsoft YaHei"/>
               </a:rPr>
-              <a:t>安全定义（事前统一口径，全部章节适用）。 容量声明一律三元组 （资源、质量约束、风险预算 ε）：（i）服务侧：以 W∈[30,120] s 为窗口，违约 = 窗口内 P99 &gt; 10 ms 或 超时/错误 &gt; 0（失败不豁免）；声明形如"违约窗率 ≤ ε"并附独立轮数与 Clopper–Pearson 上界（5.3.2）；（ii）客户侧：主口径 = 客户工作速率 P5 ≥ 70% 独享基准（低尾分位，非"最差十分位"）；（iii）容量 oracle：在（i）（ii）两约束下、按给定 ε 判定的最大档位——拐点（均值断崖）、零违约容量（ε=0）与风险预算容量（ε&gt;0）是三个不同概念，正文每次引用必须标明属于哪一种（例：4.1b 的"3 台"是拐点前档与 ε≈7% 预算档；ε=0 时为 2 台）。超时与错误一律计入违约（不因剔除而美化成功请求 P99）。</a:t>
+              <a:t>复现（图 15 右）： 随机/对齐各重复 3 轮（r1–r3）。对齐组 3 轮共 5 个热点簇间隔全部精确命中 60 s；随机组的簇间隔在 20–40 s 间散落、无固定节拍。两种相位的"伤害签名"（周期尖峰 vs 基线抬高）在重复轮中稳定复现。</a:t>
             </a:r>
           </a:p>
           <a:p>
@@ -9255,102 +9850,7 @@
                 </a:solidFill>
                 <a:latin typeface="Microsoft YaHei"/>
               </a:rPr>
-              <a:t>问题。 8 核租户池、服务隔离在外，在"服务 P99 ≤ 10 ms 且客户体验不劣化"的双约束下，能卖多少台 1-vCPU VPS？</a:t>
-            </a:r>
-          </a:p>
-          <a:p>
-            <a:pPr>
-              <a:lnSpc>
-                <a:spcPct val="108000"/>
-              </a:lnSpc>
-              <a:spcAft>
-                <a:spcPts val="400"/>
-              </a:spcAft>
-            </a:pPr>
-            <a:r>
-              <a:rPr sz="1250" b="0">
-                <a:solidFill>
-                  <a:srgbClr val="1C1C1E"/>
-                </a:solidFill>
-                <a:latin typeface="Microsoft YaHei"/>
-              </a:rPr>
-              <a:t>质量口径（事前声明，防事后挑选）。 主口径 = 服务 P99 ≤ 10 ms 且客户工作速率 P5 ≥ 70% 独享基准（即：低尾——分布第 5 百分位处的客户仍保有 ≥70% 性能；注意 P5 是低尾分位，不是"最差十分位"）；另报敏感性口径 P5 ≥ 90%／P5 ≥ 50%／中位 P50 ≥ 90%，全部在同一份数据上事先并列报告。统计口径：先按客户级/轮级聚合再估计分位（不把逐客户逐时间样本当独立重复），轮级不确定性以轮为单位重采样。</a:t>
-            </a:r>
-          </a:p>
-          <a:p>
-            <a:pPr>
-              <a:lnSpc>
-                <a:spcPct val="108000"/>
-              </a:lnSpc>
-              <a:spcAft>
-                <a:spcPts val="400"/>
-              </a:spcAft>
-            </a:pPr>
-            <a:r>
-              <a:rPr sz="1250" b="0">
-                <a:solidFill>
-                  <a:srgbClr val="1C1C1E"/>
-                </a:solidFill>
-                <a:latin typeface="Microsoft YaHei"/>
-              </a:rPr>
-              <a:t>方法。 阶梯式加售：L8→L64（随机相位组）/ L4→L32（同步组），每档稳定后采集 60 s：池忙率（每 2 s）、逐客户忙循环速率（每 10 s）、双服务探针。客户速率以独享单核基准（25.9 M it/s）归一；随机组 2 轮合并（r1+r2，逐客户样本 n=13–117），同步组 1 轮。</a:t>
-            </a:r>
-          </a:p>
-          <a:p>
-            <a:pPr>
-              <a:lnSpc>
-                <a:spcPct val="108000"/>
-              </a:lnSpc>
-              <a:spcAft>
-                <a:spcPts val="400"/>
-              </a:spcAft>
-            </a:pPr>
-            <a:r>
-              <a:rPr sz="1250" b="0">
-                <a:solidFill>
-                  <a:srgbClr val="1C1C1E"/>
-                </a:solidFill>
-                <a:latin typeface="Microsoft YaHei"/>
-              </a:rPr>
-              <a:t>结果（图 16 左：客户体验；右：服务侧）。</a:t>
-            </a:r>
-          </a:p>
-          <a:p>
-            <a:pPr lvl="1">
-              <a:lnSpc>
-                <a:spcPct val="108000"/>
-              </a:lnSpc>
-              <a:spcAft>
-                <a:spcPts val="400"/>
-              </a:spcAft>
-            </a:pPr>
-            <a:r>
-              <a:rPr sz="1200" b="0">
-                <a:solidFill>
-                  <a:srgbClr val="1C1C1E"/>
-                </a:solidFill>
-                <a:latin typeface="Microsoft YaHei"/>
-              </a:rPr>
-              <a:t>• 服务侧（右）：两组、全部档位 P99 0.56–0.78 ms——隔离包络下，"卖到 8× 超售"服务依然零伤。</a:t>
-            </a:r>
-          </a:p>
-          <a:p>
-            <a:pPr lvl="1">
-              <a:lnSpc>
-                <a:spcPct val="108000"/>
-              </a:lnSpc>
-              <a:spcAft>
-                <a:spcPts val="400"/>
-              </a:spcAft>
-            </a:pPr>
-            <a:r>
-              <a:rPr sz="1200" b="0">
-                <a:solidFill>
-                  <a:srgbClr val="1C1C1E"/>
-                </a:solidFill>
-                <a:latin typeface="Microsoft YaHei"/>
-              </a:rPr>
-              <a:t>• 客户侧（左）：同负载（人均 20%）、同池子，安全容量随质量口径在 3–7× 区间移动：</a:t>
+              <a:t>读法。 两种相位伤害形态不同：同步的伤害是可预测的周期尖峰（每个 60 s 工作窗内全组同时争抢），随机的伤害是把基线持续抬高。这修正了第 4.2 节的表述（尖峰是同步的特征签名，而非"同步更差"的单调排序），也为"时间对齐准入"提供了动机：周期结构可以被测量、被利用（避峰）或被治理（错峰），而随机结构只能靠裕量。</a:t>
             </a:r>
           </a:p>
         </p:txBody>
@@ -9463,7 +9963,7 @@
                 </a:solidFill>
                 <a:latin typeface="Microsoft YaHei"/>
               </a:rPr>
-              <a:t>图</a:t>
+              <a:t>8 物理机验证与安全容量模型</a:t>
             </a:r>
           </a:p>
           <a:p>
@@ -9479,40 +9979,16 @@
           </a:p>
         </p:txBody>
       </p:sp>
-      <p:pic>
-        <p:nvPicPr>
-          <p:cNvPr id="4" name="Picture 3" descr="fig16_phys_sell.png"/>
-          <p:cNvPicPr>
-            <a:picLocks noChangeAspect="1"/>
-          </p:cNvPicPr>
-          <p:nvPr/>
-        </p:nvPicPr>
-        <p:blipFill>
-          <a:blip r:embed="rId2"/>
-          <a:stretch>
-            <a:fillRect/>
-          </a:stretch>
-        </p:blipFill>
-        <p:spPr>
-          <a:xfrm>
-            <a:off x="1737360" y="960120"/>
-            <a:ext cx="8686800" cy="3226526"/>
-          </a:xfrm>
-          <a:prstGeom prst="rect">
-            <a:avLst/>
-          </a:prstGeom>
-        </p:spPr>
-      </p:pic>
-      <p:sp>
-        <p:nvSpPr>
-          <p:cNvPr id="5" name="TextBox 4"/>
+      <p:sp>
+        <p:nvSpPr>
+          <p:cNvPr id="4" name="TextBox 3"/>
           <p:cNvSpPr txBox="1"/>
           <p:nvPr/>
         </p:nvSpPr>
         <p:spPr>
           <a:xfrm>
-            <a:off x="914400" y="4226646"/>
-            <a:ext cx="10332720" cy="548640"/>
+            <a:off x="502920" y="914400"/>
+            <a:ext cx="11155680" cy="5486400"/>
           </a:xfrm>
           <a:prstGeom prst="rect">
             <a:avLst/>
@@ -9520,20 +9996,141 @@
           <a:noFill/>
         </p:spPr>
         <p:txBody>
-          <a:bodyPr wrap="none">
+          <a:bodyPr wrap="square">
             <a:spAutoFit/>
           </a:bodyPr>
           <a:lstStyle/>
           <a:p>
-            <a:pPr algn="ctr"/>
-            <a:r>
-              <a:rPr sz="1100" b="0">
-                <a:solidFill>
-                  <a:srgbClr val="5A6472"/>
-                </a:solidFill>
-                <a:latin typeface="Microsoft YaHei"/>
-              </a:rPr>
-              <a:t>图 16 物理机售卖容量：客户体验与服务侧</a:t>
+            <a:pPr>
+              <a:lnSpc>
+                <a:spcPct val="108000"/>
+              </a:lnSpc>
+              <a:spcAft>
+                <a:spcPts val="400"/>
+              </a:spcAft>
+            </a:pPr>
+            <a:r>
+              <a:rPr sz="1250" b="0">
+                <a:solidFill>
+                  <a:srgbClr val="1C1C1E"/>
+                </a:solidFill>
+                <a:latin typeface="Microsoft YaHei"/>
+              </a:rPr>
+              <a:t>安全定义（事前统一口径，全部章节适用）。 容量声明一律三元组 （资源、质量约束、风险预算 ε）：（i）服务侧：以 W∈[30,120] s 为窗口，违约 = 窗口内 P99 &gt; 10 ms 或 超时/错误 &gt; 0（失败不豁免）；声明形如"违约窗率 ≤ ε"并附独立轮数与 Clopper–Pearson 上界（5.3.2）；（ii）客户侧：主口径 = 客户工作速率 P5 ≥ 70% 独享基准（低尾分位，非"最差十分位"）；（iii）容量参照：在（i）（ii）两约束下、按给定 ε 判定的最大已验证阶梯档位（真实断点需细扫钉定）——拐点（均值断崖）、零违约容量（ε=0）与风险预算容量（ε&gt;0）是三个不同概念，正文每次引用必须标明属于哪一种（例：4.1b 的"3 台"是拐点前档与 ε≈7% 预算档；ε=0 时为 2 台）。超时与错误一律计入违约（不因剔除而美化成功请求 P99）。</a:t>
+            </a:r>
+          </a:p>
+          <a:p>
+            <a:pPr>
+              <a:lnSpc>
+                <a:spcPct val="108000"/>
+              </a:lnSpc>
+              <a:spcAft>
+                <a:spcPts val="400"/>
+              </a:spcAft>
+            </a:pPr>
+            <a:r>
+              <a:rPr sz="1250" b="0">
+                <a:solidFill>
+                  <a:srgbClr val="1C1C1E"/>
+                </a:solidFill>
+                <a:latin typeface="Microsoft YaHei"/>
+              </a:rPr>
+              <a:t>问题。 8 核租户池、服务隔离在外，在"服务 P99 ≤ 10 ms 且客户体验不劣化"的双约束下，能卖多少台 1-vCPU VPS？</a:t>
+            </a:r>
+          </a:p>
+          <a:p>
+            <a:pPr>
+              <a:lnSpc>
+                <a:spcPct val="108000"/>
+              </a:lnSpc>
+              <a:spcAft>
+                <a:spcPts val="400"/>
+              </a:spcAft>
+            </a:pPr>
+            <a:r>
+              <a:rPr sz="1250" b="0">
+                <a:solidFill>
+                  <a:srgbClr val="1C1C1E"/>
+                </a:solidFill>
+                <a:latin typeface="Microsoft YaHei"/>
+              </a:rPr>
+              <a:t>质量口径（事前声明，防事后挑选）。 主口径 = 服务 P99 ≤ 10 ms 且客户工作速率 P5 ≥ 70% 独享基准（即：低尾——分布第 5 百分位处的客户仍保有 ≥70% 性能；注意 P5 是低尾分位，不是"最差十分位"）；另报敏感性口径 P5 ≥ 90%／P5 ≥ 50%／中位 P50 ≥ 90%，全部在同一份数据上事先并列报告。统计口径：先按客户级/轮级聚合再估计分位（不把逐客户逐时间样本当独立重复），轮级不确定性以轮为单位重采样。</a:t>
+            </a:r>
+          </a:p>
+          <a:p>
+            <a:pPr>
+              <a:lnSpc>
+                <a:spcPct val="108000"/>
+              </a:lnSpc>
+              <a:spcAft>
+                <a:spcPts val="400"/>
+              </a:spcAft>
+            </a:pPr>
+            <a:r>
+              <a:rPr sz="1250" b="0">
+                <a:solidFill>
+                  <a:srgbClr val="1C1C1E"/>
+                </a:solidFill>
+                <a:latin typeface="Microsoft YaHei"/>
+              </a:rPr>
+              <a:t>方法。 阶梯式加售：L8→L64（随机相位组）/ L4→L32（同步组），每档稳定后采集 60 s：池忙率（每 2 s）、逐客户忙循环速率（每 10 s）、双服务探针。客户速率以独享单核基准（25.9 M it/s）归一；随机组 2 轮合并（r1+r2，逐客户样本 n=13–117），同步组 1 轮。</a:t>
+            </a:r>
+          </a:p>
+          <a:p>
+            <a:pPr>
+              <a:lnSpc>
+                <a:spcPct val="108000"/>
+              </a:lnSpc>
+              <a:spcAft>
+                <a:spcPts val="400"/>
+              </a:spcAft>
+            </a:pPr>
+            <a:r>
+              <a:rPr sz="1250" b="0">
+                <a:solidFill>
+                  <a:srgbClr val="1C1C1E"/>
+                </a:solidFill>
+                <a:latin typeface="Microsoft YaHei"/>
+              </a:rPr>
+              <a:t>结果（图 16 左：客户体验；右：服务侧）。</a:t>
+            </a:r>
+          </a:p>
+          <a:p>
+            <a:pPr lvl="1">
+              <a:lnSpc>
+                <a:spcPct val="108000"/>
+              </a:lnSpc>
+              <a:spcAft>
+                <a:spcPts val="400"/>
+              </a:spcAft>
+            </a:pPr>
+            <a:r>
+              <a:rPr sz="1200" b="0">
+                <a:solidFill>
+                  <a:srgbClr val="1C1C1E"/>
+                </a:solidFill>
+                <a:latin typeface="Microsoft YaHei"/>
+              </a:rPr>
+              <a:t>• 服务侧（右）：两组、全部档位 P99 0.56–0.78 ms——隔离包络下，"卖到 8× 超售"服务依然零伤。</a:t>
+            </a:r>
+          </a:p>
+          <a:p>
+            <a:pPr lvl="1">
+              <a:lnSpc>
+                <a:spcPct val="108000"/>
+              </a:lnSpc>
+              <a:spcAft>
+                <a:spcPts val="400"/>
+              </a:spcAft>
+            </a:pPr>
+            <a:r>
+              <a:rPr sz="1200" b="0">
+                <a:solidFill>
+                  <a:srgbClr val="1C1C1E"/>
+                </a:solidFill>
+                <a:latin typeface="Microsoft YaHei"/>
+              </a:rPr>
+              <a:t>• 客户侧（左）：同负载（人均 20%）、同池子，安全容量随质量口径在 3–7× 区间移动：</a:t>
             </a:r>
           </a:p>
         </p:txBody>
@@ -9646,6 +10243,189 @@
                 </a:solidFill>
                 <a:latin typeface="Microsoft YaHei"/>
               </a:rPr>
+              <a:t>图</a:t>
+            </a:r>
+          </a:p>
+          <a:p>
+            <a:r>
+              <a:rPr sz="1200">
+                <a:solidFill>
+                  <a:srgbClr val="D8E2F0"/>
+                </a:solidFill>
+                <a:latin typeface="Microsoft YaHei"/>
+              </a:rPr>
+              <a:t>8.4 安全售卖容量（图 16，核心结果）</a:t>
+            </a:r>
+          </a:p>
+        </p:txBody>
+      </p:sp>
+      <p:pic>
+        <p:nvPicPr>
+          <p:cNvPr id="4" name="Picture 3" descr="fig16_phys_sell.png"/>
+          <p:cNvPicPr>
+            <a:picLocks noChangeAspect="1"/>
+          </p:cNvPicPr>
+          <p:nvPr/>
+        </p:nvPicPr>
+        <p:blipFill>
+          <a:blip r:embed="rId2"/>
+          <a:stretch>
+            <a:fillRect/>
+          </a:stretch>
+        </p:blipFill>
+        <p:spPr>
+          <a:xfrm>
+            <a:off x="1737360" y="960120"/>
+            <a:ext cx="8686800" cy="3226526"/>
+          </a:xfrm>
+          <a:prstGeom prst="rect">
+            <a:avLst/>
+          </a:prstGeom>
+        </p:spPr>
+      </p:pic>
+      <p:sp>
+        <p:nvSpPr>
+          <p:cNvPr id="5" name="TextBox 4"/>
+          <p:cNvSpPr txBox="1"/>
+          <p:nvPr/>
+        </p:nvSpPr>
+        <p:spPr>
+          <a:xfrm>
+            <a:off x="914400" y="4226646"/>
+            <a:ext cx="10332720" cy="548640"/>
+          </a:xfrm>
+          <a:prstGeom prst="rect">
+            <a:avLst/>
+          </a:prstGeom>
+          <a:noFill/>
+        </p:spPr>
+        <p:txBody>
+          <a:bodyPr wrap="none">
+            <a:spAutoFit/>
+          </a:bodyPr>
+          <a:lstStyle/>
+          <a:p>
+            <a:pPr algn="ctr"/>
+            <a:r>
+              <a:rPr sz="1100" b="0">
+                <a:solidFill>
+                  <a:srgbClr val="5A6472"/>
+                </a:solidFill>
+                <a:latin typeface="Microsoft YaHei"/>
+              </a:rPr>
+              <a:t>图 16 物理机售卖容量：客户体验与服务侧</a:t>
+            </a:r>
+          </a:p>
+        </p:txBody>
+      </p:sp>
+    </p:spTree>
+  </p:cSld>
+  <p:clrMapOvr>
+    <a:masterClrMapping/>
+  </p:clrMapOvr>
+</p:sld>
+</file>
+
+<file path=ppt/slides/slide126.xml><?xml version="1.0" encoding="utf-8"?>
+<p:sld xmlns:a="http://schemas.openxmlformats.org/drawingml/2006/main" xmlns:p="http://schemas.openxmlformats.org/presentationml/2006/main" xmlns:r="http://schemas.openxmlformats.org/officeDocument/2006/relationships">
+  <p:cSld>
+    <p:spTree>
+      <p:nvGrpSpPr>
+        <p:cNvPr id="1" name=""/>
+        <p:cNvGrpSpPr/>
+        <p:nvPr/>
+      </p:nvGrpSpPr>
+      <p:grpSpPr/>
+      <p:sp>
+        <p:nvSpPr>
+          <p:cNvPr id="2" name="Rectangle 1"/>
+          <p:cNvSpPr/>
+          <p:nvPr/>
+        </p:nvSpPr>
+        <p:spPr>
+          <a:xfrm>
+            <a:off x="0" y="0"/>
+            <a:ext cx="12191695" cy="6858000"/>
+          </a:xfrm>
+          <a:prstGeom prst="rect">
+            <a:avLst/>
+          </a:prstGeom>
+          <a:solidFill>
+            <a:srgbClr val="FFFFFF"/>
+          </a:solidFill>
+          <a:ln>
+            <a:noFill/>
+          </a:ln>
+        </p:spPr>
+        <p:style>
+          <a:lnRef idx="1">
+            <a:schemeClr val="accent1"/>
+          </a:lnRef>
+          <a:fillRef idx="3">
+            <a:schemeClr val="accent1"/>
+          </a:fillRef>
+          <a:effectRef idx="2">
+            <a:schemeClr val="accent1"/>
+          </a:effectRef>
+          <a:fontRef idx="minor">
+            <a:schemeClr val="lt1"/>
+          </a:fontRef>
+        </p:style>
+        <p:txBody>
+          <a:bodyPr rtlCol="0" anchor="ctr"/>
+          <a:lstStyle/>
+          <a:p>
+            <a:pPr algn="ctr"/>
+          </a:p>
+        </p:txBody>
+      </p:sp>
+      <p:sp>
+        <p:nvSpPr>
+          <p:cNvPr id="3" name="Rectangle 2"/>
+          <p:cNvSpPr/>
+          <p:nvPr/>
+        </p:nvSpPr>
+        <p:spPr>
+          <a:xfrm>
+            <a:off x="0" y="0"/>
+            <a:ext cx="12191695" cy="777240"/>
+          </a:xfrm>
+          <a:prstGeom prst="rect">
+            <a:avLst/>
+          </a:prstGeom>
+          <a:solidFill>
+            <a:srgbClr val="123A63"/>
+          </a:solidFill>
+          <a:ln>
+            <a:noFill/>
+          </a:ln>
+        </p:spPr>
+        <p:style>
+          <a:lnRef idx="1">
+            <a:schemeClr val="accent1"/>
+          </a:lnRef>
+          <a:fillRef idx="3">
+            <a:schemeClr val="accent1"/>
+          </a:fillRef>
+          <a:effectRef idx="2">
+            <a:schemeClr val="accent1"/>
+          </a:effectRef>
+          <a:fontRef idx="minor">
+            <a:schemeClr val="lt1"/>
+          </a:fontRef>
+        </p:style>
+        <p:txBody>
+          <a:bodyPr rtlCol="0" anchor="ctr" lIns="411480" tIns="54864"/>
+          <a:lstStyle/>
+          <a:p>
+            <a:pPr algn="ctr"/>
+            <a:r>
+              <a:rPr sz="2100" b="1">
+                <a:solidFill>
+                  <a:srgbClr val="FFFFFF"/>
+                </a:solidFill>
+                <a:latin typeface="Microsoft YaHei"/>
+              </a:rPr>
               <a:t>8 物理机验证与安全容量模型</a:t>
             </a:r>
           </a:p>
@@ -10084,343 +10864,6 @@
 </p:sld>
 </file>
 
-<file path=ppt/slides/slide126.xml><?xml version="1.0" encoding="utf-8"?>
-<p:sld xmlns:a="http://schemas.openxmlformats.org/drawingml/2006/main" xmlns:p="http://schemas.openxmlformats.org/presentationml/2006/main" xmlns:r="http://schemas.openxmlformats.org/officeDocument/2006/relationships">
-  <p:cSld>
-    <p:spTree>
-      <p:nvGrpSpPr>
-        <p:cNvPr id="1" name=""/>
-        <p:cNvGrpSpPr/>
-        <p:nvPr/>
-      </p:nvGrpSpPr>
-      <p:grpSpPr/>
-      <p:sp>
-        <p:nvSpPr>
-          <p:cNvPr id="2" name="Rectangle 1"/>
-          <p:cNvSpPr/>
-          <p:nvPr/>
-        </p:nvSpPr>
-        <p:spPr>
-          <a:xfrm>
-            <a:off x="0" y="0"/>
-            <a:ext cx="12191695" cy="6858000"/>
-          </a:xfrm>
-          <a:prstGeom prst="rect">
-            <a:avLst/>
-          </a:prstGeom>
-          <a:solidFill>
-            <a:srgbClr val="FFFFFF"/>
-          </a:solidFill>
-          <a:ln>
-            <a:noFill/>
-          </a:ln>
-        </p:spPr>
-        <p:style>
-          <a:lnRef idx="1">
-            <a:schemeClr val="accent1"/>
-          </a:lnRef>
-          <a:fillRef idx="3">
-            <a:schemeClr val="accent1"/>
-          </a:fillRef>
-          <a:effectRef idx="2">
-            <a:schemeClr val="accent1"/>
-          </a:effectRef>
-          <a:fontRef idx="minor">
-            <a:schemeClr val="lt1"/>
-          </a:fontRef>
-        </p:style>
-        <p:txBody>
-          <a:bodyPr rtlCol="0" anchor="ctr"/>
-          <a:lstStyle/>
-          <a:p>
-            <a:pPr algn="ctr"/>
-          </a:p>
-        </p:txBody>
-      </p:sp>
-      <p:sp>
-        <p:nvSpPr>
-          <p:cNvPr id="3" name="Rectangle 2"/>
-          <p:cNvSpPr/>
-          <p:nvPr/>
-        </p:nvSpPr>
-        <p:spPr>
-          <a:xfrm>
-            <a:off x="0" y="0"/>
-            <a:ext cx="12191695" cy="777240"/>
-          </a:xfrm>
-          <a:prstGeom prst="rect">
-            <a:avLst/>
-          </a:prstGeom>
-          <a:solidFill>
-            <a:srgbClr val="123A63"/>
-          </a:solidFill>
-          <a:ln>
-            <a:noFill/>
-          </a:ln>
-        </p:spPr>
-        <p:style>
-          <a:lnRef idx="1">
-            <a:schemeClr val="accent1"/>
-          </a:lnRef>
-          <a:fillRef idx="3">
-            <a:schemeClr val="accent1"/>
-          </a:fillRef>
-          <a:effectRef idx="2">
-            <a:schemeClr val="accent1"/>
-          </a:effectRef>
-          <a:fontRef idx="minor">
-            <a:schemeClr val="lt1"/>
-          </a:fontRef>
-        </p:style>
-        <p:txBody>
-          <a:bodyPr rtlCol="0" anchor="ctr" lIns="411480" tIns="54864"/>
-          <a:lstStyle/>
-          <a:p>
-            <a:pPr algn="ctr"/>
-            <a:r>
-              <a:rPr sz="2100" b="1">
-                <a:solidFill>
-                  <a:srgbClr val="FFFFFF"/>
-                </a:solidFill>
-                <a:latin typeface="Microsoft YaHei"/>
-              </a:rPr>
-              <a:t>8 物理机验证与安全容量模型</a:t>
-            </a:r>
-          </a:p>
-          <a:p>
-            <a:r>
-              <a:rPr sz="1200">
-                <a:solidFill>
-                  <a:srgbClr val="D8E2F0"/>
-                </a:solidFill>
-                <a:latin typeface="Microsoft YaHei"/>
-              </a:rPr>
-              <a:t>8.4 安全售卖容量（图 16，核心结果）</a:t>
-            </a:r>
-          </a:p>
-        </p:txBody>
-      </p:sp>
-      <p:sp>
-        <p:nvSpPr>
-          <p:cNvPr id="4" name="TextBox 3"/>
-          <p:cNvSpPr txBox="1"/>
-          <p:nvPr/>
-        </p:nvSpPr>
-        <p:spPr>
-          <a:xfrm>
-            <a:off x="502920" y="914400"/>
-            <a:ext cx="11155680" cy="5486400"/>
-          </a:xfrm>
-          <a:prstGeom prst="rect">
-            <a:avLst/>
-          </a:prstGeom>
-          <a:noFill/>
-        </p:spPr>
-        <p:txBody>
-          <a:bodyPr wrap="square">
-            <a:spAutoFit/>
-          </a:bodyPr>
-          <a:lstStyle/>
-          <a:p>
-            <a:pPr>
-              <a:lnSpc>
-                <a:spcPct val="108000"/>
-              </a:lnSpc>
-              <a:spcAft>
-                <a:spcPts val="400"/>
-              </a:spcAft>
-            </a:pPr>
-            <a:r>
-              <a:rPr sz="1250" b="0">
-                <a:solidFill>
-                  <a:srgbClr val="1C1C1E"/>
-                </a:solidFill>
-                <a:latin typeface="Microsoft YaHei"/>
-              </a:rPr>
-              <a:t>（随机组逐档 P5：L16=100%、L24=88%、L32=62%、L40=65%、L48=51%、L56=50%、L64=43%——渐进劣化；同步组 L8=99%、L12=51%、L16=49%——断崖坍塌，各口径下均迅速触底。）</a:t>
-            </a:r>
-          </a:p>
-          <a:p>
-            <a:pPr>
-              <a:lnSpc>
-                <a:spcPct val="108000"/>
-              </a:lnSpc>
-              <a:spcAft>
-                <a:spcPts val="400"/>
-              </a:spcAft>
-            </a:pPr>
-            <a:r>
-              <a:rPr sz="1250" b="0">
-                <a:solidFill>
-                  <a:srgbClr val="1C1C1E"/>
-                </a:solidFill>
-                <a:latin typeface="Microsoft YaHei"/>
-              </a:rPr>
-              <a:t>四条结论。</a:t>
-            </a:r>
-          </a:p>
-          <a:p>
-            <a:pPr lvl="1">
-              <a:lnSpc>
-                <a:spcPct val="108000"/>
-              </a:lnSpc>
-              <a:spcAft>
-                <a:spcPts val="400"/>
-              </a:spcAft>
-            </a:pPr>
-            <a:r>
-              <a:rPr sz="1200" b="0">
-                <a:solidFill>
-                  <a:srgbClr val="1C1C1E"/>
-                </a:solidFill>
-                <a:latin typeface="Microsoft YaHei"/>
-              </a:rPr>
-              <a:t>• 盲目看平均利用率会灾难性超卖：同步组卖到 32 台时平均忙率仅 ~35%（"池子看起来很空"），</a:t>
-            </a:r>
-          </a:p>
-          <a:p>
-            <a:pPr>
-              <a:lnSpc>
-                <a:spcPct val="108000"/>
-              </a:lnSpc>
-              <a:spcAft>
-                <a:spcPts val="400"/>
-              </a:spcAft>
-            </a:pPr>
-            <a:r>
-              <a:rPr sz="1250" b="0">
-                <a:solidFill>
-                  <a:srgbClr val="1C1C1E"/>
-                </a:solidFill>
-                <a:latin typeface="Microsoft YaHei"/>
-              </a:rPr>
-              <a:t>但每个 burst 窗口客户速率已跌到 25%。基于平均值的准入在真实的"集体定时行为"（备份、扫盘、定时任务）前毫无防线。</a:t>
-            </a:r>
-          </a:p>
-          <a:p>
-            <a:pPr lvl="1">
-              <a:lnSpc>
-                <a:spcPct val="108000"/>
-              </a:lnSpc>
-              <a:spcAft>
-                <a:spcPts val="400"/>
-              </a:spcAft>
-            </a:pPr>
-            <a:r>
-              <a:rPr sz="1200" b="0">
-                <a:solidFill>
-                  <a:srgbClr val="1C1C1E"/>
-                </a:solidFill>
-                <a:latin typeface="Microsoft YaHei"/>
-              </a:rPr>
-              <a:t>• 同样平均负载，容量由相位结构决定：主口径下随机 24 台 vs 同步 8 台（3×）；容量比随质量口径在 2×–5× 间移动</a:t>
-            </a:r>
-          </a:p>
-          <a:p>
-            <a:pPr>
-              <a:lnSpc>
-                <a:spcPct val="108000"/>
-              </a:lnSpc>
-              <a:spcAft>
-                <a:spcPts val="400"/>
-              </a:spcAft>
-            </a:pPr>
-            <a:r>
-              <a:rPr sz="1250" b="0">
-                <a:solidFill>
-                  <a:srgbClr val="1C1C1E"/>
-                </a:solidFill>
-                <a:latin typeface="Microsoft YaHei"/>
-              </a:rPr>
-              <a:t>（中位口径 5×、地板口径 ~5×、严格口径 2×）。报告容量必须同时报告质量口径——"5×"是 P50 口径的数字，"不劣化"应以 P5 口径度量（本节的修正即来自这一原则）。</a:t>
-            </a:r>
-          </a:p>
-          <a:p>
-            <a:pPr lvl="1">
-              <a:lnSpc>
-                <a:spcPct val="108000"/>
-              </a:lnSpc>
-              <a:spcAft>
-                <a:spcPts val="400"/>
-              </a:spcAft>
-            </a:pPr>
-            <a:r>
-              <a:rPr sz="1200" b="0">
-                <a:solidFill>
-                  <a:srgbClr val="1C1C1E"/>
-                </a:solidFill>
-                <a:latin typeface="Microsoft YaHei"/>
-              </a:rPr>
-              <a:t>• 两类失效的形状不同：随机组是渐进劣化（P5 逐档下滑，可预警、可准入控制）；同步组是断崖（99%→49%），</a:t>
-            </a:r>
-          </a:p>
-          <a:p>
-            <a:pPr>
-              <a:lnSpc>
-                <a:spcPct val="108000"/>
-              </a:lnSpc>
-              <a:spcAft>
-                <a:spcPts val="400"/>
-              </a:spcAft>
-            </a:pPr>
-            <a:r>
-              <a:rPr sz="1250" b="0">
-                <a:solidFill>
-                  <a:srgbClr val="1C1C1E"/>
-                </a:solidFill>
-                <a:latin typeface="Microsoft YaHei"/>
-              </a:rPr>
-              <a:t>没有预警窗口——这解释了为什么"监测平均值/中位数"的准入对同步失效免疫失败。</a:t>
-            </a:r>
-          </a:p>
-          <a:p>
-            <a:pPr lvl="1">
-              <a:lnSpc>
-                <a:spcPct val="108000"/>
-              </a:lnSpc>
-              <a:spcAft>
-                <a:spcPts val="400"/>
-              </a:spcAft>
-            </a:pPr>
-            <a:r>
-              <a:rPr sz="1200" b="0">
-                <a:solidFill>
-                  <a:srgbClr val="1C1C1E"/>
-                </a:solidFill>
-                <a:latin typeface="Microsoft YaHei"/>
-              </a:rPr>
-              <a:t>• 隔离把两类伤害解耦：服务侧全程平直（0.7 ms），代价全部显式落在客户侧速率上——</a:t>
-            </a:r>
-          </a:p>
-          <a:p>
-            <a:pPr>
-              <a:lnSpc>
-                <a:spcPct val="108000"/>
-              </a:lnSpc>
-              <a:spcAft>
-                <a:spcPts val="400"/>
-              </a:spcAft>
-            </a:pPr>
-            <a:r>
-              <a:rPr sz="1250" b="0">
-                <a:solidFill>
-                  <a:srgbClr val="1C1C1E"/>
-                </a:solidFill>
-                <a:latin typeface="Microsoft YaHei"/>
-              </a:rPr>
-              <a:t>与第 5 章"代价定价"的框架一致；"经济版"卖的其实就是这个速率衰减的额度。</a:t>
-            </a:r>
-          </a:p>
-        </p:txBody>
-      </p:sp>
-    </p:spTree>
-  </p:cSld>
-  <p:clrMapOvr>
-    <a:masterClrMapping/>
-  </p:clrMapOvr>
-</p:sld>
-</file>
-
 <file path=ppt/slides/slide127.xml><?xml version="1.0" encoding="utf-8"?>
 <p:sld xmlns:a="http://schemas.openxmlformats.org/drawingml/2006/main" xmlns:p="http://schemas.openxmlformats.org/presentationml/2006/main" xmlns:r="http://schemas.openxmlformats.org/officeDocument/2006/relationships">
   <p:cSld>
@@ -10532,7 +10975,7 @@
                 </a:solidFill>
                 <a:latin typeface="Microsoft YaHei"/>
               </a:rPr>
-              <a:t>8.5 容量近似模型：混合相位验证（图 21）</a:t>
+              <a:t>8.4 安全售卖容量（图 16，核心结果）</a:t>
             </a:r>
           </a:p>
         </p:txBody>
@@ -10574,7 +11017,7 @@
                 </a:solidFill>
                 <a:latin typeface="Microsoft YaHei"/>
               </a:rPr>
-              <a:t>模型（明确假设下的近似，非普适定律）。 假设：（A1）各租户相位在决策跨度内稳定；（B）对齐组的突发窗彼此重合、与随机租户的重叠按占空比近似。在该假设下，聚合并发峰 ≈ 对齐组 φ N + 随机组 ρ(1-φ)N，故"峰值不超过池容量"的中位口径容量为N^_mid  ≈  Cφ + (1-φ) ρ,即相位集中度形式 N^_mid = C/(ρκ)、κ = max_b Σ_i p_i(b)/Σ_i ρ_i。该模型刻画平均/中位口径；对纯随机端的 P5 尾部口径显著偏乐观（纯随机端模型给 40，而主口径实测安全容量为 24）。随机端的尾部风险天然由重叠计数的上分位给出：要求 Q_p(φ N + Bin((1-φ)N, ρ)) ≤ C/θ（θ 为体验质量界），数值上低于中位口径；工程上安全值直接取实测口径容量（§8.4 阈值表），模型仅用于跨配比外推与准入控制器的先验。</a:t>
+              <a:t>（随机组逐档 P5：L16=100%、L24=88%、L32=62%、L40=65%、L48=51%、L56=50%、L64=43%——渐进劣化；同步组 L8=99%、L12=51%、L16=49%——断崖坍塌，各口径下均迅速触底。）</a:t>
             </a:r>
           </a:p>
           <a:p>
@@ -10593,7 +11036,159 @@
                 </a:solidFill>
                 <a:latin typeface="Microsoft YaHei"/>
               </a:rPr>
-              <a:t>首轮验证（图 21；8 核池、ρ=0.20，每配比单轮）：</a:t>
+              <a:t>四条结论。</a:t>
+            </a:r>
+          </a:p>
+          <a:p>
+            <a:pPr lvl="1">
+              <a:lnSpc>
+                <a:spcPct val="108000"/>
+              </a:lnSpc>
+              <a:spcAft>
+                <a:spcPts val="400"/>
+              </a:spcAft>
+            </a:pPr>
+            <a:r>
+              <a:rPr sz="1200" b="0">
+                <a:solidFill>
+                  <a:srgbClr val="1C1C1E"/>
+                </a:solidFill>
+                <a:latin typeface="Microsoft YaHei"/>
+              </a:rPr>
+              <a:t>• 盲目看平均利用率会灾难性超卖：同步组卖到 32 台时平均忙率仅 ~35%（"池子看起来很空"），</a:t>
+            </a:r>
+          </a:p>
+          <a:p>
+            <a:pPr>
+              <a:lnSpc>
+                <a:spcPct val="108000"/>
+              </a:lnSpc>
+              <a:spcAft>
+                <a:spcPts val="400"/>
+              </a:spcAft>
+            </a:pPr>
+            <a:r>
+              <a:rPr sz="1250" b="0">
+                <a:solidFill>
+                  <a:srgbClr val="1C1C1E"/>
+                </a:solidFill>
+                <a:latin typeface="Microsoft YaHei"/>
+              </a:rPr>
+              <a:t>但每个 burst 窗口客户速率已跌到 25%。基于平均值的准入在真实的"集体定时行为"（备份、扫盘、定时任务）前毫无防线。</a:t>
+            </a:r>
+          </a:p>
+          <a:p>
+            <a:pPr lvl="1">
+              <a:lnSpc>
+                <a:spcPct val="108000"/>
+              </a:lnSpc>
+              <a:spcAft>
+                <a:spcPts val="400"/>
+              </a:spcAft>
+            </a:pPr>
+            <a:r>
+              <a:rPr sz="1200" b="0">
+                <a:solidFill>
+                  <a:srgbClr val="1C1C1E"/>
+                </a:solidFill>
+                <a:latin typeface="Microsoft YaHei"/>
+              </a:rPr>
+              <a:t>• 同样平均负载，容量由相位结构决定：主口径下随机 24 台 vs 同步 8 台（3×）；容量比随质量口径在 2×–5× 间移动</a:t>
+            </a:r>
+          </a:p>
+          <a:p>
+            <a:pPr>
+              <a:lnSpc>
+                <a:spcPct val="108000"/>
+              </a:lnSpc>
+              <a:spcAft>
+                <a:spcPts val="400"/>
+              </a:spcAft>
+            </a:pPr>
+            <a:r>
+              <a:rPr sz="1250" b="0">
+                <a:solidFill>
+                  <a:srgbClr val="1C1C1E"/>
+                </a:solidFill>
+                <a:latin typeface="Microsoft YaHei"/>
+              </a:rPr>
+              <a:t>（中位口径 5×、地板口径 ~5×、严格口径 2×）。报告容量必须同时报告质量口径——"5×"是 P50 口径的数字，"不劣化"应以 P5 口径度量（本节的修正即来自这一原则）。</a:t>
+            </a:r>
+          </a:p>
+          <a:p>
+            <a:pPr lvl="1">
+              <a:lnSpc>
+                <a:spcPct val="108000"/>
+              </a:lnSpc>
+              <a:spcAft>
+                <a:spcPts val="400"/>
+              </a:spcAft>
+            </a:pPr>
+            <a:r>
+              <a:rPr sz="1200" b="0">
+                <a:solidFill>
+                  <a:srgbClr val="1C1C1E"/>
+                </a:solidFill>
+                <a:latin typeface="Microsoft YaHei"/>
+              </a:rPr>
+              <a:t>• 两类失效的形状不同：随机组是渐进劣化（P5 逐档下滑，可预警、可准入控制）；同步组是断崖（99%→49%），</a:t>
+            </a:r>
+          </a:p>
+          <a:p>
+            <a:pPr>
+              <a:lnSpc>
+                <a:spcPct val="108000"/>
+              </a:lnSpc>
+              <a:spcAft>
+                <a:spcPts val="400"/>
+              </a:spcAft>
+            </a:pPr>
+            <a:r>
+              <a:rPr sz="1250" b="0">
+                <a:solidFill>
+                  <a:srgbClr val="1C1C1E"/>
+                </a:solidFill>
+                <a:latin typeface="Microsoft YaHei"/>
+              </a:rPr>
+              <a:t>没有预警窗口——这解释了为什么"监测平均值/中位数"的准入对同步失效免疫失败。</a:t>
+            </a:r>
+          </a:p>
+          <a:p>
+            <a:pPr lvl="1">
+              <a:lnSpc>
+                <a:spcPct val="108000"/>
+              </a:lnSpc>
+              <a:spcAft>
+                <a:spcPts val="400"/>
+              </a:spcAft>
+            </a:pPr>
+            <a:r>
+              <a:rPr sz="1200" b="0">
+                <a:solidFill>
+                  <a:srgbClr val="1C1C1E"/>
+                </a:solidFill>
+                <a:latin typeface="Microsoft YaHei"/>
+              </a:rPr>
+              <a:t>• 隔离把两类伤害解耦：服务侧全程平直（0.7 ms），代价全部显式落在客户侧速率上——</a:t>
+            </a:r>
+          </a:p>
+          <a:p>
+            <a:pPr>
+              <a:lnSpc>
+                <a:spcPct val="108000"/>
+              </a:lnSpc>
+              <a:spcAft>
+                <a:spcPts val="400"/>
+              </a:spcAft>
+            </a:pPr>
+            <a:r>
+              <a:rPr sz="1250" b="0">
+                <a:solidFill>
+                  <a:srgbClr val="1C1C1E"/>
+                </a:solidFill>
+                <a:latin typeface="Microsoft YaHei"/>
+              </a:rPr>
+              <a:t>与第 5 章"代价定价"的框架一致；"经济版"卖的其实就是这个速率衰减的额度。</a:t>
             </a:r>
           </a:p>
         </p:txBody>
@@ -10706,7 +11301,7 @@
                 </a:solidFill>
                 <a:latin typeface="Microsoft YaHei"/>
               </a:rPr>
-              <a:t>图</a:t>
+              <a:t>8 物理机验证与安全容量模型</a:t>
             </a:r>
           </a:p>
           <a:p>
@@ -10722,40 +11317,16 @@
           </a:p>
         </p:txBody>
       </p:sp>
-      <p:pic>
-        <p:nvPicPr>
-          <p:cNvPr id="4" name="Picture 3" descr="fig21_density_law.png"/>
-          <p:cNvPicPr>
-            <a:picLocks noChangeAspect="1"/>
-          </p:cNvPicPr>
-          <p:nvPr/>
-        </p:nvPicPr>
-        <p:blipFill>
-          <a:blip r:embed="rId2"/>
-          <a:stretch>
-            <a:fillRect/>
-          </a:stretch>
-        </p:blipFill>
-        <p:spPr>
-          <a:xfrm>
-            <a:off x="1737360" y="960120"/>
-            <a:ext cx="8686800" cy="3226526"/>
-          </a:xfrm>
-          <a:prstGeom prst="rect">
-            <a:avLst/>
-          </a:prstGeom>
-        </p:spPr>
-      </p:pic>
-      <p:sp>
-        <p:nvSpPr>
-          <p:cNvPr id="5" name="TextBox 4"/>
+      <p:sp>
+        <p:nvSpPr>
+          <p:cNvPr id="4" name="TextBox 3"/>
           <p:cNvSpPr txBox="1"/>
           <p:nvPr/>
         </p:nvSpPr>
         <p:spPr>
           <a:xfrm>
-            <a:off x="914400" y="4226646"/>
-            <a:ext cx="10332720" cy="548640"/>
+            <a:off x="502920" y="914400"/>
+            <a:ext cx="11155680" cy="5486400"/>
           </a:xfrm>
           <a:prstGeom prst="rect">
             <a:avLst/>
@@ -10763,20 +11334,46 @@
           <a:noFill/>
         </p:spPr>
         <p:txBody>
-          <a:bodyPr wrap="none">
+          <a:bodyPr wrap="square">
             <a:spAutoFit/>
           </a:bodyPr>
           <a:lstStyle/>
           <a:p>
-            <a:pPr algn="ctr"/>
-            <a:r>
-              <a:rPr sz="1100" b="0">
-                <a:solidFill>
-                  <a:srgbClr val="5A6472"/>
-                </a:solidFill>
-                <a:latin typeface="Microsoft YaHei"/>
-              </a:rPr>
-              <a:t>图 21 安全容量近似模型：混合相位首轮验证（φ=0.25/0.50/0.75，单轮）</a:t>
+            <a:pPr>
+              <a:lnSpc>
+                <a:spcPct val="108000"/>
+              </a:lnSpc>
+              <a:spcAft>
+                <a:spcPts val="400"/>
+              </a:spcAft>
+            </a:pPr>
+            <a:r>
+              <a:rPr sz="1250" b="0">
+                <a:solidFill>
+                  <a:srgbClr val="1C1C1E"/>
+                </a:solidFill>
+                <a:latin typeface="Microsoft YaHei"/>
+              </a:rPr>
+              <a:t>模型（明确假设下的近似，非普适定律）。 假设：（A1）各租户相位在决策跨度内稳定；（B）对齐组的突发窗彼此重合、与随机租户的重叠按占空比近似。在该假设下，聚合并发峰 ≈ 对齐组 φ N + 随机组 ρ(1-φ)N，故"峰值不超过池容量"的中位口径容量为N^_mid  ≈  Cφ + (1-φ) ρ,即相位集中度形式 N^_mid = C/(ρκ)、κ = max_b Σ_i p_i(b)/Σ_i ρ_i。该模型刻画平均/中位口径；对纯随机端的 P5 尾部口径显著偏乐观（纯随机端模型给 40，而主口径实测安全容量为 24）。随机端的尾部风险天然由重叠计数的上分位给出：要求 Q_p(φ N + Bin((1-φ)N, ρ)) ≤ C/θ（θ 为体验质量界），数值上低于中位口径；工程上安全值直接取实测口径容量（§8.4 阈值表），模型仅用于跨配比外推与准入控制器的先验。</a:t>
+            </a:r>
+          </a:p>
+          <a:p>
+            <a:pPr>
+              <a:lnSpc>
+                <a:spcPct val="108000"/>
+              </a:lnSpc>
+              <a:spcAft>
+                <a:spcPts val="400"/>
+              </a:spcAft>
+            </a:pPr>
+            <a:r>
+              <a:rPr sz="1250" b="0">
+                <a:solidFill>
+                  <a:srgbClr val="1C1C1E"/>
+                </a:solidFill>
+                <a:latin typeface="Microsoft YaHei"/>
+              </a:rPr>
+              <a:t>首轮验证（图 21；8 核池、ρ=0.20，每配比单轮）：</a:t>
             </a:r>
           </a:p>
         </p:txBody>
@@ -10889,6 +11486,355 @@
                 </a:solidFill>
                 <a:latin typeface="Microsoft YaHei"/>
               </a:rPr>
+              <a:t>图</a:t>
+            </a:r>
+          </a:p>
+          <a:p>
+            <a:r>
+              <a:rPr sz="1200">
+                <a:solidFill>
+                  <a:srgbClr val="D8E2F0"/>
+                </a:solidFill>
+                <a:latin typeface="Microsoft YaHei"/>
+              </a:rPr>
+              <a:t>8.5 容量近似模型：混合相位验证（图 21）</a:t>
+            </a:r>
+          </a:p>
+        </p:txBody>
+      </p:sp>
+      <p:pic>
+        <p:nvPicPr>
+          <p:cNvPr id="4" name="Picture 3" descr="fig21_density_law.png"/>
+          <p:cNvPicPr>
+            <a:picLocks noChangeAspect="1"/>
+          </p:cNvPicPr>
+          <p:nvPr/>
+        </p:nvPicPr>
+        <p:blipFill>
+          <a:blip r:embed="rId2"/>
+          <a:stretch>
+            <a:fillRect/>
+          </a:stretch>
+        </p:blipFill>
+        <p:spPr>
+          <a:xfrm>
+            <a:off x="1737360" y="960120"/>
+            <a:ext cx="8686800" cy="3226526"/>
+          </a:xfrm>
+          <a:prstGeom prst="rect">
+            <a:avLst/>
+          </a:prstGeom>
+        </p:spPr>
+      </p:pic>
+      <p:sp>
+        <p:nvSpPr>
+          <p:cNvPr id="5" name="TextBox 4"/>
+          <p:cNvSpPr txBox="1"/>
+          <p:nvPr/>
+        </p:nvSpPr>
+        <p:spPr>
+          <a:xfrm>
+            <a:off x="914400" y="4226646"/>
+            <a:ext cx="10332720" cy="548640"/>
+          </a:xfrm>
+          <a:prstGeom prst="rect">
+            <a:avLst/>
+          </a:prstGeom>
+          <a:noFill/>
+        </p:spPr>
+        <p:txBody>
+          <a:bodyPr wrap="none">
+            <a:spAutoFit/>
+          </a:bodyPr>
+          <a:lstStyle/>
+          <a:p>
+            <a:pPr algn="ctr"/>
+            <a:r>
+              <a:rPr sz="1100" b="0">
+                <a:solidFill>
+                  <a:srgbClr val="5A6472"/>
+                </a:solidFill>
+                <a:latin typeface="Microsoft YaHei"/>
+              </a:rPr>
+              <a:t>图 21 安全容量近似模型：混合相位首轮验证（φ=0.25/0.50/0.75，单轮）</a:t>
+            </a:r>
+          </a:p>
+        </p:txBody>
+      </p:sp>
+    </p:spTree>
+  </p:cSld>
+  <p:clrMapOvr>
+    <a:masterClrMapping/>
+  </p:clrMapOvr>
+</p:sld>
+</file>
+
+<file path=ppt/slides/slide13.xml><?xml version="1.0" encoding="utf-8"?>
+<p:sld xmlns:a="http://schemas.openxmlformats.org/drawingml/2006/main" xmlns:p="http://schemas.openxmlformats.org/presentationml/2006/main" xmlns:r="http://schemas.openxmlformats.org/officeDocument/2006/relationships">
+  <p:cSld>
+    <p:spTree>
+      <p:nvGrpSpPr>
+        <p:cNvPr id="1" name=""/>
+        <p:cNvGrpSpPr/>
+        <p:nvPr/>
+      </p:nvGrpSpPr>
+      <p:grpSpPr/>
+      <p:sp>
+        <p:nvSpPr>
+          <p:cNvPr id="2" name="Rectangle 1"/>
+          <p:cNvSpPr/>
+          <p:nvPr/>
+        </p:nvSpPr>
+        <p:spPr>
+          <a:xfrm>
+            <a:off x="0" y="0"/>
+            <a:ext cx="12191695" cy="6858000"/>
+          </a:xfrm>
+          <a:prstGeom prst="rect">
+            <a:avLst/>
+          </a:prstGeom>
+          <a:solidFill>
+            <a:srgbClr val="FFFFFF"/>
+          </a:solidFill>
+          <a:ln>
+            <a:noFill/>
+          </a:ln>
+        </p:spPr>
+        <p:style>
+          <a:lnRef idx="1">
+            <a:schemeClr val="accent1"/>
+          </a:lnRef>
+          <a:fillRef idx="3">
+            <a:schemeClr val="accent1"/>
+          </a:fillRef>
+          <a:effectRef idx="2">
+            <a:schemeClr val="accent1"/>
+          </a:effectRef>
+          <a:fontRef idx="minor">
+            <a:schemeClr val="lt1"/>
+          </a:fontRef>
+        </p:style>
+        <p:txBody>
+          <a:bodyPr rtlCol="0" anchor="ctr"/>
+          <a:lstStyle/>
+          <a:p>
+            <a:pPr algn="ctr"/>
+          </a:p>
+        </p:txBody>
+      </p:sp>
+      <p:sp>
+        <p:nvSpPr>
+          <p:cNvPr id="3" name="Rectangle 2"/>
+          <p:cNvSpPr/>
+          <p:nvPr/>
+        </p:nvSpPr>
+        <p:spPr>
+          <a:xfrm>
+            <a:off x="0" y="0"/>
+            <a:ext cx="12191695" cy="777240"/>
+          </a:xfrm>
+          <a:prstGeom prst="rect">
+            <a:avLst/>
+          </a:prstGeom>
+          <a:solidFill>
+            <a:srgbClr val="123A63"/>
+          </a:solidFill>
+          <a:ln>
+            <a:noFill/>
+          </a:ln>
+        </p:spPr>
+        <p:style>
+          <a:lnRef idx="1">
+            <a:schemeClr val="accent1"/>
+          </a:lnRef>
+          <a:fillRef idx="3">
+            <a:schemeClr val="accent1"/>
+          </a:fillRef>
+          <a:effectRef idx="2">
+            <a:schemeClr val="accent1"/>
+          </a:effectRef>
+          <a:fontRef idx="minor">
+            <a:schemeClr val="lt1"/>
+          </a:fontRef>
+        </p:style>
+        <p:txBody>
+          <a:bodyPr rtlCol="0" anchor="ctr" lIns="411480" tIns="54864"/>
+          <a:lstStyle/>
+          <a:p>
+            <a:pPr algn="ctr"/>
+            <a:r>
+              <a:rPr sz="2100" b="1">
+                <a:solidFill>
+                  <a:srgbClr val="FFFFFF"/>
+                </a:solidFill>
+                <a:latin typeface="Microsoft YaHei"/>
+              </a:rPr>
+              <a:t>2 相关工作</a:t>
+            </a:r>
+          </a:p>
+          <a:p>
+            <a:r>
+              <a:rPr sz="1200">
+                <a:solidFill>
+                  <a:srgbClr val="D8E2F0"/>
+                </a:solidFill>
+                <a:latin typeface="Microsoft YaHei"/>
+              </a:rPr>
+              <a:t>2.3 工业实践与工具</a:t>
+            </a:r>
+          </a:p>
+        </p:txBody>
+      </p:sp>
+      <p:sp>
+        <p:nvSpPr>
+          <p:cNvPr id="4" name="TextBox 3"/>
+          <p:cNvSpPr txBox="1"/>
+          <p:nvPr/>
+        </p:nvSpPr>
+        <p:spPr>
+          <a:xfrm>
+            <a:off x="502920" y="914400"/>
+            <a:ext cx="11155680" cy="5486400"/>
+          </a:xfrm>
+          <a:prstGeom prst="rect">
+            <a:avLst/>
+          </a:prstGeom>
+          <a:noFill/>
+        </p:spPr>
+        <p:txBody>
+          <a:bodyPr wrap="square">
+            <a:spAutoFit/>
+          </a:bodyPr>
+          <a:lstStyle/>
+          <a:p>
+            <a:pPr>
+              <a:lnSpc>
+                <a:spcPct val="108000"/>
+              </a:lnSpc>
+              <a:spcAft>
+                <a:spcPts val="400"/>
+              </a:spcAft>
+            </a:pPr>
+            <a:r>
+              <a:rPr sz="1250" b="0">
+                <a:solidFill>
+                  <a:srgbClr val="1C1C1E"/>
+                </a:solidFill>
+                <a:latin typeface="Microsoft YaHei"/>
+              </a:rPr>
+              <a:t>Kubernetes 生态以"超售类别"方式表达差异化策略：Inditex 的 k8s-overcommit-operator [11] 按标签给不同工作负载折算资源请求，OpenShift 的 ClusterResourceOverride [12] 通过 request/limit 比例控制节点密度；KubeVirt [13] 提供全局 cpuAllocationRatio，社区提出"每 VM 自定义超售比"的需求（issue #15710，2025-09 提出、2026-02 因未实现关闭），说明按客户分级的超售在真实运营中尚未被良好支持。学术原型 SweetSpotVM/SlackVM [14] 给出"每 VM 多级超售模板 + 本地调度器"的形态；Calabi [15] 的宿主资源管理实践则以 Gold/Silver/Bronze 分层 slice、guest/emulator 分池绑核以及 KSM/zram 内存压缩为组合。本文与这些实践的关系是"证据补足"：分层模板与分级售卖的思想一致，但我们用量化对照说明每种手段的可靠边界——例如内存路径上，压缩/换出恰是被本文要求"默认关闭"的故障路径（无限制时客户被 OOM 杀死、受限时 swap 被耗尽），而"memory.high + memory.swap.max=0"的双闸能在不杀客户、不污染宿主的前提下截断超用。在内存路径上，ORCA [23] 把整合预测与内存超售结合并给出生产部署验证，其"密度—回归"权衡与本文互补。</a:t>
+            </a:r>
+          </a:p>
+        </p:txBody>
+      </p:sp>
+    </p:spTree>
+  </p:cSld>
+  <p:clrMapOvr>
+    <a:masterClrMapping/>
+  </p:clrMapOvr>
+</p:sld>
+</file>
+
+<file path=ppt/slides/slide130.xml><?xml version="1.0" encoding="utf-8"?>
+<p:sld xmlns:a="http://schemas.openxmlformats.org/drawingml/2006/main" xmlns:p="http://schemas.openxmlformats.org/presentationml/2006/main" xmlns:r="http://schemas.openxmlformats.org/officeDocument/2006/relationships">
+  <p:cSld>
+    <p:spTree>
+      <p:nvGrpSpPr>
+        <p:cNvPr id="1" name=""/>
+        <p:cNvGrpSpPr/>
+        <p:nvPr/>
+      </p:nvGrpSpPr>
+      <p:grpSpPr/>
+      <p:sp>
+        <p:nvSpPr>
+          <p:cNvPr id="2" name="Rectangle 1"/>
+          <p:cNvSpPr/>
+          <p:nvPr/>
+        </p:nvSpPr>
+        <p:spPr>
+          <a:xfrm>
+            <a:off x="0" y="0"/>
+            <a:ext cx="12191695" cy="6858000"/>
+          </a:xfrm>
+          <a:prstGeom prst="rect">
+            <a:avLst/>
+          </a:prstGeom>
+          <a:solidFill>
+            <a:srgbClr val="FFFFFF"/>
+          </a:solidFill>
+          <a:ln>
+            <a:noFill/>
+          </a:ln>
+        </p:spPr>
+        <p:style>
+          <a:lnRef idx="1">
+            <a:schemeClr val="accent1"/>
+          </a:lnRef>
+          <a:fillRef idx="3">
+            <a:schemeClr val="accent1"/>
+          </a:fillRef>
+          <a:effectRef idx="2">
+            <a:schemeClr val="accent1"/>
+          </a:effectRef>
+          <a:fontRef idx="minor">
+            <a:schemeClr val="lt1"/>
+          </a:fontRef>
+        </p:style>
+        <p:txBody>
+          <a:bodyPr rtlCol="0" anchor="ctr"/>
+          <a:lstStyle/>
+          <a:p>
+            <a:pPr algn="ctr"/>
+          </a:p>
+        </p:txBody>
+      </p:sp>
+      <p:sp>
+        <p:nvSpPr>
+          <p:cNvPr id="3" name="Rectangle 2"/>
+          <p:cNvSpPr/>
+          <p:nvPr/>
+        </p:nvSpPr>
+        <p:spPr>
+          <a:xfrm>
+            <a:off x="0" y="0"/>
+            <a:ext cx="12191695" cy="777240"/>
+          </a:xfrm>
+          <a:prstGeom prst="rect">
+            <a:avLst/>
+          </a:prstGeom>
+          <a:solidFill>
+            <a:srgbClr val="123A63"/>
+          </a:solidFill>
+          <a:ln>
+            <a:noFill/>
+          </a:ln>
+        </p:spPr>
+        <p:style>
+          <a:lnRef idx="1">
+            <a:schemeClr val="accent1"/>
+          </a:lnRef>
+          <a:fillRef idx="3">
+            <a:schemeClr val="accent1"/>
+          </a:fillRef>
+          <a:effectRef idx="2">
+            <a:schemeClr val="accent1"/>
+          </a:effectRef>
+          <a:fontRef idx="minor">
+            <a:schemeClr val="lt1"/>
+          </a:fontRef>
+        </p:style>
+        <p:txBody>
+          <a:bodyPr rtlCol="0" anchor="ctr" lIns="411480" tIns="54864"/>
+          <a:lstStyle/>
+          <a:p>
+            <a:pPr algn="ctr"/>
+            <a:r>
+              <a:rPr sz="2100" b="1">
+                <a:solidFill>
+                  <a:srgbClr val="FFFFFF"/>
+                </a:solidFill>
+                <a:latin typeface="Microsoft YaHei"/>
+              </a:rPr>
               <a:t>8 物理机验证与安全容量模型</a:t>
             </a:r>
           </a:p>
@@ -11253,357 +12199,6 @@
 </p:sld>
 </file>
 
-<file path=ppt/slides/slide13.xml><?xml version="1.0" encoding="utf-8"?>
-<p:sld xmlns:a="http://schemas.openxmlformats.org/drawingml/2006/main" xmlns:p="http://schemas.openxmlformats.org/presentationml/2006/main" xmlns:r="http://schemas.openxmlformats.org/officeDocument/2006/relationships">
-  <p:cSld>
-    <p:spTree>
-      <p:nvGrpSpPr>
-        <p:cNvPr id="1" name=""/>
-        <p:cNvGrpSpPr/>
-        <p:nvPr/>
-      </p:nvGrpSpPr>
-      <p:grpSpPr/>
-      <p:sp>
-        <p:nvSpPr>
-          <p:cNvPr id="2" name="Rectangle 1"/>
-          <p:cNvSpPr/>
-          <p:nvPr/>
-        </p:nvSpPr>
-        <p:spPr>
-          <a:xfrm>
-            <a:off x="0" y="0"/>
-            <a:ext cx="12191695" cy="6858000"/>
-          </a:xfrm>
-          <a:prstGeom prst="rect">
-            <a:avLst/>
-          </a:prstGeom>
-          <a:solidFill>
-            <a:srgbClr val="FFFFFF"/>
-          </a:solidFill>
-          <a:ln>
-            <a:noFill/>
-          </a:ln>
-        </p:spPr>
-        <p:style>
-          <a:lnRef idx="1">
-            <a:schemeClr val="accent1"/>
-          </a:lnRef>
-          <a:fillRef idx="3">
-            <a:schemeClr val="accent1"/>
-          </a:fillRef>
-          <a:effectRef idx="2">
-            <a:schemeClr val="accent1"/>
-          </a:effectRef>
-          <a:fontRef idx="minor">
-            <a:schemeClr val="lt1"/>
-          </a:fontRef>
-        </p:style>
-        <p:txBody>
-          <a:bodyPr rtlCol="0" anchor="ctr"/>
-          <a:lstStyle/>
-          <a:p>
-            <a:pPr algn="ctr"/>
-          </a:p>
-        </p:txBody>
-      </p:sp>
-      <p:sp>
-        <p:nvSpPr>
-          <p:cNvPr id="3" name="Rectangle 2"/>
-          <p:cNvSpPr/>
-          <p:nvPr/>
-        </p:nvSpPr>
-        <p:spPr>
-          <a:xfrm>
-            <a:off x="0" y="0"/>
-            <a:ext cx="12191695" cy="777240"/>
-          </a:xfrm>
-          <a:prstGeom prst="rect">
-            <a:avLst/>
-          </a:prstGeom>
-          <a:solidFill>
-            <a:srgbClr val="123A63"/>
-          </a:solidFill>
-          <a:ln>
-            <a:noFill/>
-          </a:ln>
-        </p:spPr>
-        <p:style>
-          <a:lnRef idx="1">
-            <a:schemeClr val="accent1"/>
-          </a:lnRef>
-          <a:fillRef idx="3">
-            <a:schemeClr val="accent1"/>
-          </a:fillRef>
-          <a:effectRef idx="2">
-            <a:schemeClr val="accent1"/>
-          </a:effectRef>
-          <a:fontRef idx="minor">
-            <a:schemeClr val="lt1"/>
-          </a:fontRef>
-        </p:style>
-        <p:txBody>
-          <a:bodyPr rtlCol="0" anchor="ctr" lIns="411480" tIns="54864"/>
-          <a:lstStyle/>
-          <a:p>
-            <a:pPr algn="ctr"/>
-            <a:r>
-              <a:rPr sz="2100" b="1">
-                <a:solidFill>
-                  <a:srgbClr val="FFFFFF"/>
-                </a:solidFill>
-                <a:latin typeface="Microsoft YaHei"/>
-              </a:rPr>
-              <a:t>2 相关工作</a:t>
-            </a:r>
-          </a:p>
-          <a:p>
-            <a:r>
-              <a:rPr sz="1200">
-                <a:solidFill>
-                  <a:srgbClr val="D8E2F0"/>
-                </a:solidFill>
-                <a:latin typeface="Microsoft YaHei"/>
-              </a:rPr>
-              <a:t>2.3 工业实践与工具</a:t>
-            </a:r>
-          </a:p>
-        </p:txBody>
-      </p:sp>
-      <p:sp>
-        <p:nvSpPr>
-          <p:cNvPr id="4" name="TextBox 3"/>
-          <p:cNvSpPr txBox="1"/>
-          <p:nvPr/>
-        </p:nvSpPr>
-        <p:spPr>
-          <a:xfrm>
-            <a:off x="502920" y="914400"/>
-            <a:ext cx="11155680" cy="5486400"/>
-          </a:xfrm>
-          <a:prstGeom prst="rect">
-            <a:avLst/>
-          </a:prstGeom>
-          <a:noFill/>
-        </p:spPr>
-        <p:txBody>
-          <a:bodyPr wrap="square">
-            <a:spAutoFit/>
-          </a:bodyPr>
-          <a:lstStyle/>
-          <a:p>
-            <a:pPr>
-              <a:lnSpc>
-                <a:spcPct val="108000"/>
-              </a:lnSpc>
-              <a:spcAft>
-                <a:spcPts val="400"/>
-              </a:spcAft>
-            </a:pPr>
-            <a:r>
-              <a:rPr sz="1250" b="0">
-                <a:solidFill>
-                  <a:srgbClr val="1C1C1E"/>
-                </a:solidFill>
-                <a:latin typeface="Microsoft YaHei"/>
-              </a:rPr>
-              <a:t>Kubernetes 生态以"超售类别"方式表达差异化策略：Inditex 的 k8s-overcommit-operator [11] 按标签给不同工作负载折算资源请求，OpenShift 的 ClusterResourceOverride [12] 通过 request/limit 比例控制节点密度；KubeVirt [13] 提供全局 cpuAllocationRatio，社区提出"每 VM 自定义超售比"的需求（issue #15710，2025-09 提出、2026-02 因未实现关闭），说明按客户分级的超售在真实运营中尚未被良好支持。学术原型 SweetSpotVM/SlackVM [14] 给出"每 VM 多级超售模板 + 本地调度器"的形态；Calabi [15] 的宿主资源管理实践则以 Gold/Silver/Bronze 分层 slice、guest/emulator 分池绑核以及 KSM/zram 内存压缩为组合。本文与这些实践的关系是"证据补足"：分层模板与分级售卖的思想一致，但我们用量化对照说明每种手段的可靠边界——例如内存路径上，压缩/换出恰是被本文要求"默认关闭"的故障路径（无限制时客户被 OOM 杀死、受限时 swap 被耗尽），而"memory.high + memory.swap.max=0"的双闸能在不杀客户、不污染宿主的前提下截断超用。在内存路径上，ORCA [23] 把整合预测与内存超售结合并给出生产部署验证，其"密度—回归"权衡与本文互补。</a:t>
-            </a:r>
-          </a:p>
-        </p:txBody>
-      </p:sp>
-    </p:spTree>
-  </p:cSld>
-  <p:clrMapOvr>
-    <a:masterClrMapping/>
-  </p:clrMapOvr>
-</p:sld>
-</file>
-
-<file path=ppt/slides/slide130.xml><?xml version="1.0" encoding="utf-8"?>
-<p:sld xmlns:a="http://schemas.openxmlformats.org/drawingml/2006/main" xmlns:p="http://schemas.openxmlformats.org/presentationml/2006/main" xmlns:r="http://schemas.openxmlformats.org/officeDocument/2006/relationships">
-  <p:cSld>
-    <p:spTree>
-      <p:nvGrpSpPr>
-        <p:cNvPr id="1" name=""/>
-        <p:cNvGrpSpPr/>
-        <p:nvPr/>
-      </p:nvGrpSpPr>
-      <p:grpSpPr/>
-      <p:sp>
-        <p:nvSpPr>
-          <p:cNvPr id="2" name="Rectangle 1"/>
-          <p:cNvSpPr/>
-          <p:nvPr/>
-        </p:nvSpPr>
-        <p:spPr>
-          <a:xfrm>
-            <a:off x="0" y="0"/>
-            <a:ext cx="12191695" cy="6858000"/>
-          </a:xfrm>
-          <a:prstGeom prst="rect">
-            <a:avLst/>
-          </a:prstGeom>
-          <a:solidFill>
-            <a:srgbClr val="FFFFFF"/>
-          </a:solidFill>
-          <a:ln>
-            <a:noFill/>
-          </a:ln>
-        </p:spPr>
-        <p:style>
-          <a:lnRef idx="1">
-            <a:schemeClr val="accent1"/>
-          </a:lnRef>
-          <a:fillRef idx="3">
-            <a:schemeClr val="accent1"/>
-          </a:fillRef>
-          <a:effectRef idx="2">
-            <a:schemeClr val="accent1"/>
-          </a:effectRef>
-          <a:fontRef idx="minor">
-            <a:schemeClr val="lt1"/>
-          </a:fontRef>
-        </p:style>
-        <p:txBody>
-          <a:bodyPr rtlCol="0" anchor="ctr"/>
-          <a:lstStyle/>
-          <a:p>
-            <a:pPr algn="ctr"/>
-          </a:p>
-        </p:txBody>
-      </p:sp>
-      <p:sp>
-        <p:nvSpPr>
-          <p:cNvPr id="3" name="Rectangle 2"/>
-          <p:cNvSpPr/>
-          <p:nvPr/>
-        </p:nvSpPr>
-        <p:spPr>
-          <a:xfrm>
-            <a:off x="0" y="0"/>
-            <a:ext cx="12191695" cy="777240"/>
-          </a:xfrm>
-          <a:prstGeom prst="rect">
-            <a:avLst/>
-          </a:prstGeom>
-          <a:solidFill>
-            <a:srgbClr val="123A63"/>
-          </a:solidFill>
-          <a:ln>
-            <a:noFill/>
-          </a:ln>
-        </p:spPr>
-        <p:style>
-          <a:lnRef idx="1">
-            <a:schemeClr val="accent1"/>
-          </a:lnRef>
-          <a:fillRef idx="3">
-            <a:schemeClr val="accent1"/>
-          </a:fillRef>
-          <a:effectRef idx="2">
-            <a:schemeClr val="accent1"/>
-          </a:effectRef>
-          <a:fontRef idx="minor">
-            <a:schemeClr val="lt1"/>
-          </a:fontRef>
-        </p:style>
-        <p:txBody>
-          <a:bodyPr rtlCol="0" anchor="ctr" lIns="411480" tIns="54864"/>
-          <a:lstStyle/>
-          <a:p>
-            <a:pPr algn="ctr"/>
-            <a:r>
-              <a:rPr sz="2100" b="1">
-                <a:solidFill>
-                  <a:srgbClr val="FFFFFF"/>
-                </a:solidFill>
-                <a:latin typeface="Microsoft YaHei"/>
-              </a:rPr>
-              <a:t>8 物理机验证与安全容量模型</a:t>
-            </a:r>
-          </a:p>
-          <a:p>
-            <a:r>
-              <a:rPr sz="1200">
-                <a:solidFill>
-                  <a:srgbClr val="D8E2F0"/>
-                </a:solidFill>
-                <a:latin typeface="Microsoft YaHei"/>
-              </a:rPr>
-              <a:t>8.5 容量近似模型：混合相位验证（图 21）</a:t>
-            </a:r>
-          </a:p>
-        </p:txBody>
-      </p:sp>
-      <p:sp>
-        <p:nvSpPr>
-          <p:cNvPr id="4" name="TextBox 3"/>
-          <p:cNvSpPr txBox="1"/>
-          <p:nvPr/>
-        </p:nvSpPr>
-        <p:spPr>
-          <a:xfrm>
-            <a:off x="502920" y="914400"/>
-            <a:ext cx="11155680" cy="5486400"/>
-          </a:xfrm>
-          <a:prstGeom prst="rect">
-            <a:avLst/>
-          </a:prstGeom>
-          <a:noFill/>
-        </p:spPr>
-        <p:txBody>
-          <a:bodyPr wrap="square">
-            <a:spAutoFit/>
-          </a:bodyPr>
-          <a:lstStyle/>
-          <a:p>
-            <a:pPr>
-              <a:lnSpc>
-                <a:spcPct val="108000"/>
-              </a:lnSpc>
-              <a:spcAft>
-                <a:spcPts val="400"/>
-              </a:spcAft>
-            </a:pPr>
-            <a:r>
-              <a:rPr sz="1250" b="0">
-                <a:solidFill>
-                  <a:srgbClr val="1C1C1E"/>
-                </a:solidFill>
-                <a:latin typeface="Microsoft YaHei"/>
-              </a:rPr>
-              <a:t>结构性相位（φ ≥ 0.5）两点命中；φ=0.25 的预测点落在通过区内（预测偏保守），纯随机端偏乐观——误差方向与"尾部口径 vs 中位口径"的预期一致。</a:t>
-            </a:r>
-          </a:p>
-          <a:p>
-            <a:pPr>
-              <a:lnSpc>
-                <a:spcPct val="108000"/>
-              </a:lnSpc>
-              <a:spcAft>
-                <a:spcPts val="400"/>
-              </a:spcAft>
-            </a:pPr>
-            <a:r>
-              <a:rPr sz="1250" b="0">
-                <a:solidFill>
-                  <a:srgbClr val="1C1C1E"/>
-                </a:solidFill>
-                <a:latin typeface="Microsoft YaHei"/>
-              </a:rPr>
-              <a:t>诚实边界。 （i）每配比目前单轮，p5 存在非单调采样噪声（如 φ=0.25 的 L24 反高于 L20）；轮次复现（多轮、多随机种子）与"模型预测 vs 实测"的误差分布验证正在队列中，完成后本节将报告轮级区间与预测误差带。（ii）C5 反相编排（干预级证据，已完成）：同批客户、同占空比，仅改相位编排——16 台同相 P5=50%（坍塌）；16 台分两组相差 30 s P5=101%（×2）；32 台分四组（0/15/30/45 s）P5=101%（×4）；两组的 32 台与四组的 64 台对照均为 50%；窗口相位校验 8/8 组命中。（iii）本节的定位是带明确假设的容量近似模型：结构性相位下用于外推与准入先验，安全值以实测口径为准——不主张普适定律。</a:t>
-            </a:r>
-          </a:p>
-        </p:txBody>
-      </p:sp>
-    </p:spTree>
-  </p:cSld>
-  <p:clrMapOvr>
-    <a:masterClrMapping/>
-  </p:clrMapOvr>
-</p:sld>
-</file>
-
 <file path=ppt/slides/slide131.xml><?xml version="1.0" encoding="utf-8"?>
 <p:sld xmlns:a="http://schemas.openxmlformats.org/drawingml/2006/main" xmlns:p="http://schemas.openxmlformats.org/presentationml/2006/main" xmlns:r="http://schemas.openxmlformats.org/officeDocument/2006/relationships">
   <p:cSld>
@@ -11715,7 +12310,7 @@
                 </a:solidFill>
                 <a:latin typeface="Microsoft YaHei"/>
               </a:rPr>
-              <a:t>8.6 相位剖面卷积与"边际幻觉"命题（图 28）</a:t>
+              <a:t>8.5 容量近似模型：混合相位验证（图 21）</a:t>
             </a:r>
           </a:p>
         </p:txBody>
@@ -11757,7 +12352,7 @@
                 </a:solidFill>
                 <a:latin typeface="Microsoft YaHei"/>
               </a:rPr>
-              <a:t>命题（边际幻觉 / Marginal Illusion）。 §8.4 的两次实验直接给出构造性证明：两组客户每台的用量边际分布完全相同（同一 burner、同一 20%/60 s 占空比与相同繁忙段形状），但随机相位组与对齐相位组在主口径（P5≥70%）下的安全容量为 24 vs 8（中位口径 40 vs 8）。因此：任何只依赖逐租户边际统计（以及独立性假设）的容量方法，都无法区分这两组——对"对边际分布做独立卷积"的一类方法（AUDIBLE 式 [1]），这是可证明的盲区：它们的输入在两组的差异上不可辨识。这是 3.3.1 非可辨识性结论（需求估计）的容量版本（安全容量估计）。</a:t>
+              <a:t>结构性相位（φ ≥ 0.5）两点命中；φ=0.25 的预测点落在通过区内（预测偏保守），纯随机端偏乐观——误差方向与"尾部口径 vs 中位口径"的预期一致。</a:t>
             </a:r>
           </a:p>
           <a:p>
@@ -11776,26 +12371,7 @@
                 </a:solidFill>
                 <a:latin typeface="Microsoft YaHei"/>
               </a:rPr>
-              <a:t>方法（PPC，相位剖面卷积）。 输入：候选集合的逐租户相位剖面 p_i(b)（1 秒分辨率）。PPC 的保相关性重采样分两档实现：</a:t>
-            </a:r>
-          </a:p>
-          <a:p>
-            <a:pPr>
-              <a:lnSpc>
-                <a:spcPct val="108000"/>
-              </a:lnSpc>
-              <a:spcAft>
-                <a:spcPts val="400"/>
-              </a:spcAft>
-            </a:pPr>
-            <a:r>
-              <a:rPr sz="1250" b="0">
-                <a:solidFill>
-                  <a:srgbClr val="1C1C1E"/>
-                </a:solidFill>
-                <a:latin typeface="Microsoft YaHei"/>
-              </a:rPr>
-              <a:t>算法 P（PPC 容量预测；输入：候选集 X（含逐租户 1 s 活跃序列）、池容量 C、质量分位 θ、重采样次数 R）1  档案化：对每台 i 维护活跃指示 aᵢ(t)（1 s）；结构相位（对齐/定时）直接从历史取相位，不做随机化2  相关保留重采样（二选一，按数据来源）：(a) 参数化相位模型：对齐租户共享固定偏移（零方差）；随机租户偏移 ~ U[0,P) 独立采样—— 仅用于“按配置生成的”负载（如混合相位阶梯）；同步关系由构造保证(b) 联合块自助（经验舰队）：对所有租户使用同一组时间块（块长 B·1 s，块内原序保留）重采样 —— 同时刻的跨租户相关性被块结构保留；禁止逐租户独立平移（那正是 iid 卷积的假设，会把同步结构洗掉）3  对每个重采样：A(b) ← Σᵢ aᵢ(b)；peak_r ← max_b A(b)；体验分位由 C/max(1,A) 逐租户聚合4  输出：P(peak&gt; C)、容量 N*(θ, ε) = max N s.t. Q_1-ε(peak) ≤ C/θ复杂度：O(R · N · P)，R=10³、N=64、P=60 s 时 ~4×10⁶ 次布尔运算（毫秒级）。</a:t>
+              <a:t>诚实边界。 （i）每配比目前单轮，p5 存在非单调采样噪声（如 φ=0.25 的 L24 反高于 L20）；轮次复现（多轮、多随机种子）与"模型预测 vs 实测"的误差分布验证正在队列中，完成后本节将报告轮级区间与预测误差带。（ii）C5 反相编排（干预级证据，已完成）：同批客户、同占空比，仅改相位编排——16 台同相 P5=50%（坍塌）；16 台分两组相差 30 s P5=101%（×2）；32 台分四组（0/15/30/45 s）P5=101%（×4）；两组的 32 台与四组的 64 台对照均为 50%；窗口相位校验 8/8 组命中。（iii）本节的定位是带明确假设的容量近似模型：结构性相位下用于外推与准入先验，安全值以实测口径为准——不主张普适定律。</a:t>
             </a:r>
           </a:p>
         </p:txBody>
@@ -11908,7 +12484,7 @@
                 </a:solidFill>
                 <a:latin typeface="Microsoft YaHei"/>
               </a:rPr>
-              <a:t>图</a:t>
+              <a:t>8 物理机验证与安全容量模型</a:t>
             </a:r>
           </a:p>
           <a:p>
@@ -11924,40 +12500,16 @@
           </a:p>
         </p:txBody>
       </p:sp>
-      <p:pic>
-        <p:nvPicPr>
-          <p:cNvPr id="4" name="Picture 3" descr="fig28_ppc.png"/>
-          <p:cNvPicPr>
-            <a:picLocks noChangeAspect="1"/>
-          </p:cNvPicPr>
-          <p:nvPr/>
-        </p:nvPicPr>
-        <p:blipFill>
-          <a:blip r:embed="rId2"/>
-          <a:stretch>
-            <a:fillRect/>
-          </a:stretch>
-        </p:blipFill>
-        <p:spPr>
-          <a:xfrm>
-            <a:off x="1737360" y="960120"/>
-            <a:ext cx="8686800" cy="3226526"/>
-          </a:xfrm>
-          <a:prstGeom prst="rect">
-            <a:avLst/>
-          </a:prstGeom>
-        </p:spPr>
-      </p:pic>
-      <p:sp>
-        <p:nvSpPr>
-          <p:cNvPr id="5" name="TextBox 4"/>
+      <p:sp>
+        <p:nvSpPr>
+          <p:cNvPr id="4" name="TextBox 3"/>
           <p:cNvSpPr txBox="1"/>
           <p:nvPr/>
         </p:nvSpPr>
         <p:spPr>
           <a:xfrm>
-            <a:off x="914400" y="4226646"/>
-            <a:ext cx="10332720" cy="548640"/>
+            <a:off x="502920" y="914400"/>
+            <a:ext cx="11155680" cy="5486400"/>
           </a:xfrm>
           <a:prstGeom prst="rect">
             <a:avLst/>
@@ -11965,20 +12517,65 @@
           <a:noFill/>
         </p:spPr>
         <p:txBody>
-          <a:bodyPr wrap="none">
+          <a:bodyPr wrap="square">
             <a:spAutoFit/>
           </a:bodyPr>
           <a:lstStyle/>
           <a:p>
-            <a:pPr algn="ctr"/>
-            <a:r>
-              <a:rPr sz="1100" b="0">
-                <a:solidFill>
-                  <a:srgbClr val="5A6472"/>
-                </a:solidFill>
-                <a:latin typeface="Microsoft YaHei"/>
-              </a:rPr>
-              <a:t>图 28 相位剖面卷积：iid 卷积全盲（同一预测 24）vs PPC 随相位变化并落入实测断档</a:t>
+            <a:pPr>
+              <a:lnSpc>
+                <a:spcPct val="108000"/>
+              </a:lnSpc>
+              <a:spcAft>
+                <a:spcPts val="400"/>
+              </a:spcAft>
+            </a:pPr>
+            <a:r>
+              <a:rPr sz="1250" b="0">
+                <a:solidFill>
+                  <a:srgbClr val="1C1C1E"/>
+                </a:solidFill>
+                <a:latin typeface="Microsoft YaHei"/>
+              </a:rPr>
+              <a:t>命题（边际幻觉 / Marginal Illusion）。 §8.4 的两次实验直接给出构造性证明：两组客户每台的用量边际分布完全相同（同一 burner、同一 20%/60 s 占空比与相同繁忙段形状），但随机相位组与对齐相位组在主口径（P5≥70%）下的安全容量为 24 vs 8（中位口径 40 vs 8）。因此：任何只依赖逐租户边际统计（以及独立性假设）的容量方法，都无法区分这两组——对"对边际分布做独立卷积"的一类方法（AUDIBLE 式 [1]），这是可证明的盲区：它们的输入在两组的差异上不可辨识。这是 3.3.1 非可辨识性结论（需求估计）的容量版本（安全容量估计）。</a:t>
+            </a:r>
+          </a:p>
+          <a:p>
+            <a:pPr>
+              <a:lnSpc>
+                <a:spcPct val="108000"/>
+              </a:lnSpc>
+              <a:spcAft>
+                <a:spcPts val="400"/>
+              </a:spcAft>
+            </a:pPr>
+            <a:r>
+              <a:rPr sz="1250" b="0">
+                <a:solidFill>
+                  <a:srgbClr val="1C1C1E"/>
+                </a:solidFill>
+                <a:latin typeface="Microsoft YaHei"/>
+              </a:rPr>
+              <a:t>方法（PPC，相位剖面卷积）。 输入：候选集合的逐租户相位剖面 p_i(b)（1 秒分辨率）。PPC 的保相关性重采样分两档实现：</a:t>
+            </a:r>
+          </a:p>
+          <a:p>
+            <a:pPr>
+              <a:lnSpc>
+                <a:spcPct val="108000"/>
+              </a:lnSpc>
+              <a:spcAft>
+                <a:spcPts val="400"/>
+              </a:spcAft>
+            </a:pPr>
+            <a:r>
+              <a:rPr sz="1250" b="0">
+                <a:solidFill>
+                  <a:srgbClr val="1C1C1E"/>
+                </a:solidFill>
+                <a:latin typeface="Microsoft YaHei"/>
+              </a:rPr>
+              <a:t>算法 P（PPC 容量预测；输入：候选集 X（含逐租户 1 s 活跃序列）、池容量 C、质量分位 θ、重采样次数 R）1  档案化：对每台 i 维护活跃指示 aᵢ(t)（1 s）；结构相位（对齐/定时）直接从历史取相位，不做随机化2  相关保留重采样（二选一，按数据来源）：(a) 参数化相位模型：对齐租户共享固定偏移（零方差）；随机租户偏移 ~ U[0,P) 独立采样—— 仅用于“按配置生成的”负载（如混合相位阶梯）；同步关系由构造保证(b) 联合块自助（经验舰队）：对所有租户使用同一组时间块（块长 B·1 s，块内原序保留）重采样 —— 同时刻的跨租户相关性被块结构保留；禁止逐租户独立平移（那正是 iid 卷积的假设，会把同步结构洗掉）3  对每个重采样：A(b) ← Σᵢ aᵢ(b)；peak_r ← max_b A(b)；体验分位由 C/max(1,A) 逐租户聚合4  输出：P(peak&gt; C)、容量 N*(θ, ε) = max N s.t. Q_1-ε(peak) ≤ C/θ复杂度：O(R · N · P)，R=10³、N=64、P=60 s 时 ~4×10⁶ 次布尔运算（毫秒级）。</a:t>
             </a:r>
           </a:p>
         </p:txBody>
@@ -12091,7 +12688,7 @@
                 </a:solidFill>
                 <a:latin typeface="Microsoft YaHei"/>
               </a:rPr>
-              <a:t>8 物理机验证与安全容量模型</a:t>
+              <a:t>图</a:t>
             </a:r>
           </a:p>
           <a:p>
@@ -12107,16 +12704,40 @@
           </a:p>
         </p:txBody>
       </p:sp>
-      <p:sp>
-        <p:nvSpPr>
-          <p:cNvPr id="4" name="TextBox 3"/>
+      <p:pic>
+        <p:nvPicPr>
+          <p:cNvPr id="4" name="Picture 3" descr="fig28_ppc.png"/>
+          <p:cNvPicPr>
+            <a:picLocks noChangeAspect="1"/>
+          </p:cNvPicPr>
+          <p:nvPr/>
+        </p:nvPicPr>
+        <p:blipFill>
+          <a:blip r:embed="rId2"/>
+          <a:stretch>
+            <a:fillRect/>
+          </a:stretch>
+        </p:blipFill>
+        <p:spPr>
+          <a:xfrm>
+            <a:off x="1737360" y="960120"/>
+            <a:ext cx="8686800" cy="3226526"/>
+          </a:xfrm>
+          <a:prstGeom prst="rect">
+            <a:avLst/>
+          </a:prstGeom>
+        </p:spPr>
+      </p:pic>
+      <p:sp>
+        <p:nvSpPr>
+          <p:cNvPr id="5" name="TextBox 4"/>
           <p:cNvSpPr txBox="1"/>
           <p:nvPr/>
         </p:nvSpPr>
         <p:spPr>
           <a:xfrm>
-            <a:off x="502920" y="914400"/>
-            <a:ext cx="11155680" cy="5486400"/>
+            <a:off x="914400" y="4226646"/>
+            <a:ext cx="10332720" cy="548640"/>
           </a:xfrm>
           <a:prstGeom prst="rect">
             <a:avLst/>
@@ -12124,65 +12745,20 @@
           <a:noFill/>
         </p:spPr>
         <p:txBody>
-          <a:bodyPr wrap="square">
+          <a:bodyPr wrap="none">
             <a:spAutoFit/>
           </a:bodyPr>
           <a:lstStyle/>
           <a:p>
-            <a:pPr>
-              <a:lnSpc>
-                <a:spcPct val="108000"/>
-              </a:lnSpc>
-              <a:spcAft>
-                <a:spcPts val="400"/>
-              </a:spcAft>
-            </a:pPr>
-            <a:r>
-              <a:rPr sz="1250" b="0">
-                <a:solidFill>
-                  <a:srgbClr val="1C1C1E"/>
-                </a:solidFill>
-                <a:latin typeface="Microsoft YaHei"/>
-              </a:rPr>
-              <a:t>训练/测试分离：PPC 的超参数只有块长 B 与 θ（主口径固定 70%）；B 在前一半观察窗上选择（以预测峰值 CDF 与实测峰值的 KS 距离最小），后一半窗用于报告预测误差——阶梯回测（本文）即离线测试；在线对决（§7.4b）是端到端盲测（控制器状态与 8.6 的预测参数分离）。与边际卷积的本质差别：在相位（联合）结构上卷积，而不是在时间边缘上——这正是 3.5 节"幅度用截断证据、结构用时间史"的容量侧对应物。</a:t>
-            </a:r>
-          </a:p>
-          <a:p>
-            <a:pPr>
-              <a:lnSpc>
-                <a:spcPct val="108000"/>
-              </a:lnSpc>
-              <a:spcAft>
-                <a:spcPts val="400"/>
-              </a:spcAft>
-            </a:pPr>
-            <a:r>
-              <a:rPr sz="1250" b="0">
-                <a:solidFill>
-                  <a:srgbClr val="1C1C1E"/>
-                </a:solidFill>
-                <a:latin typeface="Microsoft YaHei"/>
-              </a:rPr>
-              <a:t>结果（图 28）。 同参数下：iid 卷积对 rand / mix25 / mix50 / mix75 / sync 五种结构给出同一个预测 24（完全盲区）；PPC 给出 24 / 16 / 13 / 12 / 10，其中 4/5 落入实测粗粒度断档区间（rand [24,32)、mix50 [13,16)、mix75 [10,13)、sync [8,12)），mix25 预测 16 偏保守（区间 [20,28)，单轮噪声）。口径澄清："落入断档区间"不等于"预测出精确 oracle"——例如 sync 的预测 10 落在 [8,12) 内是因为阶梯粒度（8→12）没有扫过 9–11，PPC 的 10 是否恰好是最大安全容量需要边界细扫才能回答（已排队：sync/4,8,10,12,14,16 与 rand/16,20,22,24,26,28,32，各 2 轮、每档 180 s 多周期采集）。纯随机端尾部乐观性与 §8.5 一致（由实测口径修正）。</a:t>
-            </a:r>
-          </a:p>
-          <a:p>
-            <a:pPr>
-              <a:lnSpc>
-                <a:spcPct val="108000"/>
-              </a:lnSpc>
-              <a:spcAft>
-                <a:spcPts val="400"/>
-              </a:spcAft>
-            </a:pPr>
-            <a:r>
-              <a:rPr sz="1250" b="0">
-                <a:solidFill>
-                  <a:srgbClr val="1C1C1E"/>
-                </a:solidFill>
-                <a:latin typeface="Microsoft YaHei"/>
-              </a:rPr>
-              <a:t>预测质量指标（比"落入断档"更严格的口径）。 对每个配置定义四项：超接（预测 ≥ 首个失败档；安全否决项，必须为 0）、未验证上探（预测 − 最后通过档；&gt;0 表示预测伸入了未扫描区间，需要边界细扫点头）、失败余量（首个失败档 − 预测）、保守差（最后通过档 − 预测，&gt;0 表示白让容量）。当前单轮数据：</a:t>
+            <a:pPr algn="ctr"/>
+            <a:r>
+              <a:rPr sz="1100" b="0">
+                <a:solidFill>
+                  <a:srgbClr val="5A6472"/>
+                </a:solidFill>
+                <a:latin typeface="Microsoft YaHei"/>
+              </a:rPr>
+              <a:t>图 28 相位剖面卷积：iid 卷积全盲（同一预测 24）vs PPC 随相位变化并落入实测断档</a:t>
             </a:r>
           </a:p>
         </p:txBody>
@@ -12196,6 +12772,210 @@
 </file>
 
 <file path=ppt/slides/slide134.xml><?xml version="1.0" encoding="utf-8"?>
+<p:sld xmlns:a="http://schemas.openxmlformats.org/drawingml/2006/main" xmlns:p="http://schemas.openxmlformats.org/presentationml/2006/main" xmlns:r="http://schemas.openxmlformats.org/officeDocument/2006/relationships">
+  <p:cSld>
+    <p:spTree>
+      <p:nvGrpSpPr>
+        <p:cNvPr id="1" name=""/>
+        <p:cNvGrpSpPr/>
+        <p:nvPr/>
+      </p:nvGrpSpPr>
+      <p:grpSpPr/>
+      <p:sp>
+        <p:nvSpPr>
+          <p:cNvPr id="2" name="Rectangle 1"/>
+          <p:cNvSpPr/>
+          <p:nvPr/>
+        </p:nvSpPr>
+        <p:spPr>
+          <a:xfrm>
+            <a:off x="0" y="0"/>
+            <a:ext cx="12191695" cy="6858000"/>
+          </a:xfrm>
+          <a:prstGeom prst="rect">
+            <a:avLst/>
+          </a:prstGeom>
+          <a:solidFill>
+            <a:srgbClr val="FFFFFF"/>
+          </a:solidFill>
+          <a:ln>
+            <a:noFill/>
+          </a:ln>
+        </p:spPr>
+        <p:style>
+          <a:lnRef idx="1">
+            <a:schemeClr val="accent1"/>
+          </a:lnRef>
+          <a:fillRef idx="3">
+            <a:schemeClr val="accent1"/>
+          </a:fillRef>
+          <a:effectRef idx="2">
+            <a:schemeClr val="accent1"/>
+          </a:effectRef>
+          <a:fontRef idx="minor">
+            <a:schemeClr val="lt1"/>
+          </a:fontRef>
+        </p:style>
+        <p:txBody>
+          <a:bodyPr rtlCol="0" anchor="ctr"/>
+          <a:lstStyle/>
+          <a:p>
+            <a:pPr algn="ctr"/>
+          </a:p>
+        </p:txBody>
+      </p:sp>
+      <p:sp>
+        <p:nvSpPr>
+          <p:cNvPr id="3" name="Rectangle 2"/>
+          <p:cNvSpPr/>
+          <p:nvPr/>
+        </p:nvSpPr>
+        <p:spPr>
+          <a:xfrm>
+            <a:off x="0" y="0"/>
+            <a:ext cx="12191695" cy="777240"/>
+          </a:xfrm>
+          <a:prstGeom prst="rect">
+            <a:avLst/>
+          </a:prstGeom>
+          <a:solidFill>
+            <a:srgbClr val="123A63"/>
+          </a:solidFill>
+          <a:ln>
+            <a:noFill/>
+          </a:ln>
+        </p:spPr>
+        <p:style>
+          <a:lnRef idx="1">
+            <a:schemeClr val="accent1"/>
+          </a:lnRef>
+          <a:fillRef idx="3">
+            <a:schemeClr val="accent1"/>
+          </a:fillRef>
+          <a:effectRef idx="2">
+            <a:schemeClr val="accent1"/>
+          </a:effectRef>
+          <a:fontRef idx="minor">
+            <a:schemeClr val="lt1"/>
+          </a:fontRef>
+        </p:style>
+        <p:txBody>
+          <a:bodyPr rtlCol="0" anchor="ctr" lIns="411480" tIns="54864"/>
+          <a:lstStyle/>
+          <a:p>
+            <a:pPr algn="ctr"/>
+            <a:r>
+              <a:rPr sz="2100" b="1">
+                <a:solidFill>
+                  <a:srgbClr val="FFFFFF"/>
+                </a:solidFill>
+                <a:latin typeface="Microsoft YaHei"/>
+              </a:rPr>
+              <a:t>8 物理机验证与安全容量模型</a:t>
+            </a:r>
+          </a:p>
+          <a:p>
+            <a:r>
+              <a:rPr sz="1200">
+                <a:solidFill>
+                  <a:srgbClr val="D8E2F0"/>
+                </a:solidFill>
+                <a:latin typeface="Microsoft YaHei"/>
+              </a:rPr>
+              <a:t>8.6 相位剖面卷积与"边际幻觉"命题（图 28）</a:t>
+            </a:r>
+          </a:p>
+        </p:txBody>
+      </p:sp>
+      <p:sp>
+        <p:nvSpPr>
+          <p:cNvPr id="4" name="TextBox 3"/>
+          <p:cNvSpPr txBox="1"/>
+          <p:nvPr/>
+        </p:nvSpPr>
+        <p:spPr>
+          <a:xfrm>
+            <a:off x="502920" y="914400"/>
+            <a:ext cx="11155680" cy="5486400"/>
+          </a:xfrm>
+          <a:prstGeom prst="rect">
+            <a:avLst/>
+          </a:prstGeom>
+          <a:noFill/>
+        </p:spPr>
+        <p:txBody>
+          <a:bodyPr wrap="square">
+            <a:spAutoFit/>
+          </a:bodyPr>
+          <a:lstStyle/>
+          <a:p>
+            <a:pPr>
+              <a:lnSpc>
+                <a:spcPct val="108000"/>
+              </a:lnSpc>
+              <a:spcAft>
+                <a:spcPts val="400"/>
+              </a:spcAft>
+            </a:pPr>
+            <a:r>
+              <a:rPr sz="1250" b="0">
+                <a:solidFill>
+                  <a:srgbClr val="1C1C1E"/>
+                </a:solidFill>
+                <a:latin typeface="Microsoft YaHei"/>
+              </a:rPr>
+              <a:t>训练/测试分离：PPC 的超参数只有块长 B 与 θ（主口径固定 70%）；B 在前一半观察窗上选择（以预测峰值 CDF 与实测峰值的 KS 距离最小），后一半窗用于报告预测误差——阶梯回测（本文）即离线测试；在线对决（§7.4b）是端到端盲测（控制器状态与 8.6 的预测参数分离）。与边际卷积的本质差别：在相位（联合）结构上卷积，而不是在时间边缘上——这正是 3.5 节"幅度用截断证据、结构用时间史"的容量侧对应物。</a:t>
+            </a:r>
+          </a:p>
+          <a:p>
+            <a:pPr>
+              <a:lnSpc>
+                <a:spcPct val="108000"/>
+              </a:lnSpc>
+              <a:spcAft>
+                <a:spcPts val="400"/>
+              </a:spcAft>
+            </a:pPr>
+            <a:r>
+              <a:rPr sz="1250" b="0">
+                <a:solidFill>
+                  <a:srgbClr val="1C1C1E"/>
+                </a:solidFill>
+                <a:latin typeface="Microsoft YaHei"/>
+              </a:rPr>
+              <a:t>结果（图 28）。 同参数下：iid 卷积对 rand / mix25 / mix50 / mix75 / sync 五种结构给出同一个预测 24（完全盲区）；PPC 给出 24 / 16 / 13 / 12 / 10，其中 4/5 落入实测粗粒度断档区间（rand [24,32)、mix50 [13,16)、mix75 [10,13)、sync [8,12)），mix25 预测 16 偏保守（区间 [20,28)，单轮噪声）。口径澄清："落入断档区间"不等于"预测出精确 oracle"——例如 sync 的预测 10 落在 [8,12) 内是因为阶梯粒度（8→12）没有扫过 9–11，PPC 的 10 是否恰好是最大安全容量需要边界细扫才能回答（已排队：sync/4,8,10,12,14,16 与 rand/16,20,22,24,26,28,32，各 2 轮、每档 180 s 多周期采集）。纯随机端尾部乐观性与 §8.5 一致（由实测口径修正）。</a:t>
+            </a:r>
+          </a:p>
+          <a:p>
+            <a:pPr>
+              <a:lnSpc>
+                <a:spcPct val="108000"/>
+              </a:lnSpc>
+              <a:spcAft>
+                <a:spcPts val="400"/>
+              </a:spcAft>
+            </a:pPr>
+            <a:r>
+              <a:rPr sz="1250" b="0">
+                <a:solidFill>
+                  <a:srgbClr val="1C1C1E"/>
+                </a:solidFill>
+                <a:latin typeface="Microsoft YaHei"/>
+              </a:rPr>
+              <a:t>预测质量指标（比"落入断档"更严格的口径）。 对每个配置定义四项：超接（预测 ≥ 首个失败档；安全否决项，必须为 0）、未验证上探（预测 − 最后通过档；&gt;0 表示预测伸入了未扫描区间，需要边界细扫点头）、失败余量（首个失败档 − 预测）、保守差（最后通过档 − 预测，&gt;0 表示白让容量）。当前单轮数据：</a:t>
+            </a:r>
+          </a:p>
+        </p:txBody>
+      </p:sp>
+    </p:spTree>
+  </p:cSld>
+  <p:clrMapOvr>
+    <a:masterClrMapping/>
+  </p:clrMapOvr>
+</p:sld>
+</file>
+
+<file path=ppt/slides/slide135.xml><?xml version="1.0" encoding="utf-8"?>
 <p:sld xmlns:a="http://schemas.openxmlformats.org/drawingml/2006/main" xmlns:p="http://schemas.openxmlformats.org/presentationml/2006/main" xmlns:r="http://schemas.openxmlformats.org/officeDocument/2006/relationships">
   <p:cSld>
     <p:spTree>
@@ -13146,191 +13926,6 @@
 </p:sld>
 </file>
 
-<file path=ppt/slides/slide135.xml><?xml version="1.0" encoding="utf-8"?>
-<p:sld xmlns:a="http://schemas.openxmlformats.org/drawingml/2006/main" xmlns:p="http://schemas.openxmlformats.org/presentationml/2006/main" xmlns:r="http://schemas.openxmlformats.org/officeDocument/2006/relationships">
-  <p:cSld>
-    <p:spTree>
-      <p:nvGrpSpPr>
-        <p:cNvPr id="1" name=""/>
-        <p:cNvGrpSpPr/>
-        <p:nvPr/>
-      </p:nvGrpSpPr>
-      <p:grpSpPr/>
-      <p:sp>
-        <p:nvSpPr>
-          <p:cNvPr id="2" name="Rectangle 1"/>
-          <p:cNvSpPr/>
-          <p:nvPr/>
-        </p:nvSpPr>
-        <p:spPr>
-          <a:xfrm>
-            <a:off x="0" y="0"/>
-            <a:ext cx="12191695" cy="6858000"/>
-          </a:xfrm>
-          <a:prstGeom prst="rect">
-            <a:avLst/>
-          </a:prstGeom>
-          <a:solidFill>
-            <a:srgbClr val="FFFFFF"/>
-          </a:solidFill>
-          <a:ln>
-            <a:noFill/>
-          </a:ln>
-        </p:spPr>
-        <p:style>
-          <a:lnRef idx="1">
-            <a:schemeClr val="accent1"/>
-          </a:lnRef>
-          <a:fillRef idx="3">
-            <a:schemeClr val="accent1"/>
-          </a:fillRef>
-          <a:effectRef idx="2">
-            <a:schemeClr val="accent1"/>
-          </a:effectRef>
-          <a:fontRef idx="minor">
-            <a:schemeClr val="lt1"/>
-          </a:fontRef>
-        </p:style>
-        <p:txBody>
-          <a:bodyPr rtlCol="0" anchor="ctr"/>
-          <a:lstStyle/>
-          <a:p>
-            <a:pPr algn="ctr"/>
-          </a:p>
-        </p:txBody>
-      </p:sp>
-      <p:sp>
-        <p:nvSpPr>
-          <p:cNvPr id="3" name="Rectangle 2"/>
-          <p:cNvSpPr/>
-          <p:nvPr/>
-        </p:nvSpPr>
-        <p:spPr>
-          <a:xfrm>
-            <a:off x="0" y="0"/>
-            <a:ext cx="12191695" cy="777240"/>
-          </a:xfrm>
-          <a:prstGeom prst="rect">
-            <a:avLst/>
-          </a:prstGeom>
-          <a:solidFill>
-            <a:srgbClr val="123A63"/>
-          </a:solidFill>
-          <a:ln>
-            <a:noFill/>
-          </a:ln>
-        </p:spPr>
-        <p:style>
-          <a:lnRef idx="1">
-            <a:schemeClr val="accent1"/>
-          </a:lnRef>
-          <a:fillRef idx="3">
-            <a:schemeClr val="accent1"/>
-          </a:fillRef>
-          <a:effectRef idx="2">
-            <a:schemeClr val="accent1"/>
-          </a:effectRef>
-          <a:fontRef idx="minor">
-            <a:schemeClr val="lt1"/>
-          </a:fontRef>
-        </p:style>
-        <p:txBody>
-          <a:bodyPr rtlCol="0" anchor="ctr" lIns="411480" tIns="54864"/>
-          <a:lstStyle/>
-          <a:p>
-            <a:pPr algn="ctr"/>
-            <a:r>
-              <a:rPr sz="2100" b="1">
-                <a:solidFill>
-                  <a:srgbClr val="FFFFFF"/>
-                </a:solidFill>
-                <a:latin typeface="Microsoft YaHei"/>
-              </a:rPr>
-              <a:t>8 物理机验证与安全容量模型</a:t>
-            </a:r>
-          </a:p>
-          <a:p>
-            <a:r>
-              <a:rPr sz="1200">
-                <a:solidFill>
-                  <a:srgbClr val="D8E2F0"/>
-                </a:solidFill>
-                <a:latin typeface="Microsoft YaHei"/>
-              </a:rPr>
-              <a:t>8.6 相位剖面卷积与"边际幻觉"命题（图 28）</a:t>
-            </a:r>
-          </a:p>
-        </p:txBody>
-      </p:sp>
-      <p:sp>
-        <p:nvSpPr>
-          <p:cNvPr id="4" name="TextBox 3"/>
-          <p:cNvSpPr txBox="1"/>
-          <p:nvPr/>
-        </p:nvSpPr>
-        <p:spPr>
-          <a:xfrm>
-            <a:off x="502920" y="914400"/>
-            <a:ext cx="11155680" cy="5486400"/>
-          </a:xfrm>
-          <a:prstGeom prst="rect">
-            <a:avLst/>
-          </a:prstGeom>
-          <a:noFill/>
-        </p:spPr>
-        <p:txBody>
-          <a:bodyPr wrap="square">
-            <a:spAutoFit/>
-          </a:bodyPr>
-          <a:lstStyle/>
-          <a:p>
-            <a:pPr>
-              <a:lnSpc>
-                <a:spcPct val="108000"/>
-              </a:lnSpc>
-              <a:spcAft>
-                <a:spcPts val="400"/>
-              </a:spcAft>
-            </a:pPr>
-            <a:r>
-              <a:rPr sz="1250" b="0">
-                <a:solidFill>
-                  <a:srgbClr val="1C1C1E"/>
-                </a:solidFill>
-                <a:latin typeface="Microsoft YaHei"/>
-              </a:rPr>
-              <a:t>读法：5/5 无超接（控制器安全性的必要条件）；mix75 与 sync 的预测伸入未扫描区间（+2），其"是否恰好安全"由 boundary 细扫（各档 180 s ×2 轮）直接回答；mix25 保守 4 台；rand/mix50 恰落在已验证边界上。这套指标替换"落入断档"作为 8.6 的验收口径。</a:t>
-            </a:r>
-          </a:p>
-          <a:p>
-            <a:pPr>
-              <a:lnSpc>
-                <a:spcPct val="108000"/>
-              </a:lnSpc>
-              <a:spcAft>
-                <a:spcPts val="400"/>
-              </a:spcAft>
-            </a:pPr>
-            <a:r>
-              <a:rPr sz="1250" b="0">
-                <a:solidFill>
-                  <a:srgbClr val="1C1C1E"/>
-                </a:solidFill>
-                <a:latin typeface="Microsoft YaHei"/>
-              </a:rPr>
-              <a:t>边界。 PPC 需要相位史（冷启动退化为类别先验/观察窗）；随机端仍需实测口径；本节验证为离线回测 + 对决中的在线决策（ours 即 PPC 的作动器；对齐场景 v1 停在 8 台断档，v2 复核与边界细扫进行中——不断言精确 oracle）。</a:t>
-            </a:r>
-          </a:p>
-        </p:txBody>
-      </p:sp>
-    </p:spTree>
-  </p:cSld>
-  <p:clrMapOvr>
-    <a:masterClrMapping/>
-  </p:clrMapOvr>
-</p:sld>
-</file>
-
 <file path=ppt/slides/slide136.xml><?xml version="1.0" encoding="utf-8"?>
 <p:sld xmlns:a="http://schemas.openxmlformats.org/drawingml/2006/main" xmlns:p="http://schemas.openxmlformats.org/presentationml/2006/main" xmlns:r="http://schemas.openxmlformats.org/officeDocument/2006/relationships">
   <p:cSld>
@@ -13442,442 +14037,72 @@
                 </a:solidFill>
                 <a:latin typeface="Microsoft YaHei"/>
               </a:rPr>
-              <a:t>8.7 与 BeroHost 的一致性小结</a:t>
-            </a:r>
-          </a:p>
-        </p:txBody>
-      </p:sp>
-      <p:graphicFrame>
-        <p:nvGraphicFramePr>
-          <p:cNvPr id="4" name="Table 3"/>
-          <p:cNvGraphicFramePr>
-            <a:graphicFrameLocks noGrp="1"/>
-          </p:cNvGraphicFramePr>
-          <p:nvPr/>
-        </p:nvGraphicFramePr>
-        <p:xfrm>
-          <a:off x="502920" y="960120"/>
-          <a:ext cx="11155680" cy="2560320"/>
-        </p:xfrm>
-        <a:graphic>
-          <a:graphicData uri="http://schemas.openxmlformats.org/drawingml/2006/table">
-            <a:tbl>
-              <a:tblPr firstRow="1" bandRow="1">
-                <a:tableStyleId>{5C22544A-7EE6-4342-B048-85BDC9FD1C3A}</a:tableStyleId>
-              </a:tblPr>
-              <a:tblGrid>
-                <a:gridCol w="3718560"/>
-                <a:gridCol w="3718560"/>
-                <a:gridCol w="3718560"/>
-              </a:tblGrid>
-              <a:tr h="365760">
-                <a:tc>
-                  <a:txBody>
-                    <a:bodyPr/>
-                    <a:lstStyle/>
-                    <a:p>
-                      <a:r>
-                        <a:rPr sz="1050" b="1">
-                          <a:solidFill>
-                            <a:srgbClr val="FFFFFF"/>
-                          </a:solidFill>
-                          <a:latin typeface="Microsoft YaHei"/>
-                        </a:rPr>
-                        <a:t>结论</a:t>
-                      </a:r>
-                    </a:p>
-                  </a:txBody>
-                  <a:tcPr>
-                    <a:solidFill>
-                      <a:srgbClr val="123A63"/>
-                    </a:solidFill>
-                  </a:tcPr>
-                </a:tc>
-                <a:tc>
-                  <a:txBody>
-                    <a:bodyPr/>
-                    <a:lstStyle/>
-                    <a:p>
-                      <a:r>
-                        <a:rPr sz="1050" b="1">
-                          <a:solidFill>
-                            <a:srgbClr val="FFFFFF"/>
-                          </a:solidFill>
-                          <a:latin typeface="Microsoft YaHei"/>
-                        </a:rPr>
-                        <a:t>BeroHost（4 vCPU 嵌套）</a:t>
-                      </a:r>
-                    </a:p>
-                  </a:txBody>
-                  <a:tcPr>
-                    <a:solidFill>
-                      <a:srgbClr val="123A63"/>
-                    </a:solidFill>
-                  </a:tcPr>
-                </a:tc>
-                <a:tc>
-                  <a:txBody>
-                    <a:bodyPr/>
-                    <a:lstStyle/>
-                    <a:p>
-                      <a:r>
-                        <a:rPr sz="1050" b="1">
-                          <a:solidFill>
-                            <a:srgbClr val="FFFFFF"/>
-                          </a:solidFill>
-                          <a:latin typeface="Microsoft YaHei"/>
-                        </a:rPr>
-                        <a:t>物理机（96 线程）</a:t>
-                      </a:r>
-                    </a:p>
-                  </a:txBody>
-                  <a:tcPr>
-                    <a:solidFill>
-                      <a:srgbClr val="123A63"/>
-                    </a:solidFill>
-                  </a:tcPr>
-                </a:tc>
-              </a:tr>
-              <a:tr h="365760">
-                <a:tc>
-                  <a:txBody>
-                    <a:bodyPr/>
-                    <a:lstStyle/>
-                    <a:p>
-                      <a:r>
-                        <a:rPr sz="1000" b="0">
-                          <a:solidFill>
-                            <a:srgbClr val="1C1C1E"/>
-                          </a:solidFill>
-                          <a:latin typeface="Microsoft YaHei"/>
-                        </a:rPr>
-                        <a:t>膝点在共享池饱和处</a:t>
-                      </a:r>
-                    </a:p>
-                  </a:txBody>
-                  <a:tcPr/>
-                </a:tc>
-                <a:tc>
-                  <a:txBody>
-                    <a:bodyPr/>
-                    <a:lstStyle/>
-                    <a:p>
-                      <a:r>
-                        <a:rPr sz="1000" b="0">
-                          <a:solidFill>
-                            <a:srgbClr val="1C1C1E"/>
-                          </a:solidFill>
-                          <a:latin typeface="Microsoft YaHei"/>
-                        </a:rPr>
-                        <a:t>3→4 台（2 核租户池）</a:t>
-                      </a:r>
-                    </a:p>
-                  </a:txBody>
-                  <a:tcPr/>
-                </a:tc>
-                <a:tc>
-                  <a:txBody>
-                    <a:bodyPr/>
-                    <a:lstStyle/>
-                    <a:p>
-                      <a:r>
-                        <a:rPr sz="1000" b="0">
-                          <a:solidFill>
-                            <a:srgbClr val="1C1C1E"/>
-                          </a:solidFill>
-                          <a:latin typeface="Microsoft YaHei"/>
-                        </a:rPr>
-                        <a:t>2/4/16 核池全部在饱和点（细扫 L15→L16）</a:t>
-                      </a:r>
-                    </a:p>
-                  </a:txBody>
-                  <a:tcPr/>
-                </a:tc>
-              </a:tr>
-              <a:tr h="365760">
-                <a:tc>
-                  <a:txBody>
-                    <a:bodyPr/>
-                    <a:lstStyle/>
-                    <a:p>
-                      <a:r>
-                        <a:rPr sz="1000" b="0">
-                          <a:solidFill>
-                            <a:srgbClr val="1C1C1E"/>
-                          </a:solidFill>
-                          <a:latin typeface="Microsoft YaHei"/>
-                        </a:rPr>
-                        <a:t>隔离护尾</a:t>
-                      </a:r>
-                    </a:p>
-                  </a:txBody>
-                  <a:tcPr/>
-                </a:tc>
-                <a:tc>
-                  <a:txBody>
-                    <a:bodyPr/>
-                    <a:lstStyle/>
-                    <a:p>
-                      <a:r>
-                        <a:rPr sz="1000" b="0">
-                          <a:solidFill>
-                            <a:srgbClr val="1C1C1E"/>
-                          </a:solidFill>
-                          <a:latin typeface="Microsoft YaHei"/>
-                        </a:rPr>
-                        <a:t>P99≈2.9–3.2 ms</a:t>
-                      </a:r>
-                    </a:p>
-                  </a:txBody>
-                  <a:tcPr/>
-                </a:tc>
-                <a:tc>
-                  <a:txBody>
-                    <a:bodyPr/>
-                    <a:lstStyle/>
-                    <a:p>
-                      <a:r>
-                        <a:rPr sz="1000" b="0">
-                          <a:solidFill>
-                            <a:srgbClr val="1C1C1E"/>
-                          </a:solidFill>
-                          <a:latin typeface="Microsoft YaHei"/>
-                        </a:rPr>
-                        <a:t>P99 0.68–0.78 ms（0–2.5× 超售）</a:t>
-                      </a:r>
-                    </a:p>
-                  </a:txBody>
-                  <a:tcPr/>
-                </a:tc>
-              </a:tr>
-              <a:tr h="365760">
-                <a:tc>
-                  <a:txBody>
-                    <a:bodyPr/>
-                    <a:lstStyle/>
-                    <a:p>
-                      <a:r>
-                        <a:rPr sz="1000" b="0">
-                          <a:solidFill>
-                            <a:srgbClr val="1C1C1E"/>
-                          </a:solidFill>
-                          <a:latin typeface="Microsoft YaHei"/>
-                        </a:rPr>
-                        <a:t>同步 → 周期尖峰</a:t>
-                      </a:r>
-                    </a:p>
-                  </a:txBody>
-                  <a:tcPr/>
-                </a:tc>
-                <a:tc>
-                  <a:txBody>
-                    <a:bodyPr/>
-                    <a:lstStyle/>
-                    <a:p>
-                      <a:r>
-                        <a:rPr sz="1000" b="0">
-                          <a:solidFill>
-                            <a:srgbClr val="1C1C1E"/>
-                          </a:solidFill>
-                          <a:latin typeface="Microsoft YaHei"/>
-                        </a:rPr>
-                        <a:t>60 s 周期（6 客户）</a:t>
-                      </a:r>
-                    </a:p>
-                  </a:txBody>
-                  <a:tcPr/>
-                </a:tc>
-                <a:tc>
-                  <a:txBody>
-                    <a:bodyPr/>
-                    <a:lstStyle/>
-                    <a:p>
-                      <a:r>
-                        <a:rPr sz="1000" b="0">
-                          <a:solidFill>
-                            <a:srgbClr val="1C1C1E"/>
-                          </a:solidFill>
-                          <a:latin typeface="Microsoft YaHei"/>
-                        </a:rPr>
-                        <a:t>60 s 周期（64 客户，3 轮复现、簇间隔全部精确 60 s）</a:t>
-                      </a:r>
-                    </a:p>
-                  </a:txBody>
-                  <a:tcPr/>
-                </a:tc>
-              </a:tr>
-              <a:tr h="365760">
-                <a:tc>
-                  <a:txBody>
-                    <a:bodyPr/>
-                    <a:lstStyle/>
-                    <a:p>
-                      <a:r>
-                        <a:rPr sz="1000" b="0">
-                          <a:solidFill>
-                            <a:srgbClr val="1C1C1E"/>
-                          </a:solidFill>
-                          <a:latin typeface="Microsoft YaHei"/>
-                        </a:rPr>
-                        <a:t>软手段不护尾 / 硬限速可靠</a:t>
-                      </a:r>
-                    </a:p>
-                  </a:txBody>
-                  <a:tcPr/>
-                </a:tc>
-                <a:tc>
-                  <a:txBody>
-                    <a:bodyPr/>
-                    <a:lstStyle/>
-                    <a:p>
-                      <a:r>
-                        <a:rPr sz="1000" b="0">
-                          <a:solidFill>
-                            <a:srgbClr val="1C1C1E"/>
-                          </a:solidFill>
-                          <a:latin typeface="Microsoft YaHei"/>
-                        </a:rPr>
-                        <a:t>已验证</a:t>
-                      </a:r>
-                    </a:p>
-                  </a:txBody>
-                  <a:tcPr/>
-                </a:tc>
-                <a:tc>
-                  <a:txBody>
-                    <a:bodyPr/>
-                    <a:lstStyle/>
-                    <a:p>
-                      <a:r>
-                        <a:rPr sz="1000" b="0">
-                          <a:solidFill>
-                            <a:srgbClr val="1C1C1E"/>
-                          </a:solidFill>
-                          <a:latin typeface="Microsoft YaHei"/>
-                        </a:rPr>
-                        <a:t>（物理机轮次续做）</a:t>
-                      </a:r>
-                    </a:p>
-                  </a:txBody>
-                  <a:tcPr/>
-                </a:tc>
-              </a:tr>
-              <a:tr h="365760">
-                <a:tc>
-                  <a:txBody>
-                    <a:bodyPr/>
-                    <a:lstStyle/>
-                    <a:p>
-                      <a:r>
-                        <a:rPr sz="1000" b="0">
-                          <a:solidFill>
-                            <a:srgbClr val="1C1C1E"/>
-                          </a:solidFill>
-                          <a:latin typeface="Microsoft YaHei"/>
-                        </a:rPr>
-                        <a:t>安全售卖容量</a:t>
-                      </a:r>
-                    </a:p>
-                  </a:txBody>
-                  <a:tcPr/>
-                </a:tc>
-                <a:tc>
-                  <a:txBody>
-                    <a:bodyPr/>
-                    <a:lstStyle/>
-                    <a:p>
-                      <a:r>
-                        <a:rPr sz="1000" b="0">
-                          <a:solidFill>
-                            <a:srgbClr val="1C1C1E"/>
-                          </a:solidFill>
-                          <a:latin typeface="Microsoft YaHei"/>
-                        </a:rPr>
-                        <a:t>定性（预算内 3 席）</a:t>
-                      </a:r>
-                    </a:p>
-                  </a:txBody>
-                  <a:tcPr/>
-                </a:tc>
-                <a:tc>
-                  <a:txBody>
-                    <a:bodyPr/>
-                    <a:lstStyle/>
-                    <a:p>
-                      <a:r>
-                        <a:rPr sz="1000" b="0">
-                          <a:solidFill>
-                            <a:srgbClr val="1C1C1E"/>
-                          </a:solidFill>
-                          <a:latin typeface="Microsoft YaHei"/>
-                        </a:rPr>
-                        <a:t>定量：主口径 3×（24 vs 8），随质量口径 2×–5×</a:t>
-                      </a:r>
-                    </a:p>
-                  </a:txBody>
-                  <a:tcPr/>
-                </a:tc>
-              </a:tr>
-              <a:tr h="365760">
-                <a:tc>
-                  <a:txBody>
-                    <a:bodyPr/>
-                    <a:lstStyle/>
-                    <a:p>
-                      <a:r>
-                        <a:rPr sz="1000" b="0">
-                          <a:solidFill>
-                            <a:srgbClr val="1C1C1E"/>
-                          </a:solidFill>
-                          <a:latin typeface="Microsoft YaHei"/>
-                        </a:rPr>
-                        <a:t>容量模型预测 N*(φ)</a:t>
-                      </a:r>
-                    </a:p>
-                  </a:txBody>
-                  <a:tcPr/>
-                </a:tc>
-                <a:tc>
-                  <a:txBody>
-                    <a:bodyPr/>
-                    <a:lstStyle/>
-                    <a:p>
-                      <a:r>
-                        <a:rPr sz="1000" b="0">
-                          <a:solidFill>
-                            <a:srgbClr val="1C1C1E"/>
-                          </a:solidFill>
-                          <a:latin typeface="Microsoft YaHei"/>
-                        </a:rPr>
-                        <a:t>—（单核数床）</a:t>
-                      </a:r>
-                    </a:p>
-                  </a:txBody>
-                  <a:tcPr/>
-                </a:tc>
-                <a:tc>
-                  <a:txBody>
-                    <a:bodyPr/>
-                    <a:lstStyle/>
-                    <a:p>
-                      <a:r>
-                        <a:rPr sz="1000" b="0">
-                          <a:solidFill>
-                            <a:srgbClr val="1C1C1E"/>
-                          </a:solidFill>
-                          <a:latin typeface="Microsoft YaHei"/>
-                        </a:rPr>
-                        <a:t>φ=0.50/0.75 命中断点、φ=0.25 偏保守（单轮首验，图 21）</a:t>
-                      </a:r>
-                    </a:p>
-                  </a:txBody>
-                  <a:tcPr/>
-                </a:tc>
-              </a:tr>
-            </a:tbl>
-          </a:graphicData>
-        </a:graphic>
-      </p:graphicFrame>
+              <a:t>8.6 相位剖面卷积与"边际幻觉"命题（图 28）</a:t>
+            </a:r>
+          </a:p>
+        </p:txBody>
+      </p:sp>
+      <p:sp>
+        <p:nvSpPr>
+          <p:cNvPr id="4" name="TextBox 3"/>
+          <p:cNvSpPr txBox="1"/>
+          <p:nvPr/>
+        </p:nvSpPr>
+        <p:spPr>
+          <a:xfrm>
+            <a:off x="502920" y="914400"/>
+            <a:ext cx="11155680" cy="5486400"/>
+          </a:xfrm>
+          <a:prstGeom prst="rect">
+            <a:avLst/>
+          </a:prstGeom>
+          <a:noFill/>
+        </p:spPr>
+        <p:txBody>
+          <a:bodyPr wrap="square">
+            <a:spAutoFit/>
+          </a:bodyPr>
+          <a:lstStyle/>
+          <a:p>
+            <a:pPr>
+              <a:lnSpc>
+                <a:spcPct val="108000"/>
+              </a:lnSpc>
+              <a:spcAft>
+                <a:spcPts val="400"/>
+              </a:spcAft>
+            </a:pPr>
+            <a:r>
+              <a:rPr sz="1250" b="0">
+                <a:solidFill>
+                  <a:srgbClr val="1C1C1E"/>
+                </a:solidFill>
+                <a:latin typeface="Microsoft YaHei"/>
+              </a:rPr>
+              <a:t>读法：5/5 无超接（控制器安全性的必要条件）；mix75 与 sync 的预测伸入未扫描区间（+2），其"是否恰好安全"由 boundary 细扫（各档 180 s ×2 轮）直接回答；mix25 保守 4 台；rand/mix50 恰落在已验证边界上。这套指标替换"落入断档"作为 8.6 的验收口径。</a:t>
+            </a:r>
+          </a:p>
+          <a:p>
+            <a:pPr>
+              <a:lnSpc>
+                <a:spcPct val="108000"/>
+              </a:lnSpc>
+              <a:spcAft>
+                <a:spcPts val="400"/>
+              </a:spcAft>
+            </a:pPr>
+            <a:r>
+              <a:rPr sz="1250" b="0">
+                <a:solidFill>
+                  <a:srgbClr val="1C1C1E"/>
+                </a:solidFill>
+                <a:latin typeface="Microsoft YaHei"/>
+              </a:rPr>
+              <a:t>边界。 PPC 需要相位史（冷启动退化为类别先验/观察窗）；随机端仍需实测口径；本节验证为离线回测 + 对决中的在线决策（ours 即 PPC 的作动器；对齐场景 v1 停在 8 台断档，v2 复核与边界细扫进行中——不断言精确 oracle）。</a:t>
+            </a:r>
+          </a:p>
+        </p:txBody>
+      </p:sp>
     </p:spTree>
   </p:cSld>
   <p:clrMapOvr>
@@ -13997,91 +14222,442 @@
                 </a:solidFill>
                 <a:latin typeface="Microsoft YaHei"/>
               </a:rPr>
-              <a:t>8.8 本章数据与工件</a:t>
-            </a:r>
-          </a:p>
-        </p:txBody>
-      </p:sp>
-      <p:sp>
-        <p:nvSpPr>
-          <p:cNvPr id="4" name="TextBox 3"/>
-          <p:cNvSpPr txBox="1"/>
-          <p:nvPr/>
-        </p:nvSpPr>
-        <p:spPr>
-          <a:xfrm>
-            <a:off x="502920" y="914400"/>
-            <a:ext cx="11155680" cy="5486400"/>
-          </a:xfrm>
-          <a:prstGeom prst="rect">
-            <a:avLst/>
-          </a:prstGeom>
-          <a:noFill/>
-        </p:spPr>
-        <p:txBody>
-          <a:bodyPr wrap="square">
-            <a:spAutoFit/>
-          </a:bodyPr>
-          <a:lstStyle/>
-          <a:p>
-            <a:pPr lvl="1">
-              <a:lnSpc>
-                <a:spcPct val="108000"/>
-              </a:lnSpc>
-              <a:spcAft>
-                <a:spcPts val="400"/>
-              </a:spcAft>
-            </a:pPr>
-            <a:r>
-              <a:rPr sz="1200" b="0">
-                <a:solidFill>
-                  <a:srgbClr val="1C1C1E"/>
-                </a:solidFill>
-                <a:latin typeface="Microsoft YaHei"/>
-              </a:rPr>
-              <a:t>• 数据：research_data/phys8269_pilot/（多规模扫描 JSONL + 细膝点 4 轮 + 同步 3 轮探针 raw + 售卖阶梯 JSONL + 分析文档）</a:t>
-            </a:r>
-          </a:p>
-          <a:p>
-            <a:pPr lvl="1">
-              <a:lnSpc>
-                <a:spcPct val="108000"/>
-              </a:lnSpc>
-              <a:spcAft>
-                <a:spcPts val="400"/>
-              </a:spcAft>
-            </a:pPr>
-            <a:r>
-              <a:rPr sz="1200" b="0">
-                <a:solidFill>
-                  <a:srgbClr val="1C1C1E"/>
-                </a:solidFill>
-                <a:latin typeface="Microsoft YaHei"/>
-              </a:rPr>
-              <a:t>• 图：figs/fig14_phys_knee.png、fig15_phys_sync.png（含 3 轮簇间隔复现）、fig16_phys_sell.png（一键复现：figs/make_phys_figs.py）</a:t>
-            </a:r>
-          </a:p>
-          <a:p>
-            <a:pPr lvl="1">
-              <a:lnSpc>
-                <a:spcPct val="108000"/>
-              </a:lnSpc>
-              <a:spcAft>
-                <a:spcPts val="400"/>
-              </a:spcAft>
-            </a:pPr>
-            <a:r>
-              <a:rPr sz="1200" b="0">
-                <a:solidFill>
-                  <a:srgbClr val="1C1C1E"/>
-                </a:solidFill>
-                <a:latin typeface="Microsoft YaHei"/>
-              </a:rPr>
-              <a:t>• 工具：tools/tb_sweep.py（膝点）、tools/tb_sync.py（相位）、tools/tb_sell.py（售卖阶梯），全部宿主机侧执行</a:t>
-            </a:r>
-          </a:p>
-        </p:txBody>
-      </p:sp>
+              <a:t>8.7 与 BeroHost 的一致性小结</a:t>
+            </a:r>
+          </a:p>
+        </p:txBody>
+      </p:sp>
+      <p:graphicFrame>
+        <p:nvGraphicFramePr>
+          <p:cNvPr id="4" name="Table 3"/>
+          <p:cNvGraphicFramePr>
+            <a:graphicFrameLocks noGrp="1"/>
+          </p:cNvGraphicFramePr>
+          <p:nvPr/>
+        </p:nvGraphicFramePr>
+        <p:xfrm>
+          <a:off x="502920" y="960120"/>
+          <a:ext cx="11155680" cy="2560320"/>
+        </p:xfrm>
+        <a:graphic>
+          <a:graphicData uri="http://schemas.openxmlformats.org/drawingml/2006/table">
+            <a:tbl>
+              <a:tblPr firstRow="1" bandRow="1">
+                <a:tableStyleId>{5C22544A-7EE6-4342-B048-85BDC9FD1C3A}</a:tableStyleId>
+              </a:tblPr>
+              <a:tblGrid>
+                <a:gridCol w="3718560"/>
+                <a:gridCol w="3718560"/>
+                <a:gridCol w="3718560"/>
+              </a:tblGrid>
+              <a:tr h="365760">
+                <a:tc>
+                  <a:txBody>
+                    <a:bodyPr/>
+                    <a:lstStyle/>
+                    <a:p>
+                      <a:r>
+                        <a:rPr sz="1050" b="1">
+                          <a:solidFill>
+                            <a:srgbClr val="FFFFFF"/>
+                          </a:solidFill>
+                          <a:latin typeface="Microsoft YaHei"/>
+                        </a:rPr>
+                        <a:t>结论</a:t>
+                      </a:r>
+                    </a:p>
+                  </a:txBody>
+                  <a:tcPr>
+                    <a:solidFill>
+                      <a:srgbClr val="123A63"/>
+                    </a:solidFill>
+                  </a:tcPr>
+                </a:tc>
+                <a:tc>
+                  <a:txBody>
+                    <a:bodyPr/>
+                    <a:lstStyle/>
+                    <a:p>
+                      <a:r>
+                        <a:rPr sz="1050" b="1">
+                          <a:solidFill>
+                            <a:srgbClr val="FFFFFF"/>
+                          </a:solidFill>
+                          <a:latin typeface="Microsoft YaHei"/>
+                        </a:rPr>
+                        <a:t>BeroHost（4 vCPU 嵌套）</a:t>
+                      </a:r>
+                    </a:p>
+                  </a:txBody>
+                  <a:tcPr>
+                    <a:solidFill>
+                      <a:srgbClr val="123A63"/>
+                    </a:solidFill>
+                  </a:tcPr>
+                </a:tc>
+                <a:tc>
+                  <a:txBody>
+                    <a:bodyPr/>
+                    <a:lstStyle/>
+                    <a:p>
+                      <a:r>
+                        <a:rPr sz="1050" b="1">
+                          <a:solidFill>
+                            <a:srgbClr val="FFFFFF"/>
+                          </a:solidFill>
+                          <a:latin typeface="Microsoft YaHei"/>
+                        </a:rPr>
+                        <a:t>物理机（96 线程）</a:t>
+                      </a:r>
+                    </a:p>
+                  </a:txBody>
+                  <a:tcPr>
+                    <a:solidFill>
+                      <a:srgbClr val="123A63"/>
+                    </a:solidFill>
+                  </a:tcPr>
+                </a:tc>
+              </a:tr>
+              <a:tr h="365760">
+                <a:tc>
+                  <a:txBody>
+                    <a:bodyPr/>
+                    <a:lstStyle/>
+                    <a:p>
+                      <a:r>
+                        <a:rPr sz="1000" b="0">
+                          <a:solidFill>
+                            <a:srgbClr val="1C1C1E"/>
+                          </a:solidFill>
+                          <a:latin typeface="Microsoft YaHei"/>
+                        </a:rPr>
+                        <a:t>膝点在共享池饱和处</a:t>
+                      </a:r>
+                    </a:p>
+                  </a:txBody>
+                  <a:tcPr/>
+                </a:tc>
+                <a:tc>
+                  <a:txBody>
+                    <a:bodyPr/>
+                    <a:lstStyle/>
+                    <a:p>
+                      <a:r>
+                        <a:rPr sz="1000" b="0">
+                          <a:solidFill>
+                            <a:srgbClr val="1C1C1E"/>
+                          </a:solidFill>
+                          <a:latin typeface="Microsoft YaHei"/>
+                        </a:rPr>
+                        <a:t>3→4 台（2 核租户池）</a:t>
+                      </a:r>
+                    </a:p>
+                  </a:txBody>
+                  <a:tcPr/>
+                </a:tc>
+                <a:tc>
+                  <a:txBody>
+                    <a:bodyPr/>
+                    <a:lstStyle/>
+                    <a:p>
+                      <a:r>
+                        <a:rPr sz="1000" b="0">
+                          <a:solidFill>
+                            <a:srgbClr val="1C1C1E"/>
+                          </a:solidFill>
+                          <a:latin typeface="Microsoft YaHei"/>
+                        </a:rPr>
+                        <a:t>2/4/16 核池全部在饱和点（细扫 L15→L16）</a:t>
+                      </a:r>
+                    </a:p>
+                  </a:txBody>
+                  <a:tcPr/>
+                </a:tc>
+              </a:tr>
+              <a:tr h="365760">
+                <a:tc>
+                  <a:txBody>
+                    <a:bodyPr/>
+                    <a:lstStyle/>
+                    <a:p>
+                      <a:r>
+                        <a:rPr sz="1000" b="0">
+                          <a:solidFill>
+                            <a:srgbClr val="1C1C1E"/>
+                          </a:solidFill>
+                          <a:latin typeface="Microsoft YaHei"/>
+                        </a:rPr>
+                        <a:t>隔离护尾</a:t>
+                      </a:r>
+                    </a:p>
+                  </a:txBody>
+                  <a:tcPr/>
+                </a:tc>
+                <a:tc>
+                  <a:txBody>
+                    <a:bodyPr/>
+                    <a:lstStyle/>
+                    <a:p>
+                      <a:r>
+                        <a:rPr sz="1000" b="0">
+                          <a:solidFill>
+                            <a:srgbClr val="1C1C1E"/>
+                          </a:solidFill>
+                          <a:latin typeface="Microsoft YaHei"/>
+                        </a:rPr>
+                        <a:t>P99≈2.9–3.2 ms</a:t>
+                      </a:r>
+                    </a:p>
+                  </a:txBody>
+                  <a:tcPr/>
+                </a:tc>
+                <a:tc>
+                  <a:txBody>
+                    <a:bodyPr/>
+                    <a:lstStyle/>
+                    <a:p>
+                      <a:r>
+                        <a:rPr sz="1000" b="0">
+                          <a:solidFill>
+                            <a:srgbClr val="1C1C1E"/>
+                          </a:solidFill>
+                          <a:latin typeface="Microsoft YaHei"/>
+                        </a:rPr>
+                        <a:t>P99 0.68–0.78 ms（0–2.5× 超售）</a:t>
+                      </a:r>
+                    </a:p>
+                  </a:txBody>
+                  <a:tcPr/>
+                </a:tc>
+              </a:tr>
+              <a:tr h="365760">
+                <a:tc>
+                  <a:txBody>
+                    <a:bodyPr/>
+                    <a:lstStyle/>
+                    <a:p>
+                      <a:r>
+                        <a:rPr sz="1000" b="0">
+                          <a:solidFill>
+                            <a:srgbClr val="1C1C1E"/>
+                          </a:solidFill>
+                          <a:latin typeface="Microsoft YaHei"/>
+                        </a:rPr>
+                        <a:t>同步 → 周期尖峰</a:t>
+                      </a:r>
+                    </a:p>
+                  </a:txBody>
+                  <a:tcPr/>
+                </a:tc>
+                <a:tc>
+                  <a:txBody>
+                    <a:bodyPr/>
+                    <a:lstStyle/>
+                    <a:p>
+                      <a:r>
+                        <a:rPr sz="1000" b="0">
+                          <a:solidFill>
+                            <a:srgbClr val="1C1C1E"/>
+                          </a:solidFill>
+                          <a:latin typeface="Microsoft YaHei"/>
+                        </a:rPr>
+                        <a:t>60 s 周期（6 客户）</a:t>
+                      </a:r>
+                    </a:p>
+                  </a:txBody>
+                  <a:tcPr/>
+                </a:tc>
+                <a:tc>
+                  <a:txBody>
+                    <a:bodyPr/>
+                    <a:lstStyle/>
+                    <a:p>
+                      <a:r>
+                        <a:rPr sz="1000" b="0">
+                          <a:solidFill>
+                            <a:srgbClr val="1C1C1E"/>
+                          </a:solidFill>
+                          <a:latin typeface="Microsoft YaHei"/>
+                        </a:rPr>
+                        <a:t>60 s 周期（64 客户，3 轮复现、簇间隔全部精确 60 s）</a:t>
+                      </a:r>
+                    </a:p>
+                  </a:txBody>
+                  <a:tcPr/>
+                </a:tc>
+              </a:tr>
+              <a:tr h="365760">
+                <a:tc>
+                  <a:txBody>
+                    <a:bodyPr/>
+                    <a:lstStyle/>
+                    <a:p>
+                      <a:r>
+                        <a:rPr sz="1000" b="0">
+                          <a:solidFill>
+                            <a:srgbClr val="1C1C1E"/>
+                          </a:solidFill>
+                          <a:latin typeface="Microsoft YaHei"/>
+                        </a:rPr>
+                        <a:t>软手段不护尾 / 硬限速可靠</a:t>
+                      </a:r>
+                    </a:p>
+                  </a:txBody>
+                  <a:tcPr/>
+                </a:tc>
+                <a:tc>
+                  <a:txBody>
+                    <a:bodyPr/>
+                    <a:lstStyle/>
+                    <a:p>
+                      <a:r>
+                        <a:rPr sz="1000" b="0">
+                          <a:solidFill>
+                            <a:srgbClr val="1C1C1E"/>
+                          </a:solidFill>
+                          <a:latin typeface="Microsoft YaHei"/>
+                        </a:rPr>
+                        <a:t>已验证</a:t>
+                      </a:r>
+                    </a:p>
+                  </a:txBody>
+                  <a:tcPr/>
+                </a:tc>
+                <a:tc>
+                  <a:txBody>
+                    <a:bodyPr/>
+                    <a:lstStyle/>
+                    <a:p>
+                      <a:r>
+                        <a:rPr sz="1000" b="0">
+                          <a:solidFill>
+                            <a:srgbClr val="1C1C1E"/>
+                          </a:solidFill>
+                          <a:latin typeface="Microsoft YaHei"/>
+                        </a:rPr>
+                        <a:t>（物理机轮次续做）</a:t>
+                      </a:r>
+                    </a:p>
+                  </a:txBody>
+                  <a:tcPr/>
+                </a:tc>
+              </a:tr>
+              <a:tr h="365760">
+                <a:tc>
+                  <a:txBody>
+                    <a:bodyPr/>
+                    <a:lstStyle/>
+                    <a:p>
+                      <a:r>
+                        <a:rPr sz="1000" b="0">
+                          <a:solidFill>
+                            <a:srgbClr val="1C1C1E"/>
+                          </a:solidFill>
+                          <a:latin typeface="Microsoft YaHei"/>
+                        </a:rPr>
+                        <a:t>安全售卖容量</a:t>
+                      </a:r>
+                    </a:p>
+                  </a:txBody>
+                  <a:tcPr/>
+                </a:tc>
+                <a:tc>
+                  <a:txBody>
+                    <a:bodyPr/>
+                    <a:lstStyle/>
+                    <a:p>
+                      <a:r>
+                        <a:rPr sz="1000" b="0">
+                          <a:solidFill>
+                            <a:srgbClr val="1C1C1E"/>
+                          </a:solidFill>
+                          <a:latin typeface="Microsoft YaHei"/>
+                        </a:rPr>
+                        <a:t>定性（预算内 3 席）</a:t>
+                      </a:r>
+                    </a:p>
+                  </a:txBody>
+                  <a:tcPr/>
+                </a:tc>
+                <a:tc>
+                  <a:txBody>
+                    <a:bodyPr/>
+                    <a:lstStyle/>
+                    <a:p>
+                      <a:r>
+                        <a:rPr sz="1000" b="0">
+                          <a:solidFill>
+                            <a:srgbClr val="1C1C1E"/>
+                          </a:solidFill>
+                          <a:latin typeface="Microsoft YaHei"/>
+                        </a:rPr>
+                        <a:t>定量：主口径 3×（24 vs 8），随质量口径 2×–5×</a:t>
+                      </a:r>
+                    </a:p>
+                  </a:txBody>
+                  <a:tcPr/>
+                </a:tc>
+              </a:tr>
+              <a:tr h="365760">
+                <a:tc>
+                  <a:txBody>
+                    <a:bodyPr/>
+                    <a:lstStyle/>
+                    <a:p>
+                      <a:r>
+                        <a:rPr sz="1000" b="0">
+                          <a:solidFill>
+                            <a:srgbClr val="1C1C1E"/>
+                          </a:solidFill>
+                          <a:latin typeface="Microsoft YaHei"/>
+                        </a:rPr>
+                        <a:t>容量模型预测 N*(φ)</a:t>
+                      </a:r>
+                    </a:p>
+                  </a:txBody>
+                  <a:tcPr/>
+                </a:tc>
+                <a:tc>
+                  <a:txBody>
+                    <a:bodyPr/>
+                    <a:lstStyle/>
+                    <a:p>
+                      <a:r>
+                        <a:rPr sz="1000" b="0">
+                          <a:solidFill>
+                            <a:srgbClr val="1C1C1E"/>
+                          </a:solidFill>
+                          <a:latin typeface="Microsoft YaHei"/>
+                        </a:rPr>
+                        <a:t>—（单核数床）</a:t>
+                      </a:r>
+                    </a:p>
+                  </a:txBody>
+                  <a:tcPr/>
+                </a:tc>
+                <a:tc>
+                  <a:txBody>
+                    <a:bodyPr/>
+                    <a:lstStyle/>
+                    <a:p>
+                      <a:r>
+                        <a:rPr sz="1000" b="0">
+                          <a:solidFill>
+                            <a:srgbClr val="1C1C1E"/>
+                          </a:solidFill>
+                          <a:latin typeface="Microsoft YaHei"/>
+                        </a:rPr>
+                        <a:t>φ=0.50/0.75 命中断点、φ=0.25 偏保守（单轮首验，图 21）</a:t>
+                      </a:r>
+                    </a:p>
+                  </a:txBody>
+                  <a:tcPr/>
+                </a:tc>
+              </a:tr>
+            </a:tbl>
+          </a:graphicData>
+        </a:graphic>
+      </p:graphicFrame>
     </p:spTree>
   </p:cSld>
   <p:clrMapOvr>
@@ -14151,8 +14727,8 @@
         </p:nvSpPr>
         <p:spPr>
           <a:xfrm>
-            <a:off x="0" y="2651760"/>
-            <a:ext cx="12191695" cy="1371600"/>
+            <a:off x="0" y="0"/>
+            <a:ext cx="12191695" cy="777240"/>
           </a:xfrm>
           <a:prstGeom prst="rect">
             <a:avLst/>
@@ -14179,18 +14755,109 @@
           </a:fontRef>
         </p:style>
         <p:txBody>
-          <a:bodyPr rtlCol="0" anchor="ctr" lIns="731520"/>
+          <a:bodyPr rtlCol="0" anchor="ctr" lIns="411480" tIns="54864"/>
           <a:lstStyle/>
           <a:p>
             <a:pPr algn="ctr"/>
             <a:r>
-              <a:rPr sz="3000" b="1">
+              <a:rPr sz="2100" b="1">
                 <a:solidFill>
                   <a:srgbClr val="FFFFFF"/>
                 </a:solidFill>
                 <a:latin typeface="Microsoft YaHei"/>
               </a:rPr>
-              <a:t>9 资源效率模块</a:t>
+              <a:t>8 物理机验证与安全容量模型</a:t>
+            </a:r>
+          </a:p>
+          <a:p>
+            <a:r>
+              <a:rPr sz="1200">
+                <a:solidFill>
+                  <a:srgbClr val="D8E2F0"/>
+                </a:solidFill>
+                <a:latin typeface="Microsoft YaHei"/>
+              </a:rPr>
+              <a:t>8.8 本章数据与工件</a:t>
+            </a:r>
+          </a:p>
+        </p:txBody>
+      </p:sp>
+      <p:sp>
+        <p:nvSpPr>
+          <p:cNvPr id="4" name="TextBox 3"/>
+          <p:cNvSpPr txBox="1"/>
+          <p:nvPr/>
+        </p:nvSpPr>
+        <p:spPr>
+          <a:xfrm>
+            <a:off x="502920" y="914400"/>
+            <a:ext cx="11155680" cy="5486400"/>
+          </a:xfrm>
+          <a:prstGeom prst="rect">
+            <a:avLst/>
+          </a:prstGeom>
+          <a:noFill/>
+        </p:spPr>
+        <p:txBody>
+          <a:bodyPr wrap="square">
+            <a:spAutoFit/>
+          </a:bodyPr>
+          <a:lstStyle/>
+          <a:p>
+            <a:pPr lvl="1">
+              <a:lnSpc>
+                <a:spcPct val="108000"/>
+              </a:lnSpc>
+              <a:spcAft>
+                <a:spcPts val="400"/>
+              </a:spcAft>
+            </a:pPr>
+            <a:r>
+              <a:rPr sz="1200" b="0">
+                <a:solidFill>
+                  <a:srgbClr val="1C1C1E"/>
+                </a:solidFill>
+                <a:latin typeface="Microsoft YaHei"/>
+              </a:rPr>
+              <a:t>• 数据：research_data/phys8269_pilot/（多规模扫描 JSONL + 细膝点 4 轮 + 同步 3 轮探针 raw + 售卖阶梯 JSONL + 分析文档）</a:t>
+            </a:r>
+          </a:p>
+          <a:p>
+            <a:pPr lvl="1">
+              <a:lnSpc>
+                <a:spcPct val="108000"/>
+              </a:lnSpc>
+              <a:spcAft>
+                <a:spcPts val="400"/>
+              </a:spcAft>
+            </a:pPr>
+            <a:r>
+              <a:rPr sz="1200" b="0">
+                <a:solidFill>
+                  <a:srgbClr val="1C1C1E"/>
+                </a:solidFill>
+                <a:latin typeface="Microsoft YaHei"/>
+              </a:rPr>
+              <a:t>• 图：figs/fig14_phys_knee.png、fig15_phys_sync.png（含 3 轮簇间隔复现）、fig16_phys_sell.png（一键复现：figs/make_phys_figs.py）</a:t>
+            </a:r>
+          </a:p>
+          <a:p>
+            <a:pPr lvl="1">
+              <a:lnSpc>
+                <a:spcPct val="108000"/>
+              </a:lnSpc>
+              <a:spcAft>
+                <a:spcPts val="400"/>
+              </a:spcAft>
+            </a:pPr>
+            <a:r>
+              <a:rPr sz="1200" b="0">
+                <a:solidFill>
+                  <a:srgbClr val="1C1C1E"/>
+                </a:solidFill>
+                <a:latin typeface="Microsoft YaHei"/>
+              </a:rPr>
+              <a:t>• 工具：tools/tb_sweep.py（膝点）、tools/tb_sync.py（相位）、tools/tb_sell.py（售卖阶梯），全部宿主机侧执行</a:t>
             </a:r>
           </a:p>
         </p:txBody>
@@ -14264,8 +14931,8 @@
         </p:nvSpPr>
         <p:spPr>
           <a:xfrm>
-            <a:off x="0" y="0"/>
-            <a:ext cx="12191695" cy="658368"/>
+            <a:off x="0" y="2651760"/>
+            <a:ext cx="12191695" cy="1371600"/>
           </a:xfrm>
           <a:prstGeom prst="rect">
             <a:avLst/>
@@ -14292,60 +14959,18 @@
           </a:fontRef>
         </p:style>
         <p:txBody>
-          <a:bodyPr rtlCol="0" anchor="ctr" lIns="411480" tIns="54864"/>
+          <a:bodyPr rtlCol="0" anchor="ctr" lIns="731520"/>
           <a:lstStyle/>
           <a:p>
             <a:pPr algn="ctr"/>
             <a:r>
-              <a:rPr sz="2100" b="1">
+              <a:rPr sz="3000" b="1">
                 <a:solidFill>
                   <a:srgbClr val="FFFFFF"/>
                 </a:solidFill>
                 <a:latin typeface="Microsoft YaHei"/>
               </a:rPr>
               <a:t>9 资源效率模块</a:t>
-            </a:r>
-          </a:p>
-        </p:txBody>
-      </p:sp>
-      <p:sp>
-        <p:nvSpPr>
-          <p:cNvPr id="4" name="TextBox 3"/>
-          <p:cNvSpPr txBox="1"/>
-          <p:nvPr/>
-        </p:nvSpPr>
-        <p:spPr>
-          <a:xfrm>
-            <a:off x="502920" y="914400"/>
-            <a:ext cx="11155680" cy="5486400"/>
-          </a:xfrm>
-          <a:prstGeom prst="rect">
-            <a:avLst/>
-          </a:prstGeom>
-          <a:noFill/>
-        </p:spPr>
-        <p:txBody>
-          <a:bodyPr wrap="square">
-            <a:spAutoFit/>
-          </a:bodyPr>
-          <a:lstStyle/>
-          <a:p>
-            <a:pPr>
-              <a:lnSpc>
-                <a:spcPct val="108000"/>
-              </a:lnSpc>
-              <a:spcAft>
-                <a:spcPts val="400"/>
-              </a:spcAft>
-            </a:pPr>
-            <a:r>
-              <a:rPr sz="1100" b="0">
-                <a:solidFill>
-                  <a:srgbClr val="5A6472"/>
-                </a:solidFill>
-                <a:latin typeface="Microsoft YaHei"/>
-              </a:rPr>
-              <a:t>〔本章承接"无回归的资源效率最大化"支柱（骨架 §9）：在"服务 P99 ≤ 10 ms + 客户速率不劣化 + VPS 可见内存不下降" 三条无回归约束下，逐资源给出精密控制的实测增益。Phase C 实验正在物理机上自动运行（screen phasec）， 数据落地后填入对应小节（规划图：Fig.22–26）。定位说明：本章为支撑性模块（核心贡献链在 3/5/7/8 章的识别—预测—行动三支柱）；若模块数据不齐，按评审建议缩减本章或移至后续工作。〕</a:t>
             </a:r>
           </a:p>
         </p:txBody>
@@ -14586,7 +15211,7 @@
         <p:spPr>
           <a:xfrm>
             <a:off x="0" y="0"/>
-            <a:ext cx="12191695" cy="777240"/>
+            <a:ext cx="12191695" cy="658368"/>
           </a:xfrm>
           <a:prstGeom prst="rect">
             <a:avLst/>
@@ -14625,17 +15250,6 @@
                 <a:latin typeface="Microsoft YaHei"/>
               </a:rPr>
               <a:t>9 资源效率模块</a:t>
-            </a:r>
-          </a:p>
-          <a:p>
-            <a:r>
-              <a:rPr sz="1200">
-                <a:solidFill>
-                  <a:srgbClr val="D8E2F0"/>
-                </a:solidFill>
-                <a:latin typeface="Microsoft YaHei"/>
-              </a:rPr>
-              <a:t>9.1 CPU：微周期配额——同样配额，精度决定客户速率（图 22）</a:t>
             </a:r>
           </a:p>
         </p:txBody>
@@ -14671,32 +15285,13 @@
               </a:spcAft>
             </a:pPr>
             <a:r>
-              <a:rPr sz="1250" b="0">
-                <a:solidFill>
-                  <a:srgbClr val="1C1C1E"/>
-                </a:solidFill>
-                <a:latin typeface="Microsoft YaHei"/>
-              </a:rPr>
-              <a:t>设置。 8 核池、5 台满载客户、各 50% 配额（cpu.max），周期取 2 / 4 / 10 / 100 ms / 1 s 五档 + 无配额基线；每档 15 s 稳定后读服务 P99、客户工作相速率与节流时长增量。注意内核下界：配额最小 1 ms，故 50% 配额的最小周期为 2 ms（500 µs 配额会被内核 EINVAL 拒绝——这是"高精度"的物理边界）。</a:t>
-            </a:r>
-          </a:p>
-          <a:p>
-            <a:pPr>
-              <a:lnSpc>
-                <a:spcPct val="108000"/>
-              </a:lnSpc>
-              <a:spcAft>
-                <a:spcPts val="400"/>
-              </a:spcAft>
-            </a:pPr>
-            <a:r>
-              <a:rPr sz="1250" b="0">
-                <a:solidFill>
-                  <a:srgbClr val="1C1C1E"/>
-                </a:solidFill>
-                <a:latin typeface="Microsoft YaHei"/>
-              </a:rPr>
-              <a:t>结果（表/图 22）。</a:t>
+              <a:rPr sz="1100" b="0">
+                <a:solidFill>
+                  <a:srgbClr val="5A6472"/>
+                </a:solidFill>
+                <a:latin typeface="Microsoft YaHei"/>
+              </a:rPr>
+              <a:t>〔本章承接"无回归的资源效率最大化"支柱（骨架 §9）：在"服务 P99 ≤ 10 ms + 客户速率不劣化 + VPS 可见内存不下降" 三条无回归约束下，逐资源给出精密控制的实测增益。Phase C 实验正在物理机上自动运行（screen phasec）， 数据落地后填入对应小节（规划图：Fig.22–26）。定位说明：本章为支撑性模块（核心贡献链在 3/5/7/8 章的识别—预测—行动三支柱）；若模块数据不齐，按评审建议缩减本章或移至后续工作。〕</a:t>
             </a:r>
           </a:p>
         </p:txBody>
@@ -14825,6 +15420,191 @@
           </a:p>
         </p:txBody>
       </p:sp>
+      <p:sp>
+        <p:nvSpPr>
+          <p:cNvPr id="4" name="TextBox 3"/>
+          <p:cNvSpPr txBox="1"/>
+          <p:nvPr/>
+        </p:nvSpPr>
+        <p:spPr>
+          <a:xfrm>
+            <a:off x="502920" y="914400"/>
+            <a:ext cx="11155680" cy="5486400"/>
+          </a:xfrm>
+          <a:prstGeom prst="rect">
+            <a:avLst/>
+          </a:prstGeom>
+          <a:noFill/>
+        </p:spPr>
+        <p:txBody>
+          <a:bodyPr wrap="square">
+            <a:spAutoFit/>
+          </a:bodyPr>
+          <a:lstStyle/>
+          <a:p>
+            <a:pPr>
+              <a:lnSpc>
+                <a:spcPct val="108000"/>
+              </a:lnSpc>
+              <a:spcAft>
+                <a:spcPts val="400"/>
+              </a:spcAft>
+            </a:pPr>
+            <a:r>
+              <a:rPr sz="1250" b="0">
+                <a:solidFill>
+                  <a:srgbClr val="1C1C1E"/>
+                </a:solidFill>
+                <a:latin typeface="Microsoft YaHei"/>
+              </a:rPr>
+              <a:t>设置。 8 核池、5 台满载客户、各 50% 配额（cpu.max），周期取 2 / 4 / 10 / 100 ms / 1 s 五档 + 无配额基线；每档 15 s 稳定后读服务 P99、客户工作相速率与节流时长增量。注意内核下界：配额最小 1 ms，故 50% 配额的最小周期为 2 ms（500 µs 配额会被内核 EINVAL 拒绝——这是"高精度"的物理边界）。</a:t>
+            </a:r>
+          </a:p>
+          <a:p>
+            <a:pPr>
+              <a:lnSpc>
+                <a:spcPct val="108000"/>
+              </a:lnSpc>
+              <a:spcAft>
+                <a:spcPts val="400"/>
+              </a:spcAft>
+            </a:pPr>
+            <a:r>
+              <a:rPr sz="1250" b="0">
+                <a:solidFill>
+                  <a:srgbClr val="1C1C1E"/>
+                </a:solidFill>
+                <a:latin typeface="Microsoft YaHei"/>
+              </a:rPr>
+              <a:t>结果（表/图 22）。</a:t>
+            </a:r>
+          </a:p>
+        </p:txBody>
+      </p:sp>
+    </p:spTree>
+  </p:cSld>
+  <p:clrMapOvr>
+    <a:masterClrMapping/>
+  </p:clrMapOvr>
+</p:sld>
+</file>
+
+<file path=ppt/slides/slide142.xml><?xml version="1.0" encoding="utf-8"?>
+<p:sld xmlns:a="http://schemas.openxmlformats.org/drawingml/2006/main" xmlns:p="http://schemas.openxmlformats.org/presentationml/2006/main" xmlns:r="http://schemas.openxmlformats.org/officeDocument/2006/relationships">
+  <p:cSld>
+    <p:spTree>
+      <p:nvGrpSpPr>
+        <p:cNvPr id="1" name=""/>
+        <p:cNvGrpSpPr/>
+        <p:nvPr/>
+      </p:nvGrpSpPr>
+      <p:grpSpPr/>
+      <p:sp>
+        <p:nvSpPr>
+          <p:cNvPr id="2" name="Rectangle 1"/>
+          <p:cNvSpPr/>
+          <p:nvPr/>
+        </p:nvSpPr>
+        <p:spPr>
+          <a:xfrm>
+            <a:off x="0" y="0"/>
+            <a:ext cx="12191695" cy="6858000"/>
+          </a:xfrm>
+          <a:prstGeom prst="rect">
+            <a:avLst/>
+          </a:prstGeom>
+          <a:solidFill>
+            <a:srgbClr val="FFFFFF"/>
+          </a:solidFill>
+          <a:ln>
+            <a:noFill/>
+          </a:ln>
+        </p:spPr>
+        <p:style>
+          <a:lnRef idx="1">
+            <a:schemeClr val="accent1"/>
+          </a:lnRef>
+          <a:fillRef idx="3">
+            <a:schemeClr val="accent1"/>
+          </a:fillRef>
+          <a:effectRef idx="2">
+            <a:schemeClr val="accent1"/>
+          </a:effectRef>
+          <a:fontRef idx="minor">
+            <a:schemeClr val="lt1"/>
+          </a:fontRef>
+        </p:style>
+        <p:txBody>
+          <a:bodyPr rtlCol="0" anchor="ctr"/>
+          <a:lstStyle/>
+          <a:p>
+            <a:pPr algn="ctr"/>
+          </a:p>
+        </p:txBody>
+      </p:sp>
+      <p:sp>
+        <p:nvSpPr>
+          <p:cNvPr id="3" name="Rectangle 2"/>
+          <p:cNvSpPr/>
+          <p:nvPr/>
+        </p:nvSpPr>
+        <p:spPr>
+          <a:xfrm>
+            <a:off x="0" y="0"/>
+            <a:ext cx="12191695" cy="777240"/>
+          </a:xfrm>
+          <a:prstGeom prst="rect">
+            <a:avLst/>
+          </a:prstGeom>
+          <a:solidFill>
+            <a:srgbClr val="123A63"/>
+          </a:solidFill>
+          <a:ln>
+            <a:noFill/>
+          </a:ln>
+        </p:spPr>
+        <p:style>
+          <a:lnRef idx="1">
+            <a:schemeClr val="accent1"/>
+          </a:lnRef>
+          <a:fillRef idx="3">
+            <a:schemeClr val="accent1"/>
+          </a:fillRef>
+          <a:effectRef idx="2">
+            <a:schemeClr val="accent1"/>
+          </a:effectRef>
+          <a:fontRef idx="minor">
+            <a:schemeClr val="lt1"/>
+          </a:fontRef>
+        </p:style>
+        <p:txBody>
+          <a:bodyPr rtlCol="0" anchor="ctr" lIns="411480" tIns="54864"/>
+          <a:lstStyle/>
+          <a:p>
+            <a:pPr algn="ctr"/>
+            <a:r>
+              <a:rPr sz="2100" b="1">
+                <a:solidFill>
+                  <a:srgbClr val="FFFFFF"/>
+                </a:solidFill>
+                <a:latin typeface="Microsoft YaHei"/>
+              </a:rPr>
+              <a:t>9 资源效率模块</a:t>
+            </a:r>
+          </a:p>
+          <a:p>
+            <a:r>
+              <a:rPr sz="1200">
+                <a:solidFill>
+                  <a:srgbClr val="D8E2F0"/>
+                </a:solidFill>
+                <a:latin typeface="Microsoft YaHei"/>
+              </a:rPr>
+              <a:t>9.1 CPU：微周期配额——同样配额，精度决定客户速率（图 22）</a:t>
+            </a:r>
+          </a:p>
+        </p:txBody>
+      </p:sp>
       <p:graphicFrame>
         <p:nvGraphicFramePr>
           <p:cNvPr id="4" name="Table 3"/>
@@ -15395,191 +16175,6 @@
 </p:sld>
 </file>
 
-<file path=ppt/slides/slide142.xml><?xml version="1.0" encoding="utf-8"?>
-<p:sld xmlns:a="http://schemas.openxmlformats.org/drawingml/2006/main" xmlns:p="http://schemas.openxmlformats.org/presentationml/2006/main" xmlns:r="http://schemas.openxmlformats.org/officeDocument/2006/relationships">
-  <p:cSld>
-    <p:spTree>
-      <p:nvGrpSpPr>
-        <p:cNvPr id="1" name=""/>
-        <p:cNvGrpSpPr/>
-        <p:nvPr/>
-      </p:nvGrpSpPr>
-      <p:grpSpPr/>
-      <p:sp>
-        <p:nvSpPr>
-          <p:cNvPr id="2" name="Rectangle 1"/>
-          <p:cNvSpPr/>
-          <p:nvPr/>
-        </p:nvSpPr>
-        <p:spPr>
-          <a:xfrm>
-            <a:off x="0" y="0"/>
-            <a:ext cx="12191695" cy="6858000"/>
-          </a:xfrm>
-          <a:prstGeom prst="rect">
-            <a:avLst/>
-          </a:prstGeom>
-          <a:solidFill>
-            <a:srgbClr val="FFFFFF"/>
-          </a:solidFill>
-          <a:ln>
-            <a:noFill/>
-          </a:ln>
-        </p:spPr>
-        <p:style>
-          <a:lnRef idx="1">
-            <a:schemeClr val="accent1"/>
-          </a:lnRef>
-          <a:fillRef idx="3">
-            <a:schemeClr val="accent1"/>
-          </a:fillRef>
-          <a:effectRef idx="2">
-            <a:schemeClr val="accent1"/>
-          </a:effectRef>
-          <a:fontRef idx="minor">
-            <a:schemeClr val="lt1"/>
-          </a:fontRef>
-        </p:style>
-        <p:txBody>
-          <a:bodyPr rtlCol="0" anchor="ctr"/>
-          <a:lstStyle/>
-          <a:p>
-            <a:pPr algn="ctr"/>
-          </a:p>
-        </p:txBody>
-      </p:sp>
-      <p:sp>
-        <p:nvSpPr>
-          <p:cNvPr id="3" name="Rectangle 2"/>
-          <p:cNvSpPr/>
-          <p:nvPr/>
-        </p:nvSpPr>
-        <p:spPr>
-          <a:xfrm>
-            <a:off x="0" y="0"/>
-            <a:ext cx="12191695" cy="777240"/>
-          </a:xfrm>
-          <a:prstGeom prst="rect">
-            <a:avLst/>
-          </a:prstGeom>
-          <a:solidFill>
-            <a:srgbClr val="123A63"/>
-          </a:solidFill>
-          <a:ln>
-            <a:noFill/>
-          </a:ln>
-        </p:spPr>
-        <p:style>
-          <a:lnRef idx="1">
-            <a:schemeClr val="accent1"/>
-          </a:lnRef>
-          <a:fillRef idx="3">
-            <a:schemeClr val="accent1"/>
-          </a:fillRef>
-          <a:effectRef idx="2">
-            <a:schemeClr val="accent1"/>
-          </a:effectRef>
-          <a:fontRef idx="minor">
-            <a:schemeClr val="lt1"/>
-          </a:fontRef>
-        </p:style>
-        <p:txBody>
-          <a:bodyPr rtlCol="0" anchor="ctr" lIns="411480" tIns="54864"/>
-          <a:lstStyle/>
-          <a:p>
-            <a:pPr algn="ctr"/>
-            <a:r>
-              <a:rPr sz="2100" b="1">
-                <a:solidFill>
-                  <a:srgbClr val="FFFFFF"/>
-                </a:solidFill>
-                <a:latin typeface="Microsoft YaHei"/>
-              </a:rPr>
-              <a:t>9 资源效率模块</a:t>
-            </a:r>
-          </a:p>
-          <a:p>
-            <a:r>
-              <a:rPr sz="1200">
-                <a:solidFill>
-                  <a:srgbClr val="D8E2F0"/>
-                </a:solidFill>
-                <a:latin typeface="Microsoft YaHei"/>
-              </a:rPr>
-              <a:t>9.1 CPU：微周期配额——同样配额，精度决定客户速率（图 22）</a:t>
-            </a:r>
-          </a:p>
-        </p:txBody>
-      </p:sp>
-      <p:sp>
-        <p:nvSpPr>
-          <p:cNvPr id="4" name="TextBox 3"/>
-          <p:cNvSpPr txBox="1"/>
-          <p:nvPr/>
-        </p:nvSpPr>
-        <p:spPr>
-          <a:xfrm>
-            <a:off x="502920" y="914400"/>
-            <a:ext cx="11155680" cy="5486400"/>
-          </a:xfrm>
-          <a:prstGeom prst="rect">
-            <a:avLst/>
-          </a:prstGeom>
-          <a:noFill/>
-        </p:spPr>
-        <p:txBody>
-          <a:bodyPr wrap="square">
-            <a:spAutoFit/>
-          </a:bodyPr>
-          <a:lstStyle/>
-          <a:p>
-            <a:pPr>
-              <a:lnSpc>
-                <a:spcPct val="108000"/>
-              </a:lnSpc>
-              <a:spcAft>
-                <a:spcPts val="400"/>
-              </a:spcAft>
-            </a:pPr>
-            <a:r>
-              <a:rPr sz="1250" b="0">
-                <a:solidFill>
-                  <a:srgbClr val="1C1C1E"/>
-                </a:solidFill>
-                <a:latin typeface="Microsoft YaHei"/>
-              </a:rPr>
-              <a:t>读法。 （i）服务侧全程 0.73–0.75 ms——隔离前提下配额精度对服务保护无影响（与 4.4.1 的"配额不增加安全席位"一致）。（ii）但客户侧代价差异巨大：同样 50% 配额，把周期从 1 s 缩到 2 ms，客户有效速率从 59% 提到 80%（+35%）；即配额"税"的大小主要由周期粒度决定，而非配额比例本身。（iii）各档节流时长合计相近（44–54 s）——速率差异不是"少被限"，而是细粒度交替（1 ms on / 1 ms off）让客户的工作相更满、调度损耗更小。（iv）这是"CPU 精密控制"的首个量化收益：在不提高配额比例（不危及密度结论）的前提下，把经济版客户的体验拉高约三分之一档。</a:t>
-            </a:r>
-          </a:p>
-          <a:p>
-            <a:pPr>
-              <a:lnSpc>
-                <a:spcPct val="108000"/>
-              </a:lnSpc>
-              <a:spcAft>
-                <a:spcPts val="400"/>
-              </a:spcAft>
-            </a:pPr>
-            <a:r>
-              <a:rPr sz="1250" b="0">
-                <a:solidFill>
-                  <a:srgbClr val="1C1C1E"/>
-                </a:solidFill>
-                <a:latin typeface="Microsoft YaHei"/>
-              </a:rPr>
-              <a:t>边界。 单池、满载忙循环负载；速率为工作相均值；调度器/内核版本可能改变绝对值，机制（周期粒度→配额税）与具体数字无关。</a:t>
-            </a:r>
-          </a:p>
-        </p:txBody>
-      </p:sp>
-    </p:spTree>
-  </p:cSld>
-  <p:clrMapOvr>
-    <a:masterClrMapping/>
-  </p:clrMapOvr>
-</p:sld>
-</file>
-
 <file path=ppt/slides/slide143.xml><?xml version="1.0" encoding="utf-8"?>
 <p:sld xmlns:a="http://schemas.openxmlformats.org/drawingml/2006/main" xmlns:p="http://schemas.openxmlformats.org/presentationml/2006/main" xmlns:r="http://schemas.openxmlformats.org/officeDocument/2006/relationships">
   <p:cSld>
@@ -15691,7 +16286,7 @@
                 </a:solidFill>
                 <a:latin typeface="Microsoft YaHei"/>
               </a:rPr>
-              <a:t>9.2 内存：无 balloon 回收三件套（图 23–25）— 部分完成</a:t>
+              <a:t>9.1 CPU：微周期配额——同样配额，精度决定客户速率（图 22）</a:t>
             </a:r>
           </a:p>
         </p:txBody>
@@ -15733,7 +16328,7 @@
                 </a:solidFill>
                 <a:latin typeface="Microsoft YaHei"/>
               </a:rPr>
-              <a:t>已完成（本批数据）。 （i）KSM 舰队去重（ksm1）：64 台同镜像舰队共享 21.9 GB = 舰队内存的 33.4%；ksmd 平均 ~0.16 核；服务 P99 0.73→0.76 ms（零回归）。代价边界：写入 CoW 长尾未测；跨租户去重存在已知侧信道议题，生产上按信任域分层启用。（ii）空闲页上报（FPR）机制验证：手动 300 MB——宿主 memory.current 315→629 MB 随分配、释放后 6–12 s 回落至原位，guest MemTotal 恒 973 MB 不变；附带发现：空闲「1 GB」VM 的宿主实占仅 156–315 MB（FPR 一直在归还空闲页）。（iii）自动化 fpr4（300 MB、stderr 捕获修订版）已排队（final→replay 之后）。进行中：zram 三臂（无 swap / zram / 磁盘 swap × 1 TB 冷页压测）在 final 链尾执行。</a:t>
+              <a:t>读法。 （i）服务侧全程 0.73–0.75 ms——隔离前提下配额精度对服务保护无影响（与 4.4.1 的"配额不增加安全席位"一致）。（ii）但客户侧代价差异巨大：同样 50% 配额，把周期从 1 s 缩到 2 ms，客户有效速率从 59% 提到 80%（+35%）；即配额"税"的大小主要由周期粒度决定，而非配额比例本身。（iii）各档节流时长合计相近（44–54 s）——速率差异不是"少被限"，而是细粒度交替（1 ms on / 1 ms off）让客户的工作相更满、调度损耗更小。（iv）吞吐口径佐证（防“统计假象”）：速率定义为墙钟吞吐（burner 以 n/经过墙钟时间计，节流停顿计入分母；duty=1.0 时工作相即全程）——59%→80% 是真实可交付吞吐；旁证：池忙率 2 ms 56.1% vs 1 s 48.1%，同窗口节流累计 2 ms 44.3 s vs 1 s 54.4 s（+23%）——细周期把被硬停顿的时间还给了客户。（v）这是“CPU 精密控制”的首个量化收益：不提高配额比例即可把经济版体验拉高约三分之一档。</a:t>
             </a:r>
           </a:p>
           <a:p>
@@ -15752,7 +16347,7 @@
                 </a:solidFill>
                 <a:latin typeface="Microsoft YaHei"/>
               </a:rPr>
-              <a:t>指标口径：宿主回收量（ksm sharing / memory.current 回落）、租户可见内存不变性（guest MemTotal/可用内存）、压缩/去重比、PSI 与探针延迟代价。</a:t>
+              <a:t>边界。 单池、单负载类型（满载忙循环）；调度器/内核版本可能改变绝对值，机制（周期粒度→配额税）与数字无关；待补：web/编译型等真实负载上的口径复验（列入待办）。</a:t>
             </a:r>
           </a:p>
         </p:txBody>
@@ -15876,7 +16471,7 @@
                 </a:solidFill>
                 <a:latin typeface="Microsoft YaHei"/>
               </a:rPr>
-              <a:t>9.3 IO：自适应限速对决（图 26）— 待填</a:t>
+              <a:t>9.2 内存：无 balloon 回收三件套（图 23–25）— 部分完成</a:t>
             </a:r>
           </a:p>
         </p:txBody>
@@ -15918,7 +16513,26 @@
                 </a:solidFill>
                 <a:latin typeface="Microsoft YaHei"/>
               </a:rPr>
-              <a:t>（数据源：ioc1，8 台风暴客户 × none/static/adaptive 三臂；指标：宿主 IOPS、服务 P99、租户聚合 IOPS 与逐 op 尾延迟——检验"自适应比静态上限多交付且不伤服务"。）</a:t>
+              <a:t>已完成（本批数据）。 （i）KSM 舰队去重（ksm1）：64 台同镜像舰队共享 21.9 GB = 舰队内存的 33.4%；ksmd 平均 ~0.16 核；服务 P99 0.73→0.76 ms（零回归）。代价边界：写入 CoW 长尾未测；跨租户去重存在已知侧信道议题，生产上按信任域分层启用。（ii）空闲页上报（FPR）机制验证：手动 300 MB——宿主 memory.current 315→629 MB 随分配、释放后 6–12 s 回落至原位，guest MemTotal 恒 973 MB 不变；附带发现：空闲「1 GB」VM 的宿主实占仅 156–315 MB（FPR 一直在归还空闲页）。（iii）自动化 fpr4（300 MB、stderr 捕获修订版）已排队（final→replay 之后）。进行中：zram 三臂（无 swap / zram / 磁盘 swap × 1 TB 冷页压测）在 final 链尾执行。</a:t>
+            </a:r>
+          </a:p>
+          <a:p>
+            <a:pPr>
+              <a:lnSpc>
+                <a:spcPct val="108000"/>
+              </a:lnSpc>
+              <a:spcAft>
+                <a:spcPts val="400"/>
+              </a:spcAft>
+            </a:pPr>
+            <a:r>
+              <a:rPr sz="1250" b="0">
+                <a:solidFill>
+                  <a:srgbClr val="1C1C1E"/>
+                </a:solidFill>
+                <a:latin typeface="Microsoft YaHei"/>
+              </a:rPr>
+              <a:t>指标口径：宿主回收量（ksm sharing / memory.current 回落）、租户可见内存不变性（guest MemTotal/可用内存）、压缩/去重比、PSI 与探针延迟代价。</a:t>
             </a:r>
           </a:p>
         </p:txBody>
@@ -16042,7 +16656,7 @@
                 </a:solidFill>
                 <a:latin typeface="Microsoft YaHei"/>
               </a:rPr>
-              <a:t>9.4 与"无回归"约束的关系 — 待填</a:t>
+              <a:t>9.3 IO：自适应限速对决（图 26）— 待填</a:t>
             </a:r>
           </a:p>
         </p:txBody>
@@ -16084,7 +16698,7 @@
                 </a:solidFill>
                 <a:latin typeface="Microsoft YaHei"/>
               </a:rPr>
-              <a:t>（每机制记三笔账：密度增益 / 隐形代价 / 租户可见回归；KSM、FPR、隔离为零可见回归；zram/配额/IO 上限为明确计价的回归。呼应第 5 章的"经济版 = 明码标价的回归预算"。）（ksm1 [22]：舰队去重扫描——首批结果：共享 21.9 GB = 舰队内存 33.4%，ksmd ≈ 0.16 核，服务 P99 0.73→0.76 ms；代价边界：写入 CoW 长尾未测、跨租户去重存在已知侧信道议题，生产上按信任域分层启用；fpr1/fpr2：空闲页上报——空闲"1 GB"VM 宿主实占仅 156–315 MB，300 MB 客户分配在释放后 6–12 s 回收，guest 可见内存不变；zram1：无 swap/zram/磁盘 swap 三臂（1 TB 冷页压测）。）</a:t>
+              <a:t>（数据源：ioc1，8 台风暴客户 × none/static/adaptive 三臂；指标：宿主 IOPS、服务 P99、租户聚合 IOPS 与逐 op 尾延迟——检验"自适应比静态上限多交付且不伤服务"。）</a:t>
             </a:r>
           </a:p>
         </p:txBody>
@@ -16158,8 +16772,8 @@
         </p:nvSpPr>
         <p:spPr>
           <a:xfrm>
-            <a:off x="0" y="2651760"/>
-            <a:ext cx="12191695" cy="1371600"/>
+            <a:off x="0" y="0"/>
+            <a:ext cx="12191695" cy="777240"/>
           </a:xfrm>
           <a:prstGeom prst="rect">
             <a:avLst/>
@@ -16186,18 +16800,71 @@
           </a:fontRef>
         </p:style>
         <p:txBody>
-          <a:bodyPr rtlCol="0" anchor="ctr" lIns="731520"/>
+          <a:bodyPr rtlCol="0" anchor="ctr" lIns="411480" tIns="54864"/>
           <a:lstStyle/>
           <a:p>
             <a:pPr algn="ctr"/>
             <a:r>
-              <a:rPr sz="3000" b="1">
+              <a:rPr sz="2100" b="1">
                 <a:solidFill>
                   <a:srgbClr val="FFFFFF"/>
                 </a:solidFill>
                 <a:latin typeface="Microsoft YaHei"/>
               </a:rPr>
-              <a:t>10 讨论与局限</a:t>
+              <a:t>9 资源效率模块</a:t>
+            </a:r>
+          </a:p>
+          <a:p>
+            <a:r>
+              <a:rPr sz="1200">
+                <a:solidFill>
+                  <a:srgbClr val="D8E2F0"/>
+                </a:solidFill>
+                <a:latin typeface="Microsoft YaHei"/>
+              </a:rPr>
+              <a:t>9.4 与"无回归"约束的关系 — 待填</a:t>
+            </a:r>
+          </a:p>
+        </p:txBody>
+      </p:sp>
+      <p:sp>
+        <p:nvSpPr>
+          <p:cNvPr id="4" name="TextBox 3"/>
+          <p:cNvSpPr txBox="1"/>
+          <p:nvPr/>
+        </p:nvSpPr>
+        <p:spPr>
+          <a:xfrm>
+            <a:off x="502920" y="914400"/>
+            <a:ext cx="11155680" cy="5486400"/>
+          </a:xfrm>
+          <a:prstGeom prst="rect">
+            <a:avLst/>
+          </a:prstGeom>
+          <a:noFill/>
+        </p:spPr>
+        <p:txBody>
+          <a:bodyPr wrap="square">
+            <a:spAutoFit/>
+          </a:bodyPr>
+          <a:lstStyle/>
+          <a:p>
+            <a:pPr>
+              <a:lnSpc>
+                <a:spcPct val="108000"/>
+              </a:lnSpc>
+              <a:spcAft>
+                <a:spcPts val="400"/>
+              </a:spcAft>
+            </a:pPr>
+            <a:r>
+              <a:rPr sz="1250" b="0">
+                <a:solidFill>
+                  <a:srgbClr val="1C1C1E"/>
+                </a:solidFill>
+                <a:latin typeface="Microsoft YaHei"/>
+              </a:rPr>
+              <a:t>（每机制记三笔账：密度增益 / 隐形代价 / 租户可见回归；KSM、FPR、隔离为零可见回归；zram/配额/IO 上限为明确计价的回归。呼应第 5 章的"经济版 = 明码标价的回归预算"。）（ksm1 [22]：舰队去重扫描——首批结果：共享 21.9 GB = 舰队内存 33.4%，ksmd ≈ 0.16 核，服务 P99 0.73→0.76 ms；代价边界：写入 CoW 长尾未测、跨租户去重存在已知侧信道议题，生产上按信任域分层启用；fpr1/fpr2：空闲页上报——空闲"1 GB"VM 宿主实占仅 156–315 MB，300 MB 客户分配在释放后 6–12 s 回收，guest 可见内存不变；zram1：无 swap/zram/磁盘 swap 三臂（1 TB 冷页压测）。）</a:t>
             </a:r>
           </a:p>
         </p:txBody>
@@ -16271,8 +16938,8 @@
         </p:nvSpPr>
         <p:spPr>
           <a:xfrm>
-            <a:off x="0" y="0"/>
-            <a:ext cx="12191695" cy="777240"/>
+            <a:off x="0" y="2651760"/>
+            <a:ext cx="12191695" cy="1371600"/>
           </a:xfrm>
           <a:prstGeom prst="rect">
             <a:avLst/>
@@ -16299,90 +16966,18 @@
           </a:fontRef>
         </p:style>
         <p:txBody>
-          <a:bodyPr rtlCol="0" anchor="ctr" lIns="411480" tIns="54864"/>
+          <a:bodyPr rtlCol="0" anchor="ctr" lIns="731520"/>
           <a:lstStyle/>
           <a:p>
             <a:pPr algn="ctr"/>
             <a:r>
-              <a:rPr sz="2100" b="1">
+              <a:rPr sz="3000" b="1">
                 <a:solidFill>
                   <a:srgbClr val="FFFFFF"/>
                 </a:solidFill>
                 <a:latin typeface="Microsoft YaHei"/>
               </a:rPr>
               <a:t>10 讨论与局限</a:t>
-            </a:r>
-          </a:p>
-          <a:p>
-            <a:r>
-              <a:rPr sz="1200">
-                <a:solidFill>
-                  <a:srgbClr val="D8E2F0"/>
-                </a:solidFill>
-                <a:latin typeface="Microsoft YaHei"/>
-              </a:rPr>
-              <a:t>10.1 哪些结论可迁移，哪些绑定本环境</a:t>
-            </a:r>
-          </a:p>
-        </p:txBody>
-      </p:sp>
-      <p:sp>
-        <p:nvSpPr>
-          <p:cNvPr id="4" name="TextBox 3"/>
-          <p:cNvSpPr txBox="1"/>
-          <p:nvPr/>
-        </p:nvSpPr>
-        <p:spPr>
-          <a:xfrm>
-            <a:off x="502920" y="914400"/>
-            <a:ext cx="11155680" cy="5486400"/>
-          </a:xfrm>
-          <a:prstGeom prst="rect">
-            <a:avLst/>
-          </a:prstGeom>
-          <a:noFill/>
-        </p:spPr>
-        <p:txBody>
-          <a:bodyPr wrap="square">
-            <a:spAutoFit/>
-          </a:bodyPr>
-          <a:lstStyle/>
-          <a:p>
-            <a:pPr>
-              <a:lnSpc>
-                <a:spcPct val="108000"/>
-              </a:lnSpc>
-              <a:spcAft>
-                <a:spcPts val="400"/>
-              </a:spcAft>
-            </a:pPr>
-            <a:r>
-              <a:rPr sz="1250" b="0">
-                <a:solidFill>
-                  <a:srgbClr val="1C1C1E"/>
-                </a:solidFill>
-                <a:latin typeface="Microsoft YaHei"/>
-              </a:rPr>
-              <a:t>可迁移的机制性结论： （i）尾延迟由瞬时并发/重叠驱动而非平均利用率——这与核心数、虚拟化层次无关，只与"可运行线程集合是否周期性地超过容量"有关；（ii）截断需求的逻辑——任何以配额/限流实现保底的系统都会让用量低估需求，节流证据是可移植的检测器；（iii）控制手段的可靠性层级——隔离 &gt; 硬限速 &gt; 软优先级，后者在 KVM/CFS 与块层（默认调度器）上的失效有机制解释（锁持有者抢占、调度信用、uq 分发），不是本测试床的偶然。</a:t>
-            </a:r>
-          </a:p>
-          <a:p>
-            <a:pPr>
-              <a:lnSpc>
-                <a:spcPct val="108000"/>
-              </a:lnSpc>
-              <a:spcAft>
-                <a:spcPts val="400"/>
-              </a:spcAft>
-            </a:pPr>
-            <a:r>
-              <a:rPr sz="1250" b="0">
-                <a:solidFill>
-                  <a:srgbClr val="1C1C1E"/>
-                </a:solidFill>
-                <a:latin typeface="Microsoft YaHei"/>
-              </a:rPr>
-              <a:t>绑定本环境的数值： 膝点"3→4"特指 4 逻辑核 + 每客户 1 核满载的最坏形态；内存翻车点（约 13.8 GB 客户驻留 + 1 GB swap）绑定 19.5 GiB 物理与 swap 配置；IO 数字绑定虚拟磁盘与宿主调度器（none，无 BFQ）。正文给出的是机制与相对的"上限—代价"关系，读者应按自身核数与预留重算绝对值。</a:t>
             </a:r>
           </a:p>
         </p:txBody>
@@ -16506,7 +17101,7 @@
                 </a:solidFill>
                 <a:latin typeface="Microsoft YaHei"/>
               </a:rPr>
-              <a:t>10.2 SLO 档位与"容量—质量"曲线</a:t>
+              <a:t>10.1 哪些结论可迁移，哪些绑定本环境</a:t>
             </a:r>
           </a:p>
         </p:txBody>
@@ -16548,7 +17143,26 @@
                 </a:solidFill>
                 <a:latin typeface="Microsoft YaHei"/>
               </a:rPr>
-              <a:t>本文全程使用严格档 P99 ≤ 10 ms。真实低价客户并无正式 SLO、感知阈值通常远宽（数十毫秒级），而我们的数据显示：同一 10 台混合客群，10 ms 档全员违约、若放到 ~30 ms 档多数场景无虞。"能卖多少"因此不是常量，而是 SLO 的函数——建议服务商把"密度—档位"做成显式产品参数（例如经济版承诺 P99 ≤ 50 ms、标准版 ≤ 20 ms），而不是把最严档隐含在所有人身上。这一敏感性分析属于【待补实验】，但机制与初步数据已齐。</a:t>
+              <a:t>可迁移的机制性结论： （i）尾延迟由瞬时并发/重叠驱动而非平均利用率——这与核心数、虚拟化层次无关，只与"可运行线程集合是否周期性地超过容量"有关；（ii）截断需求的逻辑——任何以配额/限流实现保底的系统都会让用量低估需求，节流证据是可移植的检测器；（iii）控制手段的可靠性层级——隔离 &gt; 硬限速 &gt; 软优先级，后者在 KVM/CFS 与块层（默认调度器）上的失效有机制解释（锁持有者抢占、调度信用、uq 分发），不是本测试床的偶然。</a:t>
+            </a:r>
+          </a:p>
+          <a:p>
+            <a:pPr>
+              <a:lnSpc>
+                <a:spcPct val="108000"/>
+              </a:lnSpc>
+              <a:spcAft>
+                <a:spcPts val="400"/>
+              </a:spcAft>
+            </a:pPr>
+            <a:r>
+              <a:rPr sz="1250" b="0">
+                <a:solidFill>
+                  <a:srgbClr val="1C1C1E"/>
+                </a:solidFill>
+                <a:latin typeface="Microsoft YaHei"/>
+              </a:rPr>
+              <a:t>绑定本环境的数值： 膝点"3→4"特指 4 逻辑核 + 每客户 1 核满载的最坏形态；内存翻车点（约 13.8 GB 客户驻留 + 1 GB swap）绑定 19.5 GiB 物理与 swap 配置；IO 数字绑定虚拟磁盘与宿主调度器（none，无 BFQ）。正文给出的是机制与相对的"上限—代价"关系，读者应按自身核数与预留重算绝对值。</a:t>
             </a:r>
           </a:p>
         </p:txBody>
@@ -16672,7 +17286,7 @@
                 </a:solidFill>
                 <a:latin typeface="Microsoft YaHei"/>
               </a:rPr>
-              <a:t>10.3 设计含义</a:t>
+              <a:t>10.2 SLO 档位与"容量—质量"曲线</a:t>
             </a:r>
           </a:p>
         </p:txBody>
@@ -16714,7 +17328,7 @@
                 </a:solidFill>
                 <a:latin typeface="Microsoft YaHei"/>
               </a:rPr>
-              <a:t>对服务商：先隔离、后密度——为敏感业务划出哪怕一个专属核，收益大于任何调参；内存与 IO 用"双闸/上限"兜底；售卖的"名义包络"与"保护包络"分开表述（分层定价的依据）；准入用证据（节流计数、时间对齐的需求上分位）而不是面板数字。对平台/系统建设者：cgroup v2 的若干"直觉口径"需要实测校准——IO 记账落在整盘而非分区；io.weight 依赖 IO 调度器选择（另有基于 IO Cost 的 io.cost.* 路线，未在本环境验证）；memory.high 的回收压力会外溢到宿主 swap（需要 memory.swap.max 或禁 swap 配合，且作为软阈值不构成 OOM 豁免）；CPU 权重几乎不是延迟保护工具。这些语义空白值得在文档与默认配置层面修复。</a:t>
+              <a:t>本文全程使用严格档 P99 ≤ 10 ms。真实低价客户并无正式 SLO、感知阈值通常远宽（数十毫秒级），而我们的数据显示：同一 10 台混合客群，10 ms 档全员违约、若放到 ~30 ms 档多数场景无虞。"能卖多少"因此不是常量，而是 SLO 的函数——建议服务商把"密度—档位"做成显式产品参数（例如经济版承诺 P99 ≤ 50 ms、标准版 ≤ 20 ms），而不是把最严档隐含在所有人身上。这一敏感性分析属于【待补实验】，但机制与初步数据已齐。</a:t>
             </a:r>
           </a:p>
         </p:txBody>
@@ -17023,7 +17637,7 @@
                 </a:solidFill>
                 <a:latin typeface="Microsoft YaHei"/>
               </a:rPr>
-              <a:t>10.4 有效性与威胁</a:t>
+              <a:t>10.3 设计含义</a:t>
             </a:r>
           </a:p>
         </p:txBody>
@@ -17065,7 +17679,7 @@
                 </a:solidFill>
                 <a:latin typeface="Microsoft YaHei"/>
               </a:rPr>
-              <a:t>构念效度： 服务"业务"用轻量 HTTP/Redis 代理，真实业务（数据库、网关）的敏感路径更长、更依赖系统调用，绝对数字会变，但"尾延迟由重叠驱动"的结构不变；客户负载为合成忙循环/占空比，未含真实业务的慢路径（锁竞争、GC），后续应以真实应用镜像复验。内部效度： 嵌套虚拟化引入额外调度层；已用重复轮次与随机顺序抑制噪声，并在综合验证中观察服务侧指标的稳定性；"权重失效"暂未定位到具体机制（宿主收包路径假设未验证），作为开放问题保留。联合验证进一步暴露：阵发背景的瞬时采样存在相位偏差，控制器需按设计采用时间对齐历史分位（当前未实现，见 7.5b）；客户侧金丝雀显示紧内存上限可造成秒级停顿，闸门尺寸应作为显式产品参数标定。外部效度： 单测试床、单核数档（4）、单磁盘；生产证据为观测性锚点而非受控实验；跨宿主/跨硬件的外推已在缺口清单中列为独立验证项。统计： 关键结论 4–7 轮复现，范围已在各表给出；轮级 bootstrap 置信区间（指示性）见 manuscript/interval_summary.txt；准入对照、冷启动与方法评估仍为单轮预实验，正式版本待补（缺口清单第 3 项）。</a:t>
+              <a:t>对服务商：先隔离、后密度——为敏感业务划出哪怕一个专属核，收益大于任何调参；内存与 IO 用"双闸/上限"兜底；售卖的"名义包络"与"保护包络"分开表述（分层定价的依据）；准入用证据（节流计数、时间对齐的需求上分位）而不是面板数字。对平台/系统建设者：cgroup v2 的若干"直觉口径"需要实测校准——IO 记账落在整盘而非分区；io.weight 依赖 IO 调度器选择（另有基于 IO Cost 的 io.cost.* 路线，未在本环境验证）；memory.high 的回收压力会外溢到宿主 swap（需要 memory.swap.max 或禁 swap 配合，且作为软阈值不构成 OOM 豁免）；CPU 权重几乎不是延迟保护工具。这些语义空白值得在文档与默认配置层面修复。</a:t>
             </a:r>
           </a:p>
         </p:txBody>
@@ -17189,7 +17803,7 @@
                 </a:solidFill>
                 <a:latin typeface="Microsoft YaHei"/>
               </a:rPr>
-              <a:t>10.5 与超大规模路线的边界</a:t>
+              <a:t>10.4 有效性与威胁</a:t>
             </a:r>
           </a:p>
         </p:txBody>
@@ -17231,7 +17845,7 @@
                 </a:solidFill>
                 <a:latin typeface="Microsoft YaHei"/>
               </a:rPr>
-              <a:t>本文不替代 AUDIBLE/Coach 类方法在大平台上的价值：它们解决的是"有长期数据与调度自由度时的容量优化"；我们解决的是"没有历史、没有迁移余地、甚至看不真需求的小宿主如何不翻车"。两者可组合——例如以本文的截断校正在小宿主端产出干净的需求证据，再交给大平台式的预测器做全局规划。</a:t>
+              <a:t>构念效度： 服务"业务"用轻量 HTTP/Redis 代理，真实业务（数据库、网关）的敏感路径更长、更依赖系统调用，绝对数字会变，但"尾延迟由重叠驱动"的结构不变；客户负载为合成忙循环/占空比，未含真实业务的慢路径（锁竞争、GC），后续应以真实应用镜像复验。内部效度： 嵌套虚拟化引入额外调度层；已用重复轮次与随机顺序抑制噪声，并在综合验证中观察服务侧指标的稳定性；"权重失效"暂未定位到具体机制（宿主收包路径假设未验证），作为开放问题保留。联合验证进一步暴露：阵发背景的瞬时采样存在相位偏差，控制器需按设计采用时间对齐历史分位（当前未实现，见 7.5b）；客户侧金丝雀显示紧内存上限可造成秒级停顿，闸门尺寸应作为显式产品参数标定。外部效度： 单测试床、单核数档（4）、单磁盘；生产证据为观测性锚点而非受控实验；跨宿主/跨硬件的外推已在缺口清单中列为独立验证项。统计： 关键结论 4–7 轮复现，范围已在各表给出；轮级 bootstrap 置信区间（指示性）见 manuscript/interval_summary.txt；准入对照、冷启动与方法评估仍为单轮预实验，正式版本待补（缺口清单第 3 项）。</a:t>
             </a:r>
           </a:p>
         </p:txBody>
@@ -17305,8 +17919,8 @@
         </p:nvSpPr>
         <p:spPr>
           <a:xfrm>
-            <a:off x="0" y="2651760"/>
-            <a:ext cx="12191695" cy="1371600"/>
+            <a:off x="0" y="0"/>
+            <a:ext cx="12191695" cy="777240"/>
           </a:xfrm>
           <a:prstGeom prst="rect">
             <a:avLst/>
@@ -17333,18 +17947,71 @@
           </a:fontRef>
         </p:style>
         <p:txBody>
-          <a:bodyPr rtlCol="0" anchor="ctr" lIns="731520"/>
+          <a:bodyPr rtlCol="0" anchor="ctr" lIns="411480" tIns="54864"/>
           <a:lstStyle/>
           <a:p>
             <a:pPr algn="ctr"/>
             <a:r>
-              <a:rPr sz="3000" b="1">
+              <a:rPr sz="2100" b="1">
                 <a:solidFill>
                   <a:srgbClr val="FFFFFF"/>
                 </a:solidFill>
                 <a:latin typeface="Microsoft YaHei"/>
               </a:rPr>
-              <a:t>11 结论</a:t>
+              <a:t>10 讨论与局限</a:t>
+            </a:r>
+          </a:p>
+          <a:p>
+            <a:r>
+              <a:rPr sz="1200">
+                <a:solidFill>
+                  <a:srgbClr val="D8E2F0"/>
+                </a:solidFill>
+                <a:latin typeface="Microsoft YaHei"/>
+              </a:rPr>
+              <a:t>10.5 与超大规模路线的边界</a:t>
+            </a:r>
+          </a:p>
+        </p:txBody>
+      </p:sp>
+      <p:sp>
+        <p:nvSpPr>
+          <p:cNvPr id="4" name="TextBox 3"/>
+          <p:cNvSpPr txBox="1"/>
+          <p:nvPr/>
+        </p:nvSpPr>
+        <p:spPr>
+          <a:xfrm>
+            <a:off x="502920" y="914400"/>
+            <a:ext cx="11155680" cy="5486400"/>
+          </a:xfrm>
+          <a:prstGeom prst="rect">
+            <a:avLst/>
+          </a:prstGeom>
+          <a:noFill/>
+        </p:spPr>
+        <p:txBody>
+          <a:bodyPr wrap="square">
+            <a:spAutoFit/>
+          </a:bodyPr>
+          <a:lstStyle/>
+          <a:p>
+            <a:pPr>
+              <a:lnSpc>
+                <a:spcPct val="108000"/>
+              </a:lnSpc>
+              <a:spcAft>
+                <a:spcPts val="400"/>
+              </a:spcAft>
+            </a:pPr>
+            <a:r>
+              <a:rPr sz="1250" b="0">
+                <a:solidFill>
+                  <a:srgbClr val="1C1C1E"/>
+                </a:solidFill>
+                <a:latin typeface="Microsoft YaHei"/>
+              </a:rPr>
+              <a:t>本文不替代 AUDIBLE/Coach 类方法在大平台上的价值：它们解决的是"有长期数据与调度自由度时的容量优化"；我们解决的是"没有历史、没有迁移余地、甚至看不真需求的小宿主如何不翻车"。两者可组合——例如以本文的截断校正在小宿主端产出干净的需求证据，再交给大平台式的预测器做全局规划。</a:t>
             </a:r>
           </a:p>
         </p:txBody>
@@ -17418,8 +18085,8 @@
         </p:nvSpPr>
         <p:spPr>
           <a:xfrm>
-            <a:off x="0" y="0"/>
-            <a:ext cx="12191695" cy="658368"/>
+            <a:off x="0" y="2651760"/>
+            <a:ext cx="12191695" cy="1371600"/>
           </a:xfrm>
           <a:prstGeom prst="rect">
             <a:avLst/>
@@ -17446,117 +18113,18 @@
           </a:fontRef>
         </p:style>
         <p:txBody>
-          <a:bodyPr rtlCol="0" anchor="ctr" lIns="411480" tIns="54864"/>
+          <a:bodyPr rtlCol="0" anchor="ctr" lIns="731520"/>
           <a:lstStyle/>
           <a:p>
             <a:pPr algn="ctr"/>
             <a:r>
-              <a:rPr sz="2100" b="1">
+              <a:rPr sz="3000" b="1">
                 <a:solidFill>
                   <a:srgbClr val="FFFFFF"/>
                 </a:solidFill>
                 <a:latin typeface="Microsoft YaHei"/>
               </a:rPr>
               <a:t>11 结论</a:t>
-            </a:r>
-          </a:p>
-        </p:txBody>
-      </p:sp>
-      <p:sp>
-        <p:nvSpPr>
-          <p:cNvPr id="4" name="TextBox 3"/>
-          <p:cNvSpPr txBox="1"/>
-          <p:nvPr/>
-        </p:nvSpPr>
-        <p:spPr>
-          <a:xfrm>
-            <a:off x="502920" y="914400"/>
-            <a:ext cx="11155680" cy="5486400"/>
-          </a:xfrm>
-          <a:prstGeom prst="rect">
-            <a:avLst/>
-          </a:prstGeom>
-          <a:noFill/>
-        </p:spPr>
-        <p:txBody>
-          <a:bodyPr wrap="square">
-            <a:spAutoFit/>
-          </a:bodyPr>
-          <a:lstStyle/>
-          <a:p>
-            <a:pPr>
-              <a:lnSpc>
-                <a:spcPct val="108000"/>
-              </a:lnSpc>
-              <a:spcAft>
-                <a:spcPts val="400"/>
-              </a:spcAft>
-            </a:pPr>
-            <a:r>
-              <a:rPr sz="1250" b="0">
-                <a:solidFill>
-                  <a:srgbClr val="1C1C1E"/>
-                </a:solidFill>
-                <a:latin typeface="Microsoft YaHei"/>
-              </a:rPr>
-              <a:t>本文面向一个被大规模云研究忽略的运营场景——把便宜、多数时间空闲、偶发突发的客户超售打包进少量物理资源的小型 VPS 宿主——用两套自建测试床（4 vCPU 嵌套床与 96 线程裸金属床，后者以 64 台客户舰队复现核心结论、并经 SMT/NUMA 拓扑核验物理核级隔离）、50/90/24 轮量级的复测批次与两台真实宿主的匿名只读遥测，把"安全超售"重写为三个依次递进的问题。</a:t>
-            </a:r>
-          </a:p>
-          <a:p>
-            <a:pPr>
-              <a:lnSpc>
-                <a:spcPct val="108000"/>
-              </a:lnSpc>
-              <a:spcAft>
-                <a:spcPts val="400"/>
-              </a:spcAft>
-            </a:pPr>
-            <a:r>
-              <a:rPr sz="1250" b="0">
-                <a:solidFill>
-                  <a:srgbClr val="1C1C1E"/>
-                </a:solidFill>
-                <a:latin typeface="Microsoft YaHei"/>
-              </a:rPr>
-              <a:t>识别（Identify）：配额截断使需求在聚合计数器中不可完全观测。我们给出可辨识性分析——点估计等于运行段均值（精确条件为两段需求均值相等，需求恒定只是充分条件）、d≥ q 假设下的条件性下界 q(1+t)、以及聚合非可辨识构造；90 个 cycle 的一致验证显示节流校正估计与真值相符，而基于少报的松绑决策在 30 个独立轮（90 个时间相关 cycle，按轮聚类）中全部违约（90/90）；混合占用消融进一步表明"懂配额的缩放基线"在部分饱和下高估，节流证据是区分"被截断"与"真的闲"的关键。</a:t>
-            </a:r>
-          </a:p>
-          <a:p>
-            <a:pPr>
-              <a:lnSpc>
-                <a:spcPct val="108000"/>
-              </a:lnSpc>
-              <a:spcAft>
-                <a:spcPts val="400"/>
-              </a:spcAft>
-            </a:pPr>
-            <a:r>
-              <a:rPr sz="1250" b="0">
-                <a:solidFill>
-                  <a:srgbClr val="1C1C1E"/>
-                </a:solidFill>
-                <a:latin typeface="Microsoft YaHei"/>
-              </a:rPr>
-              <a:t>预测（Predict）：容量由负载相位结构决定，而非平均利用率——随机与同步相位的安全容量比 3×（主口径 P5≥70%）至 5×（中位口径），且存在"35% 忙碌被压垮、98% 忙碌安全"的不可能性反例。在此之上给出带明确假设的安全容量近似模型 N^* ≈ C/(φ+(1-φ)ρ)=C/(ρκ)：结构性相位下两点命中断点、混合端偏保守、纯随机端偏乐观（尾部口径需实测修正）——我们如实报告误差方向与单轮边界，并已安排多轮/多随机种子的预测误差验证。</a:t>
-            </a:r>
-          </a:p>
-          <a:p>
-            <a:pPr>
-              <a:lnSpc>
-                <a:spcPct val="108000"/>
-              </a:lnSpc>
-              <a:spcAft>
-                <a:spcPts val="400"/>
-              </a:spcAft>
-            </a:pPr>
-            <a:r>
-              <a:rPr sz="1250" b="0">
-                <a:solidFill>
-                  <a:srgbClr val="1C1C1E"/>
-                </a:solidFill>
-                <a:latin typeface="Microsoft YaHei"/>
-              </a:rPr>
-              <a:t>行动（Actuate）：把识别与预测组装为完整控制器与无回归控制堆栈。相位感知准入在在线对决的对齐场景中精确停在实测容量 oracle（8 台；v2 十四局复核运行中）；解码后的组件分解（配额保守基线、截断校正、相位对齐、暂停护栏）与四种基线在统一到达流下对照，回答"同等质量约束下多卖多少、少违约多少"。资源效率侧，无回归手段把密度继续抬高而不伤租户可见资源：KSM 在 64 台同镜像舰队上去重回收 21.9 GB（33.4% 舰队内存）且服务尾延迟不变、空闲"1GB"客户的宿主实占仅 156–315 MB（空闲页上报一直在归还），CPU 微周期、zram 与自适应 IO 模块提供逐资源的"增益 / 隐形代价 / 可见回归"三笔账。</a:t>
             </a:r>
           </a:p>
         </p:txBody>
@@ -17711,7 +18279,45 @@
                 </a:solidFill>
                 <a:latin typeface="Microsoft YaHei"/>
               </a:rPr>
-              <a:t>诚实边界：当前为两套测试床、单台裸金属宿主；负载以合成占空比为主，生产遥测提供场景锚点但尚未驱动回放负载；轮级置信区间、反相编排与 Phase C 资源模块的数据仍在收集中，本文以"进行中"标注而非当结论使用。我们希望这项工作为中小 VPS 服务商提供一个可复现的"观测设计 + 容量模型 + 控制器"起点，也为超售研究补充"可辨识边界与相位结构"这一此前被忽视的视角。</a:t>
+              <a:t>本文面向一个被大规模云研究忽略的运营场景——把便宜、多数时间空闲、偶发突发的客户超售打包进少量物理资源的小型 VPS 宿主——用两套自建测试床（4 vCPU 嵌套床与 96 线程裸金属床，后者以 64 台客户舰队复现核心结论、并经 SMT/NUMA 拓扑核验物理核级隔离）、50/90/24 轮量级的复测批次与两台真实宿主的匿名只读遥测，把"安全超售"重写为三个依次递进的问题。</a:t>
+            </a:r>
+          </a:p>
+          <a:p>
+            <a:pPr>
+              <a:lnSpc>
+                <a:spcPct val="108000"/>
+              </a:lnSpc>
+              <a:spcAft>
+                <a:spcPts val="400"/>
+              </a:spcAft>
+            </a:pPr>
+            <a:r>
+              <a:rPr sz="1250" b="0">
+                <a:solidFill>
+                  <a:srgbClr val="1C1C1E"/>
+                </a:solidFill>
+                <a:latin typeface="Microsoft YaHei"/>
+              </a:rPr>
+              <a:t>识别（Identify）：配额截断使需求在聚合计数器中不可完全观测。我们给出可辨识性分析——点估计等于运行段均值（精确条件为两段需求均值相等，需求恒定只是充分条件）、d≥ q 假设下的条件性下界 q(1+t)、以及聚合非可辨识构造；90 个 cycle 的一致验证显示节流校正估计与真值相符，而基于少报的松绑决策在 30 个独立轮（90 个时间相关 cycle，按轮聚类）中全部违约（90/90）；混合占用消融进一步表明"懂配额的缩放基线"在部分饱和下高估，节流证据是区分"被截断"与"真的闲"的关键。</a:t>
+            </a:r>
+          </a:p>
+          <a:p>
+            <a:pPr>
+              <a:lnSpc>
+                <a:spcPct val="108000"/>
+              </a:lnSpc>
+              <a:spcAft>
+                <a:spcPts val="400"/>
+              </a:spcAft>
+            </a:pPr>
+            <a:r>
+              <a:rPr sz="1250" b="0">
+                <a:solidFill>
+                  <a:srgbClr val="1C1C1E"/>
+                </a:solidFill>
+                <a:latin typeface="Microsoft YaHei"/>
+              </a:rPr>
+              <a:t>预测（Predict）：容量由负载相位结构决定，而非平均利用率——随机与同步相位的安全容量比 3×（主口径 P5≥70%）至 5×（中位口径），且存在"35% 忙碌被压垮、98% 忙碌安全"的不可能性反例。在此之上给出带明确假设的安全容量近似模型 N^* ≈ C/(φ+(1-φ)ρ)=C/(ρκ)：结构性相位下两点命中断点、混合端偏保守、纯随机端偏乐观（尾部口径需实测修正）——我们如实报告误差方向与单轮边界，并已安排多轮/多随机种子的预测误差验证。</a:t>
             </a:r>
           </a:p>
         </p:txBody>
@@ -17824,7 +18430,7 @@
                 </a:solidFill>
                 <a:latin typeface="Microsoft YaHei"/>
               </a:rPr>
-              <a:t>参考文献</a:t>
+              <a:t>11 结论</a:t>
             </a:r>
           </a:p>
         </p:txBody>
@@ -17866,7 +18472,26 @@
                 </a:solidFill>
                 <a:latin typeface="Microsoft YaHei"/>
               </a:rPr>
-              <a:t>本；轮；逐；条；在；线；核；对；：；作；者；、；题；目；、；会；议；/；期；刊；、；页；码；与； ；D；O；I； ；以；官；方；信；息；源；（；A；C；M； ；D；L； ；/； ；U；S；E；N；I；X； ；/； ；I；E；E；E； ；/； ；a；r；X；i；v； ；/； ；H；A；L； ；/； ；官；方；仓；库；与；文；档；）；为；准；；； ；仍；无；法；确；证；的；极；少；数；条；目；保；留；（；投；稿；前；核；对；）；。；投；稿；前；按；目；标；期；刊；格；式；（；S；p；r；i；n；g；e；r； ；数；字；样；式；）；转；换；。</a:t>
+              <a:t>行动（Actuate）：把识别与预测组装为完整控制器与无回归控制堆栈。完整 14 局在线对决中，相位感知准入是唯一在对齐相位停在已验证档位（8 台）的策略（随机相位 16–20 台），而对照的 audible 式与忙率阈值法在同步相位卖到 40 台、客户 P5 崩至 16%——依赖独立性的卷积与平均利用率判据的相位盲区被端到端量化；解码后的组件分解（配额保守基线、截断校正、相位对齐、暂停护栏）与四种基线在统一到达流下对照，回答"同等质量约束下多卖多少、少违约多少"。资源效率侧，无回归手段把密度继续抬高而不伤租户可见资源：KSM 在 64 台同镜像舰队上去重回收 21.9 GB（33.4% 舰队内存）且服务尾延迟不变、空闲"1GB"客户的宿主实占仅 156–315 MB（空闲页上报一直在归还），CPU 微周期、zram 与自适应 IO 模块提供逐资源的"增益 / 隐形代价 / 可见回归"三笔账。</a:t>
+            </a:r>
+          </a:p>
+          <a:p>
+            <a:pPr>
+              <a:lnSpc>
+                <a:spcPct val="108000"/>
+              </a:lnSpc>
+              <a:spcAft>
+                <a:spcPts val="400"/>
+              </a:spcAft>
+            </a:pPr>
+            <a:r>
+              <a:rPr sz="1250" b="0">
+                <a:solidFill>
+                  <a:srgbClr val="1C1C1E"/>
+                </a:solidFill>
+                <a:latin typeface="Microsoft YaHei"/>
+              </a:rPr>
+              <a:t>诚实边界：当前为两套测试床、单台裸金属宿主；负载以合成占空比为主，生产遥测提供场景锚点但尚未驱动回放负载；轮级置信区间、反相编排与 Phase C 资源模块的数据仍在收集中，本文以"进行中"标注而非当结论使用。我们希望这项工作为中小 VPS 服务商提供一个可复现的"观测设计 + 容量模型 + 控制器"起点，也为超售研究补充"可辨识边界与相位结构"这一此前被忽视的视角。</a:t>
             </a:r>
           </a:p>
         </p:txBody>
@@ -17880,6 +18505,161 @@
 </file>
 
 <file path=ppt/slides/slide156.xml><?xml version="1.0" encoding="utf-8"?>
+<p:sld xmlns:a="http://schemas.openxmlformats.org/drawingml/2006/main" xmlns:p="http://schemas.openxmlformats.org/presentationml/2006/main" xmlns:r="http://schemas.openxmlformats.org/officeDocument/2006/relationships">
+  <p:cSld>
+    <p:spTree>
+      <p:nvGrpSpPr>
+        <p:cNvPr id="1" name=""/>
+        <p:cNvGrpSpPr/>
+        <p:nvPr/>
+      </p:nvGrpSpPr>
+      <p:grpSpPr/>
+      <p:sp>
+        <p:nvSpPr>
+          <p:cNvPr id="2" name="Rectangle 1"/>
+          <p:cNvSpPr/>
+          <p:nvPr/>
+        </p:nvSpPr>
+        <p:spPr>
+          <a:xfrm>
+            <a:off x="0" y="0"/>
+            <a:ext cx="12191695" cy="6858000"/>
+          </a:xfrm>
+          <a:prstGeom prst="rect">
+            <a:avLst/>
+          </a:prstGeom>
+          <a:solidFill>
+            <a:srgbClr val="FFFFFF"/>
+          </a:solidFill>
+          <a:ln>
+            <a:noFill/>
+          </a:ln>
+        </p:spPr>
+        <p:style>
+          <a:lnRef idx="1">
+            <a:schemeClr val="accent1"/>
+          </a:lnRef>
+          <a:fillRef idx="3">
+            <a:schemeClr val="accent1"/>
+          </a:fillRef>
+          <a:effectRef idx="2">
+            <a:schemeClr val="accent1"/>
+          </a:effectRef>
+          <a:fontRef idx="minor">
+            <a:schemeClr val="lt1"/>
+          </a:fontRef>
+        </p:style>
+        <p:txBody>
+          <a:bodyPr rtlCol="0" anchor="ctr"/>
+          <a:lstStyle/>
+          <a:p>
+            <a:pPr algn="ctr"/>
+          </a:p>
+        </p:txBody>
+      </p:sp>
+      <p:sp>
+        <p:nvSpPr>
+          <p:cNvPr id="3" name="Rectangle 2"/>
+          <p:cNvSpPr/>
+          <p:nvPr/>
+        </p:nvSpPr>
+        <p:spPr>
+          <a:xfrm>
+            <a:off x="0" y="0"/>
+            <a:ext cx="12191695" cy="658368"/>
+          </a:xfrm>
+          <a:prstGeom prst="rect">
+            <a:avLst/>
+          </a:prstGeom>
+          <a:solidFill>
+            <a:srgbClr val="123A63"/>
+          </a:solidFill>
+          <a:ln>
+            <a:noFill/>
+          </a:ln>
+        </p:spPr>
+        <p:style>
+          <a:lnRef idx="1">
+            <a:schemeClr val="accent1"/>
+          </a:lnRef>
+          <a:fillRef idx="3">
+            <a:schemeClr val="accent1"/>
+          </a:fillRef>
+          <a:effectRef idx="2">
+            <a:schemeClr val="accent1"/>
+          </a:effectRef>
+          <a:fontRef idx="minor">
+            <a:schemeClr val="lt1"/>
+          </a:fontRef>
+        </p:style>
+        <p:txBody>
+          <a:bodyPr rtlCol="0" anchor="ctr" lIns="411480" tIns="54864"/>
+          <a:lstStyle/>
+          <a:p>
+            <a:pPr algn="ctr"/>
+            <a:r>
+              <a:rPr sz="2100" b="1">
+                <a:solidFill>
+                  <a:srgbClr val="FFFFFF"/>
+                </a:solidFill>
+                <a:latin typeface="Microsoft YaHei"/>
+              </a:rPr>
+              <a:t>参考文献</a:t>
+            </a:r>
+          </a:p>
+        </p:txBody>
+      </p:sp>
+      <p:sp>
+        <p:nvSpPr>
+          <p:cNvPr id="4" name="TextBox 3"/>
+          <p:cNvSpPr txBox="1"/>
+          <p:nvPr/>
+        </p:nvSpPr>
+        <p:spPr>
+          <a:xfrm>
+            <a:off x="502920" y="914400"/>
+            <a:ext cx="11155680" cy="5486400"/>
+          </a:xfrm>
+          <a:prstGeom prst="rect">
+            <a:avLst/>
+          </a:prstGeom>
+          <a:noFill/>
+        </p:spPr>
+        <p:txBody>
+          <a:bodyPr wrap="square">
+            <a:spAutoFit/>
+          </a:bodyPr>
+          <a:lstStyle/>
+          <a:p>
+            <a:pPr>
+              <a:lnSpc>
+                <a:spcPct val="108000"/>
+              </a:lnSpc>
+              <a:spcAft>
+                <a:spcPts val="400"/>
+              </a:spcAft>
+            </a:pPr>
+            <a:r>
+              <a:rPr sz="1250" b="0">
+                <a:solidFill>
+                  <a:srgbClr val="1C1C1E"/>
+                </a:solidFill>
+                <a:latin typeface="Microsoft YaHei"/>
+              </a:rPr>
+              <a:t>本；轮；逐；条；在；线；核；对；：；作；者；、；题；目；、；会；议；/；期；刊；、；页；码；与； ；D；O；I； ；以；官；方；信；息；源；（；A；C；M； ；D；L； ；/； ；U；S；E；N；I；X； ；/； ；I；E；E；E； ；/； ；a；r；X；i；v； ；/； ；H；A；L； ；/； ；官；方；仓；库；与；文；档；）；为；准；；； ；仍；无；法；确；证；的；极；少；数；条；目；保；留；（；投；稿；前；核；对；）；。；投；稿；前；按；目；标；期；刊；格；式；（；S；p；r；i；n；g；e；r； ；数；字；样；式；）；转；换；。</a:t>
+            </a:r>
+          </a:p>
+        </p:txBody>
+      </p:sp>
+    </p:spTree>
+  </p:cSld>
+  <p:clrMapOvr>
+    <a:masterClrMapping/>
+  </p:clrMapOvr>
+</p:sld>
+</file>
+
+<file path=ppt/slides/slide157.xml><?xml version="1.0" encoding="utf-8"?>
 <p:sld xmlns:a="http://schemas.openxmlformats.org/drawingml/2006/main" xmlns:p="http://schemas.openxmlformats.org/presentationml/2006/main" xmlns:r="http://schemas.openxmlformats.org/officeDocument/2006/relationships">
   <p:cSld>
     <p:spTree>
@@ -30069,7 +30849,7 @@
                 </a:solidFill>
                 <a:latin typeface="Microsoft YaHei"/>
               </a:rPr>
-              <a:t>算法 A（风险校准准入；到达事件或每 Δ 分钟触发）输入: 已接入集合 S（逐秒需求史 h_s、截断证据 u_s/t_s/q_s）、容量 C、利用预算 u1  对每台 s ∈ S:d_s ← u_s / (1 − t_s)                  # 节流时点估计（=运行段均值，3.3.1 命题 1）if 无截断证据: d_s ← u_sd_s ← max(d_s, q_s · (1 + t_s))        # 认证地板兜底（3.3.1 命题 2）p_s[0..59] ← 逐秒位需求上包络（最近 120 s，1 s 分辨率）2  peak ← max_b Σ_s p_s[b]                  # 相位剖面预测的聚合峰（已接入集合）bg   ← Q95(残差)：Q95(最近 10 min 实测聚合需求 − 同期剖面预测)   # 残差预留，避免与 peak 重复计账3  cand ← Σ_c∈B min(一秒峰值先验_c, q_c)     # 候选按一秒尺度上限计账（配额 ≠ 瞬时峰值）4  if peak + bg + cand ≤ u · C: allow（并记录预留）else: defer（附命中项：peak/bg/cand 哪个越线）护栏（与主循环并行）:服务 P99 窗越线 ∨ 金丝雀唤醒停顿 &gt; 250 ms ∨ 客户速率 P5 &lt; 70%⇒ 暂停准入；连续 3 个稳定窗后滞回恢复校准协议: u 与滞回窗在一次性固定的独立验证集上选取（目标：验证集违约窗比例最小）；报告单侧 Clopper–Pearson 上界，并列出达到给定上界所需的独立试验数（零失效时，95% 上界 ≤10% 需 ≥29 次、≤1% 需 ≥299 次独立试验）——以"经验安全护栏"表述，不声称 1% 保证；参数上线后不再调整。</a:t>
+              <a:t>算法 A（风险校准准入；到达事件或每 Δ 分钟触发）输入: 已接入集合 S（逐秒需求史 h_s、截断证据 u_s/t_s/q_s）、容量 C、利用预算 u1  对每台 s ∈ S:d_s ← u_s / (1 − t_s)                  # 节流时点估计（=运行段均值，3.3.1 命题 1）if 无截断证据: d_s ← u_sif 持续节流证据（连续窗口均被限流）: d_s ← max(d_s, q_s · (1 + t_s))   # 条件性下界仅对持续饱和客户启用p_s[0..59] ← 逐秒位需求上包络（最近 120 s，1 s 分辨率）2  peak ← max_b Σ_s p_s[b]                  # 相位剖面预测的聚合峰（已接入集合）bg   ← Q95(残差)：Q95(最近 10 min 实测聚合需求 − 同期剖面预测)   # 残差预留，避免与 peak 重复计账3  cand ← Σ_c∈B min(一秒峰值先验_c, q_c)     # 候选按一秒尺度上限计账（配额 ≠ 瞬时峰值）4  if peak + bg + cand ≤ u · C: allow（并记录预留）else: defer（附命中项：peak/bg/cand 哪个越线）护栏（与主循环并行）:服务 P99 窗越线 ∨ 金丝雀唤醒停顿 &gt; 250 ms ∨ 客户速率 P5 &lt; 70%⇒ 暂停准入；连续 3 个稳定窗后滞回恢复校准协议: u 与滞回窗在一次性固定的独立验证集上选取（目标：验证集违约窗比例最小）；报告单侧 Clopper–Pearson 上界，并列出达到给定上界所需的独立试验数（零失效时，95% 上界 ≤10% 需 ≥29 次、≤1% 需 ≥299 次独立试验）——以"经验安全护栏"表述，不声称 1% 保证；参数上线后不再调整。</a:t>
             </a:r>
           </a:p>
           <a:p>
@@ -31842,7 +32622,7 @@
                 </a:solidFill>
                 <a:latin typeface="Microsoft YaHei"/>
               </a:rPr>
-              <a:t>• 识别：5 台 30% 配额满载客户，用量面板 1.50 核 vs 真实需求 5.00 核（低估 3.3×，7/7 轮）；v2 复测 90 个 cycle 中节流校正均达真值、基于少报的松绑决策 90/90 违约；混合占用消融（3 满载+3 闲型 @30%、真值 3.3 核）：naive 0.99（−2.31，危险）、配额缩放 3.31（+0.01，巧合近似）、节流校正 3.10（−0.20，最准）、满 vCPU 兜底 6.00（+2.70，浪费 45% 席位）、纯公式不封顶 3.14（−0.16）。</a:t>
+              <a:t>• 识别：5 台 30% 配额满载客户，用量面板 1.50 核 vs 真实需求 5.00 核（低估 3.3×，7/7 轮）；v2 复测 90 个 cycle 中节流校正均达真值、基于少报的松绑决策 90/90 违约；混合占用消融（3 满载+3 闲型 @30%、真值 3.3 核）：聚合误差——naive 0.99（−2.31，危险）、配额缩放 3.31（+0.01：本例闲型客户突发恰好被 30% 配额封顶，除以配额比例碰巧校正）、节流校正 3.10（−0.20）、满 vCPU 6.00（+2.70）、不封顶 3.14（−0.16）；逐租户——饱和客户两类均精确（1.00），阵发客户上整窗节流占比被空闲稀释（t=0.071）致节流法低估至 0.033/台（真值 0.10）——估计器选择必须依据逐租户正确性与负载形状，聚合巧合不可依赖；多分辨率节流序列（第 9 章模块）即修复该稀释。</a:t>
             </a:r>
           </a:p>
           <a:p>
@@ -39783,7 +40563,7 @@
                 </a:solidFill>
                 <a:latin typeface="Microsoft YaHei"/>
               </a:rPr>
-              <a:t>协议。 在 8 核租户池上，7 个策略（worstcase 配额保守 / fixed 固定 2× / util80 80% 忙率 / quantile 历史分位 / audible 式 MC 卷积 / ours 相位剖面 / ours_p 相位剖面+暂停护栏）× 2 种相位（随机 / 对齐），使用统一到达流（每步 +2 台、25 s 稳定、15 s 双服务探针）与统一可用证据（同一套 cgroup 计数与历史）；客户负载 20%/60 s 占空比。质量口径为 §8.4 主口径（服务 P99 ≤ 10 ms 且客户速率 P5 ≥ 70%）；容量 oracle 取同口径实测阶梯（随机 24 台 / 对齐 8 台）。指标：停止席位、首次违背档位、安全 VM-hours（首次违背前 Σ n_i Δ t_i）、以及相对 oracle 的差距。</a:t>
+              <a:t>协议。 在 8 核租户池上，7 个策略（worstcase 配额保守 / fixed 固定 2× / util80 80% 忙率 / quantile 历史分位 / audible 式 MC 卷积 / ours 相位剖面 / ours_p 相位剖面+暂停护栏）× 2 种相位（随机 / 对齐），使用统一到达流（每步 +2 台、25 s 稳定、15 s 双服务探针）与统一可用证据（同一套 cgroup 计数与历史）；客户负载 20%/60 s 占空比。质量口径为 §8.4 主口径（服务 P99 ≤ 10 ms 且客户速率 P5 ≥ 70%）；容量参照取同口径已验证阶梯档位（随机 24 台 / 对齐 8 台；真实断点由细扫钉定）。指标：停止席位、首次违背档位、安全 VM-hours（首次违背前 Σ n_i Δ t_i）、以及相对 oracle 的差距。</a:t>
             </a:r>
           </a:p>
           <a:p>
@@ -39803,6 +40583,25 @@
                 <a:latin typeface="Microsoft YaHei"/>
               </a:rPr>
               <a:t>v1 初步（10 局，旧采样口径，如实标注）。 fixed 停 16、quantile 停 8、util80 无止损（冲到实验帽 40；50% 地板口径下 n=30 起出现慢客户）、audible 在对齐场景放开至 40（独立性假设抹掉相位相关性——正是其已知失效模式）；修复后的 ours 在对齐场景停在 8 台 = oracle（剖面峰值计数 0→2.01→4.02→6.01，第 10 台预判 8.4&gt;7.2 而拒绝）。v1 的随机相位前 4 局为旧格式（无逐客户速率），故本节结论以对齐场景与决策轨迹为主。</a:t>
+            </a:r>
+          </a:p>
+          <a:p>
+            <a:pPr>
+              <a:lnSpc>
+                <a:spcPct val="108000"/>
+              </a:lnSpc>
+              <a:spcAft>
+                <a:spcPts val="400"/>
+              </a:spcAft>
+            </a:pPr>
+            <a:r>
+              <a:rPr sz="1250" b="0">
+                <a:solidFill>
+                  <a:srgbClr val="1C1C1E"/>
+                </a:solidFill>
+                <a:latin typeface="Microsoft YaHei"/>
+              </a:rPr>
+              <a:t>v2 完整 14 局（图 20；评审点名要求的核心对照）。 统一到达流、统一证据、主口径（服务 P99 ≤ 10 ms 且客户 P5 ≥ 70%）；停点表（✅=全程未违主口径；⚠=停点越线后继续/未止损）：</a:t>
             </a:r>
           </a:p>
         </p:txBody>
